--- a/slides/datasets-in-10-minutes-c3.pptx
+++ b/slides/datasets-in-10-minutes-c3.pptx
@@ -18,7 +18,6 @@
     <p:sldId id="266" r:id="rId16"/>
     <p:sldId id="267" r:id="rId17"/>
     <p:sldId id="268" r:id="rId18"/>
-    <p:sldId id="269" r:id="rId19"/>
     <p:sldId id="270" r:id="rId20"/>
     <p:sldId id="271" r:id="rId21"/>
     <p:sldId id="272" r:id="rId22"/>
@@ -33,7 +32,6 @@
     <p:sldId id="281" r:id="rId31"/>
     <p:sldId id="282" r:id="rId32"/>
     <p:sldId id="283" r:id="rId33"/>
-    <p:sldId id="284" r:id="rId34"/>
     <p:sldId id="285" r:id="rId35"/>
     <p:sldId id="286" r:id="rId36"/>
     <p:sldId id="287" r:id="rId37"/>
@@ -57,14 +55,8 @@
     <p:sldId id="305" r:id="rId55"/>
     <p:sldId id="306" r:id="rId56"/>
     <p:sldId id="307" r:id="rId57"/>
-    <p:sldId id="308" r:id="rId58"/>
-    <p:sldId id="309" r:id="rId59"/>
     <p:sldId id="310" r:id="rId60"/>
-    <p:sldId id="311" r:id="rId61"/>
     <p:sldId id="312" r:id="rId62"/>
-    <p:sldId id="313" r:id="rId63"/>
-    <p:sldId id="314" r:id="rId64"/>
-    <p:sldId id="315" r:id="rId65"/>
     <p:sldId id="316" r:id="rId66"/>
     <p:sldId id="317" r:id="rId67"/>
     <p:sldId id="318" r:id="rId68"/>
@@ -7385,11 +7377,11 @@
         <p:spPr>
           <a:xfrm>
             <a:off x="548640" y="2472652"/>
-            <a:ext cx="8046720" cy="1339215"/>
+            <a:ext cx="8046720" cy="1440815"/>
           </a:xfrm>
         </p:spPr>
         <p:txBody>
-          <a:bodyPr lIns="0" rIns="0" tIns="0" bIns="0">
+          <a:bodyPr lIns="0" rIns="0" tIns="0" bIns="101600">
             <a:noAutofit/>
           </a:bodyPr>
           <a:lstStyle/>
@@ -7418,8 +7410,7 @@
                 <a:ea typeface="Noto Sans CJK JP"/>
                 <a:cs typeface="Noto Sans"/>
               </a:rPr>
-              <a:t>free-form multiple-Choice Chinese
-machine reading Comprehension</a:t>
+              <a:t>free-form multiple-Choice Chinese</a:t>
             </a:r>
           </a:p>
           <a:p>
@@ -7447,7 +7438,35 @@
                 <a:ea typeface="Noto Sans CJK JP"/>
                 <a:cs typeface="Noto Sans"/>
               </a:rPr>
-              <a:t>中国語の対話と文章で、知識を伴う読解を問う</a:t>
+              <a:t>machine reading Comprehension</a:t>
+            </a:r>
+          </a:p>
+          <a:p>
+            <a:pPr algn="ctr">
+              <a:lnSpc>
+                <a:spcPct val="125000"/>
+              </a:lnSpc>
+              <a:spcAft>
+                <a:spcPts val="1200"/>
+              </a:spcAft>
+              <a:buNone/>
+              <a:defRPr sz="2200" b="0">
+                <a:solidFill>
+                  <a:srgbClr val="303437"/>
+                </a:solidFill>
+                <a:latin typeface="Noto Sans"/>
+              </a:defRPr>
+            </a:pPr>
+            <a:r>
+              <a:rPr sz="2200" b="0" lang="ja-JP" altLang="en-US">
+                <a:solidFill>
+                  <a:srgbClr val="303437"/>
+                </a:solidFill>
+                <a:latin typeface="Noto Sans"/>
+                <a:ea typeface="Noto Sans CJK JP"/>
+                <a:cs typeface="Noto Sans"/>
+              </a:rPr>
+              <a:t>中国語の対話や文章を読み、知識で答えを選ぶ</a:t>
             </a:r>
           </a:p>
         </p:txBody>
@@ -7658,60 +7677,6 @@
                 <a:cs typeface="Noto Sans"/>
               </a:rPr>
               <a:t>1. 文書から、正しい選択肢を選ぶ</a:t>
-            </a:r>
-          </a:p>
-        </p:txBody>
-      </p:sp>
-      <p:sp>
-        <p:nvSpPr>
-          <p:cNvPr id="4" name="TextBox 3"/>
-          <p:cNvSpPr txBox="1"/>
-          <p:nvPr/>
-        </p:nvSpPr>
-        <p:spPr>
-          <a:xfrm>
-            <a:off x="548640" y="1271016"/>
-            <a:ext cx="8046720" cy="201168"/>
-          </a:xfrm>
-          <a:prstGeom prst="rect">
-            <a:avLst/>
-          </a:prstGeom>
-          <a:noFill/>
-        </p:spPr>
-        <p:txBody>
-          <a:bodyPr wrap="square" lIns="0" rIns="0" tIns="0" bIns="0">
-            <a:noAutofit/>
-          </a:bodyPr>
-          <a:lstStyle/>
-          <a:p>
-            <a:pPr algn="l">
-              <a:lnSpc>
-                <a:spcPts val="1287"/>
-              </a:lnSpc>
-              <a:spcBef>
-                <a:spcPts val="0"/>
-              </a:spcBef>
-              <a:spcAft>
-                <a:spcPts val="0"/>
-              </a:spcAft>
-              <a:buNone/>
-              <a:defRPr sz="1100" b="0">
-                <a:solidFill>
-                  <a:srgbClr val="303437"/>
-                </a:solidFill>
-                <a:latin typeface="Noto Sans"/>
-              </a:defRPr>
-            </a:pPr>
-            <a:r>
-              <a:rPr sz="1100" b="0" lang="ja-JP" altLang="en-US">
-                <a:solidFill>
-                  <a:srgbClr val="626669"/>
-                </a:solidFill>
-                <a:latin typeface="Noto Sans"/>
-                <a:ea typeface="Noto Sans CJK JP"/>
-                <a:cs typeface="Noto Sans"/>
-              </a:rPr>
-              <a:t>C³-Mixed / dev / ID 11-67 / 質問1</a:t>
             </a:r>
           </a:p>
         </p:txBody>
@@ -8083,7 +8048,7 @@
                 <a:spcPts val="0"/>
               </a:spcBef>
               <a:spcAft>
-                <a:spcPts val="400"/>
+                <a:spcPts val="140"/>
               </a:spcAft>
               <a:buNone/>
               <a:defRPr sz="810" b="0">
@@ -8102,7 +8067,7 @@
                 <a:ea typeface="Noto Sans CJK JP"/>
                 <a:cs typeface="Noto Sans"/>
               </a:rPr>
-              <a:t>[1] Sun et al. C³-M / dev / 11-67 / question 1.</a:t>
+              <a:t>[1] Sun et al. C³ データセット。</a:t>
             </a:r>
             <a:r>
               <a:rPr sz="810" b="0" lang="ja-JP" altLang="en-US">
@@ -8123,9 +8088,9 @@
                 <a:latin typeface="Noto Sans"/>
                 <a:ea typeface="Noto Sans CJK JP"/>
                 <a:cs typeface="Noto Sans"/>
-                <a:hlinkClick r:id="rId2"/>
-              </a:rPr>
-              <a:t>https://github.com/nlpdata/c3/blob/1f41682ebb684d63afe7c583c8f38e137fc8a826/data/c3-m-dev.json</a:t>
+                <a:hlinkClick r:id="rId3"/>
+              </a:rPr>
+              <a:t>https://github.com/nlpdata/c3/tree/master/data</a:t>
             </a:r>
           </a:p>
         </p:txBody>
@@ -8387,7 +8352,7 @@
                 <a:spcPts val="0"/>
               </a:spcBef>
               <a:spcAft>
-                <a:spcPts val="400"/>
+                <a:spcPts val="140"/>
               </a:spcAft>
               <a:buNone/>
               <a:defRPr sz="810" b="0">
@@ -8406,7 +8371,7 @@
                 <a:ea typeface="Noto Sans CJK JP"/>
                 <a:cs typeface="Noto Sans"/>
               </a:rPr>
-              <a:t>[1] Sun et al. C³-M / dev / 11-67 / question 1.</a:t>
+              <a:t>[1] Sun et al. C³ データセット。</a:t>
             </a:r>
             <a:r>
               <a:rPr sz="810" b="0" lang="ja-JP" altLang="en-US">
@@ -8427,9 +8392,9 @@
                 <a:latin typeface="Noto Sans"/>
                 <a:ea typeface="Noto Sans CJK JP"/>
                 <a:cs typeface="Noto Sans"/>
-                <a:hlinkClick r:id="rId2"/>
-              </a:rPr>
-              <a:t>https://github.com/nlpdata/c3/blob/1f41682ebb684d63afe7c583c8f38e137fc8a826/data/c3-m-dev.json</a:t>
+                <a:hlinkClick r:id="rId3"/>
+              </a:rPr>
+              <a:t>https://github.com/nlpdata/c3/tree/master/data</a:t>
             </a:r>
           </a:p>
         </p:txBody>
@@ -8544,60 +8509,6 @@
                 <a:cs typeface="Noto Sans"/>
               </a:rPr>
               <a:t>1. 文書から、正しい選択肢を選ぶ</a:t>
-            </a:r>
-          </a:p>
-        </p:txBody>
-      </p:sp>
-      <p:sp>
-        <p:nvSpPr>
-          <p:cNvPr id="4" name="TextBox 3"/>
-          <p:cNvSpPr txBox="1"/>
-          <p:nvPr/>
-        </p:nvSpPr>
-        <p:spPr>
-          <a:xfrm>
-            <a:off x="548640" y="1271016"/>
-            <a:ext cx="8046720" cy="201168"/>
-          </a:xfrm>
-          <a:prstGeom prst="rect">
-            <a:avLst/>
-          </a:prstGeom>
-          <a:noFill/>
-        </p:spPr>
-        <p:txBody>
-          <a:bodyPr wrap="square" lIns="0" rIns="0" tIns="0" bIns="0">
-            <a:noAutofit/>
-          </a:bodyPr>
-          <a:lstStyle/>
-          <a:p>
-            <a:pPr algn="l">
-              <a:lnSpc>
-                <a:spcPts val="1287"/>
-              </a:lnSpc>
-              <a:spcBef>
-                <a:spcPts val="0"/>
-              </a:spcBef>
-              <a:spcAft>
-                <a:spcPts val="0"/>
-              </a:spcAft>
-              <a:buNone/>
-              <a:defRPr sz="1100" b="0">
-                <a:solidFill>
-                  <a:srgbClr val="303437"/>
-                </a:solidFill>
-                <a:latin typeface="Noto Sans"/>
-              </a:defRPr>
-            </a:pPr>
-            <a:r>
-              <a:rPr sz="1100" b="0" lang="ja-JP" altLang="en-US">
-                <a:solidFill>
-                  <a:srgbClr val="626669"/>
-                </a:solidFill>
-                <a:latin typeface="Noto Sans"/>
-                <a:ea typeface="Noto Sans CJK JP"/>
-                <a:cs typeface="Noto Sans"/>
-              </a:rPr>
-              <a:t>C³-Mixed / test / ID 9-120 / 質問1</a:t>
             </a:r>
           </a:p>
         </p:txBody>
@@ -9190,7 +9101,7 @@
                 <a:spcPts val="0"/>
               </a:spcBef>
               <a:spcAft>
-                <a:spcPts val="400"/>
+                <a:spcPts val="140"/>
               </a:spcAft>
               <a:buNone/>
               <a:defRPr sz="810" b="0">
@@ -9209,7 +9120,7 @@
                 <a:ea typeface="Noto Sans CJK JP"/>
                 <a:cs typeface="Noto Sans"/>
               </a:rPr>
-              <a:t>[1] Sun et al. C³-M / test / 9-120 / question 1.</a:t>
+              <a:t>[1] Sun et al. C³ データセット。</a:t>
             </a:r>
             <a:r>
               <a:rPr sz="810" b="0" lang="ja-JP" altLang="en-US">
@@ -9230,9 +9141,9 @@
                 <a:latin typeface="Noto Sans"/>
                 <a:ea typeface="Noto Sans CJK JP"/>
                 <a:cs typeface="Noto Sans"/>
-                <a:hlinkClick r:id="rId2"/>
-              </a:rPr>
-              <a:t>https://github.com/nlpdata/c3/blob/1f41682ebb684d63afe7c583c8f38e137fc8a826/data/c3-m-test.json</a:t>
+                <a:hlinkClick r:id="rId3"/>
+              </a:rPr>
+              <a:t>https://github.com/nlpdata/c3/tree/master/data</a:t>
             </a:r>
           </a:p>
         </p:txBody>
@@ -9472,872 +9383,6 @@
         </p:nvSpPr>
         <p:spPr>
           <a:xfrm>
-            <a:off x="502920" y="4517136"/>
-            <a:ext cx="8183879" cy="530352"/>
-          </a:xfrm>
-          <a:prstGeom prst="rect">
-            <a:avLst/>
-          </a:prstGeom>
-          <a:noFill/>
-        </p:spPr>
-        <p:txBody>
-          <a:bodyPr wrap="square" lIns="0" rIns="0" tIns="0" bIns="0">
-            <a:noAutofit/>
-          </a:bodyPr>
-          <a:lstStyle/>
-          <a:p>
-            <a:pPr algn="l">
-              <a:lnSpc>
-                <a:spcPts val="940"/>
-              </a:lnSpc>
-              <a:spcBef>
-                <a:spcPts val="0"/>
-              </a:spcBef>
-              <a:spcAft>
-                <a:spcPts val="400"/>
-              </a:spcAft>
-              <a:buNone/>
-              <a:defRPr sz="810" b="0">
-                <a:solidFill>
-                  <a:srgbClr val="303437"/>
-                </a:solidFill>
-                <a:latin typeface="Noto Sans"/>
-              </a:defRPr>
-            </a:pPr>
-            <a:r>
-              <a:rPr sz="810" b="0" lang="ja-JP" altLang="en-US">
-                <a:solidFill>
-                  <a:srgbClr val="626669"/>
-                </a:solidFill>
-                <a:latin typeface="Noto Sans"/>
-                <a:ea typeface="Noto Sans CJK JP"/>
-                <a:cs typeface="Noto Sans"/>
-              </a:rPr>
-              <a:t>[1] Sun et al. C³-M / test / 9-120 / question 1.</a:t>
-            </a:r>
-            <a:r>
-              <a:rPr sz="810" b="0" lang="ja-JP" altLang="en-US">
-                <a:solidFill>
-                  <a:srgbClr val="626669"/>
-                </a:solidFill>
-                <a:latin typeface="Noto Sans"/>
-                <a:ea typeface="Noto Sans CJK JP"/>
-                <a:cs typeface="Noto Sans"/>
-              </a:rPr>
-              <a:t>  </a:t>
-            </a:r>
-            <a:r>
-              <a:rPr sz="810" b="0" lang="ja-JP" altLang="en-US">
-                <a:solidFill>
-                  <a:srgbClr val="626669"/>
-                </a:solidFill>
-                <a:latin typeface="Noto Sans"/>
-                <a:ea typeface="Noto Sans CJK JP"/>
-                <a:cs typeface="Noto Sans"/>
-                <a:hlinkClick r:id="rId2"/>
-              </a:rPr>
-              <a:t>https://github.com/nlpdata/c3/blob/1f41682ebb684d63afe7c583c8f38e137fc8a826/data/c3-m-test.json</a:t>
-            </a:r>
-          </a:p>
-          <a:p>
-            <a:pPr>
-              <a:lnSpc>
-                <a:spcPts val="940"/>
-              </a:lnSpc>
-              <a:spcAft>
-                <a:spcPts val="400"/>
-              </a:spcAft>
-              <a:buNone/>
-              <a:defRPr sz="810" b="0">
-                <a:solidFill>
-                  <a:srgbClr val="303437"/>
-                </a:solidFill>
-                <a:latin typeface="Noto Sans"/>
-              </a:defRPr>
-            </a:pPr>
-            <a:r>
-              <a:rPr sz="810" b="0" lang="ja-JP" altLang="en-US">
-                <a:solidFill>
-                  <a:srgbClr val="626669"/>
-                </a:solidFill>
-                <a:latin typeface="Noto Sans"/>
-                <a:ea typeface="Noto Sans CJK JP"/>
-                <a:cs typeface="Noto Sans"/>
-              </a:rPr>
-              <a:t>[2] Sun, Yu, Yu &amp; Cardie (2020). Investigating Prior Knowledge for Challenging Chinese Machine Reading Comprehension. TACL 8:141–155.</a:t>
-            </a:r>
-          </a:p>
-          <a:p>
-            <a:pPr>
-              <a:lnSpc>
-                <a:spcPts val="940"/>
-              </a:lnSpc>
-              <a:spcAft>
-                <a:spcPts val="400"/>
-              </a:spcAft>
-              <a:buNone/>
-              <a:defRPr sz="810" b="0">
-                <a:solidFill>
-                  <a:srgbClr val="303437"/>
-                </a:solidFill>
-                <a:latin typeface="Noto Sans"/>
-              </a:defRPr>
-            </a:pPr>
-            <a:r>
-              <a:rPr sz="810" b="0" lang="ja-JP" altLang="en-US">
-                <a:solidFill>
-                  <a:srgbClr val="626669"/>
-                </a:solidFill>
-                <a:latin typeface="Noto Sans"/>
-                <a:ea typeface="Noto Sans CJK JP"/>
-                <a:cs typeface="Noto Sans"/>
-                <a:hlinkClick r:id="rId3"/>
-              </a:rPr>
-              <a:t>https://aclanthology.org/2020.tacl-1.10/</a:t>
-            </a:r>
-          </a:p>
-        </p:txBody>
-      </p:sp>
-    </p:spTree>
-  </p:cSld>
-  <p:clrMapOvr>
-    <a:masterClrMapping/>
-  </p:clrMapOvr>
-</p:sld>
-</file>
-
-<file path=ppt/slides/slide14.xml><?xml version="1.0" encoding="utf-8"?>
-<p:sld xmlns:a="http://schemas.openxmlformats.org/drawingml/2006/main" xmlns:p="http://schemas.openxmlformats.org/presentationml/2006/main" xmlns:r="http://schemas.openxmlformats.org/officeDocument/2006/relationships">
-  <p:cSld>
-    <p:spTree>
-      <p:nvGrpSpPr>
-        <p:cNvPr id="1" name=""/>
-        <p:cNvGrpSpPr/>
-        <p:nvPr/>
-      </p:nvGrpSpPr>
-      <p:grpSpPr/>
-      <p:sp>
-        <p:nvSpPr>
-          <p:cNvPr id="2" name="Title 1"/>
-          <p:cNvSpPr>
-            <a:spLocks noGrp="1"/>
-          </p:cNvSpPr>
-          <p:nvPr>
-            <p:ph type="title"/>
-          </p:nvPr>
-        </p:nvSpPr>
-        <p:spPr>
-          <a:xfrm>
-            <a:off x="468172" y="650138"/>
-            <a:ext cx="8206740" cy="616305"/>
-          </a:xfrm>
-        </p:spPr>
-        <p:txBody>
-          <a:bodyPr wrap="square" lIns="0" rIns="0" tIns="0" bIns="0">
-            <a:noAutofit/>
-          </a:bodyPr>
-          <a:lstStyle/>
-          <a:p>
-            <a:pPr algn="l">
-              <a:lnSpc>
-                <a:spcPct val="110000"/>
-              </a:lnSpc>
-              <a:buNone/>
-              <a:defRPr sz="2800" b="0">
-                <a:solidFill>
-                  <a:srgbClr val="303437"/>
-                </a:solidFill>
-                <a:latin typeface="Noto Sans"/>
-              </a:defRPr>
-            </a:pPr>
-            <a:r>
-              <a:rPr sz="2800" b="1" lang="ja-JP" altLang="en-US">
-                <a:solidFill>
-                  <a:srgbClr val="303437"/>
-                </a:solidFill>
-                <a:latin typeface="Noto Sans"/>
-                <a:ea typeface="Noto Sans CJK JP"/>
-                <a:cs typeface="Noto Sans"/>
-              </a:rPr>
-              <a:t>一つの文書に、複数の質問が付く</a:t>
-            </a:r>
-          </a:p>
-        </p:txBody>
-      </p:sp>
-      <p:sp>
-        <p:nvSpPr>
-          <p:cNvPr id="3" name="Title 2"/>
-          <p:cNvSpPr>
-            <a:spLocks noGrp="1"/>
-          </p:cNvSpPr>
-          <p:nvPr>
-            <p:ph type="title" idx="2"/>
-          </p:nvPr>
-        </p:nvSpPr>
-        <p:spPr>
-          <a:xfrm>
-            <a:off x="75895" y="0"/>
-            <a:ext cx="8115300" cy="480060"/>
-          </a:xfrm>
-        </p:spPr>
-        <p:txBody>
-          <a:bodyPr wrap="square" lIns="0" rIns="0" tIns="0" bIns="0" anchor="ctr">
-            <a:noAutofit/>
-          </a:bodyPr>
-          <a:lstStyle/>
-          <a:p>
-            <a:pPr algn="l">
-              <a:lnSpc>
-                <a:spcPct val="110000"/>
-              </a:lnSpc>
-              <a:buNone/>
-              <a:defRPr sz="1400" b="0">
-                <a:solidFill>
-                  <a:srgbClr val="303437"/>
-                </a:solidFill>
-                <a:latin typeface="Noto Sans"/>
-              </a:defRPr>
-            </a:pPr>
-            <a:r>
-              <a:rPr sz="1400" b="1" lang="ja-JP" altLang="en-US">
-                <a:solidFill>
-                  <a:srgbClr val="FFFEF8"/>
-                </a:solidFill>
-                <a:latin typeface="Noto Sans"/>
-                <a:ea typeface="Noto Sans CJK JP"/>
-                <a:cs typeface="Noto Sans"/>
-              </a:rPr>
-              <a:t>1. 文書から、正しい選択肢を選ぶ</a:t>
-            </a:r>
-          </a:p>
-        </p:txBody>
-      </p:sp>
-      <p:sp>
-        <p:nvSpPr>
-          <p:cNvPr id="4" name="Rectangle 3"/>
-          <p:cNvSpPr/>
-          <p:nvPr/>
-        </p:nvSpPr>
-        <p:spPr>
-          <a:xfrm>
-            <a:off x="594360" y="1691640"/>
-            <a:ext cx="2468880" cy="1143000"/>
-          </a:xfrm>
-          <a:prstGeom prst="rect">
-            <a:avLst/>
-          </a:prstGeom>
-          <a:solidFill>
-            <a:srgbClr val="EBEDEB"/>
-          </a:solidFill>
-          <a:ln>
-            <a:noFill/>
-          </a:ln>
-          <a:effectLst/>
-        </p:spPr>
-        <p:style>
-          <a:lnRef idx="1">
-            <a:schemeClr val="accent1"/>
-          </a:lnRef>
-          <a:fillRef idx="3">
-            <a:schemeClr val="accent1"/>
-          </a:fillRef>
-          <a:effectRef idx="0">
-            <a:schemeClr val="accent1"/>
-          </a:effectRef>
-          <a:fontRef idx="minor">
-            <a:schemeClr val="lt1"/>
-          </a:fontRef>
-        </p:style>
-        <p:txBody>
-          <a:bodyPr rtlCol="0" anchor="ctr"/>
-          <a:lstStyle/>
-          <a:p>
-            <a:pPr algn="ctr"/>
-          </a:p>
-        </p:txBody>
-      </p:sp>
-      <p:sp>
-        <p:nvSpPr>
-          <p:cNvPr id="5" name="TextBox 4"/>
-          <p:cNvSpPr txBox="1"/>
-          <p:nvPr/>
-        </p:nvSpPr>
-        <p:spPr>
-          <a:xfrm>
-            <a:off x="713232" y="1847088"/>
-            <a:ext cx="2231136" cy="274320"/>
-          </a:xfrm>
-          <a:prstGeom prst="rect">
-            <a:avLst/>
-          </a:prstGeom>
-          <a:noFill/>
-        </p:spPr>
-        <p:txBody>
-          <a:bodyPr wrap="square" lIns="0" rIns="0" tIns="0" bIns="0">
-            <a:noAutofit/>
-          </a:bodyPr>
-          <a:lstStyle/>
-          <a:p>
-            <a:pPr algn="l">
-              <a:lnSpc>
-                <a:spcPts val="2106"/>
-              </a:lnSpc>
-              <a:spcBef>
-                <a:spcPts val="0"/>
-              </a:spcBef>
-              <a:spcAft>
-                <a:spcPts val="0"/>
-              </a:spcAft>
-              <a:buNone/>
-              <a:defRPr sz="1800" b="0">
-                <a:solidFill>
-                  <a:srgbClr val="303437"/>
-                </a:solidFill>
-                <a:latin typeface="Noto Sans"/>
-              </a:defRPr>
-            </a:pPr>
-            <a:r>
-              <a:rPr sz="1800" b="1" lang="ja-JP" altLang="en-US">
-                <a:solidFill>
-                  <a:srgbClr val="303437"/>
-                </a:solidFill>
-                <a:latin typeface="Noto Sans"/>
-                <a:ea typeface="Noto Sans CJK JP"/>
-                <a:cs typeface="Noto Sans"/>
-              </a:rPr>
-              <a:t>文書</a:t>
-            </a:r>
-          </a:p>
-        </p:txBody>
-      </p:sp>
-      <p:sp>
-        <p:nvSpPr>
-          <p:cNvPr id="6" name="TextBox 5"/>
-          <p:cNvSpPr txBox="1"/>
-          <p:nvPr/>
-        </p:nvSpPr>
-        <p:spPr>
-          <a:xfrm>
-            <a:off x="713232" y="2276856"/>
-            <a:ext cx="2231136" cy="365760"/>
-          </a:xfrm>
-          <a:prstGeom prst="rect">
-            <a:avLst/>
-          </a:prstGeom>
-          <a:noFill/>
-        </p:spPr>
-        <p:txBody>
-          <a:bodyPr wrap="square" lIns="0" rIns="0" tIns="0" bIns="0">
-            <a:noAutofit/>
-          </a:bodyPr>
-          <a:lstStyle/>
-          <a:p>
-            <a:pPr algn="l">
-              <a:lnSpc>
-                <a:spcPts val="1696"/>
-              </a:lnSpc>
-              <a:spcBef>
-                <a:spcPts val="0"/>
-              </a:spcBef>
-              <a:spcAft>
-                <a:spcPts val="0"/>
-              </a:spcAft>
-              <a:buNone/>
-              <a:defRPr sz="1450" b="0">
-                <a:solidFill>
-                  <a:srgbClr val="303437"/>
-                </a:solidFill>
-                <a:latin typeface="Noto Sans"/>
-              </a:defRPr>
-            </a:pPr>
-            <a:r>
-              <a:rPr sz="1450" b="0" lang="ja-JP" altLang="en-US">
-                <a:solidFill>
-                  <a:srgbClr val="303437"/>
-                </a:solidFill>
-                <a:latin typeface="Noto Sans"/>
-                <a:ea typeface="Noto Sans CJK JP"/>
-                <a:cs typeface="Noto Sans"/>
-              </a:rPr>
-              <a:t>対話 または 単一テキスト</a:t>
-            </a:r>
-          </a:p>
-        </p:txBody>
-      </p:sp>
-      <p:sp>
-        <p:nvSpPr>
-          <p:cNvPr id="7" name="TextBox 6"/>
-          <p:cNvSpPr txBox="1"/>
-          <p:nvPr/>
-        </p:nvSpPr>
-        <p:spPr>
-          <a:xfrm>
-            <a:off x="3099816" y="2057400"/>
-            <a:ext cx="228600" cy="274320"/>
-          </a:xfrm>
-          <a:prstGeom prst="rect">
-            <a:avLst/>
-          </a:prstGeom>
-          <a:noFill/>
-        </p:spPr>
-        <p:txBody>
-          <a:bodyPr wrap="square" lIns="0" rIns="0" tIns="0" bIns="0">
-            <a:noAutofit/>
-          </a:bodyPr>
-          <a:lstStyle/>
-          <a:p>
-            <a:pPr algn="l">
-              <a:lnSpc>
-                <a:spcPts val="2106"/>
-              </a:lnSpc>
-              <a:spcBef>
-                <a:spcPts val="0"/>
-              </a:spcBef>
-              <a:spcAft>
-                <a:spcPts val="0"/>
-              </a:spcAft>
-              <a:buNone/>
-              <a:defRPr sz="1800" b="0">
-                <a:solidFill>
-                  <a:srgbClr val="303437"/>
-                </a:solidFill>
-                <a:latin typeface="Noto Sans"/>
-              </a:defRPr>
-            </a:pPr>
-            <a:r>
-              <a:rPr sz="1800" b="1" lang="ja-JP" altLang="en-US">
-                <a:solidFill>
-                  <a:srgbClr val="303437"/>
-                </a:solidFill>
-                <a:latin typeface="Noto Sans"/>
-                <a:ea typeface="Noto Sans CJK JP"/>
-                <a:cs typeface="Noto Sans"/>
-              </a:rPr>
-              <a:t>→</a:t>
-            </a:r>
-          </a:p>
-        </p:txBody>
-      </p:sp>
-      <p:sp>
-        <p:nvSpPr>
-          <p:cNvPr id="8" name="Rectangle 7"/>
-          <p:cNvSpPr/>
-          <p:nvPr/>
-        </p:nvSpPr>
-        <p:spPr>
-          <a:xfrm>
-            <a:off x="3337560" y="1691640"/>
-            <a:ext cx="2468880" cy="1143000"/>
-          </a:xfrm>
-          <a:prstGeom prst="rect">
-            <a:avLst/>
-          </a:prstGeom>
-          <a:solidFill>
-            <a:srgbClr val="EBEDEB"/>
-          </a:solidFill>
-          <a:ln>
-            <a:noFill/>
-          </a:ln>
-          <a:effectLst/>
-        </p:spPr>
-        <p:style>
-          <a:lnRef idx="1">
-            <a:schemeClr val="accent1"/>
-          </a:lnRef>
-          <a:fillRef idx="3">
-            <a:schemeClr val="accent1"/>
-          </a:fillRef>
-          <a:effectRef idx="0">
-            <a:schemeClr val="accent1"/>
-          </a:effectRef>
-          <a:fontRef idx="minor">
-            <a:schemeClr val="lt1"/>
-          </a:fontRef>
-        </p:style>
-        <p:txBody>
-          <a:bodyPr rtlCol="0" anchor="ctr"/>
-          <a:lstStyle/>
-          <a:p>
-            <a:pPr algn="ctr"/>
-          </a:p>
-        </p:txBody>
-      </p:sp>
-      <p:sp>
-        <p:nvSpPr>
-          <p:cNvPr id="9" name="TextBox 8"/>
-          <p:cNvSpPr txBox="1"/>
-          <p:nvPr/>
-        </p:nvSpPr>
-        <p:spPr>
-          <a:xfrm>
-            <a:off x="3456432" y="1847088"/>
-            <a:ext cx="2231136" cy="274320"/>
-          </a:xfrm>
-          <a:prstGeom prst="rect">
-            <a:avLst/>
-          </a:prstGeom>
-          <a:noFill/>
-        </p:spPr>
-        <p:txBody>
-          <a:bodyPr wrap="square" lIns="0" rIns="0" tIns="0" bIns="0">
-            <a:noAutofit/>
-          </a:bodyPr>
-          <a:lstStyle/>
-          <a:p>
-            <a:pPr algn="l">
-              <a:lnSpc>
-                <a:spcPts val="2106"/>
-              </a:lnSpc>
-              <a:spcBef>
-                <a:spcPts val="0"/>
-              </a:spcBef>
-              <a:spcAft>
-                <a:spcPts val="0"/>
-              </a:spcAft>
-              <a:buNone/>
-              <a:defRPr sz="1800" b="0">
-                <a:solidFill>
-                  <a:srgbClr val="303437"/>
-                </a:solidFill>
-                <a:latin typeface="Noto Sans"/>
-              </a:defRPr>
-            </a:pPr>
-            <a:r>
-              <a:rPr sz="1800" b="1" lang="ja-JP" altLang="en-US">
-                <a:solidFill>
-                  <a:srgbClr val="303437"/>
-                </a:solidFill>
-                <a:latin typeface="Noto Sans"/>
-                <a:ea typeface="Noto Sans CJK JP"/>
-                <a:cs typeface="Noto Sans"/>
-              </a:rPr>
-              <a:t>質問ごとの候補</a:t>
-            </a:r>
-          </a:p>
-        </p:txBody>
-      </p:sp>
-      <p:sp>
-        <p:nvSpPr>
-          <p:cNvPr id="10" name="TextBox 9"/>
-          <p:cNvSpPr txBox="1"/>
-          <p:nvPr/>
-        </p:nvSpPr>
-        <p:spPr>
-          <a:xfrm>
-            <a:off x="3456432" y="2276856"/>
-            <a:ext cx="2231136" cy="365760"/>
-          </a:xfrm>
-          <a:prstGeom prst="rect">
-            <a:avLst/>
-          </a:prstGeom>
-          <a:noFill/>
-        </p:spPr>
-        <p:txBody>
-          <a:bodyPr wrap="square" lIns="0" rIns="0" tIns="0" bIns="0">
-            <a:noAutofit/>
-          </a:bodyPr>
-          <a:lstStyle/>
-          <a:p>
-            <a:pPr algn="l">
-              <a:lnSpc>
-                <a:spcPts val="1696"/>
-              </a:lnSpc>
-              <a:spcBef>
-                <a:spcPts val="0"/>
-              </a:spcBef>
-              <a:spcAft>
-                <a:spcPts val="0"/>
-              </a:spcAft>
-              <a:buNone/>
-              <a:defRPr sz="1450" b="0">
-                <a:solidFill>
-                  <a:srgbClr val="303437"/>
-                </a:solidFill>
-                <a:latin typeface="Noto Sans"/>
-              </a:defRPr>
-            </a:pPr>
-            <a:r>
-              <a:rPr sz="1450" b="0" lang="ja-JP" altLang="en-US">
-                <a:solidFill>
-                  <a:srgbClr val="303437"/>
-                </a:solidFill>
-                <a:latin typeface="Noto Sans"/>
-                <a:ea typeface="Noto Sans CJK JP"/>
-                <a:cs typeface="Noto Sans"/>
-              </a:rPr>
-              <a:t>2〜4個から一つを選ぶ</a:t>
-            </a:r>
-          </a:p>
-        </p:txBody>
-      </p:sp>
-      <p:sp>
-        <p:nvSpPr>
-          <p:cNvPr id="11" name="TextBox 10"/>
-          <p:cNvSpPr txBox="1"/>
-          <p:nvPr/>
-        </p:nvSpPr>
-        <p:spPr>
-          <a:xfrm>
-            <a:off x="5843016" y="2057400"/>
-            <a:ext cx="228600" cy="274320"/>
-          </a:xfrm>
-          <a:prstGeom prst="rect">
-            <a:avLst/>
-          </a:prstGeom>
-          <a:noFill/>
-        </p:spPr>
-        <p:txBody>
-          <a:bodyPr wrap="square" lIns="0" rIns="0" tIns="0" bIns="0">
-            <a:noAutofit/>
-          </a:bodyPr>
-          <a:lstStyle/>
-          <a:p>
-            <a:pPr algn="l">
-              <a:lnSpc>
-                <a:spcPts val="2106"/>
-              </a:lnSpc>
-              <a:spcBef>
-                <a:spcPts val="0"/>
-              </a:spcBef>
-              <a:spcAft>
-                <a:spcPts val="0"/>
-              </a:spcAft>
-              <a:buNone/>
-              <a:defRPr sz="1800" b="0">
-                <a:solidFill>
-                  <a:srgbClr val="303437"/>
-                </a:solidFill>
-                <a:latin typeface="Noto Sans"/>
-              </a:defRPr>
-            </a:pPr>
-            <a:r>
-              <a:rPr sz="1800" b="1" lang="ja-JP" altLang="en-US">
-                <a:solidFill>
-                  <a:srgbClr val="303437"/>
-                </a:solidFill>
-                <a:latin typeface="Noto Sans"/>
-                <a:ea typeface="Noto Sans CJK JP"/>
-                <a:cs typeface="Noto Sans"/>
-              </a:rPr>
-              <a:t>→</a:t>
-            </a:r>
-          </a:p>
-        </p:txBody>
-      </p:sp>
-      <p:sp>
-        <p:nvSpPr>
-          <p:cNvPr id="12" name="Rectangle 11"/>
-          <p:cNvSpPr/>
-          <p:nvPr/>
-        </p:nvSpPr>
-        <p:spPr>
-          <a:xfrm>
-            <a:off x="6080760" y="1691640"/>
-            <a:ext cx="2468880" cy="1143000"/>
-          </a:xfrm>
-          <a:prstGeom prst="rect">
-            <a:avLst/>
-          </a:prstGeom>
-          <a:solidFill>
-            <a:srgbClr val="EBEDEB"/>
-          </a:solidFill>
-          <a:ln>
-            <a:noFill/>
-          </a:ln>
-          <a:effectLst/>
-        </p:spPr>
-        <p:style>
-          <a:lnRef idx="1">
-            <a:schemeClr val="accent1"/>
-          </a:lnRef>
-          <a:fillRef idx="3">
-            <a:schemeClr val="accent1"/>
-          </a:fillRef>
-          <a:effectRef idx="0">
-            <a:schemeClr val="accent1"/>
-          </a:effectRef>
-          <a:fontRef idx="minor">
-            <a:schemeClr val="lt1"/>
-          </a:fontRef>
-        </p:style>
-        <p:txBody>
-          <a:bodyPr rtlCol="0" anchor="ctr"/>
-          <a:lstStyle/>
-          <a:p>
-            <a:pPr algn="ctr"/>
-          </a:p>
-        </p:txBody>
-      </p:sp>
-      <p:sp>
-        <p:nvSpPr>
-          <p:cNvPr id="13" name="TextBox 12"/>
-          <p:cNvSpPr txBox="1"/>
-          <p:nvPr/>
-        </p:nvSpPr>
-        <p:spPr>
-          <a:xfrm>
-            <a:off x="6199632" y="1847088"/>
-            <a:ext cx="2231136" cy="274320"/>
-          </a:xfrm>
-          <a:prstGeom prst="rect">
-            <a:avLst/>
-          </a:prstGeom>
-          <a:noFill/>
-        </p:spPr>
-        <p:txBody>
-          <a:bodyPr wrap="square" lIns="0" rIns="0" tIns="0" bIns="0">
-            <a:noAutofit/>
-          </a:bodyPr>
-          <a:lstStyle/>
-          <a:p>
-            <a:pPr algn="l">
-              <a:lnSpc>
-                <a:spcPts val="2106"/>
-              </a:lnSpc>
-              <a:spcBef>
-                <a:spcPts val="0"/>
-              </a:spcBef>
-              <a:spcAft>
-                <a:spcPts val="0"/>
-              </a:spcAft>
-              <a:buNone/>
-              <a:defRPr sz="1800" b="0">
-                <a:solidFill>
-                  <a:srgbClr val="303437"/>
-                </a:solidFill>
-                <a:latin typeface="Noto Sans"/>
-              </a:defRPr>
-            </a:pPr>
-            <a:r>
-              <a:rPr sz="1800" b="1" lang="ja-JP" altLang="en-US">
-                <a:solidFill>
-                  <a:srgbClr val="303437"/>
-                </a:solidFill>
-                <a:latin typeface="Noto Sans"/>
-                <a:ea typeface="Noto Sans CJK JP"/>
-                <a:cs typeface="Noto Sans"/>
-              </a:rPr>
-              <a:t>正解</a:t>
-            </a:r>
-          </a:p>
-        </p:txBody>
-      </p:sp>
-      <p:sp>
-        <p:nvSpPr>
-          <p:cNvPr id="14" name="TextBox 13"/>
-          <p:cNvSpPr txBox="1"/>
-          <p:nvPr/>
-        </p:nvSpPr>
-        <p:spPr>
-          <a:xfrm>
-            <a:off x="6199632" y="2276856"/>
-            <a:ext cx="2231136" cy="365760"/>
-          </a:xfrm>
-          <a:prstGeom prst="rect">
-            <a:avLst/>
-          </a:prstGeom>
-          <a:noFill/>
-        </p:spPr>
-        <p:txBody>
-          <a:bodyPr wrap="square" lIns="0" rIns="0" tIns="0" bIns="0">
-            <a:noAutofit/>
-          </a:bodyPr>
-          <a:lstStyle/>
-          <a:p>
-            <a:pPr algn="l">
-              <a:lnSpc>
-                <a:spcPts val="1696"/>
-              </a:lnSpc>
-              <a:spcBef>
-                <a:spcPts val="0"/>
-              </a:spcBef>
-              <a:spcAft>
-                <a:spcPts val="0"/>
-              </a:spcAft>
-              <a:buNone/>
-              <a:defRPr sz="1450" b="0">
-                <a:solidFill>
-                  <a:srgbClr val="303437"/>
-                </a:solidFill>
-                <a:latin typeface="Noto Sans"/>
-              </a:defRPr>
-            </a:pPr>
-            <a:r>
-              <a:rPr sz="1450" b="0" lang="ja-JP" altLang="en-US">
-                <a:solidFill>
-                  <a:srgbClr val="303437"/>
-                </a:solidFill>
-                <a:latin typeface="Noto Sans"/>
-                <a:ea typeface="Noto Sans CJK JP"/>
-                <a:cs typeface="Noto Sans"/>
-              </a:rPr>
-              <a:t>候補の文字列を保持</a:t>
-            </a:r>
-          </a:p>
-        </p:txBody>
-      </p:sp>
-      <p:sp>
-        <p:nvSpPr>
-          <p:cNvPr id="15" name="TextBox 14"/>
-          <p:cNvSpPr txBox="1"/>
-          <p:nvPr/>
-        </p:nvSpPr>
-        <p:spPr>
-          <a:xfrm>
-            <a:off x="594360" y="3273552"/>
-            <a:ext cx="7955279" cy="822960"/>
-          </a:xfrm>
-          <a:prstGeom prst="rect">
-            <a:avLst/>
-          </a:prstGeom>
-          <a:noFill/>
-        </p:spPr>
-        <p:txBody>
-          <a:bodyPr wrap="square" lIns="0" rIns="0" tIns="0" bIns="0">
-            <a:noAutofit/>
-          </a:bodyPr>
-          <a:lstStyle/>
-          <a:p>
-            <a:pPr algn="l">
-              <a:lnSpc>
-                <a:spcPts val="2379"/>
-              </a:lnSpc>
-              <a:spcBef>
-                <a:spcPts val="0"/>
-              </a:spcBef>
-              <a:spcAft>
-                <a:spcPts val="0"/>
-              </a:spcAft>
-              <a:buNone/>
-              <a:defRPr sz="2000" b="0">
-                <a:solidFill>
-                  <a:srgbClr val="303437"/>
-                </a:solidFill>
-                <a:latin typeface="Noto Sans"/>
-              </a:defRPr>
-            </a:pPr>
-            <a:r>
-              <a:rPr sz="2000" b="0" lang="ja-JP" altLang="en-US">
-                <a:solidFill>
-                  <a:srgbClr val="303437"/>
-                </a:solidFill>
-                <a:latin typeface="Noto Sans"/>
-                <a:ea typeface="Noto Sans CJK JP"/>
-                <a:cs typeface="Noto Sans"/>
-              </a:rPr>
-              <a:t>同じ文書に最大6問が付く。文書数と質問数は異なる。各実例は文書全文と選んだ一問の全内容を示し、同じ文書の別の質問は含めない。</a:t>
-            </a:r>
-          </a:p>
-        </p:txBody>
-      </p:sp>
-      <p:sp>
-        <p:nvSpPr>
-          <p:cNvPr id="16" name="sources"/>
-          <p:cNvSpPr txBox="1"/>
-          <p:nvPr/>
-        </p:nvSpPr>
-        <p:spPr>
-          <a:xfrm>
             <a:off x="502920" y="4700016"/>
             <a:ext cx="8183879" cy="530352"/>
           </a:xfrm>
@@ -10360,7 +9405,7 @@
                 <a:spcPts val="0"/>
               </a:spcBef>
               <a:spcAft>
-                <a:spcPts val="400"/>
+                <a:spcPts val="140"/>
               </a:spcAft>
               <a:buNone/>
               <a:defRPr sz="810" b="0">
@@ -10379,7 +9424,30 @@
                 <a:ea typeface="Noto Sans CJK JP"/>
                 <a:cs typeface="Noto Sans"/>
               </a:rPr>
-              <a:t>[1] Sun, Yu, Yu &amp; Cardie (2020). Investigating Prior Knowledge for Challenging Chinese Machine Reading Comprehension. TACL 8:141–155.</a:t>
+              <a:t>[1] Sun et al. C³ データセット。</a:t>
+            </a:r>
+            <a:r>
+              <a:rPr sz="810" b="0" lang="ja-JP" altLang="en-US">
+                <a:solidFill>
+                  <a:srgbClr val="626669"/>
+                </a:solidFill>
+                <a:latin typeface="Noto Sans"/>
+                <a:ea typeface="Noto Sans CJK JP"/>
+                <a:cs typeface="Noto Sans"/>
+              </a:rPr>
+              <a:t>  </a:t>
+            </a:r>
+            <a:r>
+              <a:rPr sz="810" b="0" lang="ja-JP" altLang="en-US">
+                <a:solidFill>
+                  <a:srgbClr val="626669"/>
+                </a:solidFill>
+                <a:latin typeface="Noto Sans"/>
+                <a:ea typeface="Noto Sans CJK JP"/>
+                <a:cs typeface="Noto Sans"/>
+                <a:hlinkClick r:id="rId4"/>
+              </a:rPr>
+              <a:t>https://github.com/nlpdata/c3/tree/master/data</a:t>
             </a:r>
           </a:p>
           <a:p>
@@ -10388,7 +9456,7 @@
                 <a:spcPts val="940"/>
               </a:lnSpc>
               <a:spcAft>
-                <a:spcPts val="400"/>
+                <a:spcPts val="140"/>
               </a:spcAft>
               <a:buNone/>
               <a:defRPr sz="810" b="0">
@@ -10406,7 +9474,29 @@
                 <a:latin typeface="Noto Sans"/>
                 <a:ea typeface="Noto Sans CJK JP"/>
                 <a:cs typeface="Noto Sans"/>
-                <a:hlinkClick r:id="rId2"/>
+              </a:rPr>
+              <a:t>[2] Sun et al. (2020). Investigating Prior Knowledge for Challenging Chinese Machine Reading Comprehension. TACL.</a:t>
+            </a:r>
+            <a:r>
+              <a:rPr sz="810" b="0" lang="ja-JP" altLang="en-US">
+                <a:solidFill>
+                  <a:srgbClr val="626669"/>
+                </a:solidFill>
+                <a:latin typeface="Noto Sans"/>
+                <a:ea typeface="Noto Sans CJK JP"/>
+                <a:cs typeface="Noto Sans"/>
+              </a:rPr>
+              <a:t>  </a:t>
+            </a:r>
+            <a:r>
+              <a:rPr sz="810" b="0" lang="ja-JP" altLang="en-US">
+                <a:solidFill>
+                  <a:srgbClr val="626669"/>
+                </a:solidFill>
+                <a:latin typeface="Noto Sans"/>
+                <a:ea typeface="Noto Sans CJK JP"/>
+                <a:cs typeface="Noto Sans"/>
+                <a:hlinkClick r:id="rId3"/>
               </a:rPr>
               <a:t>https://aclanthology.org/2020.tacl-1.10/</a:t>
             </a:r>
@@ -10784,7 +9874,7 @@
                 <a:spcPts val="0"/>
               </a:spcBef>
               <a:spcAft>
-                <a:spcPts val="400"/>
+                <a:spcPts val="140"/>
               </a:spcAft>
               <a:buNone/>
               <a:defRPr sz="810" b="0">
@@ -10803,25 +9893,19 @@
                 <a:ea typeface="Noto Sans CJK JP"/>
                 <a:cs typeface="Noto Sans"/>
               </a:rPr>
-              <a:t>[1] Sun, Yu, Yu &amp; Cardie (2020). Investigating Prior Knowledge for Challenging Chinese Machine Reading Comprehension. TACL 8:141–155.</a:t>
-            </a:r>
-          </a:p>
-          <a:p>
-            <a:pPr>
-              <a:lnSpc>
-                <a:spcPts val="940"/>
-              </a:lnSpc>
-              <a:spcAft>
-                <a:spcPts val="400"/>
-              </a:spcAft>
-              <a:buNone/>
-              <a:defRPr sz="810" b="0">
-                <a:solidFill>
-                  <a:srgbClr val="303437"/>
-                </a:solidFill>
-                <a:latin typeface="Noto Sans"/>
-              </a:defRPr>
-            </a:pPr>
+              <a:t>[1] Sun et al. (2020). Investigating Prior Knowledge for Challenging Chinese Machine Reading Comprehension. TACL.</a:t>
+            </a:r>
+            <a:r>
+              <a:rPr sz="810" b="0" lang="ja-JP" altLang="en-US">
+                <a:solidFill>
+                  <a:srgbClr val="626669"/>
+                </a:solidFill>
+                <a:latin typeface="Noto Sans"/>
+                <a:ea typeface="Noto Sans CJK JP"/>
+                <a:cs typeface="Noto Sans"/>
+              </a:rPr>
+              <a:t>  </a:t>
+            </a:r>
             <a:r>
               <a:rPr sz="810" b="0" lang="ja-JP" altLang="en-US">
                 <a:solidFill>
@@ -12084,7 +11168,7 @@
                 <a:ea typeface="Noto Sans CJK JP"/>
                 <a:cs typeface="Noto Sans"/>
               </a:rPr>
-              <a:t>文書と質問を分けて数える。学習・開発・テストの件数は、元の6ファイルと一致。</a:t>
+              <a:t>一つの文書に複数の質問が付くため、文書数より質問数が多い。</a:t>
             </a:r>
           </a:p>
         </p:txBody>
@@ -12119,7 +11203,7 @@
                 <a:spcPts val="0"/>
               </a:spcBef>
               <a:spcAft>
-                <a:spcPts val="400"/>
+                <a:spcPts val="140"/>
               </a:spcAft>
               <a:buNone/>
               <a:defRPr sz="810" b="0">
@@ -12138,25 +11222,19 @@
                 <a:ea typeface="Noto Sans CJK JP"/>
                 <a:cs typeface="Noto Sans"/>
               </a:rPr>
-              <a:t>[1] Sun, Yu, Yu &amp; Cardie (2020). Investigating Prior Knowledge for Challenging Chinese Machine Reading Comprehension. TACL 8:141–155.</a:t>
-            </a:r>
-          </a:p>
-          <a:p>
-            <a:pPr>
-              <a:lnSpc>
-                <a:spcPts val="940"/>
-              </a:lnSpc>
-              <a:spcAft>
-                <a:spcPts val="400"/>
-              </a:spcAft>
-              <a:buNone/>
-              <a:defRPr sz="810" b="0">
-                <a:solidFill>
-                  <a:srgbClr val="303437"/>
-                </a:solidFill>
-                <a:latin typeface="Noto Sans"/>
-              </a:defRPr>
-            </a:pPr>
+              <a:t>[1] Sun et al. (2020). Investigating Prior Knowledge for Challenging Chinese Machine Reading Comprehension. TACL.</a:t>
+            </a:r>
+            <a:r>
+              <a:rPr sz="810" b="0" lang="ja-JP" altLang="en-US">
+                <a:solidFill>
+                  <a:srgbClr val="626669"/>
+                </a:solidFill>
+                <a:latin typeface="Noto Sans"/>
+                <a:ea typeface="Noto Sans CJK JP"/>
+                <a:cs typeface="Noto Sans"/>
+              </a:rPr>
+              <a:t>  </a:t>
+            </a:r>
             <a:r>
               <a:rPr sz="810" b="0" lang="ja-JP" altLang="en-US">
                 <a:solidFill>
@@ -12296,7 +11374,7 @@
         </p:nvGraphicFramePr>
         <p:xfrm>
           <a:off x="548640" y="1508760"/>
-          <a:ext cx="8046720" cy="1847088"/>
+          <a:ext cx="8046720" cy="2073402"/>
         </p:xfrm>
         <a:graphic>
           <a:graphicData uri="http://schemas.openxmlformats.org/drawingml/2006/table">
@@ -12790,7 +11868,7 @@
                   </a:tcPr>
                 </a:tc>
               </a:tr>
-              <a:tr h="377190">
+              <a:tr h="603504">
                 <a:tc>
                   <a:txBody>
                     <a:bodyPr wrap="square">
@@ -12819,7 +11897,7 @@
                           <a:ea typeface="Noto Sans CJK JP"/>
                           <a:cs typeface="Noto Sans"/>
                         </a:rPr>
-                        <a:t>正解が非抜出し</a:t>
+                        <a:t>正解をそのまま抜き出せない割合</a:t>
                       </a:r>
                     </a:p>
                   </a:txBody>
@@ -13115,7 +12193,7 @@
         </p:nvSpPr>
         <p:spPr>
           <a:xfrm>
-            <a:off x="594360" y="3447287"/>
+            <a:off x="594360" y="3858768"/>
             <a:ext cx="7955279" cy="658368"/>
           </a:xfrm>
           <a:prstGeom prst="rect">
@@ -13191,7 +12269,7 @@
                 <a:spcPts val="0"/>
               </a:spcBef>
               <a:spcAft>
-                <a:spcPts val="400"/>
+                <a:spcPts val="140"/>
               </a:spcAft>
               <a:buNone/>
               <a:defRPr sz="810" b="0">
@@ -13210,25 +12288,19 @@
                 <a:ea typeface="Noto Sans CJK JP"/>
                 <a:cs typeface="Noto Sans"/>
               </a:rPr>
-              <a:t>[1] Sun, Yu, Yu &amp; Cardie (2020). Investigating Prior Knowledge for Challenging Chinese Machine Reading Comprehension. TACL 8:141–155.</a:t>
-            </a:r>
-          </a:p>
-          <a:p>
-            <a:pPr>
-              <a:lnSpc>
-                <a:spcPts val="940"/>
-              </a:lnSpc>
-              <a:spcAft>
-                <a:spcPts val="400"/>
-              </a:spcAft>
-              <a:buNone/>
-              <a:defRPr sz="810" b="0">
-                <a:solidFill>
-                  <a:srgbClr val="303437"/>
-                </a:solidFill>
-                <a:latin typeface="Noto Sans"/>
-              </a:defRPr>
-            </a:pPr>
+              <a:t>[1] Sun et al. (2020). Investigating Prior Knowledge for Challenging Chinese Machine Reading Comprehension. TACL.</a:t>
+            </a:r>
+            <a:r>
+              <a:rPr sz="810" b="0" lang="ja-JP" altLang="en-US">
+                <a:solidFill>
+                  <a:srgbClr val="626669"/>
+                </a:solidFill>
+                <a:latin typeface="Noto Sans"/>
+                <a:ea typeface="Noto Sans CJK JP"/>
+                <a:cs typeface="Noto Sans"/>
+              </a:rPr>
+              <a:t>  </a:t>
+            </a:r>
             <a:r>
               <a:rPr sz="810" b="0" lang="ja-JP" altLang="en-US">
                 <a:solidFill>
@@ -13305,7 +12377,7 @@
                 <a:ea typeface="Noto Sans CJK JP"/>
                 <a:cs typeface="Noto Sans"/>
               </a:rPr>
-              <a:t>語句の照合を越えて、必要な知識を分ける</a:t>
+              <a:t>言語・専門・一般常識の知識を問う</a:t>
             </a:r>
           </a:p>
         </p:txBody>
@@ -13501,7 +12573,7 @@
                 <a:spcPts val="0"/>
               </a:spcBef>
               <a:spcAft>
-                <a:spcPts val="400"/>
+                <a:spcPts val="140"/>
               </a:spcAft>
               <a:buNone/>
               <a:defRPr sz="810" b="0">
@@ -13520,25 +12592,19 @@
                 <a:ea typeface="Noto Sans CJK JP"/>
                 <a:cs typeface="Noto Sans"/>
               </a:rPr>
-              <a:t>[1] Sun, Yu, Yu &amp; Cardie (2020). Investigating Prior Knowledge for Challenging Chinese Machine Reading Comprehension. TACL 8:141–155.</a:t>
-            </a:r>
-          </a:p>
-          <a:p>
-            <a:pPr>
-              <a:lnSpc>
-                <a:spcPts val="940"/>
-              </a:lnSpc>
-              <a:spcAft>
-                <a:spcPts val="400"/>
-              </a:spcAft>
-              <a:buNone/>
-              <a:defRPr sz="810" b="0">
-                <a:solidFill>
-                  <a:srgbClr val="303437"/>
-                </a:solidFill>
-                <a:latin typeface="Noto Sans"/>
-              </a:defRPr>
-            </a:pPr>
+              <a:t>[1] Sun et al. (2020). Investigating Prior Knowledge for Challenging Chinese Machine Reading Comprehension. TACL.</a:t>
+            </a:r>
+            <a:r>
+              <a:rPr sz="810" b="0" lang="ja-JP" altLang="en-US">
+                <a:solidFill>
+                  <a:srgbClr val="626669"/>
+                </a:solidFill>
+                <a:latin typeface="Noto Sans"/>
+                <a:ea typeface="Noto Sans CJK JP"/>
+                <a:cs typeface="Noto Sans"/>
+              </a:rPr>
+              <a:t>  </a:t>
+            </a:r>
             <a:r>
               <a:rPr sz="810" b="0" lang="ja-JP" altLang="en-US">
                 <a:solidFill>
@@ -13722,7 +12788,7 @@
                 <a:spcPts val="0"/>
               </a:spcBef>
               <a:spcAft>
-                <a:spcPts val="400"/>
+                <a:spcPts val="140"/>
               </a:spcAft>
               <a:buNone/>
               <a:defRPr sz="810" b="0">
@@ -13741,7 +12807,7 @@
                 <a:ea typeface="Noto Sans CJK JP"/>
                 <a:cs typeface="Noto Sans"/>
               </a:rPr>
-              <a:t>[1] Sun et al. C³ official repository. commit 1f41682e.</a:t>
+              <a:t>[1] Sun et al. C³ 公式データ・実装。</a:t>
             </a:r>
             <a:r>
               <a:rPr sz="810" b="0" lang="ja-JP" altLang="en-US">
@@ -14627,7 +13693,7 @@
                 <a:spcPts val="0"/>
               </a:spcBef>
               <a:spcAft>
-                <a:spcPts val="400"/>
+                <a:spcPts val="140"/>
               </a:spcAft>
               <a:buNone/>
               <a:defRPr sz="810" b="0">
@@ -14646,25 +13712,19 @@
                 <a:ea typeface="Noto Sans CJK JP"/>
                 <a:cs typeface="Noto Sans"/>
               </a:rPr>
-              <a:t>[1] Sun, Yu, Yu &amp; Cardie (2020). Investigating Prior Knowledge for Challenging Chinese Machine Reading Comprehension. TACL 8:141–155.</a:t>
-            </a:r>
-          </a:p>
-          <a:p>
-            <a:pPr>
-              <a:lnSpc>
-                <a:spcPts val="940"/>
-              </a:lnSpc>
-              <a:spcAft>
-                <a:spcPts val="400"/>
-              </a:spcAft>
-              <a:buNone/>
-              <a:defRPr sz="810" b="0">
-                <a:solidFill>
-                  <a:srgbClr val="303437"/>
-                </a:solidFill>
-                <a:latin typeface="Noto Sans"/>
-              </a:defRPr>
-            </a:pPr>
+              <a:t>[1] Sun et al. (2020). Investigating Prior Knowledge for Challenging Chinese Machine Reading Comprehension. TACL.</a:t>
+            </a:r>
+            <a:r>
+              <a:rPr sz="810" b="0" lang="ja-JP" altLang="en-US">
+                <a:solidFill>
+                  <a:srgbClr val="626669"/>
+                </a:solidFill>
+                <a:latin typeface="Noto Sans"/>
+                <a:ea typeface="Noto Sans CJK JP"/>
+                <a:cs typeface="Noto Sans"/>
+              </a:rPr>
+              <a:t>  </a:t>
+            </a:r>
             <a:r>
               <a:rPr sz="810" b="0" lang="ja-JP" altLang="en-US">
                 <a:solidFill>
@@ -14854,7 +13914,7 @@
                 <a:ea typeface="Noto Sans CJK JP"/>
                 <a:cs typeface="Noto Sans"/>
               </a:rPr>
-              <a:t>注釈者間の一致度はCohenのκ＝0.62。86.8％などは、この600問の分析結果である。</a:t>
+              <a:t>注釈者間の一致度はCohenのκ＝0.62。</a:t>
             </a:r>
           </a:p>
         </p:txBody>
@@ -14937,7 +13997,7 @@
                 <a:spcPts val="0"/>
               </a:spcBef>
               <a:spcAft>
-                <a:spcPts val="400"/>
+                <a:spcPts val="140"/>
               </a:spcAft>
               <a:buNone/>
               <a:defRPr sz="810" b="0">
@@ -14956,25 +14016,19 @@
                 <a:ea typeface="Noto Sans CJK JP"/>
                 <a:cs typeface="Noto Sans"/>
               </a:rPr>
-              <a:t>[1] Sun, Yu, Yu &amp; Cardie (2020). Investigating Prior Knowledge for Challenging Chinese Machine Reading Comprehension. TACL 8:141–155.</a:t>
-            </a:r>
-          </a:p>
-          <a:p>
-            <a:pPr>
-              <a:lnSpc>
-                <a:spcPts val="940"/>
-              </a:lnSpc>
-              <a:spcAft>
-                <a:spcPts val="400"/>
-              </a:spcAft>
-              <a:buNone/>
-              <a:defRPr sz="810" b="0">
-                <a:solidFill>
-                  <a:srgbClr val="303437"/>
-                </a:solidFill>
-                <a:latin typeface="Noto Sans"/>
-              </a:defRPr>
-            </a:pPr>
+              <a:t>[1] Sun et al. (2020). Investigating Prior Knowledge for Challenging Chinese Machine Reading Comprehension. TACL.</a:t>
+            </a:r>
+            <a:r>
+              <a:rPr sz="810" b="0" lang="ja-JP" altLang="en-US">
+                <a:solidFill>
+                  <a:srgbClr val="626669"/>
+                </a:solidFill>
+                <a:latin typeface="Noto Sans"/>
+                <a:ea typeface="Noto Sans CJK JP"/>
+                <a:cs typeface="Noto Sans"/>
+              </a:rPr>
+              <a:t>  </a:t>
+            </a:r>
             <a:r>
               <a:rPr sz="810" b="0" lang="ja-JP" altLang="en-US">
                 <a:solidFill>
@@ -15051,7 +14105,7 @@
                 <a:ea typeface="Noto Sans CJK JP"/>
                 <a:cs typeface="Noto Sans"/>
               </a:rPr>
-              <a:t>正答率を、対象と条件に沿って読む</a:t>
+              <a:t>正答率と構築時の性能</a:t>
             </a:r>
           </a:p>
         </p:txBody>
@@ -15099,7 +14153,7 @@
                 <a:ea typeface="Noto Sans CJK JP"/>
                 <a:cs typeface="Noto Sans"/>
               </a:rPr>
-              <a:t>3. 評価と歴史的な性能</a:t>
+              <a:t>3. 正答率と構築時の性能</a:t>
             </a:r>
           </a:p>
         </p:txBody>
@@ -15165,7 +14219,7 @@
                 <a:ea typeface="Noto Sans CJK JP"/>
                 <a:cs typeface="Noto Sans"/>
               </a:rPr>
-              <a:t>評価の単位は、一問の正しい選択</a:t>
+              <a:t>正しい候補を選んだ割合で評価する</a:t>
             </a:r>
           </a:p>
         </p:txBody>
@@ -15218,7 +14272,7 @@
                 <a:ea typeface="Noto Sans CJK JP"/>
                 <a:cs typeface="Noto Sans"/>
               </a:rPr>
-              <a:t>基本指標は正答率。正しい候補を選べた質問数を、評価した質問数で割る。すべての選択肢数を4個と仮定しない。</a:t>
+              <a:t>基本指標は正答率。正しい候補を選べた質問数を、評価した質問数で割る。</a:t>
             </a:r>
           </a:p>
           <a:p>
@@ -15248,7 +14302,7 @@
                 <a:ea typeface="Noto Sans CJK JP"/>
                 <a:cs typeface="Noto Sans"/>
               </a:rPr>
-              <a:t>BERT系は学習率0.00002、バッチ24、最大512トークン、8エポックで微調整した。長い入力は、文書・質問・候補のうち最長の列から切り詰める。</a:t>
+              <a:t>BERT系モデルを微調整して評価した。長い入力は、文書・質問・候補のうち最長の列から切り詰める。</a:t>
             </a:r>
           </a:p>
           <a:p>
@@ -15326,7 +14380,7 @@
                 <a:ea typeface="Noto Sans CJK JP"/>
                 <a:cs typeface="Noto Sans"/>
               </a:rPr>
-              <a:t>3. 評価と歴史的な性能</a:t>
+              <a:t>3. 正答率と構築時の性能</a:t>
             </a:r>
           </a:p>
         </p:txBody>
@@ -15361,7 +14415,7 @@
                 <a:spcPts val="0"/>
               </a:spcBef>
               <a:spcAft>
-                <a:spcPts val="400"/>
+                <a:spcPts val="140"/>
               </a:spcAft>
               <a:buNone/>
               <a:defRPr sz="810" b="0">
@@ -15380,25 +14434,19 @@
                 <a:ea typeface="Noto Sans CJK JP"/>
                 <a:cs typeface="Noto Sans"/>
               </a:rPr>
-              <a:t>[1] Sun, Yu, Yu &amp; Cardie (2020). Investigating Prior Knowledge for Challenging Chinese Machine Reading Comprehension. TACL 8:141–155.</a:t>
-            </a:r>
-          </a:p>
-          <a:p>
-            <a:pPr>
-              <a:lnSpc>
-                <a:spcPts val="940"/>
-              </a:lnSpc>
-              <a:spcAft>
-                <a:spcPts val="400"/>
-              </a:spcAft>
-              <a:buNone/>
-              <a:defRPr sz="810" b="0">
-                <a:solidFill>
-                  <a:srgbClr val="303437"/>
-                </a:solidFill>
-                <a:latin typeface="Noto Sans"/>
-              </a:defRPr>
-            </a:pPr>
+              <a:t>[1] Sun et al. (2020). Investigating Prior Knowledge for Challenging Chinese Machine Reading Comprehension. TACL.</a:t>
+            </a:r>
+            <a:r>
+              <a:rPr sz="810" b="0" lang="ja-JP" altLang="en-US">
+                <a:solidFill>
+                  <a:srgbClr val="626669"/>
+                </a:solidFill>
+                <a:latin typeface="Noto Sans"/>
+                <a:ea typeface="Noto Sans CJK JP"/>
+                <a:cs typeface="Noto Sans"/>
+              </a:rPr>
+              <a:t>  </a:t>
+            </a:r>
             <a:r>
               <a:rPr sz="810" b="0" lang="ja-JP" altLang="en-US">
                 <a:solidFill>
@@ -15523,7 +14571,7 @@
                 <a:ea typeface="Noto Sans CJK JP"/>
                 <a:cs typeface="Noto Sans"/>
               </a:rPr>
-              <a:t>3. 評価と歴史的な性能</a:t>
+              <a:t>3. 正答率と構築時の性能</a:t>
             </a:r>
           </a:p>
         </p:txBody>
@@ -15548,7 +14596,7 @@
       </p:graphicFrame>
       <p:sp>
         <p:nvSpPr>
-          <p:cNvPr id="6" name="sources"/>
+          <p:cNvPr id="5" name="sources"/>
           <p:cNvSpPr txBox="1"/>
           <p:nvPr/>
         </p:nvSpPr>
@@ -15576,7 +14624,7 @@
                 <a:spcPts val="0"/>
               </a:spcBef>
               <a:spcAft>
-                <a:spcPts val="400"/>
+                <a:spcPts val="140"/>
               </a:spcAft>
               <a:buNone/>
               <a:defRPr sz="810" b="0">
@@ -15595,25 +14643,19 @@
                 <a:ea typeface="Noto Sans CJK JP"/>
                 <a:cs typeface="Noto Sans"/>
               </a:rPr>
-              <a:t>[1] Sun, Yu, Yu &amp; Cardie (2020). Investigating Prior Knowledge for Challenging Chinese Machine Reading Comprehension. TACL 8:141–155.</a:t>
-            </a:r>
-          </a:p>
-          <a:p>
-            <a:pPr>
-              <a:lnSpc>
-                <a:spcPts val="940"/>
-              </a:lnSpc>
-              <a:spcAft>
-                <a:spcPts val="400"/>
-              </a:spcAft>
-              <a:buNone/>
-              <a:defRPr sz="810" b="0">
-                <a:solidFill>
-                  <a:srgbClr val="303437"/>
-                </a:solidFill>
-                <a:latin typeface="Noto Sans"/>
-              </a:defRPr>
-            </a:pPr>
+              <a:t>[1] Sun et al. (2020). Investigating Prior Knowledge for Challenging Chinese Machine Reading Comprehension. TACL.</a:t>
+            </a:r>
+            <a:r>
+              <a:rPr sz="810" b="0" lang="ja-JP" altLang="en-US">
+                <a:solidFill>
+                  <a:srgbClr val="626669"/>
+                </a:solidFill>
+                <a:latin typeface="Noto Sans"/>
+                <a:ea typeface="Noto Sans CJK JP"/>
+                <a:cs typeface="Noto Sans"/>
+              </a:rPr>
+              <a:t>  </a:t>
+            </a:r>
             <a:r>
               <a:rPr sz="810" b="0" lang="ja-JP" altLang="en-US">
                 <a:solidFill>
@@ -15690,7 +14732,7 @@
                 <a:ea typeface="Noto Sans CJK JP"/>
                 <a:cs typeface="Noto Sans"/>
               </a:rPr>
-              <a:t>人とモデルは、評価した集合を分けて読む</a:t>
+              <a:t>人は注釈付きテスト部分で、96.0％の正答率</a:t>
             </a:r>
           </a:p>
         </p:txBody>
@@ -15738,7 +14780,7 @@
                 <a:ea typeface="Noto Sans CJK JP"/>
                 <a:cs typeface="Noto Sans"/>
               </a:rPr>
-              <a:t>3. 評価と歴史的な性能</a:t>
+              <a:t>3. 正答率と構築時の性能</a:t>
             </a:r>
           </a:p>
         </p:txBody>
@@ -16234,7 +15276,7 @@
                           <a:ea typeface="Noto Sans CJK JP"/>
                           <a:cs typeface="Noto Sans"/>
                         </a:rPr>
-                        <a:t>人：注釈されたテスト部分</a:t>
+                        <a:t>人：テストの300問</a:t>
                       </a:r>
                     </a:p>
                   </a:txBody>
@@ -16472,7 +15514,7 @@
                 <a:ea typeface="Noto Sans CJK JP"/>
                 <a:cs typeface="Noto Sans"/>
               </a:rPr>
-              <a:t>人の値は全3,892問の実測ではない。モデル全体の値と、人が解いた注釈部分の値は母集団が異なる。</a:t>
+              <a:t>人の値は、知識注釈のあるテスト300問（Mixed・Dialogue各150問）で測ったもの。</a:t>
             </a:r>
           </a:p>
         </p:txBody>
@@ -16507,7 +15549,7 @@
                 <a:spcPts val="0"/>
               </a:spcBef>
               <a:spcAft>
-                <a:spcPts val="400"/>
+                <a:spcPts val="140"/>
               </a:spcAft>
               <a:buNone/>
               <a:defRPr sz="810" b="0">
@@ -16526,25 +15568,19 @@
                 <a:ea typeface="Noto Sans CJK JP"/>
                 <a:cs typeface="Noto Sans"/>
               </a:rPr>
-              <a:t>[1] Sun, Yu, Yu &amp; Cardie (2020). Investigating Prior Knowledge for Challenging Chinese Machine Reading Comprehension. TACL 8:141–155.</a:t>
-            </a:r>
-          </a:p>
-          <a:p>
-            <a:pPr>
-              <a:lnSpc>
-                <a:spcPts val="940"/>
-              </a:lnSpc>
-              <a:spcAft>
-                <a:spcPts val="400"/>
-              </a:spcAft>
-              <a:buNone/>
-              <a:defRPr sz="810" b="0">
-                <a:solidFill>
-                  <a:srgbClr val="303437"/>
-                </a:solidFill>
-                <a:latin typeface="Noto Sans"/>
-              </a:defRPr>
-            </a:pPr>
+              <a:t>[1] Sun et al. (2020). Investigating Prior Knowledge for Challenging Chinese Machine Reading Comprehension. TACL.</a:t>
+            </a:r>
+            <a:r>
+              <a:rPr sz="810" b="0" lang="ja-JP" altLang="en-US">
+                <a:solidFill>
+                  <a:srgbClr val="626669"/>
+                </a:solidFill>
+                <a:latin typeface="Noto Sans"/>
+                <a:ea typeface="Noto Sans CJK JP"/>
+                <a:cs typeface="Noto Sans"/>
+              </a:rPr>
+              <a:t>  </a:t>
+            </a:r>
             <a:r>
               <a:rPr sz="810" b="0" lang="ja-JP" altLang="en-US">
                 <a:solidFill>
@@ -16621,7 +15657,7 @@
                 <a:ea typeface="Noto Sans CJK JP"/>
                 <a:cs typeface="Noto Sans"/>
               </a:rPr>
-              <a:t>事前知識を使う読解に、研究上の余地を残す</a:t>
+              <a:t>事前知識の必要な問題に、モデルは苦戦する</a:t>
             </a:r>
           </a:p>
         </p:txBody>
@@ -16734,7 +15770,7 @@
                 <a:ea typeface="Noto Sans CJK JP"/>
                 <a:cs typeface="Noto Sans"/>
               </a:rPr>
-              <a:t>C³は、知識そのものを自由回答で説明する課題ではない。文書と候補を与えた状態で、知識を使い正しい選択をする能力を測る。</a:t>
+              <a:t>C³は、文書と候補を与えた状態で、知識を使って正しい選択をする能力を測る。</a:t>
             </a:r>
           </a:p>
         </p:txBody>
@@ -16782,7 +15818,7 @@
                 <a:ea typeface="Noto Sans CJK JP"/>
                 <a:cs typeface="Noto Sans"/>
               </a:rPr>
-              <a:t>3. 評価と歴史的な性能</a:t>
+              <a:t>3. 正答率と構築時の性能</a:t>
             </a:r>
           </a:p>
         </p:txBody>
@@ -16817,7 +15853,7 @@
                 <a:spcPts val="0"/>
               </a:spcBef>
               <a:spcAft>
-                <a:spcPts val="400"/>
+                <a:spcPts val="140"/>
               </a:spcAft>
               <a:buNone/>
               <a:defRPr sz="810" b="0">
@@ -16836,25 +15872,19 @@
                 <a:ea typeface="Noto Sans CJK JP"/>
                 <a:cs typeface="Noto Sans"/>
               </a:rPr>
-              <a:t>[1] Sun, Yu, Yu &amp; Cardie (2020). Investigating Prior Knowledge for Challenging Chinese Machine Reading Comprehension. TACL 8:141–155.</a:t>
-            </a:r>
-          </a:p>
-          <a:p>
-            <a:pPr>
-              <a:lnSpc>
-                <a:spcPts val="940"/>
-              </a:lnSpc>
-              <a:spcAft>
-                <a:spcPts val="400"/>
-              </a:spcAft>
-              <a:buNone/>
-              <a:defRPr sz="810" b="0">
-                <a:solidFill>
-                  <a:srgbClr val="303437"/>
-                </a:solidFill>
-                <a:latin typeface="Noto Sans"/>
-              </a:defRPr>
-            </a:pPr>
+              <a:t>[1] Sun et al. (2020). Investigating Prior Knowledge for Challenging Chinese Machine Reading Comprehension. TACL.</a:t>
+            </a:r>
+            <a:r>
+              <a:rPr sz="810" b="0" lang="ja-JP" altLang="en-US">
+                <a:solidFill>
+                  <a:srgbClr val="626669"/>
+                </a:solidFill>
+                <a:latin typeface="Noto Sans"/>
+                <a:ea typeface="Noto Sans CJK JP"/>
+                <a:cs typeface="Noto Sans"/>
+              </a:rPr>
+              <a:t>  </a:t>
+            </a:r>
             <a:r>
               <a:rPr sz="810" b="0" lang="ja-JP" altLang="en-US">
                 <a:solidFill>
@@ -16931,7 +15961,7 @@
                 <a:ea typeface="Noto Sans CJK JP"/>
                 <a:cs typeface="Noto Sans"/>
               </a:rPr>
-              <a:t>元データと、後続の評価を分ける</a:t>
+              <a:t>入手方法とCLUE・CLEVA</a:t>
             </a:r>
           </a:p>
         </p:txBody>
@@ -16979,7 +16009,7 @@
                 <a:ea typeface="Noto Sans CJK JP"/>
                 <a:cs typeface="Noto Sans"/>
               </a:rPr>
-              <a:t>4. CLUE・CLEVAでの利用</a:t>
+              <a:t>4. 入手方法とCLUE・CLEVA</a:t>
             </a:r>
           </a:p>
         </p:txBody>
@@ -17045,7 +16075,7 @@
                 <a:ea typeface="Noto Sans CJK JP"/>
                 <a:cs typeface="Noto Sans"/>
               </a:rPr>
-              <a:t>公開C³、CLUE、CLEVAの役割</a:t>
+              <a:t>C³とCLUEは、テストの正解公開が異なる</a:t>
             </a:r>
           </a:p>
         </p:txBody>
@@ -17093,7 +16123,7 @@
                 <a:ea typeface="Noto Sans CJK JP"/>
                 <a:cs typeface="Noto Sans"/>
               </a:rPr>
-              <a:t>4. CLUE・CLEVAでの利用</a:t>
+              <a:t>4. 入手方法とCLUE・CLEVA</a:t>
             </a:r>
           </a:p>
         </p:txBody>
@@ -17573,7 +16603,7 @@
                           <a:ea typeface="Noto Sans CJK JP"/>
                           <a:cs typeface="Noto Sans"/>
                         </a:rPr>
-                        <a:t>CLEVA v1</a:t>
+                        <a:t>CLEVA</a:t>
                       </a:r>
                     </a:p>
                   </a:txBody>
@@ -17658,415 +16688,6 @@
       </p:graphicFrame>
       <p:sp>
         <p:nvSpPr>
-          <p:cNvPr id="5" name="TextBox 4"/>
-          <p:cNvSpPr txBox="1"/>
-          <p:nvPr/>
-        </p:nvSpPr>
-        <p:spPr>
-          <a:xfrm>
-            <a:off x="594360" y="4157979"/>
-            <a:ext cx="7955279" cy="658368"/>
-          </a:xfrm>
-          <a:prstGeom prst="rect">
-            <a:avLst/>
-          </a:prstGeom>
-          <a:noFill/>
-        </p:spPr>
-        <p:txBody>
-          <a:bodyPr wrap="square" lIns="0" rIns="0" tIns="0" bIns="0">
-            <a:noAutofit/>
-          </a:bodyPr>
-          <a:lstStyle/>
-          <a:p>
-            <a:pPr algn="l">
-              <a:lnSpc>
-                <a:spcPts val="1568"/>
-              </a:lnSpc>
-              <a:spcBef>
-                <a:spcPts val="0"/>
-              </a:spcBef>
-              <a:spcAft>
-                <a:spcPts val="0"/>
-              </a:spcAft>
-              <a:buNone/>
-              <a:defRPr sz="1400" b="0">
-                <a:solidFill>
-                  <a:srgbClr val="303437"/>
-                </a:solidFill>
-                <a:latin typeface="Noto Sans"/>
-              </a:defRPr>
-            </a:pPr>
-            <a:r>
-              <a:rPr sz="1400" b="0" lang="ja-JP" altLang="en-US">
-                <a:solidFill>
-                  <a:srgbClr val="303437"/>
-                </a:solidFill>
-                <a:latin typeface="Noto Sans"/>
-                <a:ea typeface="Noto Sans CJK JP"/>
-                <a:cs typeface="Noto Sans"/>
-              </a:rPr>
-              <a:t>CLUEの新テストやCLEVAの採用部分を、元C³の全体と同一視しない。</a:t>
-            </a:r>
-          </a:p>
-        </p:txBody>
-      </p:sp>
-      <p:sp>
-        <p:nvSpPr>
-          <p:cNvPr id="6" name="sources"/>
-          <p:cNvSpPr txBox="1"/>
-          <p:nvPr/>
-        </p:nvSpPr>
-        <p:spPr>
-          <a:xfrm>
-            <a:off x="502920" y="4700016"/>
-            <a:ext cx="8183879" cy="530352"/>
-          </a:xfrm>
-          <a:prstGeom prst="rect">
-            <a:avLst/>
-          </a:prstGeom>
-          <a:noFill/>
-        </p:spPr>
-        <p:txBody>
-          <a:bodyPr wrap="square" lIns="0" rIns="0" tIns="0" bIns="0">
-            <a:noAutofit/>
-          </a:bodyPr>
-          <a:lstStyle/>
-          <a:p>
-            <a:pPr algn="l">
-              <a:lnSpc>
-                <a:spcPts val="940"/>
-              </a:lnSpc>
-              <a:spcBef>
-                <a:spcPts val="0"/>
-              </a:spcBef>
-              <a:spcAft>
-                <a:spcPts val="400"/>
-              </a:spcAft>
-              <a:buNone/>
-              <a:defRPr sz="810" b="0">
-                <a:solidFill>
-                  <a:srgbClr val="303437"/>
-                </a:solidFill>
-                <a:latin typeface="Noto Sans"/>
-              </a:defRPr>
-            </a:pPr>
-            <a:r>
-              <a:rPr sz="810" b="0" lang="ja-JP" altLang="en-US">
-                <a:solidFill>
-                  <a:srgbClr val="626669"/>
-                </a:solidFill>
-                <a:latin typeface="Noto Sans"/>
-                <a:ea typeface="Noto Sans CJK JP"/>
-                <a:cs typeface="Noto Sans"/>
-              </a:rPr>
-              <a:t>[1] CLUEbenchmark. C3 public data, CLUE 1.0 / 1.1.</a:t>
-            </a:r>
-            <a:r>
-              <a:rPr sz="810" b="0" lang="ja-JP" altLang="en-US">
-                <a:solidFill>
-                  <a:srgbClr val="626669"/>
-                </a:solidFill>
-                <a:latin typeface="Noto Sans"/>
-                <a:ea typeface="Noto Sans CJK JP"/>
-                <a:cs typeface="Noto Sans"/>
-              </a:rPr>
-              <a:t>  </a:t>
-            </a:r>
-            <a:r>
-              <a:rPr sz="810" b="0" lang="ja-JP" altLang="en-US">
-                <a:solidFill>
-                  <a:srgbClr val="626669"/>
-                </a:solidFill>
-                <a:latin typeface="Noto Sans"/>
-                <a:ea typeface="Noto Sans CJK JP"/>
-                <a:cs typeface="Noto Sans"/>
-                <a:hlinkClick r:id="rId2"/>
-              </a:rPr>
-              <a:t>https://storage.googleapis.com/cluebenchmark/tasks/c3_public.zip</a:t>
-            </a:r>
-          </a:p>
-          <a:p>
-            <a:pPr>
-              <a:lnSpc>
-                <a:spcPts val="940"/>
-              </a:lnSpc>
-              <a:spcAft>
-                <a:spcPts val="400"/>
-              </a:spcAft>
-              <a:buNone/>
-              <a:defRPr sz="810" b="0">
-                <a:solidFill>
-                  <a:srgbClr val="303437"/>
-                </a:solidFill>
-                <a:latin typeface="Noto Sans"/>
-              </a:defRPr>
-            </a:pPr>
-            <a:r>
-              <a:rPr sz="810" b="0" lang="ja-JP" altLang="en-US">
-                <a:solidFill>
-                  <a:srgbClr val="626669"/>
-                </a:solidFill>
-                <a:latin typeface="Noto Sans"/>
-                <a:ea typeface="Noto Sans CJK JP"/>
-                <a:cs typeface="Noto Sans"/>
-              </a:rPr>
-              <a:t>[2] Li et al. (2023). CLEVA: Chinese Language Models EVAluation Platform. EMNLP System Demonstrations.</a:t>
-            </a:r>
-            <a:r>
-              <a:rPr sz="810" b="0" lang="ja-JP" altLang="en-US">
-                <a:solidFill>
-                  <a:srgbClr val="626669"/>
-                </a:solidFill>
-                <a:latin typeface="Noto Sans"/>
-                <a:ea typeface="Noto Sans CJK JP"/>
-                <a:cs typeface="Noto Sans"/>
-              </a:rPr>
-              <a:t>  </a:t>
-            </a:r>
-            <a:r>
-              <a:rPr sz="810" b="0" lang="ja-JP" altLang="en-US">
-                <a:solidFill>
-                  <a:srgbClr val="626669"/>
-                </a:solidFill>
-                <a:latin typeface="Noto Sans"/>
-                <a:ea typeface="Noto Sans CJK JP"/>
-                <a:cs typeface="Noto Sans"/>
-                <a:hlinkClick r:id="rId3"/>
-              </a:rPr>
-              <a:t>https://aclanthology.org/2023.emnlp-demo.17/</a:t>
-            </a:r>
-          </a:p>
-        </p:txBody>
-      </p:sp>
-    </p:spTree>
-  </p:cSld>
-  <p:clrMapOvr>
-    <a:masterClrMapping/>
-  </p:clrMapOvr>
-</p:sld>
-</file>
-
-<file path=ppt/slides/slide29.xml><?xml version="1.0" encoding="utf-8"?>
-<p:sld xmlns:a="http://schemas.openxmlformats.org/drawingml/2006/main" xmlns:p="http://schemas.openxmlformats.org/presentationml/2006/main" xmlns:r="http://schemas.openxmlformats.org/officeDocument/2006/relationships">
-  <p:cSld>
-    <p:spTree>
-      <p:nvGrpSpPr>
-        <p:cNvPr id="1" name=""/>
-        <p:cNvGrpSpPr/>
-        <p:nvPr/>
-      </p:nvGrpSpPr>
-      <p:grpSpPr/>
-      <p:sp>
-        <p:nvSpPr>
-          <p:cNvPr id="2" name="Title 1"/>
-          <p:cNvSpPr>
-            <a:spLocks noGrp="1"/>
-          </p:cNvSpPr>
-          <p:nvPr>
-            <p:ph type="title"/>
-          </p:nvPr>
-        </p:nvSpPr>
-        <p:spPr>
-          <a:xfrm>
-            <a:off x="468172" y="650138"/>
-            <a:ext cx="8206740" cy="616305"/>
-          </a:xfrm>
-        </p:spPr>
-        <p:txBody>
-          <a:bodyPr wrap="square" lIns="0" rIns="0" tIns="0" bIns="0">
-            <a:noAutofit/>
-          </a:bodyPr>
-          <a:lstStyle/>
-          <a:p>
-            <a:pPr algn="l">
-              <a:lnSpc>
-                <a:spcPct val="110000"/>
-              </a:lnSpc>
-              <a:buNone/>
-              <a:defRPr sz="2800" b="0">
-                <a:solidFill>
-                  <a:srgbClr val="303437"/>
-                </a:solidFill>
-                <a:latin typeface="Noto Sans"/>
-              </a:defRPr>
-            </a:pPr>
-            <a:r>
-              <a:rPr sz="2800" b="1" lang="ja-JP" altLang="en-US">
-                <a:solidFill>
-                  <a:srgbClr val="303437"/>
-                </a:solidFill>
-                <a:latin typeface="Noto Sans"/>
-                <a:ea typeface="Noto Sans CJK JP"/>
-                <a:cs typeface="Noto Sans"/>
-              </a:rPr>
-              <a:t>CLUEのテスト更新は、別の問題集合</a:t>
-            </a:r>
-          </a:p>
-        </p:txBody>
-      </p:sp>
-      <p:sp>
-        <p:nvSpPr>
-          <p:cNvPr id="3" name="Text Placeholder 2"/>
-          <p:cNvSpPr>
-            <a:spLocks noGrp="1"/>
-          </p:cNvSpPr>
-          <p:nvPr>
-            <p:ph type="body" idx="1"/>
-          </p:nvPr>
-        </p:nvSpPr>
-        <p:spPr>
-          <a:xfrm>
-            <a:off x="594360" y="1463040"/>
-            <a:ext cx="7955279" cy="3044952"/>
-          </a:xfrm>
-        </p:spPr>
-        <p:txBody>
-          <a:bodyPr wrap="square" tIns="91440" bIns="91440">
-            <a:noAutofit/>
-          </a:bodyPr>
-          <a:lstStyle/>
-          <a:p>
-            <a:pPr marL="457200" indent="-355600">
-              <a:lnSpc>
-                <a:spcPts val="2320"/>
-              </a:lnSpc>
-              <a:spcAft>
-                <a:spcPts val="700"/>
-              </a:spcAft>
-              <a:buSzPct val="68205"/>
-              <a:buFont typeface="Noto Sans CJK JP"/>
-              <a:buChar char="●"/>
-              <a:defRPr sz="1950" b="0">
-                <a:solidFill>
-                  <a:srgbClr val="303437"/>
-                </a:solidFill>
-                <a:latin typeface="Noto Sans"/>
-              </a:defRPr>
-            </a:pPr>
-            <a:r>
-              <a:rPr sz="1950" b="0" lang="ja-JP" altLang="en-US">
-                <a:solidFill>
-                  <a:srgbClr val="303437"/>
-                </a:solidFill>
-                <a:latin typeface="Noto Sans"/>
-                <a:ea typeface="Noto Sans CJK JP"/>
-                <a:cs typeface="Noto Sans"/>
-              </a:rPr>
-              <a:t>CLUE配布ZIPの学習・開発4ファイルは、元C³の同じ4ファイルとバイト単位で一致する。</a:t>
-            </a:r>
-          </a:p>
-          <a:p>
-            <a:pPr marL="457200" indent="-355600">
-              <a:lnSpc>
-                <a:spcPts val="2320"/>
-              </a:lnSpc>
-              <a:spcAft>
-                <a:spcPts val="700"/>
-              </a:spcAft>
-              <a:buSzPct val="68205"/>
-              <a:buFont typeface="Noto Sans CJK JP"/>
-              <a:buChar char="●"/>
-              <a:defRPr sz="1950" b="0">
-                <a:solidFill>
-                  <a:srgbClr val="303437"/>
-                </a:solidFill>
-                <a:latin typeface="Noto Sans"/>
-              </a:defRPr>
-            </a:pPr>
-            <a:r>
-              <a:rPr sz="1950" b="0" lang="ja-JP" altLang="en-US">
-                <a:solidFill>
-                  <a:srgbClr val="303437"/>
-                </a:solidFill>
-                <a:latin typeface="Noto Sans"/>
-                <a:ea typeface="Noto Sans CJK JP"/>
-                <a:cs typeface="Noto Sans"/>
-              </a:rPr>
-              <a:t>test1.0は2,672文書・3,892問。文書・質問・候補を照合すると、元C³のテスト全問と一致する。正解欄は除かれ、提出用IDが付く。</a:t>
-            </a:r>
-          </a:p>
-          <a:p>
-            <a:pPr marL="457200" indent="-355600">
-              <a:lnSpc>
-                <a:spcPts val="2320"/>
-              </a:lnSpc>
-              <a:spcAft>
-                <a:spcPts val="0"/>
-              </a:spcAft>
-              <a:buSzPct val="68205"/>
-              <a:buFont typeface="Noto Sans CJK JP"/>
-              <a:buChar char="●"/>
-              <a:defRPr sz="1950" b="0">
-                <a:solidFill>
-                  <a:srgbClr val="303437"/>
-                </a:solidFill>
-                <a:latin typeface="Noto Sans"/>
-              </a:defRPr>
-            </a:pPr>
-            <a:r>
-              <a:rPr sz="1950" b="0" lang="ja-JP" altLang="en-US">
-                <a:solidFill>
-                  <a:srgbClr val="303437"/>
-                </a:solidFill>
-                <a:latin typeface="Noto Sans"/>
-                <a:ea typeface="Noto Sans CJK JP"/>
-                <a:cs typeface="Noto Sans"/>
-              </a:rPr>
-              <a:t>test1.1は1,080文書・1,625問。元C³全6ファイルとの同一問題は学習2問・テスト1問で、残り1,622問は一致しない。</a:t>
-            </a:r>
-          </a:p>
-        </p:txBody>
-      </p:sp>
-      <p:sp>
-        <p:nvSpPr>
-          <p:cNvPr id="4" name="Title 3"/>
-          <p:cNvSpPr>
-            <a:spLocks noGrp="1"/>
-          </p:cNvSpPr>
-          <p:nvPr>
-            <p:ph type="title" idx="2"/>
-          </p:nvPr>
-        </p:nvSpPr>
-        <p:spPr>
-          <a:xfrm>
-            <a:off x="75895" y="0"/>
-            <a:ext cx="8115300" cy="480060"/>
-          </a:xfrm>
-        </p:spPr>
-        <p:txBody>
-          <a:bodyPr wrap="square" lIns="0" rIns="0" tIns="0" bIns="0" anchor="ctr">
-            <a:noAutofit/>
-          </a:bodyPr>
-          <a:lstStyle/>
-          <a:p>
-            <a:pPr algn="l">
-              <a:lnSpc>
-                <a:spcPct val="110000"/>
-              </a:lnSpc>
-              <a:buNone/>
-              <a:defRPr sz="1400" b="0">
-                <a:solidFill>
-                  <a:srgbClr val="303437"/>
-                </a:solidFill>
-                <a:latin typeface="Noto Sans"/>
-              </a:defRPr>
-            </a:pPr>
-            <a:r>
-              <a:rPr sz="1400" b="1" lang="ja-JP" altLang="en-US">
-                <a:solidFill>
-                  <a:srgbClr val="FFFEF8"/>
-                </a:solidFill>
-                <a:latin typeface="Noto Sans"/>
-                <a:ea typeface="Noto Sans CJK JP"/>
-                <a:cs typeface="Noto Sans"/>
-              </a:rPr>
-              <a:t>4. CLUE・CLEVAでの利用</a:t>
-            </a:r>
-          </a:p>
-        </p:txBody>
-      </p:sp>
-      <p:sp>
-        <p:nvSpPr>
           <p:cNvPr id="5" name="sources"/>
           <p:cNvSpPr txBox="1"/>
           <p:nvPr/>
@@ -18095,7 +16716,7 @@
                 <a:spcPts val="0"/>
               </a:spcBef>
               <a:spcAft>
-                <a:spcPts val="400"/>
+                <a:spcPts val="140"/>
               </a:spcAft>
               <a:buNone/>
               <a:defRPr sz="810" b="0">
@@ -18114,7 +16735,7 @@
                 <a:ea typeface="Noto Sans CJK JP"/>
                 <a:cs typeface="Noto Sans"/>
               </a:rPr>
-              <a:t>[1] CLUEbenchmark. C3 public data, CLUE 1.0 / 1.1.</a:t>
+              <a:t>[1] CLUEbenchmark. C3 公開データ。</a:t>
             </a:r>
             <a:r>
               <a:rPr sz="810" b="0" lang="ja-JP" altLang="en-US">
@@ -18138,6 +16759,57 @@
                 <a:hlinkClick r:id="rId2"/>
               </a:rPr>
               <a:t>https://storage.googleapis.com/cluebenchmark/tasks/c3_public.zip</a:t>
+            </a:r>
+          </a:p>
+          <a:p>
+            <a:pPr>
+              <a:lnSpc>
+                <a:spcPts val="940"/>
+              </a:lnSpc>
+              <a:spcAft>
+                <a:spcPts val="140"/>
+              </a:spcAft>
+              <a:buNone/>
+              <a:defRPr sz="810" b="0">
+                <a:solidFill>
+                  <a:srgbClr val="303437"/>
+                </a:solidFill>
+                <a:latin typeface="Noto Sans"/>
+              </a:defRPr>
+            </a:pPr>
+            <a:r>
+              <a:rPr sz="810" b="0" lang="ja-JP" altLang="en-US">
+                <a:solidFill>
+                  <a:srgbClr val="626669"/>
+                </a:solidFill>
+                <a:latin typeface="Noto Sans"/>
+                <a:ea typeface="Noto Sans CJK JP"/>
+                <a:cs typeface="Noto Sans"/>
+              </a:rPr>
+              <a:t>[2] Li et al. (2023). CLEVA. EMNLP System Demonstrations.</a:t>
+            </a:r>
+            <a:r>
+              <a:rPr sz="810" b="0" lang="ja-JP" altLang="en-US">
+                <a:solidFill>
+                  <a:srgbClr val="626669"/>
+                </a:solidFill>
+                <a:latin typeface="Noto Sans"/>
+                <a:ea typeface="Noto Sans CJK JP"/>
+                <a:cs typeface="Noto Sans"/>
+              </a:rPr>
+              <a:t>  </a:t>
+            </a:r>
+            <a:r>
+              <a:rPr sz="810" b="0" lang="ja-JP" altLang="en-US">
+                <a:solidFill>
+                  <a:srgbClr val="626669"/>
+                </a:solidFill>
+                <a:latin typeface="Noto Sans"/>
+                <a:ea typeface="Noto Sans CJK JP"/>
+                <a:cs typeface="Noto Sans"/>
+                <a:hlinkClick r:id="rId3"/>
+              </a:rPr>
+              <a:t>https://aclanthology.org/2023.emnlp-demo.17/</a:t>
             </a:r>
           </a:p>
         </p:txBody>
@@ -18316,7 +16988,7 @@
                 <a:ea typeface="Noto Sans CJK JP"/>
                 <a:cs typeface="Noto Sans"/>
               </a:rPr>
-              <a:t>評価と歴史的な性能</a:t>
+              <a:t>正答率と構築時の性能</a:t>
             </a:r>
           </a:p>
           <a:p>
@@ -18346,7 +17018,7 @@
                 <a:ea typeface="Noto Sans CJK JP"/>
                 <a:cs typeface="Noto Sans"/>
               </a:rPr>
-              <a:t>CLUE・CLEVAでの利用</a:t>
+              <a:t>入手方法とCLUE・CLEVA</a:t>
             </a:r>
           </a:p>
         </p:txBody>
@@ -18513,7 +17185,7 @@
                 <a:ea typeface="Noto Sans CJK JP"/>
                 <a:cs typeface="Noto Sans"/>
               </a:rPr>
-              <a:t>CLEVAは2023年の中国語言語モデル評価基盤。読解にはC³から採った選択式問題を使い、正答率で評価すると説明する。</a:t>
+              <a:t>CLEVAは2023年に発表された中国語モデルの評価基盤で、読解課題にはC³から採った選択式問題を使い、正答率で評価する。</a:t>
             </a:r>
           </a:p>
           <a:p>
@@ -18543,7 +17215,7 @@
                 <a:ea typeface="Noto Sans CJK JP"/>
                 <a:cs typeface="Noto Sans"/>
               </a:rPr>
-              <a:t>HELM v0.4.0の実装ではreading_comprehensionのデータと、train/test・prompts.json・infer_params.jsonを読み込む。</a:t>
+              <a:t>公開実装は、文書・質問・全選択肢をテンプレートで整形し、生成または候補の比較によって解答する。</a:t>
             </a:r>
           </a:p>
           <a:p>
@@ -18573,7 +17245,7 @@
                 <a:ea typeface="Noto Sans CJK JP"/>
                 <a:cs typeface="Noto Sans"/>
               </a:rPr>
-              <a:t>同梱設定にはprompt_id 0〜5の6通りがある。Classic v0.4.0の公開run索引では、CLEVAを名に含む実行は0件。</a:t>
+              <a:t>CLEVAで使われた全問題や抽出範囲、詳しい推論条件は公開説明から確認できない。</a:t>
             </a:r>
           </a:p>
         </p:txBody>
@@ -18621,7 +17293,7 @@
                 <a:ea typeface="Noto Sans CJK JP"/>
                 <a:cs typeface="Noto Sans"/>
               </a:rPr>
-              <a:t>4. CLUE・CLEVAでの利用</a:t>
+              <a:t>4. 入手方法とCLUE・CLEVA</a:t>
             </a:r>
           </a:p>
         </p:txBody>
@@ -18656,7 +17328,7 @@
                 <a:spcPts val="0"/>
               </a:spcBef>
               <a:spcAft>
-                <a:spcPts val="400"/>
+                <a:spcPts val="140"/>
               </a:spcAft>
               <a:buNone/>
               <a:defRPr sz="810" b="0">
@@ -18675,7 +17347,7 @@
                 <a:ea typeface="Noto Sans CJK JP"/>
                 <a:cs typeface="Noto Sans"/>
               </a:rPr>
-              <a:t>[1] Li et al. (2023). CLEVA: Chinese Language Models EVAluation Platform. EMNLP System Demonstrations.</a:t>
+              <a:t>[1] Li et al. (2023). CLEVA. EMNLP System Demonstrations.</a:t>
             </a:r>
             <a:r>
               <a:rPr sz="810" b="0" lang="ja-JP" altLang="en-US">
@@ -18707,7 +17379,7 @@
                 <a:spcPts val="940"/>
               </a:lnSpc>
               <a:spcAft>
-                <a:spcPts val="400"/>
+                <a:spcPts val="140"/>
               </a:spcAft>
               <a:buNone/>
               <a:defRPr sz="810" b="0">
@@ -18726,7 +17398,7 @@
                 <a:ea typeface="Noto Sans CJK JP"/>
                 <a:cs typeface="Noto Sans"/>
               </a:rPr>
-              <a:t>[2] Stanford CRFM. CLEVAReadingComprehensionScenario / Converter. HELM v0.4.0.</a:t>
+              <a:t>[2] Stanford CRFM. HELM: CLEVAReadingComprehensionScenario.</a:t>
             </a:r>
           </a:p>
           <a:p>
@@ -18734,9 +17406,6 @@
               <a:lnSpc>
                 <a:spcPts val="940"/>
               </a:lnSpc>
-              <a:spcAft>
-                <a:spcPts val="400"/>
-              </a:spcAft>
               <a:buNone/>
               <a:defRPr sz="810" b="0">
                 <a:solidFill>
@@ -18821,7 +17490,7 @@
                 <a:ea typeface="Noto Sans CJK JP"/>
                 <a:cs typeface="Noto Sans"/>
               </a:rPr>
-              <a:t>利用する版を決め、権利条件を先に読む</a:t>
+              <a:t>公式データと知識注釈をJSONで取得する</a:t>
             </a:r>
           </a:p>
         </p:txBody>
@@ -18874,7 +17543,7 @@
                 <a:ea typeface="Noto Sans CJK JP"/>
                 <a:cs typeface="Noto Sans"/>
               </a:rPr>
-              <a:t>元の公式repoでは、6データファイルと4注釈ファイルを公開している。文書ID、質問、候補、正解文字列を保持して取得できる。</a:t>
+              <a:t>公式リポジトリでは、文書・質問・候補・正解を含むJSONと、600問の知識注釈が公開されている。</a:t>
             </a:r>
           </a:p>
           <a:p>
@@ -18904,7 +17573,7 @@
                 <a:ea typeface="Noto Sans CJK JP"/>
                 <a:cs typeface="Noto Sans"/>
               </a:rPr>
-              <a:t>license.txtは「非商用の研究目的のみ」と定める。元の試験問題が公開されていることと、利用条件が無制限であることは別である。</a:t>
+              <a:t>各問のanswerには、choiceに並んだ候補のうち正解の文字列が入る。正答率の評価に加え、知識注釈を使った問題種別の分析にも使える。</a:t>
             </a:r>
           </a:p>
           <a:p>
@@ -18934,7 +17603,7 @@
                 <a:ea typeface="Noto Sans CJK JP"/>
                 <a:cs typeface="Noto Sans"/>
               </a:rPr>
-              <a:t>公開資料は、読解の入力、必要な知識、歴史的な比較を追う入口になる。後続利用では分割・プロンプト・評価条件も合わせて記録する。</a:t>
+              <a:t>license.txtに記載された利用条件は「非商用の研究目的のみ」である。</a:t>
             </a:r>
           </a:p>
         </p:txBody>
@@ -18982,7 +17651,7 @@
                 <a:ea typeface="Noto Sans CJK JP"/>
                 <a:cs typeface="Noto Sans"/>
               </a:rPr>
-              <a:t>4. CLUE・CLEVAでの利用</a:t>
+              <a:t>4. 入手方法とCLUE・CLEVA</a:t>
             </a:r>
           </a:p>
         </p:txBody>
@@ -19017,7 +17686,7 @@
                 <a:spcPts val="0"/>
               </a:spcBef>
               <a:spcAft>
-                <a:spcPts val="400"/>
+                <a:spcPts val="140"/>
               </a:spcAft>
               <a:buNone/>
               <a:defRPr sz="810" b="0">
@@ -19036,7 +17705,7 @@
                 <a:ea typeface="Noto Sans CJK JP"/>
                 <a:cs typeface="Noto Sans"/>
               </a:rPr>
-              <a:t>[1] Sun et al. C³ official repository. commit 1f41682e.</a:t>
+              <a:t>[1] Sun et al. C³ 公式データ・実装。</a:t>
             </a:r>
             <a:r>
               <a:rPr sz="810" b="0" lang="ja-JP" altLang="en-US">
@@ -19068,7 +17737,7 @@
                 <a:spcPts val="940"/>
               </a:lnSpc>
               <a:spcAft>
-                <a:spcPts val="400"/>
+                <a:spcPts val="140"/>
               </a:spcAft>
               <a:buNone/>
               <a:defRPr sz="810" b="0">
@@ -19087,7 +17756,7 @@
                 <a:ea typeface="Noto Sans CJK JP"/>
                 <a:cs typeface="Noto Sans"/>
               </a:rPr>
-              <a:t>[2] Sun et al. C³ license.txt. Non-commercial research purpose only.</a:t>
+              <a:t>[2] Sun et al. C³ 利用条件。</a:t>
             </a:r>
             <a:r>
               <a:rPr sz="810" b="0" lang="ja-JP" altLang="en-US">
@@ -19108,9 +17777,9 @@
                 <a:latin typeface="Noto Sans"/>
                 <a:ea typeface="Noto Sans CJK JP"/>
                 <a:cs typeface="Noto Sans"/>
-                <a:hlinkClick r:id="rId3"/>
-              </a:rPr>
-              <a:t>https://github.com/nlpdata/c3/blob/1f41682ebb684d63afe7c583c8f38e137fc8a826/license.txt</a:t>
+                <a:hlinkClick r:id="rId4"/>
+              </a:rPr>
+              <a:t>https://github.com/nlpdata/c3/blob/master/license.txt</a:t>
             </a:r>
           </a:p>
         </p:txBody>
@@ -19262,36 +17931,6 @@
               <a:t>語句照合だけでなく、言い換え・場面・因果・計算などが必要になる。600問の知識注釈が、その性質を具体的に示す。</a:t>
             </a:r>
           </a:p>
-          <a:p>
-            <a:pPr marL="457200" indent="-355600">
-              <a:lnSpc>
-                <a:spcPts val="2379"/>
-              </a:lnSpc>
-              <a:spcAft>
-                <a:spcPts val="0"/>
-              </a:spcAft>
-              <a:buSzPct val="66500"/>
-              <a:buFont typeface="Noto Sans CJK JP"/>
-              <a:buChar char="●"/>
-              <a:defRPr sz="2000" b="0">
-                <a:solidFill>
-                  <a:srgbClr val="303437"/>
-                </a:solidFill>
-                <a:latin typeface="Noto Sans"/>
-              </a:defRPr>
-            </a:pPr>
-            <a:r>
-              <a:rPr sz="2000" b="0" lang="ja-JP" altLang="en-US">
-                <a:solidFill>
-                  <a:srgbClr val="303437"/>
-                </a:solidFill>
-                <a:latin typeface="Noto Sans"/>
-                <a:ea typeface="Noto Sans CJK JP"/>
-                <a:cs typeface="Noto Sans"/>
-              </a:rPr>
-              <a:t>構築時の性能、CLUEのテスト更新、CLEVAの採用部分を分けると、何をどの条件で比較しているのかが明確になる。</a:t>
-            </a:r>
-          </a:p>
         </p:txBody>
       </p:sp>
       <p:sp>
@@ -19337,7 +17976,7 @@
                 <a:ea typeface="Noto Sans CJK JP"/>
                 <a:cs typeface="Noto Sans"/>
               </a:rPr>
-              <a:t>4. CLUE・CLEVAでの利用</a:t>
+              <a:t>4. 入手方法とCLUE・CLEVA</a:t>
             </a:r>
           </a:p>
         </p:txBody>
@@ -19372,7 +18011,7 @@
                 <a:spcPts val="0"/>
               </a:spcBef>
               <a:spcAft>
-                <a:spcPts val="400"/>
+                <a:spcPts val="140"/>
               </a:spcAft>
               <a:buNone/>
               <a:defRPr sz="810" b="0">
@@ -19391,25 +18030,19 @@
                 <a:ea typeface="Noto Sans CJK JP"/>
                 <a:cs typeface="Noto Sans"/>
               </a:rPr>
-              <a:t>[1] Sun, Yu, Yu &amp; Cardie (2020). Investigating Prior Knowledge for Challenging Chinese Machine Reading Comprehension. TACL 8:141–155.</a:t>
-            </a:r>
-          </a:p>
-          <a:p>
-            <a:pPr>
-              <a:lnSpc>
-                <a:spcPts val="940"/>
-              </a:lnSpc>
-              <a:spcAft>
-                <a:spcPts val="400"/>
-              </a:spcAft>
-              <a:buNone/>
-              <a:defRPr sz="810" b="0">
-                <a:solidFill>
-                  <a:srgbClr val="303437"/>
-                </a:solidFill>
-                <a:latin typeface="Noto Sans"/>
-              </a:defRPr>
-            </a:pPr>
+              <a:t>[1] Sun et al. (2020). Investigating Prior Knowledge for Challenging Chinese Machine Reading Comprehension. TACL.</a:t>
+            </a:r>
+            <a:r>
+              <a:rPr sz="810" b="0" lang="ja-JP" altLang="en-US">
+                <a:solidFill>
+                  <a:srgbClr val="626669"/>
+                </a:solidFill>
+                <a:latin typeface="Noto Sans"/>
+                <a:ea typeface="Noto Sans CJK JP"/>
+                <a:cs typeface="Noto Sans"/>
+              </a:rPr>
+              <a:t>  </a:t>
+            </a:r>
             <a:r>
               <a:rPr sz="810" b="0" lang="ja-JP" altLang="en-US">
                 <a:solidFill>
@@ -19456,11 +18089,11 @@
         <p:spPr>
           <a:xfrm>
             <a:off x="548640" y="2484835"/>
-            <a:ext cx="8046720" cy="585216"/>
+            <a:ext cx="8046720" cy="686816"/>
           </a:xfrm>
         </p:spPr>
         <p:txBody>
-          <a:bodyPr wrap="square" lIns="0" rIns="0" tIns="0" bIns="0" anchor="ctr">
+          <a:bodyPr wrap="square" lIns="0" rIns="0" tIns="0" bIns="101600" anchor="ctr">
             <a:noAutofit/>
           </a:bodyPr>
           <a:lstStyle/>
@@ -19683,7 +18316,7 @@
                 <a:ea typeface="Noto Sans CJK JP"/>
                 <a:cs typeface="Noto Sans"/>
               </a:rPr>
-              <a:t>版・原位置・再現</a:t>
+              <a:t>データの読み方</a:t>
             </a:r>
           </a:p>
           <a:p>
@@ -19990,60 +18623,6 @@
                 <a:cs typeface="Noto Sans"/>
               </a:rPr>
               <a:t>Appendix: 1. 追加の公開実例</a:t>
-            </a:r>
-          </a:p>
-        </p:txBody>
-      </p:sp>
-      <p:sp>
-        <p:nvSpPr>
-          <p:cNvPr id="4" name="TextBox 3"/>
-          <p:cNvSpPr txBox="1"/>
-          <p:nvPr/>
-        </p:nvSpPr>
-        <p:spPr>
-          <a:xfrm>
-            <a:off x="548640" y="1271016"/>
-            <a:ext cx="8046720" cy="201168"/>
-          </a:xfrm>
-          <a:prstGeom prst="rect">
-            <a:avLst/>
-          </a:prstGeom>
-          <a:noFill/>
-        </p:spPr>
-        <p:txBody>
-          <a:bodyPr wrap="square" lIns="0" rIns="0" tIns="0" bIns="0">
-            <a:noAutofit/>
-          </a:bodyPr>
-          <a:lstStyle/>
-          <a:p>
-            <a:pPr algn="l">
-              <a:lnSpc>
-                <a:spcPts val="1287"/>
-              </a:lnSpc>
-              <a:spcBef>
-                <a:spcPts val="0"/>
-              </a:spcBef>
-              <a:spcAft>
-                <a:spcPts val="0"/>
-              </a:spcAft>
-              <a:buNone/>
-              <a:defRPr sz="1100" b="0">
-                <a:solidFill>
-                  <a:srgbClr val="303437"/>
-                </a:solidFill>
-                <a:latin typeface="Noto Sans"/>
-              </a:defRPr>
-            </a:pPr>
-            <a:r>
-              <a:rPr sz="1100" b="0" lang="ja-JP" altLang="en-US">
-                <a:solidFill>
-                  <a:srgbClr val="626669"/>
-                </a:solidFill>
-                <a:latin typeface="Noto Sans"/>
-                <a:ea typeface="Noto Sans CJK JP"/>
-                <a:cs typeface="Noto Sans"/>
-              </a:rPr>
-              <a:t>C³-Dialogue / dev / ID 11-30 / 質問1</a:t>
             </a:r>
           </a:p>
         </p:txBody>
@@ -20640,7 +19219,7 @@
                 <a:ea typeface="Noto Sans CJK JP"/>
                 <a:cs typeface="Noto Sans"/>
               </a:rPr>
-              <a:t>女：承知しました。遅くとも7時までのお取り置きですので、早めにお越しください。</a:t>
+              <a:t>女：承知しました。お席を確保できるのは7時までです。早めにお越しください。</a:t>
             </a:r>
           </a:p>
           <a:p>
@@ -20884,7 +19463,7 @@
                 <a:spcPts val="0"/>
               </a:spcBef>
               <a:spcAft>
-                <a:spcPts val="400"/>
+                <a:spcPts val="140"/>
               </a:spcAft>
               <a:buNone/>
               <a:defRPr sz="810" b="0">
@@ -20903,7 +19482,7 @@
                 <a:ea typeface="Noto Sans CJK JP"/>
                 <a:cs typeface="Noto Sans"/>
               </a:rPr>
-              <a:t>[1] Sun et al. C³-D / dev / 11-30 / question 1.</a:t>
+              <a:t>[1] Sun et al. C³ データセット。</a:t>
             </a:r>
             <a:r>
               <a:rPr sz="810" b="0" lang="ja-JP" altLang="en-US">
@@ -20924,9 +19503,9 @@
                 <a:latin typeface="Noto Sans"/>
                 <a:ea typeface="Noto Sans CJK JP"/>
                 <a:cs typeface="Noto Sans"/>
-                <a:hlinkClick r:id="rId2"/>
-              </a:rPr>
-              <a:t>https://github.com/nlpdata/c3/blob/1f41682ebb684d63afe7c583c8f38e137fc8a826/data/c3-d-dev.json</a:t>
+                <a:hlinkClick r:id="rId3"/>
+              </a:rPr>
+              <a:t>https://github.com/nlpdata/c3/tree/master/data</a:t>
             </a:r>
           </a:p>
         </p:txBody>
@@ -21041,60 +19620,6 @@
                 <a:cs typeface="Noto Sans"/>
               </a:rPr>
               <a:t>Appendix: 1. 追加の公開実例</a:t>
-            </a:r>
-          </a:p>
-        </p:txBody>
-      </p:sp>
-      <p:sp>
-        <p:nvSpPr>
-          <p:cNvPr id="4" name="TextBox 3"/>
-          <p:cNvSpPr txBox="1"/>
-          <p:nvPr/>
-        </p:nvSpPr>
-        <p:spPr>
-          <a:xfrm>
-            <a:off x="548640" y="1271016"/>
-            <a:ext cx="8046720" cy="201168"/>
-          </a:xfrm>
-          <a:prstGeom prst="rect">
-            <a:avLst/>
-          </a:prstGeom>
-          <a:noFill/>
-        </p:spPr>
-        <p:txBody>
-          <a:bodyPr wrap="square" lIns="0" rIns="0" tIns="0" bIns="0">
-            <a:noAutofit/>
-          </a:bodyPr>
-          <a:lstStyle/>
-          <a:p>
-            <a:pPr algn="l">
-              <a:lnSpc>
-                <a:spcPts val="1287"/>
-              </a:lnSpc>
-              <a:spcBef>
-                <a:spcPts val="0"/>
-              </a:spcBef>
-              <a:spcAft>
-                <a:spcPts val="0"/>
-              </a:spcAft>
-              <a:buNone/>
-              <a:defRPr sz="1100" b="0">
-                <a:solidFill>
-                  <a:srgbClr val="303437"/>
-                </a:solidFill>
-                <a:latin typeface="Noto Sans"/>
-              </a:defRPr>
-            </a:pPr>
-            <a:r>
-              <a:rPr sz="1100" b="0" lang="ja-JP" altLang="en-US">
-                <a:solidFill>
-                  <a:srgbClr val="626669"/>
-                </a:solidFill>
-                <a:latin typeface="Noto Sans"/>
-                <a:ea typeface="Noto Sans CJK JP"/>
-                <a:cs typeface="Noto Sans"/>
-              </a:rPr>
-              <a:t>C³-Dialogue / dev / ID 11-57 / 質問1</a:t>
             </a:r>
           </a:p>
         </p:txBody>
@@ -21559,7 +20084,7 @@
                 <a:spcPts val="0"/>
               </a:spcBef>
               <a:spcAft>
-                <a:spcPts val="400"/>
+                <a:spcPts val="140"/>
               </a:spcAft>
               <a:buNone/>
               <a:defRPr sz="810" b="0">
@@ -21578,7 +20103,7 @@
                 <a:ea typeface="Noto Sans CJK JP"/>
                 <a:cs typeface="Noto Sans"/>
               </a:rPr>
-              <a:t>[1] Sun et al. C³-D / dev / 11-57 / question 1.</a:t>
+              <a:t>[1] Sun et al. C³ データセット。</a:t>
             </a:r>
             <a:r>
               <a:rPr sz="810" b="0" lang="ja-JP" altLang="en-US">
@@ -21599,9 +20124,9 @@
                 <a:latin typeface="Noto Sans"/>
                 <a:ea typeface="Noto Sans CJK JP"/>
                 <a:cs typeface="Noto Sans"/>
-                <a:hlinkClick r:id="rId2"/>
-              </a:rPr>
-              <a:t>https://github.com/nlpdata/c3/blob/1f41682ebb684d63afe7c583c8f38e137fc8a826/data/c3-d-dev.json</a:t>
+                <a:hlinkClick r:id="rId3"/>
+              </a:rPr>
+              <a:t>https://github.com/nlpdata/c3/tree/master/data</a:t>
             </a:r>
           </a:p>
         </p:txBody>
@@ -21716,60 +20241,6 @@
                 <a:cs typeface="Noto Sans"/>
               </a:rPr>
               <a:t>Appendix: 1. 追加の公開実例</a:t>
-            </a:r>
-          </a:p>
-        </p:txBody>
-      </p:sp>
-      <p:sp>
-        <p:nvSpPr>
-          <p:cNvPr id="4" name="TextBox 3"/>
-          <p:cNvSpPr txBox="1"/>
-          <p:nvPr/>
-        </p:nvSpPr>
-        <p:spPr>
-          <a:xfrm>
-            <a:off x="548640" y="1271016"/>
-            <a:ext cx="8046720" cy="201168"/>
-          </a:xfrm>
-          <a:prstGeom prst="rect">
-            <a:avLst/>
-          </a:prstGeom>
-          <a:noFill/>
-        </p:spPr>
-        <p:txBody>
-          <a:bodyPr wrap="square" lIns="0" rIns="0" tIns="0" bIns="0">
-            <a:noAutofit/>
-          </a:bodyPr>
-          <a:lstStyle/>
-          <a:p>
-            <a:pPr algn="l">
-              <a:lnSpc>
-                <a:spcPts val="1287"/>
-              </a:lnSpc>
-              <a:spcBef>
-                <a:spcPts val="0"/>
-              </a:spcBef>
-              <a:spcAft>
-                <a:spcPts val="0"/>
-              </a:spcAft>
-              <a:buNone/>
-              <a:defRPr sz="1100" b="0">
-                <a:solidFill>
-                  <a:srgbClr val="303437"/>
-                </a:solidFill>
-                <a:latin typeface="Noto Sans"/>
-              </a:defRPr>
-            </a:pPr>
-            <a:r>
-              <a:rPr sz="1100" b="0" lang="ja-JP" altLang="en-US">
-                <a:solidFill>
-                  <a:srgbClr val="626669"/>
-                </a:solidFill>
-                <a:latin typeface="Noto Sans"/>
-                <a:ea typeface="Noto Sans CJK JP"/>
-                <a:cs typeface="Noto Sans"/>
-              </a:rPr>
-              <a:t>C³-Dialogue / dev / ID 11-57 / 質問1</a:t>
             </a:r>
           </a:p>
         </p:txBody>
@@ -22234,7 +20705,7 @@
                 <a:spcPts val="0"/>
               </a:spcBef>
               <a:spcAft>
-                <a:spcPts val="400"/>
+                <a:spcPts val="140"/>
               </a:spcAft>
               <a:buNone/>
               <a:defRPr sz="810" b="0">
@@ -22253,7 +20724,7 @@
                 <a:ea typeface="Noto Sans CJK JP"/>
                 <a:cs typeface="Noto Sans"/>
               </a:rPr>
-              <a:t>[1] Sun et al. C³-D / dev / 11-57 / question 1.</a:t>
+              <a:t>[1] Sun et al. C³ データセット。</a:t>
             </a:r>
             <a:r>
               <a:rPr sz="810" b="0" lang="ja-JP" altLang="en-US">
@@ -22274,9 +20745,9 @@
                 <a:latin typeface="Noto Sans"/>
                 <a:ea typeface="Noto Sans CJK JP"/>
                 <a:cs typeface="Noto Sans"/>
-                <a:hlinkClick r:id="rId2"/>
-              </a:rPr>
-              <a:t>https://github.com/nlpdata/c3/blob/1f41682ebb684d63afe7c583c8f38e137fc8a826/data/c3-d-dev.json</a:t>
+                <a:hlinkClick r:id="rId3"/>
+              </a:rPr>
+              <a:t>https://github.com/nlpdata/c3/tree/master/data</a:t>
             </a:r>
           </a:p>
         </p:txBody>
@@ -22391,60 +20862,6 @@
                 <a:cs typeface="Noto Sans"/>
               </a:rPr>
               <a:t>Appendix: 1. 追加の公開実例</a:t>
-            </a:r>
-          </a:p>
-        </p:txBody>
-      </p:sp>
-      <p:sp>
-        <p:nvSpPr>
-          <p:cNvPr id="4" name="TextBox 3"/>
-          <p:cNvSpPr txBox="1"/>
-          <p:nvPr/>
-        </p:nvSpPr>
-        <p:spPr>
-          <a:xfrm>
-            <a:off x="548640" y="1271016"/>
-            <a:ext cx="8046720" cy="201168"/>
-          </a:xfrm>
-          <a:prstGeom prst="rect">
-            <a:avLst/>
-          </a:prstGeom>
-          <a:noFill/>
-        </p:spPr>
-        <p:txBody>
-          <a:bodyPr wrap="square" lIns="0" rIns="0" tIns="0" bIns="0">
-            <a:noAutofit/>
-          </a:bodyPr>
-          <a:lstStyle/>
-          <a:p>
-            <a:pPr algn="l">
-              <a:lnSpc>
-                <a:spcPts val="1287"/>
-              </a:lnSpc>
-              <a:spcBef>
-                <a:spcPts val="0"/>
-              </a:spcBef>
-              <a:spcAft>
-                <a:spcPts val="0"/>
-              </a:spcAft>
-              <a:buNone/>
-              <a:defRPr sz="1100" b="0">
-                <a:solidFill>
-                  <a:srgbClr val="303437"/>
-                </a:solidFill>
-                <a:latin typeface="Noto Sans"/>
-              </a:defRPr>
-            </a:pPr>
-            <a:r>
-              <a:rPr sz="1100" b="0" lang="ja-JP" altLang="en-US">
-                <a:solidFill>
-                  <a:srgbClr val="626669"/>
-                </a:solidFill>
-                <a:latin typeface="Noto Sans"/>
-                <a:ea typeface="Noto Sans CJK JP"/>
-                <a:cs typeface="Noto Sans"/>
-              </a:rPr>
-              <a:t>C³-Dialogue / dev / ID 17-3 / 質問1</a:t>
             </a:r>
           </a:p>
         </p:txBody>
@@ -23161,7 +21578,7 @@
                 <a:spcPts val="0"/>
               </a:spcBef>
               <a:spcAft>
-                <a:spcPts val="400"/>
+                <a:spcPts val="140"/>
               </a:spcAft>
               <a:buNone/>
               <a:defRPr sz="810" b="0">
@@ -23180,7 +21597,7 @@
                 <a:ea typeface="Noto Sans CJK JP"/>
                 <a:cs typeface="Noto Sans"/>
               </a:rPr>
-              <a:t>[1] Sun et al. C³-D / dev / 17-3 / question 1.</a:t>
+              <a:t>[1] Sun et al. C³ データセット。</a:t>
             </a:r>
             <a:r>
               <a:rPr sz="810" b="0" lang="ja-JP" altLang="en-US">
@@ -23201,9 +21618,9 @@
                 <a:latin typeface="Noto Sans"/>
                 <a:ea typeface="Noto Sans CJK JP"/>
                 <a:cs typeface="Noto Sans"/>
-                <a:hlinkClick r:id="rId2"/>
-              </a:rPr>
-              <a:t>https://github.com/nlpdata/c3/blob/1f41682ebb684d63afe7c583c8f38e137fc8a826/data/c3-d-dev.json</a:t>
+                <a:hlinkClick r:id="rId3"/>
+              </a:rPr>
+              <a:t>https://github.com/nlpdata/c3/tree/master/data</a:t>
             </a:r>
           </a:p>
         </p:txBody>
@@ -23269,7 +21686,7 @@
                 <a:ea typeface="Noto Sans CJK JP"/>
                 <a:cs typeface="Noto Sans"/>
               </a:rPr>
-              <a:t>書かれたことと、分かることをつなぐ</a:t>
+              <a:t>文書から、正しい選択肢を選ぶ</a:t>
             </a:r>
           </a:p>
         </p:txBody>
@@ -23432,60 +21849,6 @@
                 <a:cs typeface="Noto Sans"/>
               </a:rPr>
               <a:t>Appendix: 1. 追加の公開実例</a:t>
-            </a:r>
-          </a:p>
-        </p:txBody>
-      </p:sp>
-      <p:sp>
-        <p:nvSpPr>
-          <p:cNvPr id="4" name="TextBox 3"/>
-          <p:cNvSpPr txBox="1"/>
-          <p:nvPr/>
-        </p:nvSpPr>
-        <p:spPr>
-          <a:xfrm>
-            <a:off x="548640" y="1271016"/>
-            <a:ext cx="8046720" cy="201168"/>
-          </a:xfrm>
-          <a:prstGeom prst="rect">
-            <a:avLst/>
-          </a:prstGeom>
-          <a:noFill/>
-        </p:spPr>
-        <p:txBody>
-          <a:bodyPr wrap="square" lIns="0" rIns="0" tIns="0" bIns="0">
-            <a:noAutofit/>
-          </a:bodyPr>
-          <a:lstStyle/>
-          <a:p>
-            <a:pPr algn="l">
-              <a:lnSpc>
-                <a:spcPts val="1287"/>
-              </a:lnSpc>
-              <a:spcBef>
-                <a:spcPts val="0"/>
-              </a:spcBef>
-              <a:spcAft>
-                <a:spcPts val="0"/>
-              </a:spcAft>
-              <a:buNone/>
-              <a:defRPr sz="1100" b="0">
-                <a:solidFill>
-                  <a:srgbClr val="303437"/>
-                </a:solidFill>
-                <a:latin typeface="Noto Sans"/>
-              </a:defRPr>
-            </a:pPr>
-            <a:r>
-              <a:rPr sz="1100" b="0" lang="ja-JP" altLang="en-US">
-                <a:solidFill>
-                  <a:srgbClr val="626669"/>
-                </a:solidFill>
-                <a:latin typeface="Noto Sans"/>
-                <a:ea typeface="Noto Sans CJK JP"/>
-                <a:cs typeface="Noto Sans"/>
-              </a:rPr>
-              <a:t>C³-Dialogue / dev / ID 28-8 / 質問1</a:t>
             </a:r>
           </a:p>
         </p:txBody>
@@ -24051,7 +22414,7 @@
                 <a:ea typeface="Noto Sans CJK JP"/>
                 <a:cs typeface="Noto Sans"/>
               </a:rPr>
-              <a:t>C. 特によい</a:t>
+              <a:t>C. 非常によい</a:t>
             </a:r>
           </a:p>
         </p:txBody>
@@ -24140,7 +22503,7 @@
                 <a:spcPts val="0"/>
               </a:spcBef>
               <a:spcAft>
-                <a:spcPts val="400"/>
+                <a:spcPts val="140"/>
               </a:spcAft>
               <a:buNone/>
               <a:defRPr sz="810" b="0">
@@ -24159,7 +22522,7 @@
                 <a:ea typeface="Noto Sans CJK JP"/>
                 <a:cs typeface="Noto Sans"/>
               </a:rPr>
-              <a:t>[1] Sun et al. C³-D / dev / 28-8 / question 1.</a:t>
+              <a:t>[1] Sun et al. C³ データセット。</a:t>
             </a:r>
             <a:r>
               <a:rPr sz="810" b="0" lang="ja-JP" altLang="en-US">
@@ -24180,9 +22543,9 @@
                 <a:latin typeface="Noto Sans"/>
                 <a:ea typeface="Noto Sans CJK JP"/>
                 <a:cs typeface="Noto Sans"/>
-                <a:hlinkClick r:id="rId2"/>
-              </a:rPr>
-              <a:t>https://github.com/nlpdata/c3/blob/1f41682ebb684d63afe7c583c8f38e137fc8a826/data/c3-d-dev.json</a:t>
+                <a:hlinkClick r:id="rId3"/>
+              </a:rPr>
+              <a:t>https://github.com/nlpdata/c3/tree/master/data</a:t>
             </a:r>
           </a:p>
         </p:txBody>
@@ -24297,60 +22660,6 @@
                 <a:cs typeface="Noto Sans"/>
               </a:rPr>
               <a:t>Appendix: 1. 追加の公開実例</a:t>
-            </a:r>
-          </a:p>
-        </p:txBody>
-      </p:sp>
-      <p:sp>
-        <p:nvSpPr>
-          <p:cNvPr id="4" name="TextBox 3"/>
-          <p:cNvSpPr txBox="1"/>
-          <p:nvPr/>
-        </p:nvSpPr>
-        <p:spPr>
-          <a:xfrm>
-            <a:off x="548640" y="1271016"/>
-            <a:ext cx="8046720" cy="201168"/>
-          </a:xfrm>
-          <a:prstGeom prst="rect">
-            <a:avLst/>
-          </a:prstGeom>
-          <a:noFill/>
-        </p:spPr>
-        <p:txBody>
-          <a:bodyPr wrap="square" lIns="0" rIns="0" tIns="0" bIns="0">
-            <a:noAutofit/>
-          </a:bodyPr>
-          <a:lstStyle/>
-          <a:p>
-            <a:pPr algn="l">
-              <a:lnSpc>
-                <a:spcPts val="1287"/>
-              </a:lnSpc>
-              <a:spcBef>
-                <a:spcPts val="0"/>
-              </a:spcBef>
-              <a:spcAft>
-                <a:spcPts val="0"/>
-              </a:spcAft>
-              <a:buNone/>
-              <a:defRPr sz="1100" b="0">
-                <a:solidFill>
-                  <a:srgbClr val="303437"/>
-                </a:solidFill>
-                <a:latin typeface="Noto Sans"/>
-              </a:defRPr>
-            </a:pPr>
-            <a:r>
-              <a:rPr sz="1100" b="0" lang="ja-JP" altLang="en-US">
-                <a:solidFill>
-                  <a:srgbClr val="626669"/>
-                </a:solidFill>
-                <a:latin typeface="Noto Sans"/>
-                <a:ea typeface="Noto Sans CJK JP"/>
-                <a:cs typeface="Noto Sans"/>
-              </a:rPr>
-              <a:t>C³-Dialogue / dev / ID 37-120 / 質問1</a:t>
             </a:r>
           </a:p>
         </p:txBody>
@@ -24815,7 +23124,7 @@
                 <a:spcPts val="0"/>
               </a:spcBef>
               <a:spcAft>
-                <a:spcPts val="400"/>
+                <a:spcPts val="140"/>
               </a:spcAft>
               <a:buNone/>
               <a:defRPr sz="810" b="0">
@@ -24834,7 +23143,7 @@
                 <a:ea typeface="Noto Sans CJK JP"/>
                 <a:cs typeface="Noto Sans"/>
               </a:rPr>
-              <a:t>[1] Sun et al. C³-D / dev / 37-120 / question 1.</a:t>
+              <a:t>[1] Sun et al. C³ データセット。</a:t>
             </a:r>
             <a:r>
               <a:rPr sz="810" b="0" lang="ja-JP" altLang="en-US">
@@ -24855,9 +23164,9 @@
                 <a:latin typeface="Noto Sans"/>
                 <a:ea typeface="Noto Sans CJK JP"/>
                 <a:cs typeface="Noto Sans"/>
-                <a:hlinkClick r:id="rId2"/>
-              </a:rPr>
-              <a:t>https://github.com/nlpdata/c3/blob/1f41682ebb684d63afe7c583c8f38e137fc8a826/data/c3-d-dev.json</a:t>
+                <a:hlinkClick r:id="rId3"/>
+              </a:rPr>
+              <a:t>https://github.com/nlpdata/c3/tree/master/data</a:t>
             </a:r>
           </a:p>
         </p:txBody>
@@ -24972,60 +23281,6 @@
                 <a:cs typeface="Noto Sans"/>
               </a:rPr>
               <a:t>Appendix: 1. 追加の公開実例</a:t>
-            </a:r>
-          </a:p>
-        </p:txBody>
-      </p:sp>
-      <p:sp>
-        <p:nvSpPr>
-          <p:cNvPr id="4" name="TextBox 3"/>
-          <p:cNvSpPr txBox="1"/>
-          <p:nvPr/>
-        </p:nvSpPr>
-        <p:spPr>
-          <a:xfrm>
-            <a:off x="548640" y="1271016"/>
-            <a:ext cx="8046720" cy="201168"/>
-          </a:xfrm>
-          <a:prstGeom prst="rect">
-            <a:avLst/>
-          </a:prstGeom>
-          <a:noFill/>
-        </p:spPr>
-        <p:txBody>
-          <a:bodyPr wrap="square" lIns="0" rIns="0" tIns="0" bIns="0">
-            <a:noAutofit/>
-          </a:bodyPr>
-          <a:lstStyle/>
-          <a:p>
-            <a:pPr algn="l">
-              <a:lnSpc>
-                <a:spcPts val="1287"/>
-              </a:lnSpc>
-              <a:spcBef>
-                <a:spcPts val="0"/>
-              </a:spcBef>
-              <a:spcAft>
-                <a:spcPts val="0"/>
-              </a:spcAft>
-              <a:buNone/>
-              <a:defRPr sz="1100" b="0">
-                <a:solidFill>
-                  <a:srgbClr val="303437"/>
-                </a:solidFill>
-                <a:latin typeface="Noto Sans"/>
-              </a:defRPr>
-            </a:pPr>
-            <a:r>
-              <a:rPr sz="1100" b="0" lang="ja-JP" altLang="en-US">
-                <a:solidFill>
-                  <a:srgbClr val="626669"/>
-                </a:solidFill>
-                <a:latin typeface="Noto Sans"/>
-                <a:ea typeface="Noto Sans CJK JP"/>
-                <a:cs typeface="Noto Sans"/>
-              </a:rPr>
-              <a:t>C³-Dialogue / dev / ID 37-120 / 質問1</a:t>
             </a:r>
           </a:p>
         </p:txBody>
@@ -25215,7 +23470,7 @@
                 <a:ea typeface="Noto Sans CJK JP"/>
                 <a:cs typeface="Noto Sans"/>
               </a:rPr>
-              <a:t>男：ああ、電池切れのはずだ。予備の電池は持ってきた？</a:t>
+              <a:t>男：ああ、たぶん電池切れだ。予備の電池は持ってきた？</a:t>
             </a:r>
           </a:p>
           <a:p>
@@ -25490,7 +23745,7 @@
                 <a:spcPts val="0"/>
               </a:spcBef>
               <a:spcAft>
-                <a:spcPts val="400"/>
+                <a:spcPts val="140"/>
               </a:spcAft>
               <a:buNone/>
               <a:defRPr sz="810" b="0">
@@ -25509,7 +23764,7 @@
                 <a:ea typeface="Noto Sans CJK JP"/>
                 <a:cs typeface="Noto Sans"/>
               </a:rPr>
-              <a:t>[1] Sun et al. C³-D / dev / 37-120 / question 1.</a:t>
+              <a:t>[1] Sun et al. C³ データセット。</a:t>
             </a:r>
             <a:r>
               <a:rPr sz="810" b="0" lang="ja-JP" altLang="en-US">
@@ -25530,9 +23785,9 @@
                 <a:latin typeface="Noto Sans"/>
                 <a:ea typeface="Noto Sans CJK JP"/>
                 <a:cs typeface="Noto Sans"/>
-                <a:hlinkClick r:id="rId2"/>
-              </a:rPr>
-              <a:t>https://github.com/nlpdata/c3/blob/1f41682ebb684d63afe7c583c8f38e137fc8a826/data/c3-d-dev.json</a:t>
+                <a:hlinkClick r:id="rId3"/>
+              </a:rPr>
+              <a:t>https://github.com/nlpdata/c3/tree/master/data</a:t>
             </a:r>
           </a:p>
         </p:txBody>
@@ -25598,7 +23853,7 @@
                 <a:ea typeface="Noto Sans CJK JP"/>
                 <a:cs typeface="Noto Sans"/>
               </a:rPr>
-              <a:t>実例9：訪問と居住を区別する</a:t>
+              <a:t>実例9：毎週訪ねる家には、住んでいない</a:t>
             </a:r>
           </a:p>
         </p:txBody>
@@ -25647,60 +23902,6 @@
                 <a:cs typeface="Noto Sans"/>
               </a:rPr>
               <a:t>Appendix: 1. 追加の公開実例</a:t>
-            </a:r>
-          </a:p>
-        </p:txBody>
-      </p:sp>
-      <p:sp>
-        <p:nvSpPr>
-          <p:cNvPr id="4" name="TextBox 3"/>
-          <p:cNvSpPr txBox="1"/>
-          <p:nvPr/>
-        </p:nvSpPr>
-        <p:spPr>
-          <a:xfrm>
-            <a:off x="548640" y="1271016"/>
-            <a:ext cx="8046720" cy="201168"/>
-          </a:xfrm>
-          <a:prstGeom prst="rect">
-            <a:avLst/>
-          </a:prstGeom>
-          <a:noFill/>
-        </p:spPr>
-        <p:txBody>
-          <a:bodyPr wrap="square" lIns="0" rIns="0" tIns="0" bIns="0">
-            <a:noAutofit/>
-          </a:bodyPr>
-          <a:lstStyle/>
-          <a:p>
-            <a:pPr algn="l">
-              <a:lnSpc>
-                <a:spcPts val="1287"/>
-              </a:lnSpc>
-              <a:spcBef>
-                <a:spcPts val="0"/>
-              </a:spcBef>
-              <a:spcAft>
-                <a:spcPts val="0"/>
-              </a:spcAft>
-              <a:buNone/>
-              <a:defRPr sz="1100" b="0">
-                <a:solidFill>
-                  <a:srgbClr val="303437"/>
-                </a:solidFill>
-                <a:latin typeface="Noto Sans"/>
-              </a:defRPr>
-            </a:pPr>
-            <a:r>
-              <a:rPr sz="1100" b="0" lang="ja-JP" altLang="en-US">
-                <a:solidFill>
-                  <a:srgbClr val="626669"/>
-                </a:solidFill>
-                <a:latin typeface="Noto Sans"/>
-                <a:ea typeface="Noto Sans CJK JP"/>
-                <a:cs typeface="Noto Sans"/>
-              </a:rPr>
-              <a:t>C³-Mixed / dev / ID 8-707 / 質問1</a:t>
             </a:r>
           </a:p>
         </p:txBody>
@@ -26231,7 +24432,7 @@
                 <a:spcPts val="0"/>
               </a:spcBef>
               <a:spcAft>
-                <a:spcPts val="400"/>
+                <a:spcPts val="140"/>
               </a:spcAft>
               <a:buNone/>
               <a:defRPr sz="810" b="0">
@@ -26250,7 +24451,7 @@
                 <a:ea typeface="Noto Sans CJK JP"/>
                 <a:cs typeface="Noto Sans"/>
               </a:rPr>
-              <a:t>[1] Sun et al. C³-M / dev / 8-707 / question 1.</a:t>
+              <a:t>[1] Sun et al. C³ データセット。</a:t>
             </a:r>
             <a:r>
               <a:rPr sz="810" b="0" lang="ja-JP" altLang="en-US">
@@ -26271,9 +24472,9 @@
                 <a:latin typeface="Noto Sans"/>
                 <a:ea typeface="Noto Sans CJK JP"/>
                 <a:cs typeface="Noto Sans"/>
-                <a:hlinkClick r:id="rId2"/>
-              </a:rPr>
-              <a:t>https://github.com/nlpdata/c3/blob/1f41682ebb684d63afe7c583c8f38e137fc8a826/data/c3-m-dev.json</a:t>
+                <a:hlinkClick r:id="rId3"/>
+              </a:rPr>
+              <a:t>https://github.com/nlpdata/c3/tree/master/data</a:t>
             </a:r>
           </a:p>
         </p:txBody>
@@ -26388,60 +24589,6 @@
                 <a:cs typeface="Noto Sans"/>
               </a:rPr>
               <a:t>Appendix: 1. 追加の公開実例</a:t>
-            </a:r>
-          </a:p>
-        </p:txBody>
-      </p:sp>
-      <p:sp>
-        <p:nvSpPr>
-          <p:cNvPr id="4" name="TextBox 3"/>
-          <p:cNvSpPr txBox="1"/>
-          <p:nvPr/>
-        </p:nvSpPr>
-        <p:spPr>
-          <a:xfrm>
-            <a:off x="548640" y="1271016"/>
-            <a:ext cx="8046720" cy="201168"/>
-          </a:xfrm>
-          <a:prstGeom prst="rect">
-            <a:avLst/>
-          </a:prstGeom>
-          <a:noFill/>
-        </p:spPr>
-        <p:txBody>
-          <a:bodyPr wrap="square" lIns="0" rIns="0" tIns="0" bIns="0">
-            <a:noAutofit/>
-          </a:bodyPr>
-          <a:lstStyle/>
-          <a:p>
-            <a:pPr algn="l">
-              <a:lnSpc>
-                <a:spcPts val="1287"/>
-              </a:lnSpc>
-              <a:spcBef>
-                <a:spcPts val="0"/>
-              </a:spcBef>
-              <a:spcAft>
-                <a:spcPts val="0"/>
-              </a:spcAft>
-              <a:buNone/>
-              <a:defRPr sz="1100" b="0">
-                <a:solidFill>
-                  <a:srgbClr val="303437"/>
-                </a:solidFill>
-                <a:latin typeface="Noto Sans"/>
-              </a:defRPr>
-            </a:pPr>
-            <a:r>
-              <a:rPr sz="1100" b="0" lang="ja-JP" altLang="en-US">
-                <a:solidFill>
-                  <a:srgbClr val="626669"/>
-                </a:solidFill>
-                <a:latin typeface="Noto Sans"/>
-                <a:ea typeface="Noto Sans CJK JP"/>
-                <a:cs typeface="Noto Sans"/>
-              </a:rPr>
-              <a:t>C³-Mixed / dev / ID 8-160 / 質問1</a:t>
             </a:r>
           </a:p>
         </p:txBody>
@@ -26972,7 +25119,7 @@
                 <a:spcPts val="0"/>
               </a:spcBef>
               <a:spcAft>
-                <a:spcPts val="400"/>
+                <a:spcPts val="140"/>
               </a:spcAft>
               <a:buNone/>
               <a:defRPr sz="810" b="0">
@@ -26991,7 +25138,7 @@
                 <a:ea typeface="Noto Sans CJK JP"/>
                 <a:cs typeface="Noto Sans"/>
               </a:rPr>
-              <a:t>[1] Sun et al. C³-M / dev / 8-160 / question 1.</a:t>
+              <a:t>[1] Sun et al. C³ データセット。</a:t>
             </a:r>
             <a:r>
               <a:rPr sz="810" b="0" lang="ja-JP" altLang="en-US">
@@ -27012,9 +25159,9 @@
                 <a:latin typeface="Noto Sans"/>
                 <a:ea typeface="Noto Sans CJK JP"/>
                 <a:cs typeface="Noto Sans"/>
-                <a:hlinkClick r:id="rId2"/>
-              </a:rPr>
-              <a:t>https://github.com/nlpdata/c3/blob/1f41682ebb684d63afe7c583c8f38e137fc8a826/data/c3-m-dev.json</a:t>
+                <a:hlinkClick r:id="rId3"/>
+              </a:rPr>
+              <a:t>https://github.com/nlpdata/c3/tree/master/data</a:t>
             </a:r>
           </a:p>
         </p:txBody>
@@ -27129,60 +25276,6 @@
                 <a:cs typeface="Noto Sans"/>
               </a:rPr>
               <a:t>Appendix: 1. 追加の公開実例</a:t>
-            </a:r>
-          </a:p>
-        </p:txBody>
-      </p:sp>
-      <p:sp>
-        <p:nvSpPr>
-          <p:cNvPr id="4" name="TextBox 3"/>
-          <p:cNvSpPr txBox="1"/>
-          <p:nvPr/>
-        </p:nvSpPr>
-        <p:spPr>
-          <a:xfrm>
-            <a:off x="548640" y="1271016"/>
-            <a:ext cx="8046720" cy="201168"/>
-          </a:xfrm>
-          <a:prstGeom prst="rect">
-            <a:avLst/>
-          </a:prstGeom>
-          <a:noFill/>
-        </p:spPr>
-        <p:txBody>
-          <a:bodyPr wrap="square" lIns="0" rIns="0" tIns="0" bIns="0">
-            <a:noAutofit/>
-          </a:bodyPr>
-          <a:lstStyle/>
-          <a:p>
-            <a:pPr algn="l">
-              <a:lnSpc>
-                <a:spcPts val="1287"/>
-              </a:lnSpc>
-              <a:spcBef>
-                <a:spcPts val="0"/>
-              </a:spcBef>
-              <a:spcAft>
-                <a:spcPts val="0"/>
-              </a:spcAft>
-              <a:buNone/>
-              <a:defRPr sz="1100" b="0">
-                <a:solidFill>
-                  <a:srgbClr val="303437"/>
-                </a:solidFill>
-                <a:latin typeface="Noto Sans"/>
-              </a:defRPr>
-            </a:pPr>
-            <a:r>
-              <a:rPr sz="1100" b="0" lang="ja-JP" altLang="en-US">
-                <a:solidFill>
-                  <a:srgbClr val="626669"/>
-                </a:solidFill>
-                <a:latin typeface="Noto Sans"/>
-                <a:ea typeface="Noto Sans CJK JP"/>
-                <a:cs typeface="Noto Sans"/>
-              </a:rPr>
-              <a:t>C³-Mixed / dev / ID 9-269 / 質問1</a:t>
             </a:r>
           </a:p>
         </p:txBody>
@@ -27775,7 +25868,7 @@
                 <a:spcPts val="0"/>
               </a:spcBef>
               <a:spcAft>
-                <a:spcPts val="400"/>
+                <a:spcPts val="140"/>
               </a:spcAft>
               <a:buNone/>
               <a:defRPr sz="810" b="0">
@@ -27794,7 +25887,7 @@
                 <a:ea typeface="Noto Sans CJK JP"/>
                 <a:cs typeface="Noto Sans"/>
               </a:rPr>
-              <a:t>[1] Sun et al. C³-M / dev / 9-269 / question 1.</a:t>
+              <a:t>[1] Sun et al. C³ データセット。</a:t>
             </a:r>
             <a:r>
               <a:rPr sz="810" b="0" lang="ja-JP" altLang="en-US">
@@ -27815,9 +25908,9 @@
                 <a:latin typeface="Noto Sans"/>
                 <a:ea typeface="Noto Sans CJK JP"/>
                 <a:cs typeface="Noto Sans"/>
-                <a:hlinkClick r:id="rId2"/>
-              </a:rPr>
-              <a:t>https://github.com/nlpdata/c3/blob/1f41682ebb684d63afe7c583c8f38e137fc8a826/data/c3-m-dev.json</a:t>
+                <a:hlinkClick r:id="rId3"/>
+              </a:rPr>
+              <a:t>https://github.com/nlpdata/c3/tree/master/data</a:t>
             </a:r>
           </a:p>
         </p:txBody>
@@ -27932,60 +26025,6 @@
                 <a:cs typeface="Noto Sans"/>
               </a:rPr>
               <a:t>Appendix: 1. 追加の公開実例</a:t>
-            </a:r>
-          </a:p>
-        </p:txBody>
-      </p:sp>
-      <p:sp>
-        <p:nvSpPr>
-          <p:cNvPr id="4" name="TextBox 3"/>
-          <p:cNvSpPr txBox="1"/>
-          <p:nvPr/>
-        </p:nvSpPr>
-        <p:spPr>
-          <a:xfrm>
-            <a:off x="548640" y="1271016"/>
-            <a:ext cx="8046720" cy="201168"/>
-          </a:xfrm>
-          <a:prstGeom prst="rect">
-            <a:avLst/>
-          </a:prstGeom>
-          <a:noFill/>
-        </p:spPr>
-        <p:txBody>
-          <a:bodyPr wrap="square" lIns="0" rIns="0" tIns="0" bIns="0">
-            <a:noAutofit/>
-          </a:bodyPr>
-          <a:lstStyle/>
-          <a:p>
-            <a:pPr algn="l">
-              <a:lnSpc>
-                <a:spcPts val="1287"/>
-              </a:lnSpc>
-              <a:spcBef>
-                <a:spcPts val="0"/>
-              </a:spcBef>
-              <a:spcAft>
-                <a:spcPts val="0"/>
-              </a:spcAft>
-              <a:buNone/>
-              <a:defRPr sz="1100" b="0">
-                <a:solidFill>
-                  <a:srgbClr val="303437"/>
-                </a:solidFill>
-                <a:latin typeface="Noto Sans"/>
-              </a:defRPr>
-            </a:pPr>
-            <a:r>
-              <a:rPr sz="1100" b="0" lang="ja-JP" altLang="en-US">
-                <a:solidFill>
-                  <a:srgbClr val="626669"/>
-                </a:solidFill>
-                <a:latin typeface="Noto Sans"/>
-                <a:ea typeface="Noto Sans CJK JP"/>
-                <a:cs typeface="Noto Sans"/>
-              </a:rPr>
-              <a:t>C³-Mixed / dev / ID 11-14 / 質問1</a:t>
             </a:r>
           </a:p>
         </p:txBody>
@@ -28357,7 +26396,7 @@
                 <a:spcPts val="0"/>
               </a:spcBef>
               <a:spcAft>
-                <a:spcPts val="400"/>
+                <a:spcPts val="140"/>
               </a:spcAft>
               <a:buNone/>
               <a:defRPr sz="810" b="0">
@@ -28376,7 +26415,7 @@
                 <a:ea typeface="Noto Sans CJK JP"/>
                 <a:cs typeface="Noto Sans"/>
               </a:rPr>
-              <a:t>[1] Sun et al. C³-M / dev / 11-14 / question 1.</a:t>
+              <a:t>[1] Sun et al. C³ データセット。</a:t>
             </a:r>
             <a:r>
               <a:rPr sz="810" b="0" lang="ja-JP" altLang="en-US">
@@ -28397,9 +26436,9 @@
                 <a:latin typeface="Noto Sans"/>
                 <a:ea typeface="Noto Sans CJK JP"/>
                 <a:cs typeface="Noto Sans"/>
-                <a:hlinkClick r:id="rId2"/>
-              </a:rPr>
-              <a:t>https://github.com/nlpdata/c3/blob/1f41682ebb684d63afe7c583c8f38e137fc8a826/data/c3-m-dev.json</a:t>
+                <a:hlinkClick r:id="rId3"/>
+              </a:rPr>
+              <a:t>https://github.com/nlpdata/c3/tree/master/data</a:t>
             </a:r>
           </a:p>
         </p:txBody>
@@ -28514,60 +26553,6 @@
                 <a:cs typeface="Noto Sans"/>
               </a:rPr>
               <a:t>Appendix: 1. 追加の公開実例</a:t>
-            </a:r>
-          </a:p>
-        </p:txBody>
-      </p:sp>
-      <p:sp>
-        <p:nvSpPr>
-          <p:cNvPr id="4" name="TextBox 3"/>
-          <p:cNvSpPr txBox="1"/>
-          <p:nvPr/>
-        </p:nvSpPr>
-        <p:spPr>
-          <a:xfrm>
-            <a:off x="548640" y="1271016"/>
-            <a:ext cx="8046720" cy="201168"/>
-          </a:xfrm>
-          <a:prstGeom prst="rect">
-            <a:avLst/>
-          </a:prstGeom>
-          <a:noFill/>
-        </p:spPr>
-        <p:txBody>
-          <a:bodyPr wrap="square" lIns="0" rIns="0" tIns="0" bIns="0">
-            <a:noAutofit/>
-          </a:bodyPr>
-          <a:lstStyle/>
-          <a:p>
-            <a:pPr algn="l">
-              <a:lnSpc>
-                <a:spcPts val="1287"/>
-              </a:lnSpc>
-              <a:spcBef>
-                <a:spcPts val="0"/>
-              </a:spcBef>
-              <a:spcAft>
-                <a:spcPts val="0"/>
-              </a:spcAft>
-              <a:buNone/>
-              <a:defRPr sz="1100" b="0">
-                <a:solidFill>
-                  <a:srgbClr val="303437"/>
-                </a:solidFill>
-                <a:latin typeface="Noto Sans"/>
-              </a:defRPr>
-            </a:pPr>
-            <a:r>
-              <a:rPr sz="1100" b="0" lang="ja-JP" altLang="en-US">
-                <a:solidFill>
-                  <a:srgbClr val="626669"/>
-                </a:solidFill>
-                <a:latin typeface="Noto Sans"/>
-                <a:ea typeface="Noto Sans CJK JP"/>
-                <a:cs typeface="Noto Sans"/>
-              </a:rPr>
-              <a:t>C³-Mixed / dev / ID 11-14 / 質問1</a:t>
             </a:r>
           </a:p>
         </p:txBody>
@@ -28939,7 +26924,7 @@
                 <a:spcPts val="0"/>
               </a:spcBef>
               <a:spcAft>
-                <a:spcPts val="400"/>
+                <a:spcPts val="140"/>
               </a:spcAft>
               <a:buNone/>
               <a:defRPr sz="810" b="0">
@@ -28958,7 +26943,7 @@
                 <a:ea typeface="Noto Sans CJK JP"/>
                 <a:cs typeface="Noto Sans"/>
               </a:rPr>
-              <a:t>[1] Sun et al. C³-M / dev / 11-14 / question 1.</a:t>
+              <a:t>[1] Sun et al. C³ データセット。</a:t>
             </a:r>
             <a:r>
               <a:rPr sz="810" b="0" lang="ja-JP" altLang="en-US">
@@ -28979,9 +26964,9 @@
                 <a:latin typeface="Noto Sans"/>
                 <a:ea typeface="Noto Sans CJK JP"/>
                 <a:cs typeface="Noto Sans"/>
-                <a:hlinkClick r:id="rId2"/>
-              </a:rPr>
-              <a:t>https://github.com/nlpdata/c3/blob/1f41682ebb684d63afe7c583c8f38e137fc8a826/data/c3-m-dev.json</a:t>
+                <a:hlinkClick r:id="rId3"/>
+              </a:rPr>
+              <a:t>https://github.com/nlpdata/c3/tree/master/data</a:t>
             </a:r>
           </a:p>
         </p:txBody>
@@ -29096,60 +27081,6 @@
                 <a:cs typeface="Noto Sans"/>
               </a:rPr>
               <a:t>Appendix: 1. 追加の公開実例</a:t>
-            </a:r>
-          </a:p>
-        </p:txBody>
-      </p:sp>
-      <p:sp>
-        <p:nvSpPr>
-          <p:cNvPr id="4" name="TextBox 3"/>
-          <p:cNvSpPr txBox="1"/>
-          <p:nvPr/>
-        </p:nvSpPr>
-        <p:spPr>
-          <a:xfrm>
-            <a:off x="548640" y="1271016"/>
-            <a:ext cx="8046720" cy="201168"/>
-          </a:xfrm>
-          <a:prstGeom prst="rect">
-            <a:avLst/>
-          </a:prstGeom>
-          <a:noFill/>
-        </p:spPr>
-        <p:txBody>
-          <a:bodyPr wrap="square" lIns="0" rIns="0" tIns="0" bIns="0">
-            <a:noAutofit/>
-          </a:bodyPr>
-          <a:lstStyle/>
-          <a:p>
-            <a:pPr algn="l">
-              <a:lnSpc>
-                <a:spcPts val="1287"/>
-              </a:lnSpc>
-              <a:spcBef>
-                <a:spcPts val="0"/>
-              </a:spcBef>
-              <a:spcAft>
-                <a:spcPts val="0"/>
-              </a:spcAft>
-              <a:buNone/>
-              <a:defRPr sz="1100" b="0">
-                <a:solidFill>
-                  <a:srgbClr val="303437"/>
-                </a:solidFill>
-                <a:latin typeface="Noto Sans"/>
-              </a:defRPr>
-            </a:pPr>
-            <a:r>
-              <a:rPr sz="1100" b="0" lang="ja-JP" altLang="en-US">
-                <a:solidFill>
-                  <a:srgbClr val="626669"/>
-                </a:solidFill>
-                <a:latin typeface="Noto Sans"/>
-                <a:ea typeface="Noto Sans CJK JP"/>
-                <a:cs typeface="Noto Sans"/>
-              </a:rPr>
-              <a:t>C³-Mixed / test / ID 8-255 / 質問1</a:t>
             </a:r>
           </a:p>
         </p:txBody>
@@ -29742,7 +27673,7 @@
                 <a:spcPts val="0"/>
               </a:spcBef>
               <a:spcAft>
-                <a:spcPts val="400"/>
+                <a:spcPts val="140"/>
               </a:spcAft>
               <a:buNone/>
               <a:defRPr sz="810" b="0">
@@ -29761,7 +27692,7 @@
                 <a:ea typeface="Noto Sans CJK JP"/>
                 <a:cs typeface="Noto Sans"/>
               </a:rPr>
-              <a:t>[1] Sun et al. C³-M / test / 8-255 / question 1.</a:t>
+              <a:t>[1] Sun et al. C³ データセット。</a:t>
             </a:r>
             <a:r>
               <a:rPr sz="810" b="0" lang="ja-JP" altLang="en-US">
@@ -29782,9 +27713,9 @@
                 <a:latin typeface="Noto Sans"/>
                 <a:ea typeface="Noto Sans CJK JP"/>
                 <a:cs typeface="Noto Sans"/>
-                <a:hlinkClick r:id="rId2"/>
-              </a:rPr>
-              <a:t>https://github.com/nlpdata/c3/blob/1f41682ebb684d63afe7c583c8f38e137fc8a826/data/c3-m-test.json</a:t>
+                <a:hlinkClick r:id="rId3"/>
+              </a:rPr>
+              <a:t>https://github.com/nlpdata/c3/tree/master/data</a:t>
             </a:r>
           </a:p>
         </p:txBody>
@@ -29850,7 +27781,7 @@
                 <a:ea typeface="Noto Sans CJK JP"/>
                 <a:cs typeface="Noto Sans"/>
               </a:rPr>
-              <a:t>各実例で使う手掛かり</a:t>
+              <a:t>実例1〜5：答えを支える手掛かり</a:t>
             </a:r>
           </a:p>
         </p:txBody>
@@ -29952,7 +27883,7 @@
                           <a:ea typeface="Noto Sans CJK JP"/>
                           <a:cs typeface="Noto Sans"/>
                         </a:rPr>
-                        <a:t>実例 / ID</a:t>
+                        <a:t>実例</a:t>
                       </a:r>
                     </a:p>
                   </a:txBody>
@@ -30066,7 +27997,7 @@
                           <a:ea typeface="Noto Sans CJK JP"/>
                           <a:cs typeface="Noto Sans"/>
                         </a:rPr>
-                        <a:t>1 / 37-153</a:t>
+                        <a:t>1</a:t>
                       </a:r>
                     </a:p>
                   </a:txBody>
@@ -30119,7 +28050,7 @@
                           <a:ea typeface="Noto Sans CJK JP"/>
                           <a:cs typeface="Noto Sans"/>
                         </a:rPr>
-                        <a:t>父親が明言する「ほとんど会話がない」が理由。息子にかかる重圧を、父親自身の重圧と取り違えない。</a:t>
+                        <a:t>父親が明言する「ほとんど会話がない」が理由。重圧がかかっているのは息子。</a:t>
                       </a:r>
                     </a:p>
                   </a:txBody>
@@ -30174,7 +28105,7 @@
                           <a:ea typeface="Noto Sans CJK JP"/>
                           <a:cs typeface="Noto Sans"/>
                         </a:rPr>
-                        <a:t>2 / 11-67</a:t>
+                        <a:t>2</a:t>
                       </a:r>
                     </a:p>
                   </a:txBody>
@@ -30276,7 +28207,7 @@
                           <a:ea typeface="Noto Sans CJK JP"/>
                           <a:cs typeface="Noto Sans"/>
                         </a:rPr>
-                        <a:t>3 / 9-120</a:t>
+                        <a:t>3</a:t>
                       </a:r>
                     </a:p>
                   </a:txBody>
@@ -30378,7 +28309,7 @@
                           <a:ea typeface="Noto Sans CJK JP"/>
                           <a:cs typeface="Noto Sans"/>
                         </a:rPr>
-                        <a:t>4 / 11-30</a:t>
+                        <a:t>4</a:t>
                       </a:r>
                     </a:p>
                   </a:txBody>
@@ -30428,7 +28359,7 @@
                           <a:ea typeface="Noto Sans CJK JP"/>
                           <a:cs typeface="Noto Sans"/>
                         </a:rPr>
-                        <a:t>「预订」と「预订座位」が直接対応する。公式注釈はmatching／1文。</a:t>
+                        <a:t>「预订」と「预订座位」が直接対応する。知識注釈は語句照合／1文。</a:t>
                       </a:r>
                     </a:p>
                   </a:txBody>
@@ -30480,7 +28411,7 @@
                           <a:ea typeface="Noto Sans CJK JP"/>
                           <a:cs typeface="Noto Sans"/>
                         </a:rPr>
-                        <a:t>5 / 11-57</a:t>
+                        <a:t>5</a:t>
                       </a:r>
                     </a:p>
                   </a:txBody>
@@ -30533,7 +28464,7 @@
                           <a:ea typeface="Noto Sans CJK JP"/>
                           <a:cs typeface="Noto Sans"/>
                         </a:rPr>
-                        <a:t>融資を受けた後に設備を更新する。公式注釈は前提条件／複数文。</a:t>
+                        <a:t>融資を受けた後に設備を更新する。知識注釈は前提条件／複数文。</a:t>
                       </a:r>
                     </a:p>
                   </a:txBody>
@@ -30612,7 +28543,7 @@
                 <a:ea typeface="Noto Sans CJK JP"/>
                 <a:cs typeface="Noto Sans"/>
               </a:rPr>
-              <a:t>「公式注釈」は公開された知識・支持文数の分類。実例1の説明は本資料による。</a:t>
+              <a:t>表の「知識注釈」は公開注釈に基づく。その他は解答の解説。</a:t>
             </a:r>
           </a:p>
         </p:txBody>
@@ -30647,7 +28578,7 @@
                 <a:spcPts val="0"/>
               </a:spcBef>
               <a:spcAft>
-                <a:spcPts val="400"/>
+                <a:spcPts val="140"/>
               </a:spcAft>
               <a:buNone/>
               <a:defRPr sz="810" b="0">
@@ -30666,7 +28597,7 @@
                 <a:ea typeface="Noto Sans CJK JP"/>
                 <a:cs typeface="Noto Sans"/>
               </a:rPr>
-              <a:t>[1] Sun et al. C³ knowledge annotations, dev/test.</a:t>
+              <a:t>[1] Sun et al. C³ 知識注釈。</a:t>
             </a:r>
             <a:r>
               <a:rPr sz="810" b="0" lang="ja-JP" altLang="en-US">
@@ -30687,9 +28618,9 @@
                 <a:latin typeface="Noto Sans"/>
                 <a:ea typeface="Noto Sans CJK JP"/>
                 <a:cs typeface="Noto Sans"/>
-                <a:hlinkClick r:id="rId2"/>
-              </a:rPr>
-              <a:t>https://github.com/nlpdata/c3/tree/1f41682ebb684d63afe7c583c8f38e137fc8a826/annotation</a:t>
+                <a:hlinkClick r:id="rId3"/>
+              </a:rPr>
+              <a:t>https://github.com/nlpdata/c3/tree/master/annotation</a:t>
             </a:r>
           </a:p>
         </p:txBody>
@@ -30929,8 +28860,8 @@
         </p:nvSpPr>
         <p:spPr>
           <a:xfrm>
-            <a:off x="502920" y="4462272"/>
-            <a:ext cx="8183879" cy="658368"/>
+            <a:off x="502920" y="4700016"/>
+            <a:ext cx="8183879" cy="530352"/>
           </a:xfrm>
           <a:prstGeom prst="rect">
             <a:avLst/>
@@ -30951,7 +28882,7 @@
                 <a:spcPts val="0"/>
               </a:spcBef>
               <a:spcAft>
-                <a:spcPts val="200"/>
+                <a:spcPts val="140"/>
               </a:spcAft>
               <a:buNone/>
               <a:defRPr sz="810" b="0">
@@ -30970,7 +28901,30 @@
                 <a:ea typeface="Noto Sans CJK JP"/>
                 <a:cs typeface="Noto Sans"/>
               </a:rPr>
-              <a:t>[1] Sun, Yu, Yu &amp; Cardie (2020). Investigating Prior Knowledge for Challenging Chinese Machine Reading Comprehension. TACL 8:141–155.</a:t>
+              <a:t>[1] Sun et al. (2020). Investigating Prior Knowledge for Challenging Chinese Machine Reading Comprehension. TACL.</a:t>
+            </a:r>
+            <a:r>
+              <a:rPr sz="810" b="0" lang="ja-JP" altLang="en-US">
+                <a:solidFill>
+                  <a:srgbClr val="626669"/>
+                </a:solidFill>
+                <a:latin typeface="Noto Sans"/>
+                <a:ea typeface="Noto Sans CJK JP"/>
+                <a:cs typeface="Noto Sans"/>
+              </a:rPr>
+              <a:t>  </a:t>
+            </a:r>
+            <a:r>
+              <a:rPr sz="810" b="0" lang="ja-JP" altLang="en-US">
+                <a:solidFill>
+                  <a:srgbClr val="626669"/>
+                </a:solidFill>
+                <a:latin typeface="Noto Sans"/>
+                <a:ea typeface="Noto Sans CJK JP"/>
+                <a:cs typeface="Noto Sans"/>
+                <a:hlinkClick r:id="rId2"/>
+              </a:rPr>
+              <a:t>https://aclanthology.org/2020.tacl-1.10/</a:t>
             </a:r>
           </a:p>
           <a:p>
@@ -30979,7 +28933,7 @@
                 <a:spcPts val="940"/>
               </a:lnSpc>
               <a:spcAft>
-                <a:spcPts val="200"/>
+                <a:spcPts val="140"/>
               </a:spcAft>
               <a:buNone/>
               <a:defRPr sz="810" b="0">
@@ -30997,27 +28951,9 @@
                 <a:latin typeface="Noto Sans"/>
                 <a:ea typeface="Noto Sans CJK JP"/>
                 <a:cs typeface="Noto Sans"/>
-                <a:hlinkClick r:id="rId2"/>
-              </a:rPr>
-              <a:t>https://aclanthology.org/2020.tacl-1.10/</a:t>
-            </a:r>
-          </a:p>
-          <a:p>
-            <a:pPr>
-              <a:lnSpc>
-                <a:spcPts val="940"/>
-              </a:lnSpc>
-              <a:spcAft>
-                <a:spcPts val="200"/>
-              </a:spcAft>
-              <a:buNone/>
-              <a:defRPr sz="810" b="0">
-                <a:solidFill>
-                  <a:srgbClr val="303437"/>
-                </a:solidFill>
-                <a:latin typeface="Noto Sans"/>
-              </a:defRPr>
-            </a:pPr>
+              </a:rPr>
+              <a:t>[2] Sun et al. (2019). Probing Prior Knowledge Needed in Challenging Chinese Machine Reading Comprehension.</a:t>
+            </a:r>
             <a:r>
               <a:rPr sz="810" b="0" lang="ja-JP" altLang="en-US">
                 <a:solidFill>
@@ -31027,25 +28963,8 @@
                 <a:ea typeface="Noto Sans CJK JP"/>
                 <a:cs typeface="Noto Sans"/>
               </a:rPr>
-              <a:t>[2] Sun et al. (2019). Probing Prior Knowledge Needed in Challenging Chinese Machine Reading Comprehension. arXiv:1904.09679v1.</a:t>
-            </a:r>
-          </a:p>
-          <a:p>
-            <a:pPr>
-              <a:lnSpc>
-                <a:spcPts val="940"/>
-              </a:lnSpc>
-              <a:spcAft>
-                <a:spcPts val="200"/>
-              </a:spcAft>
-              <a:buNone/>
-              <a:defRPr sz="810" b="0">
-                <a:solidFill>
-                  <a:srgbClr val="303437"/>
-                </a:solidFill>
-                <a:latin typeface="Noto Sans"/>
-              </a:defRPr>
-            </a:pPr>
+              <a:t>  </a:t>
+            </a:r>
             <a:r>
               <a:rPr sz="810" b="0" lang="ja-JP" altLang="en-US">
                 <a:solidFill>
@@ -31122,7 +29041,7 @@
                 <a:ea typeface="Noto Sans CJK JP"/>
                 <a:cs typeface="Noto Sans"/>
               </a:rPr>
-              <a:t>各実例で使う手掛かり</a:t>
+              <a:t>実例6〜9：答えを支える手掛かり</a:t>
             </a:r>
           </a:p>
         </p:txBody>
@@ -31224,7 +29143,7 @@
                           <a:ea typeface="Noto Sans CJK JP"/>
                           <a:cs typeface="Noto Sans"/>
                         </a:rPr>
-                        <a:t>実例 / ID</a:t>
+                        <a:t>実例</a:t>
                       </a:r>
                     </a:p>
                   </a:txBody>
@@ -31338,7 +29257,7 @@
                           <a:ea typeface="Noto Sans CJK JP"/>
                           <a:cs typeface="Noto Sans"/>
                         </a:rPr>
-                        <a:t>6 / 17-3</a:t>
+                        <a:t>6</a:t>
                       </a:r>
                     </a:p>
                   </a:txBody>
@@ -31391,7 +29310,7 @@
                           <a:ea typeface="Noto Sans CJK JP"/>
                           <a:cs typeface="Noto Sans"/>
                         </a:rPr>
-                        <a:t>「马上就到」と「就要到了」が対応する。公式注釈は言語知識／複数文。</a:t>
+                        <a:t>「马上就到」と「就要到了」が対応する。知識注釈は言語知識／複数文。</a:t>
                       </a:r>
                     </a:p>
                   </a:txBody>
@@ -31446,7 +29365,7 @@
                           <a:ea typeface="Noto Sans CJK JP"/>
                           <a:cs typeface="Noto Sans"/>
                         </a:rPr>
-                        <a:t>7 / 28-8</a:t>
+                        <a:t>7</a:t>
                       </a:r>
                     </a:p>
                   </a:txBody>
@@ -31496,7 +29415,7 @@
                           <a:ea typeface="Noto Sans CJK JP"/>
                           <a:cs typeface="Noto Sans"/>
                         </a:rPr>
-                        <a:t>「一般吧」だけでなく、途中で帰った行動も評価の手掛かり。公式注釈は含みのある感情・語調／複数文。</a:t>
+                        <a:t>「一般吧」だけでなく、途中で帰った行動も評価の手掛かり。知識注釈は含みのある感情・語調／複数文。</a:t>
                       </a:r>
                     </a:p>
                   </a:txBody>
@@ -31548,7 +29467,7 @@
                           <a:ea typeface="Noto Sans CJK JP"/>
                           <a:cs typeface="Noto Sans"/>
                         </a:rPr>
-                        <a:t>8 / 37-120</a:t>
+                        <a:t>8</a:t>
                       </a:r>
                     </a:p>
                   </a:txBody>
@@ -31598,7 +29517,7 @@
                           <a:ea typeface="Noto Sans CJK JP"/>
                           <a:cs typeface="Noto Sans"/>
                         </a:rPr>
-                        <a:t>撮影、電池、充電器からカメラだと補う。公式注釈は場面の知識／複数文。</a:t>
+                        <a:t>撮影、電池、充電器からカメラだと補う。知識注釈は場面の知識／複数文。</a:t>
                       </a:r>
                     </a:p>
                   </a:txBody>
@@ -31650,7 +29569,7 @@
                           <a:ea typeface="Noto Sans CJK JP"/>
                           <a:cs typeface="Noto Sans"/>
                         </a:rPr>
-                        <a:t>9 / 8-707</a:t>
+                        <a:t>9</a:t>
                       </a:r>
                     </a:p>
                   </a:txBody>
@@ -31703,7 +29622,7 @@
                           <a:ea typeface="Noto Sans CJK JP"/>
                           <a:cs typeface="Noto Sans"/>
                         </a:rPr>
-                        <a:t>毎週の訪問と居住を区別する。公式注釈は言語知識／1文。</a:t>
+                        <a:t>毎週訪ねていても、その家に住んでいるわけではない。知識注釈は言語知識／1文。</a:t>
                       </a:r>
                     </a:p>
                   </a:txBody>
@@ -31735,61 +29654,7 @@
       </p:graphicFrame>
       <p:sp>
         <p:nvSpPr>
-          <p:cNvPr id="5" name="TextBox 4"/>
-          <p:cNvSpPr txBox="1"/>
-          <p:nvPr/>
-        </p:nvSpPr>
-        <p:spPr>
-          <a:xfrm>
-            <a:off x="594360" y="3927157"/>
-            <a:ext cx="7955279" cy="658368"/>
-          </a:xfrm>
-          <a:prstGeom prst="rect">
-            <a:avLst/>
-          </a:prstGeom>
-          <a:noFill/>
-        </p:spPr>
-        <p:txBody>
-          <a:bodyPr wrap="square" lIns="0" rIns="0" tIns="0" bIns="0">
-            <a:noAutofit/>
-          </a:bodyPr>
-          <a:lstStyle/>
-          <a:p>
-            <a:pPr algn="l">
-              <a:lnSpc>
-                <a:spcPts val="1568"/>
-              </a:lnSpc>
-              <a:spcBef>
-                <a:spcPts val="0"/>
-              </a:spcBef>
-              <a:spcAft>
-                <a:spcPts val="0"/>
-              </a:spcAft>
-              <a:buNone/>
-              <a:defRPr sz="1400" b="0">
-                <a:solidFill>
-                  <a:srgbClr val="303437"/>
-                </a:solidFill>
-                <a:latin typeface="Noto Sans"/>
-              </a:defRPr>
-            </a:pPr>
-            <a:r>
-              <a:rPr sz="1400" b="0" lang="ja-JP" altLang="en-US">
-                <a:solidFill>
-                  <a:srgbClr val="303437"/>
-                </a:solidFill>
-                <a:latin typeface="Noto Sans"/>
-                <a:ea typeface="Noto Sans CJK JP"/>
-                <a:cs typeface="Noto Sans"/>
-              </a:rPr>
-              <a:t>「公式注釈」は公開された知識・支持文数の分類。実例1の説明は本資料による。</a:t>
-            </a:r>
-          </a:p>
-        </p:txBody>
-      </p:sp>
-      <p:sp>
-        <p:nvSpPr>
-          <p:cNvPr id="6" name="sources"/>
+          <p:cNvPr id="5" name="sources"/>
           <p:cNvSpPr txBox="1"/>
           <p:nvPr/>
         </p:nvSpPr>
@@ -31817,7 +29682,7 @@
                 <a:spcPts val="0"/>
               </a:spcBef>
               <a:spcAft>
-                <a:spcPts val="400"/>
+                <a:spcPts val="140"/>
               </a:spcAft>
               <a:buNone/>
               <a:defRPr sz="810" b="0">
@@ -31836,7 +29701,7 @@
                 <a:ea typeface="Noto Sans CJK JP"/>
                 <a:cs typeface="Noto Sans"/>
               </a:rPr>
-              <a:t>[1] Sun et al. C³ knowledge annotations, dev/test.</a:t>
+              <a:t>[1] Sun et al. C³ 知識注釈。</a:t>
             </a:r>
             <a:r>
               <a:rPr sz="810" b="0" lang="ja-JP" altLang="en-US">
@@ -31857,9 +29722,9 @@
                 <a:latin typeface="Noto Sans"/>
                 <a:ea typeface="Noto Sans CJK JP"/>
                 <a:cs typeface="Noto Sans"/>
-                <a:hlinkClick r:id="rId2"/>
-              </a:rPr>
-              <a:t>https://github.com/nlpdata/c3/tree/1f41682ebb684d63afe7c583c8f38e137fc8a826/annotation</a:t>
+                <a:hlinkClick r:id="rId3"/>
+              </a:rPr>
+              <a:t>https://github.com/nlpdata/c3/tree/master/annotation</a:t>
             </a:r>
           </a:p>
         </p:txBody>
@@ -31925,7 +29790,7 @@
                 <a:ea typeface="Noto Sans CJK JP"/>
                 <a:cs typeface="Noto Sans"/>
               </a:rPr>
-              <a:t>各実例で使う手掛かり</a:t>
+              <a:t>実例10〜13：答えを支える手掛かり</a:t>
             </a:r>
           </a:p>
         </p:txBody>
@@ -32027,7 +29892,7 @@
                           <a:ea typeface="Noto Sans CJK JP"/>
                           <a:cs typeface="Noto Sans"/>
                         </a:rPr>
-                        <a:t>実例 / ID</a:t>
+                        <a:t>実例</a:t>
                       </a:r>
                     </a:p>
                   </a:txBody>
@@ -32141,7 +30006,7 @@
                           <a:ea typeface="Noto Sans CJK JP"/>
                           <a:cs typeface="Noto Sans"/>
                         </a:rPr>
-                        <a:t>10 / 8-160</a:t>
+                        <a:t>10</a:t>
                       </a:r>
                     </a:p>
                   </a:txBody>
@@ -32194,7 +30059,7 @@
                           <a:ea typeface="Noto Sans CJK JP"/>
                           <a:cs typeface="Noto Sans"/>
                         </a:rPr>
-                        <a:t>経過した20日と残り10日を足す。公式注釈は算術と言語知識／1文。</a:t>
+                        <a:t>経過した20日と残り10日を足す。知識注釈は算術と言語知識／1文。</a:t>
                       </a:r>
                     </a:p>
                   </a:txBody>
@@ -32249,7 +30114,7 @@
                           <a:ea typeface="Noto Sans CJK JP"/>
                           <a:cs typeface="Noto Sans"/>
                         </a:rPr>
-                        <a:t>11 / 9-269</a:t>
+                        <a:t>11</a:t>
                       </a:r>
                     </a:p>
                   </a:txBody>
@@ -32299,7 +30164,7 @@
                           <a:ea typeface="Noto Sans CJK JP"/>
                           <a:cs typeface="Noto Sans"/>
                         </a:rPr>
-                        <a:t>反語と理由のつながりを読み、「言っても仕方がない」という判断を選ぶ。公式注釈は言語知識と因果／複数文。</a:t>
+                        <a:t>反語と理由のつながりを読み、「言っても仕方がない」という判断を選ぶ。知識注釈は言語知識と因果／複数文。</a:t>
                       </a:r>
                     </a:p>
                   </a:txBody>
@@ -32351,7 +30216,7 @@
                           <a:ea typeface="Noto Sans CJK JP"/>
                           <a:cs typeface="Noto Sans"/>
                         </a:rPr>
-                        <a:t>12 / 11-14</a:t>
+                        <a:t>12</a:t>
                       </a:r>
                     </a:p>
                   </a:txBody>
@@ -32401,7 +30266,7 @@
                           <a:ea typeface="Noto Sans CJK JP"/>
                           <a:cs typeface="Noto Sans"/>
                         </a:rPr>
-                        <a:t>人々の英雄視と本人の最後の発言を区別する。公式注釈は因果／複数文。</a:t>
+                        <a:t>スケート靴のための救助。知識注釈は因果／複数文。</a:t>
                       </a:r>
                     </a:p>
                   </a:txBody>
@@ -32453,7 +30318,7 @@
                           <a:ea typeface="Noto Sans CJK JP"/>
                           <a:cs typeface="Noto Sans"/>
                         </a:rPr>
-                        <a:t>13 / 8-255</a:t>
+                        <a:t>13</a:t>
                       </a:r>
                     </a:p>
                   </a:txBody>
@@ -32506,7 +30371,7 @@
                           <a:ea typeface="Noto Sans CJK JP"/>
                           <a:cs typeface="Noto Sans"/>
                         </a:rPr>
-                        <a:t>スーパーは学校の東側なので、学校はスーパーの西側。公式注釈は一般常識の「その他」／1文。</a:t>
+                        <a:t>スーパーは学校の東側なので、学校はスーパーの西側。知識注釈は一般常識の「その他」／1文。</a:t>
                       </a:r>
                     </a:p>
                   </a:txBody>
@@ -32538,61 +30403,7 @@
       </p:graphicFrame>
       <p:sp>
         <p:nvSpPr>
-          <p:cNvPr id="5" name="TextBox 4"/>
-          <p:cNvSpPr txBox="1"/>
-          <p:nvPr/>
-        </p:nvSpPr>
-        <p:spPr>
-          <a:xfrm>
-            <a:off x="594360" y="3715384"/>
-            <a:ext cx="7955279" cy="658368"/>
-          </a:xfrm>
-          <a:prstGeom prst="rect">
-            <a:avLst/>
-          </a:prstGeom>
-          <a:noFill/>
-        </p:spPr>
-        <p:txBody>
-          <a:bodyPr wrap="square" lIns="0" rIns="0" tIns="0" bIns="0">
-            <a:noAutofit/>
-          </a:bodyPr>
-          <a:lstStyle/>
-          <a:p>
-            <a:pPr algn="l">
-              <a:lnSpc>
-                <a:spcPts val="1568"/>
-              </a:lnSpc>
-              <a:spcBef>
-                <a:spcPts val="0"/>
-              </a:spcBef>
-              <a:spcAft>
-                <a:spcPts val="0"/>
-              </a:spcAft>
-              <a:buNone/>
-              <a:defRPr sz="1400" b="0">
-                <a:solidFill>
-                  <a:srgbClr val="303437"/>
-                </a:solidFill>
-                <a:latin typeface="Noto Sans"/>
-              </a:defRPr>
-            </a:pPr>
-            <a:r>
-              <a:rPr sz="1400" b="0" lang="ja-JP" altLang="en-US">
-                <a:solidFill>
-                  <a:srgbClr val="303437"/>
-                </a:solidFill>
-                <a:latin typeface="Noto Sans"/>
-                <a:ea typeface="Noto Sans CJK JP"/>
-                <a:cs typeface="Noto Sans"/>
-              </a:rPr>
-              <a:t>「公式注釈」は公開された知識・支持文数の分類。実例1の説明は本資料による。</a:t>
-            </a:r>
-          </a:p>
-        </p:txBody>
-      </p:sp>
-      <p:sp>
-        <p:nvSpPr>
-          <p:cNvPr id="6" name="sources"/>
+          <p:cNvPr id="5" name="sources"/>
           <p:cNvSpPr txBox="1"/>
           <p:nvPr/>
         </p:nvSpPr>
@@ -32620,7 +30431,7 @@
                 <a:spcPts val="0"/>
               </a:spcBef>
               <a:spcAft>
-                <a:spcPts val="400"/>
+                <a:spcPts val="140"/>
               </a:spcAft>
               <a:buNone/>
               <a:defRPr sz="810" b="0">
@@ -32639,7 +30450,7 @@
                 <a:ea typeface="Noto Sans CJK JP"/>
                 <a:cs typeface="Noto Sans"/>
               </a:rPr>
-              <a:t>[1] Sun et al. C³ knowledge annotations, dev/test.</a:t>
+              <a:t>[1] Sun et al. C³ 知識注釈。</a:t>
             </a:r>
             <a:r>
               <a:rPr sz="810" b="0" lang="ja-JP" altLang="en-US">
@@ -32660,9 +30471,9 @@
                 <a:latin typeface="Noto Sans"/>
                 <a:ea typeface="Noto Sans CJK JP"/>
                 <a:cs typeface="Noto Sans"/>
-                <a:hlinkClick r:id="rId2"/>
-              </a:rPr>
-              <a:t>https://github.com/nlpdata/c3/tree/1f41682ebb684d63afe7c583c8f38e137fc8a826/annotation</a:t>
+                <a:hlinkClick r:id="rId3"/>
+              </a:rPr>
+              <a:t>https://github.com/nlpdata/c3/tree/master/annotation</a:t>
             </a:r>
           </a:p>
         </p:txBody>
@@ -32728,7 +30539,7 @@
                 <a:ea typeface="Noto Sans CJK JP"/>
                 <a:cs typeface="Noto Sans"/>
               </a:rPr>
-              <a:t>版・原位置・再現</a:t>
+              <a:t>データの読み方</a:t>
             </a:r>
           </a:p>
         </p:txBody>
@@ -32776,2899 +30587,7 @@
                 <a:ea typeface="Noto Sans CJK JP"/>
                 <a:cs typeface="Noto Sans"/>
               </a:rPr>
-              <a:t>Appendix: 2. 版・原位置・再現</a:t>
-            </a:r>
-          </a:p>
-        </p:txBody>
-      </p:sp>
-    </p:spTree>
-  </p:cSld>
-  <p:clrMapOvr>
-    <a:masterClrMapping/>
-  </p:clrMapOvr>
-</p:sld>
-</file>
-
-<file path=ppt/slides/slide53.xml><?xml version="1.0" encoding="utf-8"?>
-<p:sld xmlns:a="http://schemas.openxmlformats.org/drawingml/2006/main" xmlns:p="http://schemas.openxmlformats.org/presentationml/2006/main" xmlns:r="http://schemas.openxmlformats.org/officeDocument/2006/relationships">
-  <p:cSld>
-    <p:spTree>
-      <p:nvGrpSpPr>
-        <p:cNvPr id="1" name=""/>
-        <p:cNvGrpSpPr/>
-        <p:nvPr/>
-      </p:nvGrpSpPr>
-      <p:grpSpPr/>
-      <p:sp>
-        <p:nvSpPr>
-          <p:cNvPr id="2" name="Title 1"/>
-          <p:cNvSpPr>
-            <a:spLocks noGrp="1"/>
-          </p:cNvSpPr>
-          <p:nvPr>
-            <p:ph type="title"/>
-          </p:nvPr>
-        </p:nvSpPr>
-        <p:spPr>
-          <a:xfrm>
-            <a:off x="468172" y="650138"/>
-            <a:ext cx="8206740" cy="616305"/>
-          </a:xfrm>
-        </p:spPr>
-        <p:txBody>
-          <a:bodyPr wrap="square" lIns="0" rIns="0" tIns="0" bIns="0">
-            <a:noAutofit/>
-          </a:bodyPr>
-          <a:lstStyle/>
-          <a:p>
-            <a:pPr algn="l">
-              <a:lnSpc>
-                <a:spcPct val="110000"/>
-              </a:lnSpc>
-              <a:buNone/>
-              <a:defRPr sz="2800" b="0">
-                <a:solidFill>
-                  <a:srgbClr val="303437"/>
-                </a:solidFill>
-                <a:latin typeface="Noto Sans"/>
-              </a:defRPr>
-            </a:pPr>
-            <a:r>
-              <a:rPr sz="2800" b="1" lang="ja-JP" altLang="en-US">
-                <a:solidFill>
-                  <a:srgbClr val="303437"/>
-                </a:solidFill>
-                <a:latin typeface="Noto Sans"/>
-                <a:ea typeface="Noto Sans CJK JP"/>
-                <a:cs typeface="Noto Sans"/>
-              </a:rPr>
-              <a:t>13実例の公開位置を固定する</a:t>
-            </a:r>
-          </a:p>
-        </p:txBody>
-      </p:sp>
-      <p:sp>
-        <p:nvSpPr>
-          <p:cNvPr id="3" name="Title 2"/>
-          <p:cNvSpPr>
-            <a:spLocks noGrp="1"/>
-          </p:cNvSpPr>
-          <p:nvPr>
-            <p:ph type="title" idx="2"/>
-          </p:nvPr>
-        </p:nvSpPr>
-        <p:spPr>
-          <a:xfrm>
-            <a:off x="75895" y="0"/>
-            <a:ext cx="8115300" cy="480060"/>
-          </a:xfrm>
-        </p:spPr>
-        <p:txBody>
-          <a:bodyPr wrap="square" lIns="0" rIns="0" tIns="0" bIns="0" anchor="ctr">
-            <a:noAutofit/>
-          </a:bodyPr>
-          <a:lstStyle/>
-          <a:p>
-            <a:pPr algn="l">
-              <a:lnSpc>
-                <a:spcPct val="110000"/>
-              </a:lnSpc>
-              <a:buNone/>
-              <a:defRPr sz="1400" b="0">
-                <a:solidFill>
-                  <a:srgbClr val="303437"/>
-                </a:solidFill>
-                <a:latin typeface="Noto Sans"/>
-              </a:defRPr>
-            </a:pPr>
-            <a:r>
-              <a:rPr sz="1400" b="1" lang="ja-JP" altLang="en-US">
-                <a:solidFill>
-                  <a:srgbClr val="FFFEF8"/>
-                </a:solidFill>
-                <a:latin typeface="Noto Sans"/>
-                <a:ea typeface="Noto Sans CJK JP"/>
-                <a:cs typeface="Noto Sans"/>
-              </a:rPr>
-              <a:t>Appendix: 2. 版・原位置・再現</a:t>
-            </a:r>
-          </a:p>
-        </p:txBody>
-      </p:sp>
-      <p:graphicFrame>
-        <p:nvGraphicFramePr>
-          <p:cNvPr id="4" name="Table 3"/>
-          <p:cNvGraphicFramePr>
-            <a:graphicFrameLocks noGrp="1"/>
-          </p:cNvGraphicFramePr>
-          <p:nvPr/>
-        </p:nvGraphicFramePr>
-        <p:xfrm>
-          <a:off x="548640" y="1508760"/>
-          <a:ext cx="8046720" cy="2783840"/>
-        </p:xfrm>
-        <a:graphic>
-          <a:graphicData uri="http://schemas.openxmlformats.org/drawingml/2006/table">
-            <a:tbl>
-              <a:tblPr firstRow="0" bandRow="0"/>
-              <a:tblGrid>
-                <a:gridCol w="2194560"/>
-                <a:gridCol w="2926080"/>
-                <a:gridCol w="2926080"/>
-              </a:tblGrid>
-              <a:tr h="347980">
-                <a:tc>
-                  <a:txBody>
-                    <a:bodyPr wrap="square">
-                      <a:noAutofit/>
-                    </a:bodyPr>
-                    <a:lstStyle/>
-                    <a:p>
-                      <a:pPr algn="l">
-                        <a:lnSpc>
-                          <a:spcPts val="1839"/>
-                        </a:lnSpc>
-                        <a:buNone/>
-                        <a:defRPr sz="1600" b="0">
-                          <a:solidFill>
-                            <a:srgbClr val="303437"/>
-                          </a:solidFill>
-                          <a:latin typeface="Noto Sans"/>
-                        </a:defRPr>
-                      </a:pPr>
-                      <a:r>
-                        <a:rPr sz="1600" b="0" lang="ja-JP" altLang="en-US">
-                          <a:solidFill>
-                            <a:srgbClr val="303437"/>
-                          </a:solidFill>
-                          <a:latin typeface="Noto Sans"/>
-                          <a:ea typeface="Noto Sans CJK JP"/>
-                          <a:cs typeface="Noto Sans"/>
-                        </a:rPr>
-                        <a:t>実例 / 文書ID</a:t>
-                      </a:r>
-                    </a:p>
-                  </a:txBody>
-                  <a:tcPr marL="63500" marR="63500" marT="38100" marB="38100" anchor="ctr">
-                    <a:lnL w="7620">
-                      <a:noFill/>
-                    </a:lnL>
-                    <a:lnR w="7620">
-                      <a:noFill/>
-                    </a:lnR>
-                    <a:lnT w="15240">
-                      <a:solidFill>
-                        <a:srgbClr val="626669"/>
-                      </a:solidFill>
-                      <a:prstDash val="solid"/>
-                    </a:lnT>
-                    <a:lnB w="7620">
-                      <a:solidFill>
-                        <a:srgbClr val="626669"/>
-                      </a:solidFill>
-                      <a:prstDash val="solid"/>
-                    </a:lnB>
-                    <a:solidFill>
-                      <a:srgbClr val="FFFEF8"/>
-                    </a:solidFill>
-                  </a:tcPr>
-                </a:tc>
-                <a:tc>
-                  <a:txBody>
-                    <a:bodyPr wrap="square">
-                      <a:noAutofit/>
-                    </a:bodyPr>
-                    <a:lstStyle/>
-                    <a:p>
-                      <a:pPr algn="l">
-                        <a:lnSpc>
-                          <a:spcPts val="1839"/>
-                        </a:lnSpc>
-                        <a:buNone/>
-                        <a:defRPr sz="1600" b="0">
-                          <a:solidFill>
-                            <a:srgbClr val="303437"/>
-                          </a:solidFill>
-                          <a:latin typeface="Noto Sans"/>
-                        </a:defRPr>
-                      </a:pPr>
-                      <a:r>
-                        <a:rPr sz="1600" b="0" lang="ja-JP" altLang="en-US">
-                          <a:solidFill>
-                            <a:srgbClr val="303437"/>
-                          </a:solidFill>
-                          <a:latin typeface="Noto Sans"/>
-                          <a:ea typeface="Noto Sans CJK JP"/>
-                          <a:cs typeface="Noto Sans"/>
-                        </a:rPr>
-                        <a:t>ファイル</a:t>
-                      </a:r>
-                    </a:p>
-                  </a:txBody>
-                  <a:tcPr marL="63500" marR="63500" marT="38100" marB="38100" anchor="ctr">
-                    <a:lnL w="7620">
-                      <a:noFill/>
-                    </a:lnL>
-                    <a:lnR w="7620">
-                      <a:noFill/>
-                    </a:lnR>
-                    <a:lnT w="15240">
-                      <a:solidFill>
-                        <a:srgbClr val="626669"/>
-                      </a:solidFill>
-                      <a:prstDash val="solid"/>
-                    </a:lnT>
-                    <a:lnB w="7620">
-                      <a:solidFill>
-                        <a:srgbClr val="626669"/>
-                      </a:solidFill>
-                      <a:prstDash val="solid"/>
-                    </a:lnB>
-                    <a:solidFill>
-                      <a:srgbClr val="FFFEF8"/>
-                    </a:solidFill>
-                  </a:tcPr>
-                </a:tc>
-                <a:tc>
-                  <a:txBody>
-                    <a:bodyPr wrap="square">
-                      <a:noAutofit/>
-                    </a:bodyPr>
-                    <a:lstStyle/>
-                    <a:p>
-                      <a:pPr algn="r">
-                        <a:lnSpc>
-                          <a:spcPts val="1839"/>
-                        </a:lnSpc>
-                        <a:buNone/>
-                        <a:defRPr sz="1600" b="0">
-                          <a:solidFill>
-                            <a:srgbClr val="303437"/>
-                          </a:solidFill>
-                          <a:latin typeface="Noto Sans"/>
-                        </a:defRPr>
-                      </a:pPr>
-                      <a:r>
-                        <a:rPr sz="1600" b="0" lang="ja-JP" altLang="en-US">
-                          <a:solidFill>
-                            <a:srgbClr val="303437"/>
-                          </a:solidFill>
-                          <a:latin typeface="Noto Sans"/>
-                          <a:ea typeface="Noto Sans CJK JP"/>
-                          <a:cs typeface="Noto Sans"/>
-                        </a:rPr>
-                        <a:t>配列index / 質問index</a:t>
-                      </a:r>
-                    </a:p>
-                  </a:txBody>
-                  <a:tcPr marL="63500" marR="63500" marT="38100" marB="38100" anchor="ctr">
-                    <a:lnL w="7620">
-                      <a:noFill/>
-                    </a:lnL>
-                    <a:lnR w="7620">
-                      <a:noFill/>
-                    </a:lnR>
-                    <a:lnT w="15240">
-                      <a:solidFill>
-                        <a:srgbClr val="626669"/>
-                      </a:solidFill>
-                      <a:prstDash val="solid"/>
-                    </a:lnT>
-                    <a:lnB w="7620">
-                      <a:solidFill>
-                        <a:srgbClr val="626669"/>
-                      </a:solidFill>
-                      <a:prstDash val="solid"/>
-                    </a:lnB>
-                    <a:solidFill>
-                      <a:srgbClr val="FFFEF8"/>
-                    </a:solidFill>
-                  </a:tcPr>
-                </a:tc>
-              </a:tr>
-              <a:tr h="347980">
-                <a:tc>
-                  <a:txBody>
-                    <a:bodyPr wrap="square">
-                      <a:noAutofit/>
-                    </a:bodyPr>
-                    <a:lstStyle/>
-                    <a:p>
-                      <a:pPr algn="l">
-                        <a:lnSpc>
-                          <a:spcPts val="1839"/>
-                        </a:lnSpc>
-                        <a:buNone/>
-                        <a:defRPr sz="1600" b="0">
-                          <a:solidFill>
-                            <a:srgbClr val="303437"/>
-                          </a:solidFill>
-                          <a:latin typeface="Noto Sans"/>
-                        </a:defRPr>
-                      </a:pPr>
-                      <a:r>
-                        <a:rPr sz="1600" b="0" lang="ja-JP" altLang="en-US">
-                          <a:solidFill>
-                            <a:srgbClr val="303437"/>
-                          </a:solidFill>
-                          <a:latin typeface="Noto Sans"/>
-                          <a:ea typeface="Noto Sans CJK JP"/>
-                          <a:cs typeface="Noto Sans"/>
-                        </a:rPr>
-                        <a:t>1 / 37-153</a:t>
-                      </a:r>
-                    </a:p>
-                  </a:txBody>
-                  <a:tcPr marL="63500" marR="63500" marT="38100" marB="38100" anchor="ctr">
-                    <a:lnL w="7620">
-                      <a:noFill/>
-                    </a:lnL>
-                    <a:lnR w="7620">
-                      <a:noFill/>
-                    </a:lnR>
-                    <a:lnT w="7620">
-                      <a:solidFill>
-                        <a:srgbClr val="626669"/>
-                      </a:solidFill>
-                      <a:prstDash val="solid"/>
-                    </a:lnT>
-                    <a:lnB w="7620">
-                      <a:noFill/>
-                    </a:lnB>
-                    <a:solidFill>
-                      <a:srgbClr val="FFFEF8"/>
-                    </a:solidFill>
-                  </a:tcPr>
-                </a:tc>
-                <a:tc>
-                  <a:txBody>
-                    <a:bodyPr wrap="square">
-                      <a:noAutofit/>
-                    </a:bodyPr>
-                    <a:lstStyle/>
-                    <a:p>
-                      <a:pPr algn="l">
-                        <a:lnSpc>
-                          <a:spcPts val="1839"/>
-                        </a:lnSpc>
-                        <a:buNone/>
-                        <a:defRPr sz="1600" b="0">
-                          <a:solidFill>
-                            <a:srgbClr val="303437"/>
-                          </a:solidFill>
-                          <a:latin typeface="Noto Sans"/>
-                        </a:defRPr>
-                      </a:pPr>
-                      <a:r>
-                        <a:rPr sz="1600" b="0" lang="ja-JP" altLang="en-US">
-                          <a:solidFill>
-                            <a:srgbClr val="303437"/>
-                          </a:solidFill>
-                          <a:latin typeface="Noto Sans"/>
-                          <a:ea typeface="Noto Sans CJK JP"/>
-                          <a:cs typeface="Noto Sans"/>
-                        </a:rPr>
-                        <a:t>c3-d-train.json</a:t>
-                      </a:r>
-                    </a:p>
-                  </a:txBody>
-                  <a:tcPr marL="63500" marR="63500" marT="38100" marB="38100" anchor="ctr">
-                    <a:lnL w="7620">
-                      <a:noFill/>
-                    </a:lnL>
-                    <a:lnR w="7620">
-                      <a:noFill/>
-                    </a:lnR>
-                    <a:lnT w="7620">
-                      <a:solidFill>
-                        <a:srgbClr val="626669"/>
-                      </a:solidFill>
-                      <a:prstDash val="solid"/>
-                    </a:lnT>
-                    <a:lnB w="7620">
-                      <a:noFill/>
-                    </a:lnB>
-                    <a:solidFill>
-                      <a:srgbClr val="FFFEF8"/>
-                    </a:solidFill>
-                  </a:tcPr>
-                </a:tc>
-                <a:tc>
-                  <a:txBody>
-                    <a:bodyPr wrap="square">
-                      <a:noAutofit/>
-                    </a:bodyPr>
-                    <a:lstStyle/>
-                    <a:p>
-                      <a:pPr algn="r">
-                        <a:lnSpc>
-                          <a:spcPts val="1839"/>
-                        </a:lnSpc>
-                        <a:buNone/>
-                        <a:defRPr sz="1600" b="0">
-                          <a:solidFill>
-                            <a:srgbClr val="303437"/>
-                          </a:solidFill>
-                          <a:latin typeface="Noto Sans"/>
-                        </a:defRPr>
-                      </a:pPr>
-                      <a:r>
-                        <a:rPr sz="1600" b="0" lang="ja-JP" altLang="en-US">
-                          <a:solidFill>
-                            <a:srgbClr val="303437"/>
-                          </a:solidFill>
-                          <a:latin typeface="Noto Sans"/>
-                          <a:ea typeface="Noto Sans CJK JP"/>
-                          <a:cs typeface="Noto Sans"/>
-                        </a:rPr>
-                        <a:t>941 / 0</a:t>
-                      </a:r>
-                    </a:p>
-                  </a:txBody>
-                  <a:tcPr marL="63500" marR="63500" marT="38100" marB="38100" anchor="ctr">
-                    <a:lnL w="7620">
-                      <a:noFill/>
-                    </a:lnL>
-                    <a:lnR w="7620">
-                      <a:noFill/>
-                    </a:lnR>
-                    <a:lnT w="7620">
-                      <a:solidFill>
-                        <a:srgbClr val="626669"/>
-                      </a:solidFill>
-                      <a:prstDash val="solid"/>
-                    </a:lnT>
-                    <a:lnB w="7620">
-                      <a:noFill/>
-                    </a:lnB>
-                    <a:solidFill>
-                      <a:srgbClr val="FFFEF8"/>
-                    </a:solidFill>
-                  </a:tcPr>
-                </a:tc>
-              </a:tr>
-              <a:tr h="347980">
-                <a:tc>
-                  <a:txBody>
-                    <a:bodyPr wrap="square">
-                      <a:noAutofit/>
-                    </a:bodyPr>
-                    <a:lstStyle/>
-                    <a:p>
-                      <a:pPr algn="l">
-                        <a:lnSpc>
-                          <a:spcPts val="1839"/>
-                        </a:lnSpc>
-                        <a:buNone/>
-                        <a:defRPr sz="1600" b="0">
-                          <a:solidFill>
-                            <a:srgbClr val="303437"/>
-                          </a:solidFill>
-                          <a:latin typeface="Noto Sans"/>
-                        </a:defRPr>
-                      </a:pPr>
-                      <a:r>
-                        <a:rPr sz="1600" b="0" lang="ja-JP" altLang="en-US">
-                          <a:solidFill>
-                            <a:srgbClr val="303437"/>
-                          </a:solidFill>
-                          <a:latin typeface="Noto Sans"/>
-                          <a:ea typeface="Noto Sans CJK JP"/>
-                          <a:cs typeface="Noto Sans"/>
-                        </a:rPr>
-                        <a:t>2 / 11-67</a:t>
-                      </a:r>
-                    </a:p>
-                  </a:txBody>
-                  <a:tcPr marL="63500" marR="63500" marT="38100" marB="38100" anchor="ctr">
-                    <a:lnL w="7620">
-                      <a:noFill/>
-                    </a:lnL>
-                    <a:lnR w="7620">
-                      <a:noFill/>
-                    </a:lnR>
-                    <a:lnT w="7620">
-                      <a:noFill/>
-                    </a:lnT>
-                    <a:lnB w="7620">
-                      <a:noFill/>
-                    </a:lnB>
-                    <a:solidFill>
-                      <a:srgbClr val="FFFEF8"/>
-                    </a:solidFill>
-                  </a:tcPr>
-                </a:tc>
-                <a:tc>
-                  <a:txBody>
-                    <a:bodyPr wrap="square">
-                      <a:noAutofit/>
-                    </a:bodyPr>
-                    <a:lstStyle/>
-                    <a:p>
-                      <a:pPr algn="l">
-                        <a:lnSpc>
-                          <a:spcPts val="1839"/>
-                        </a:lnSpc>
-                        <a:buNone/>
-                        <a:defRPr sz="1600" b="0">
-                          <a:solidFill>
-                            <a:srgbClr val="303437"/>
-                          </a:solidFill>
-                          <a:latin typeface="Noto Sans"/>
-                        </a:defRPr>
-                      </a:pPr>
-                      <a:r>
-                        <a:rPr sz="1600" b="0" lang="ja-JP" altLang="en-US">
-                          <a:solidFill>
-                            <a:srgbClr val="303437"/>
-                          </a:solidFill>
-                          <a:latin typeface="Noto Sans"/>
-                          <a:ea typeface="Noto Sans CJK JP"/>
-                          <a:cs typeface="Noto Sans"/>
-                        </a:rPr>
-                        <a:t>c3-m-dev.json</a:t>
-                      </a:r>
-                    </a:p>
-                  </a:txBody>
-                  <a:tcPr marL="63500" marR="63500" marT="38100" marB="38100" anchor="ctr">
-                    <a:lnL w="7620">
-                      <a:noFill/>
-                    </a:lnL>
-                    <a:lnR w="7620">
-                      <a:noFill/>
-                    </a:lnR>
-                    <a:lnT w="7620">
-                      <a:noFill/>
-                    </a:lnT>
-                    <a:lnB w="7620">
-                      <a:noFill/>
-                    </a:lnB>
-                    <a:solidFill>
-                      <a:srgbClr val="FFFEF8"/>
-                    </a:solidFill>
-                  </a:tcPr>
-                </a:tc>
-                <a:tc>
-                  <a:txBody>
-                    <a:bodyPr wrap="square">
-                      <a:noAutofit/>
-                    </a:bodyPr>
-                    <a:lstStyle/>
-                    <a:p>
-                      <a:pPr algn="r">
-                        <a:lnSpc>
-                          <a:spcPts val="1839"/>
-                        </a:lnSpc>
-                        <a:buNone/>
-                        <a:defRPr sz="1600" b="0">
-                          <a:solidFill>
-                            <a:srgbClr val="303437"/>
-                          </a:solidFill>
-                          <a:latin typeface="Noto Sans"/>
-                        </a:defRPr>
-                      </a:pPr>
-                      <a:r>
-                        <a:rPr sz="1600" b="0" lang="ja-JP" altLang="en-US">
-                          <a:solidFill>
-                            <a:srgbClr val="303437"/>
-                          </a:solidFill>
-                          <a:latin typeface="Noto Sans"/>
-                          <a:ea typeface="Noto Sans CJK JP"/>
-                          <a:cs typeface="Noto Sans"/>
-                        </a:rPr>
-                        <a:t>0 / 0</a:t>
-                      </a:r>
-                    </a:p>
-                  </a:txBody>
-                  <a:tcPr marL="63500" marR="63500" marT="38100" marB="38100" anchor="ctr">
-                    <a:lnL w="7620">
-                      <a:noFill/>
-                    </a:lnL>
-                    <a:lnR w="7620">
-                      <a:noFill/>
-                    </a:lnR>
-                    <a:lnT w="7620">
-                      <a:noFill/>
-                    </a:lnT>
-                    <a:lnB w="7620">
-                      <a:noFill/>
-                    </a:lnB>
-                    <a:solidFill>
-                      <a:srgbClr val="FFFEF8"/>
-                    </a:solidFill>
-                  </a:tcPr>
-                </a:tc>
-              </a:tr>
-              <a:tr h="347980">
-                <a:tc>
-                  <a:txBody>
-                    <a:bodyPr wrap="square">
-                      <a:noAutofit/>
-                    </a:bodyPr>
-                    <a:lstStyle/>
-                    <a:p>
-                      <a:pPr algn="l">
-                        <a:lnSpc>
-                          <a:spcPts val="1839"/>
-                        </a:lnSpc>
-                        <a:buNone/>
-                        <a:defRPr sz="1600" b="0">
-                          <a:solidFill>
-                            <a:srgbClr val="303437"/>
-                          </a:solidFill>
-                          <a:latin typeface="Noto Sans"/>
-                        </a:defRPr>
-                      </a:pPr>
-                      <a:r>
-                        <a:rPr sz="1600" b="0" lang="ja-JP" altLang="en-US">
-                          <a:solidFill>
-                            <a:srgbClr val="303437"/>
-                          </a:solidFill>
-                          <a:latin typeface="Noto Sans"/>
-                          <a:ea typeface="Noto Sans CJK JP"/>
-                          <a:cs typeface="Noto Sans"/>
-                        </a:rPr>
-                        <a:t>3 / 9-120</a:t>
-                      </a:r>
-                    </a:p>
-                  </a:txBody>
-                  <a:tcPr marL="63500" marR="63500" marT="38100" marB="38100" anchor="ctr">
-                    <a:lnL w="7620">
-                      <a:noFill/>
-                    </a:lnL>
-                    <a:lnR w="7620">
-                      <a:noFill/>
-                    </a:lnR>
-                    <a:lnT w="7620">
-                      <a:noFill/>
-                    </a:lnT>
-                    <a:lnB w="7620">
-                      <a:noFill/>
-                    </a:lnB>
-                    <a:solidFill>
-                      <a:srgbClr val="FFFEF8"/>
-                    </a:solidFill>
-                  </a:tcPr>
-                </a:tc>
-                <a:tc>
-                  <a:txBody>
-                    <a:bodyPr wrap="square">
-                      <a:noAutofit/>
-                    </a:bodyPr>
-                    <a:lstStyle/>
-                    <a:p>
-                      <a:pPr algn="l">
-                        <a:lnSpc>
-                          <a:spcPts val="1839"/>
-                        </a:lnSpc>
-                        <a:buNone/>
-                        <a:defRPr sz="1600" b="0">
-                          <a:solidFill>
-                            <a:srgbClr val="303437"/>
-                          </a:solidFill>
-                          <a:latin typeface="Noto Sans"/>
-                        </a:defRPr>
-                      </a:pPr>
-                      <a:r>
-                        <a:rPr sz="1600" b="0" lang="ja-JP" altLang="en-US">
-                          <a:solidFill>
-                            <a:srgbClr val="303437"/>
-                          </a:solidFill>
-                          <a:latin typeface="Noto Sans"/>
-                          <a:ea typeface="Noto Sans CJK JP"/>
-                          <a:cs typeface="Noto Sans"/>
-                        </a:rPr>
-                        <a:t>c3-m-test.json</a:t>
-                      </a:r>
-                    </a:p>
-                  </a:txBody>
-                  <a:tcPr marL="63500" marR="63500" marT="38100" marB="38100" anchor="ctr">
-                    <a:lnL w="7620">
-                      <a:noFill/>
-                    </a:lnL>
-                    <a:lnR w="7620">
-                      <a:noFill/>
-                    </a:lnR>
-                    <a:lnT w="7620">
-                      <a:noFill/>
-                    </a:lnT>
-                    <a:lnB w="7620">
-                      <a:noFill/>
-                    </a:lnB>
-                    <a:solidFill>
-                      <a:srgbClr val="FFFEF8"/>
-                    </a:solidFill>
-                  </a:tcPr>
-                </a:tc>
-                <a:tc>
-                  <a:txBody>
-                    <a:bodyPr wrap="square">
-                      <a:noAutofit/>
-                    </a:bodyPr>
-                    <a:lstStyle/>
-                    <a:p>
-                      <a:pPr algn="r">
-                        <a:lnSpc>
-                          <a:spcPts val="1839"/>
-                        </a:lnSpc>
-                        <a:buNone/>
-                        <a:defRPr sz="1600" b="0">
-                          <a:solidFill>
-                            <a:srgbClr val="303437"/>
-                          </a:solidFill>
-                          <a:latin typeface="Noto Sans"/>
-                        </a:defRPr>
-                      </a:pPr>
-                      <a:r>
-                        <a:rPr sz="1600" b="0" lang="ja-JP" altLang="en-US">
-                          <a:solidFill>
-                            <a:srgbClr val="303437"/>
-                          </a:solidFill>
-                          <a:latin typeface="Noto Sans"/>
-                          <a:ea typeface="Noto Sans CJK JP"/>
-                          <a:cs typeface="Noto Sans"/>
-                        </a:rPr>
-                        <a:t>12 / 0</a:t>
-                      </a:r>
-                    </a:p>
-                  </a:txBody>
-                  <a:tcPr marL="63500" marR="63500" marT="38100" marB="38100" anchor="ctr">
-                    <a:lnL w="7620">
-                      <a:noFill/>
-                    </a:lnL>
-                    <a:lnR w="7620">
-                      <a:noFill/>
-                    </a:lnR>
-                    <a:lnT w="7620">
-                      <a:noFill/>
-                    </a:lnT>
-                    <a:lnB w="7620">
-                      <a:noFill/>
-                    </a:lnB>
-                    <a:solidFill>
-                      <a:srgbClr val="FFFEF8"/>
-                    </a:solidFill>
-                  </a:tcPr>
-                </a:tc>
-              </a:tr>
-              <a:tr h="347980">
-                <a:tc>
-                  <a:txBody>
-                    <a:bodyPr wrap="square">
-                      <a:noAutofit/>
-                    </a:bodyPr>
-                    <a:lstStyle/>
-                    <a:p>
-                      <a:pPr algn="l">
-                        <a:lnSpc>
-                          <a:spcPts val="1839"/>
-                        </a:lnSpc>
-                        <a:buNone/>
-                        <a:defRPr sz="1600" b="0">
-                          <a:solidFill>
-                            <a:srgbClr val="303437"/>
-                          </a:solidFill>
-                          <a:latin typeface="Noto Sans"/>
-                        </a:defRPr>
-                      </a:pPr>
-                      <a:r>
-                        <a:rPr sz="1600" b="0" lang="ja-JP" altLang="en-US">
-                          <a:solidFill>
-                            <a:srgbClr val="303437"/>
-                          </a:solidFill>
-                          <a:latin typeface="Noto Sans"/>
-                          <a:ea typeface="Noto Sans CJK JP"/>
-                          <a:cs typeface="Noto Sans"/>
-                        </a:rPr>
-                        <a:t>4 / 11-30</a:t>
-                      </a:r>
-                    </a:p>
-                  </a:txBody>
-                  <a:tcPr marL="63500" marR="63500" marT="38100" marB="38100" anchor="ctr">
-                    <a:lnL w="7620">
-                      <a:noFill/>
-                    </a:lnL>
-                    <a:lnR w="7620">
-                      <a:noFill/>
-                    </a:lnR>
-                    <a:lnT w="7620">
-                      <a:noFill/>
-                    </a:lnT>
-                    <a:lnB w="7620">
-                      <a:noFill/>
-                    </a:lnB>
-                    <a:solidFill>
-                      <a:srgbClr val="FFFEF8"/>
-                    </a:solidFill>
-                  </a:tcPr>
-                </a:tc>
-                <a:tc>
-                  <a:txBody>
-                    <a:bodyPr wrap="square">
-                      <a:noAutofit/>
-                    </a:bodyPr>
-                    <a:lstStyle/>
-                    <a:p>
-                      <a:pPr algn="l">
-                        <a:lnSpc>
-                          <a:spcPts val="1839"/>
-                        </a:lnSpc>
-                        <a:buNone/>
-                        <a:defRPr sz="1600" b="0">
-                          <a:solidFill>
-                            <a:srgbClr val="303437"/>
-                          </a:solidFill>
-                          <a:latin typeface="Noto Sans"/>
-                        </a:defRPr>
-                      </a:pPr>
-                      <a:r>
-                        <a:rPr sz="1600" b="0" lang="ja-JP" altLang="en-US">
-                          <a:solidFill>
-                            <a:srgbClr val="303437"/>
-                          </a:solidFill>
-                          <a:latin typeface="Noto Sans"/>
-                          <a:ea typeface="Noto Sans CJK JP"/>
-                          <a:cs typeface="Noto Sans"/>
-                        </a:rPr>
-                        <a:t>c3-d-dev.json</a:t>
-                      </a:r>
-                    </a:p>
-                  </a:txBody>
-                  <a:tcPr marL="63500" marR="63500" marT="38100" marB="38100" anchor="ctr">
-                    <a:lnL w="7620">
-                      <a:noFill/>
-                    </a:lnL>
-                    <a:lnR w="7620">
-                      <a:noFill/>
-                    </a:lnR>
-                    <a:lnT w="7620">
-                      <a:noFill/>
-                    </a:lnT>
-                    <a:lnB w="7620">
-                      <a:noFill/>
-                    </a:lnB>
-                    <a:solidFill>
-                      <a:srgbClr val="FFFEF8"/>
-                    </a:solidFill>
-                  </a:tcPr>
-                </a:tc>
-                <a:tc>
-                  <a:txBody>
-                    <a:bodyPr wrap="square">
-                      <a:noAutofit/>
-                    </a:bodyPr>
-                    <a:lstStyle/>
-                    <a:p>
-                      <a:pPr algn="r">
-                        <a:lnSpc>
-                          <a:spcPts val="1839"/>
-                        </a:lnSpc>
-                        <a:buNone/>
-                        <a:defRPr sz="1600" b="0">
-                          <a:solidFill>
-                            <a:srgbClr val="303437"/>
-                          </a:solidFill>
-                          <a:latin typeface="Noto Sans"/>
-                        </a:defRPr>
-                      </a:pPr>
-                      <a:r>
-                        <a:rPr sz="1600" b="0" lang="ja-JP" altLang="en-US">
-                          <a:solidFill>
-                            <a:srgbClr val="303437"/>
-                          </a:solidFill>
-                          <a:latin typeface="Noto Sans"/>
-                          <a:ea typeface="Noto Sans CJK JP"/>
-                          <a:cs typeface="Noto Sans"/>
-                        </a:rPr>
-                        <a:t>2 / 0</a:t>
-                      </a:r>
-                    </a:p>
-                  </a:txBody>
-                  <a:tcPr marL="63500" marR="63500" marT="38100" marB="38100" anchor="ctr">
-                    <a:lnL w="7620">
-                      <a:noFill/>
-                    </a:lnL>
-                    <a:lnR w="7620">
-                      <a:noFill/>
-                    </a:lnR>
-                    <a:lnT w="7620">
-                      <a:noFill/>
-                    </a:lnT>
-                    <a:lnB w="7620">
-                      <a:noFill/>
-                    </a:lnB>
-                    <a:solidFill>
-                      <a:srgbClr val="FFFEF8"/>
-                    </a:solidFill>
-                  </a:tcPr>
-                </a:tc>
-              </a:tr>
-              <a:tr h="347980">
-                <a:tc>
-                  <a:txBody>
-                    <a:bodyPr wrap="square">
-                      <a:noAutofit/>
-                    </a:bodyPr>
-                    <a:lstStyle/>
-                    <a:p>
-                      <a:pPr algn="l">
-                        <a:lnSpc>
-                          <a:spcPts val="1839"/>
-                        </a:lnSpc>
-                        <a:buNone/>
-                        <a:defRPr sz="1600" b="0">
-                          <a:solidFill>
-                            <a:srgbClr val="303437"/>
-                          </a:solidFill>
-                          <a:latin typeface="Noto Sans"/>
-                        </a:defRPr>
-                      </a:pPr>
-                      <a:r>
-                        <a:rPr sz="1600" b="0" lang="ja-JP" altLang="en-US">
-                          <a:solidFill>
-                            <a:srgbClr val="303437"/>
-                          </a:solidFill>
-                          <a:latin typeface="Noto Sans"/>
-                          <a:ea typeface="Noto Sans CJK JP"/>
-                          <a:cs typeface="Noto Sans"/>
-                        </a:rPr>
-                        <a:t>5 / 11-57</a:t>
-                      </a:r>
-                    </a:p>
-                  </a:txBody>
-                  <a:tcPr marL="63500" marR="63500" marT="38100" marB="38100" anchor="ctr">
-                    <a:lnL w="7620">
-                      <a:noFill/>
-                    </a:lnL>
-                    <a:lnR w="7620">
-                      <a:noFill/>
-                    </a:lnR>
-                    <a:lnT w="7620">
-                      <a:noFill/>
-                    </a:lnT>
-                    <a:lnB w="7620">
-                      <a:noFill/>
-                    </a:lnB>
-                    <a:solidFill>
-                      <a:srgbClr val="FFFEF8"/>
-                    </a:solidFill>
-                  </a:tcPr>
-                </a:tc>
-                <a:tc>
-                  <a:txBody>
-                    <a:bodyPr wrap="square">
-                      <a:noAutofit/>
-                    </a:bodyPr>
-                    <a:lstStyle/>
-                    <a:p>
-                      <a:pPr algn="l">
-                        <a:lnSpc>
-                          <a:spcPts val="1839"/>
-                        </a:lnSpc>
-                        <a:buNone/>
-                        <a:defRPr sz="1600" b="0">
-                          <a:solidFill>
-                            <a:srgbClr val="303437"/>
-                          </a:solidFill>
-                          <a:latin typeface="Noto Sans"/>
-                        </a:defRPr>
-                      </a:pPr>
-                      <a:r>
-                        <a:rPr sz="1600" b="0" lang="ja-JP" altLang="en-US">
-                          <a:solidFill>
-                            <a:srgbClr val="303437"/>
-                          </a:solidFill>
-                          <a:latin typeface="Noto Sans"/>
-                          <a:ea typeface="Noto Sans CJK JP"/>
-                          <a:cs typeface="Noto Sans"/>
-                        </a:rPr>
-                        <a:t>c3-d-dev.json</a:t>
-                      </a:r>
-                    </a:p>
-                  </a:txBody>
-                  <a:tcPr marL="63500" marR="63500" marT="38100" marB="38100" anchor="ctr">
-                    <a:lnL w="7620">
-                      <a:noFill/>
-                    </a:lnL>
-                    <a:lnR w="7620">
-                      <a:noFill/>
-                    </a:lnR>
-                    <a:lnT w="7620">
-                      <a:noFill/>
-                    </a:lnT>
-                    <a:lnB w="7620">
-                      <a:noFill/>
-                    </a:lnB>
-                    <a:solidFill>
-                      <a:srgbClr val="FFFEF8"/>
-                    </a:solidFill>
-                  </a:tcPr>
-                </a:tc>
-                <a:tc>
-                  <a:txBody>
-                    <a:bodyPr wrap="square">
-                      <a:noAutofit/>
-                    </a:bodyPr>
-                    <a:lstStyle/>
-                    <a:p>
-                      <a:pPr algn="r">
-                        <a:lnSpc>
-                          <a:spcPts val="1839"/>
-                        </a:lnSpc>
-                        <a:buNone/>
-                        <a:defRPr sz="1600" b="0">
-                          <a:solidFill>
-                            <a:srgbClr val="303437"/>
-                          </a:solidFill>
-                          <a:latin typeface="Noto Sans"/>
-                        </a:defRPr>
-                      </a:pPr>
-                      <a:r>
-                        <a:rPr sz="1600" b="0" lang="ja-JP" altLang="en-US">
-                          <a:solidFill>
-                            <a:srgbClr val="303437"/>
-                          </a:solidFill>
-                          <a:latin typeface="Noto Sans"/>
-                          <a:ea typeface="Noto Sans CJK JP"/>
-                          <a:cs typeface="Noto Sans"/>
-                        </a:rPr>
-                        <a:t>1 / 0</a:t>
-                      </a:r>
-                    </a:p>
-                  </a:txBody>
-                  <a:tcPr marL="63500" marR="63500" marT="38100" marB="38100" anchor="ctr">
-                    <a:lnL w="7620">
-                      <a:noFill/>
-                    </a:lnL>
-                    <a:lnR w="7620">
-                      <a:noFill/>
-                    </a:lnR>
-                    <a:lnT w="7620">
-                      <a:noFill/>
-                    </a:lnT>
-                    <a:lnB w="7620">
-                      <a:noFill/>
-                    </a:lnB>
-                    <a:solidFill>
-                      <a:srgbClr val="FFFEF8"/>
-                    </a:solidFill>
-                  </a:tcPr>
-                </a:tc>
-              </a:tr>
-              <a:tr h="347980">
-                <a:tc>
-                  <a:txBody>
-                    <a:bodyPr wrap="square">
-                      <a:noAutofit/>
-                    </a:bodyPr>
-                    <a:lstStyle/>
-                    <a:p>
-                      <a:pPr algn="l">
-                        <a:lnSpc>
-                          <a:spcPts val="1839"/>
-                        </a:lnSpc>
-                        <a:buNone/>
-                        <a:defRPr sz="1600" b="0">
-                          <a:solidFill>
-                            <a:srgbClr val="303437"/>
-                          </a:solidFill>
-                          <a:latin typeface="Noto Sans"/>
-                        </a:defRPr>
-                      </a:pPr>
-                      <a:r>
-                        <a:rPr sz="1600" b="0" lang="ja-JP" altLang="en-US">
-                          <a:solidFill>
-                            <a:srgbClr val="303437"/>
-                          </a:solidFill>
-                          <a:latin typeface="Noto Sans"/>
-                          <a:ea typeface="Noto Sans CJK JP"/>
-                          <a:cs typeface="Noto Sans"/>
-                        </a:rPr>
-                        <a:t>6 / 17-3</a:t>
-                      </a:r>
-                    </a:p>
-                  </a:txBody>
-                  <a:tcPr marL="63500" marR="63500" marT="38100" marB="38100" anchor="ctr">
-                    <a:lnL w="7620">
-                      <a:noFill/>
-                    </a:lnL>
-                    <a:lnR w="7620">
-                      <a:noFill/>
-                    </a:lnR>
-                    <a:lnT w="7620">
-                      <a:noFill/>
-                    </a:lnT>
-                    <a:lnB w="7620">
-                      <a:noFill/>
-                    </a:lnB>
-                    <a:solidFill>
-                      <a:srgbClr val="FFFEF8"/>
-                    </a:solidFill>
-                  </a:tcPr>
-                </a:tc>
-                <a:tc>
-                  <a:txBody>
-                    <a:bodyPr wrap="square">
-                      <a:noAutofit/>
-                    </a:bodyPr>
-                    <a:lstStyle/>
-                    <a:p>
-                      <a:pPr algn="l">
-                        <a:lnSpc>
-                          <a:spcPts val="1839"/>
-                        </a:lnSpc>
-                        <a:buNone/>
-                        <a:defRPr sz="1600" b="0">
-                          <a:solidFill>
-                            <a:srgbClr val="303437"/>
-                          </a:solidFill>
-                          <a:latin typeface="Noto Sans"/>
-                        </a:defRPr>
-                      </a:pPr>
-                      <a:r>
-                        <a:rPr sz="1600" b="0" lang="ja-JP" altLang="en-US">
-                          <a:solidFill>
-                            <a:srgbClr val="303437"/>
-                          </a:solidFill>
-                          <a:latin typeface="Noto Sans"/>
-                          <a:ea typeface="Noto Sans CJK JP"/>
-                          <a:cs typeface="Noto Sans"/>
-                        </a:rPr>
-                        <a:t>c3-d-dev.json</a:t>
-                      </a:r>
-                    </a:p>
-                  </a:txBody>
-                  <a:tcPr marL="63500" marR="63500" marT="38100" marB="38100" anchor="ctr">
-                    <a:lnL w="7620">
-                      <a:noFill/>
-                    </a:lnL>
-                    <a:lnR w="7620">
-                      <a:noFill/>
-                    </a:lnR>
-                    <a:lnT w="7620">
-                      <a:noFill/>
-                    </a:lnT>
-                    <a:lnB w="7620">
-                      <a:noFill/>
-                    </a:lnB>
-                    <a:solidFill>
-                      <a:srgbClr val="FFFEF8"/>
-                    </a:solidFill>
-                  </a:tcPr>
-                </a:tc>
-                <a:tc>
-                  <a:txBody>
-                    <a:bodyPr wrap="square">
-                      <a:noAutofit/>
-                    </a:bodyPr>
-                    <a:lstStyle/>
-                    <a:p>
-                      <a:pPr algn="r">
-                        <a:lnSpc>
-                          <a:spcPts val="1839"/>
-                        </a:lnSpc>
-                        <a:buNone/>
-                        <a:defRPr sz="1600" b="0">
-                          <a:solidFill>
-                            <a:srgbClr val="303437"/>
-                          </a:solidFill>
-                          <a:latin typeface="Noto Sans"/>
-                        </a:defRPr>
-                      </a:pPr>
-                      <a:r>
-                        <a:rPr sz="1600" b="0" lang="ja-JP" altLang="en-US">
-                          <a:solidFill>
-                            <a:srgbClr val="303437"/>
-                          </a:solidFill>
-                          <a:latin typeface="Noto Sans"/>
-                          <a:ea typeface="Noto Sans CJK JP"/>
-                          <a:cs typeface="Noto Sans"/>
-                        </a:rPr>
-                        <a:t>3 / 0</a:t>
-                      </a:r>
-                    </a:p>
-                  </a:txBody>
-                  <a:tcPr marL="63500" marR="63500" marT="38100" marB="38100" anchor="ctr">
-                    <a:lnL w="7620">
-                      <a:noFill/>
-                    </a:lnL>
-                    <a:lnR w="7620">
-                      <a:noFill/>
-                    </a:lnR>
-                    <a:lnT w="7620">
-                      <a:noFill/>
-                    </a:lnT>
-                    <a:lnB w="7620">
-                      <a:noFill/>
-                    </a:lnB>
-                    <a:solidFill>
-                      <a:srgbClr val="FFFEF8"/>
-                    </a:solidFill>
-                  </a:tcPr>
-                </a:tc>
-              </a:tr>
-              <a:tr h="347980">
-                <a:tc>
-                  <a:txBody>
-                    <a:bodyPr wrap="square">
-                      <a:noAutofit/>
-                    </a:bodyPr>
-                    <a:lstStyle/>
-                    <a:p>
-                      <a:pPr algn="l">
-                        <a:lnSpc>
-                          <a:spcPts val="1839"/>
-                        </a:lnSpc>
-                        <a:buNone/>
-                        <a:defRPr sz="1600" b="0">
-                          <a:solidFill>
-                            <a:srgbClr val="303437"/>
-                          </a:solidFill>
-                          <a:latin typeface="Noto Sans"/>
-                        </a:defRPr>
-                      </a:pPr>
-                      <a:r>
-                        <a:rPr sz="1600" b="0" lang="ja-JP" altLang="en-US">
-                          <a:solidFill>
-                            <a:srgbClr val="303437"/>
-                          </a:solidFill>
-                          <a:latin typeface="Noto Sans"/>
-                          <a:ea typeface="Noto Sans CJK JP"/>
-                          <a:cs typeface="Noto Sans"/>
-                        </a:rPr>
-                        <a:t>7 / 28-8</a:t>
-                      </a:r>
-                    </a:p>
-                  </a:txBody>
-                  <a:tcPr marL="63500" marR="63500" marT="38100" marB="38100" anchor="ctr">
-                    <a:lnL w="7620">
-                      <a:noFill/>
-                    </a:lnL>
-                    <a:lnR w="7620">
-                      <a:noFill/>
-                    </a:lnR>
-                    <a:lnT w="7620">
-                      <a:noFill/>
-                    </a:lnT>
-                    <a:lnB w="15240">
-                      <a:solidFill>
-                        <a:srgbClr val="626669"/>
-                      </a:solidFill>
-                      <a:prstDash val="solid"/>
-                    </a:lnB>
-                    <a:solidFill>
-                      <a:srgbClr val="FFFEF8"/>
-                    </a:solidFill>
-                  </a:tcPr>
-                </a:tc>
-                <a:tc>
-                  <a:txBody>
-                    <a:bodyPr wrap="square">
-                      <a:noAutofit/>
-                    </a:bodyPr>
-                    <a:lstStyle/>
-                    <a:p>
-                      <a:pPr algn="l">
-                        <a:lnSpc>
-                          <a:spcPts val="1839"/>
-                        </a:lnSpc>
-                        <a:buNone/>
-                        <a:defRPr sz="1600" b="0">
-                          <a:solidFill>
-                            <a:srgbClr val="303437"/>
-                          </a:solidFill>
-                          <a:latin typeface="Noto Sans"/>
-                        </a:defRPr>
-                      </a:pPr>
-                      <a:r>
-                        <a:rPr sz="1600" b="0" lang="ja-JP" altLang="en-US">
-                          <a:solidFill>
-                            <a:srgbClr val="303437"/>
-                          </a:solidFill>
-                          <a:latin typeface="Noto Sans"/>
-                          <a:ea typeface="Noto Sans CJK JP"/>
-                          <a:cs typeface="Noto Sans"/>
-                        </a:rPr>
-                        <a:t>c3-d-dev.json</a:t>
-                      </a:r>
-                    </a:p>
-                  </a:txBody>
-                  <a:tcPr marL="63500" marR="63500" marT="38100" marB="38100" anchor="ctr">
-                    <a:lnL w="7620">
-                      <a:noFill/>
-                    </a:lnL>
-                    <a:lnR w="7620">
-                      <a:noFill/>
-                    </a:lnR>
-                    <a:lnT w="7620">
-                      <a:noFill/>
-                    </a:lnT>
-                    <a:lnB w="15240">
-                      <a:solidFill>
-                        <a:srgbClr val="626669"/>
-                      </a:solidFill>
-                      <a:prstDash val="solid"/>
-                    </a:lnB>
-                    <a:solidFill>
-                      <a:srgbClr val="FFFEF8"/>
-                    </a:solidFill>
-                  </a:tcPr>
-                </a:tc>
-                <a:tc>
-                  <a:txBody>
-                    <a:bodyPr wrap="square">
-                      <a:noAutofit/>
-                    </a:bodyPr>
-                    <a:lstStyle/>
-                    <a:p>
-                      <a:pPr algn="r">
-                        <a:lnSpc>
-                          <a:spcPts val="1839"/>
-                        </a:lnSpc>
-                        <a:buNone/>
-                        <a:defRPr sz="1600" b="0">
-                          <a:solidFill>
-                            <a:srgbClr val="303437"/>
-                          </a:solidFill>
-                          <a:latin typeface="Noto Sans"/>
-                        </a:defRPr>
-                      </a:pPr>
-                      <a:r>
-                        <a:rPr sz="1600" b="0" lang="ja-JP" altLang="en-US">
-                          <a:solidFill>
-                            <a:srgbClr val="303437"/>
-                          </a:solidFill>
-                          <a:latin typeface="Noto Sans"/>
-                          <a:ea typeface="Noto Sans CJK JP"/>
-                          <a:cs typeface="Noto Sans"/>
-                        </a:rPr>
-                        <a:t>6 / 0</a:t>
-                      </a:r>
-                    </a:p>
-                  </a:txBody>
-                  <a:tcPr marL="63500" marR="63500" marT="38100" marB="38100" anchor="ctr">
-                    <a:lnL w="7620">
-                      <a:noFill/>
-                    </a:lnL>
-                    <a:lnR w="7620">
-                      <a:noFill/>
-                    </a:lnR>
-                    <a:lnT w="7620">
-                      <a:noFill/>
-                    </a:lnT>
-                    <a:lnB w="15240">
-                      <a:solidFill>
-                        <a:srgbClr val="626669"/>
-                      </a:solidFill>
-                      <a:prstDash val="solid"/>
-                    </a:lnB>
-                    <a:solidFill>
-                      <a:srgbClr val="FFFEF8"/>
-                    </a:solidFill>
-                  </a:tcPr>
-                </a:tc>
-              </a:tr>
-            </a:tbl>
-          </a:graphicData>
-        </a:graphic>
-      </p:graphicFrame>
-      <p:sp>
-        <p:nvSpPr>
-          <p:cNvPr id="5" name="TextBox 4"/>
-          <p:cNvSpPr txBox="1"/>
-          <p:nvPr/>
-        </p:nvSpPr>
-        <p:spPr>
-          <a:xfrm>
-            <a:off x="594360" y="4384040"/>
-            <a:ext cx="7955279" cy="658368"/>
-          </a:xfrm>
-          <a:prstGeom prst="rect">
-            <a:avLst/>
-          </a:prstGeom>
-          <a:noFill/>
-        </p:spPr>
-        <p:txBody>
-          <a:bodyPr wrap="square" lIns="0" rIns="0" tIns="0" bIns="0">
-            <a:noAutofit/>
-          </a:bodyPr>
-          <a:lstStyle/>
-          <a:p>
-            <a:pPr algn="l">
-              <a:lnSpc>
-                <a:spcPts val="1568"/>
-              </a:lnSpc>
-              <a:spcBef>
-                <a:spcPts val="0"/>
-              </a:spcBef>
-              <a:spcAft>
-                <a:spcPts val="0"/>
-              </a:spcAft>
-              <a:buNone/>
-              <a:defRPr sz="1400" b="0">
-                <a:solidFill>
-                  <a:srgbClr val="303437"/>
-                </a:solidFill>
-                <a:latin typeface="Noto Sans"/>
-              </a:defRPr>
-            </a:pPr>
-            <a:r>
-              <a:rPr sz="1400" b="0" lang="ja-JP" altLang="en-US">
-                <a:solidFill>
-                  <a:srgbClr val="303437"/>
-                </a:solidFill>
-                <a:latin typeface="Noto Sans"/>
-                <a:ea typeface="Noto Sans CJK JP"/>
-                <a:cs typeface="Noto Sans"/>
-              </a:rPr>
-              <a:t>indexは0起算。固定commit 1f41682…、各ファイルSHA256と原レコードを付属記録へ保存。</a:t>
-            </a:r>
-          </a:p>
-        </p:txBody>
-      </p:sp>
-      <p:sp>
-        <p:nvSpPr>
-          <p:cNvPr id="6" name="sources"/>
-          <p:cNvSpPr txBox="1"/>
-          <p:nvPr/>
-        </p:nvSpPr>
-        <p:spPr>
-          <a:xfrm>
-            <a:off x="502920" y="4700016"/>
-            <a:ext cx="8183879" cy="530352"/>
-          </a:xfrm>
-          <a:prstGeom prst="rect">
-            <a:avLst/>
-          </a:prstGeom>
-          <a:noFill/>
-        </p:spPr>
-        <p:txBody>
-          <a:bodyPr wrap="square" lIns="0" rIns="0" tIns="0" bIns="0">
-            <a:noAutofit/>
-          </a:bodyPr>
-          <a:lstStyle/>
-          <a:p>
-            <a:pPr algn="l">
-              <a:lnSpc>
-                <a:spcPts val="940"/>
-              </a:lnSpc>
-              <a:spcBef>
-                <a:spcPts val="0"/>
-              </a:spcBef>
-              <a:spcAft>
-                <a:spcPts val="400"/>
-              </a:spcAft>
-              <a:buNone/>
-              <a:defRPr sz="810" b="0">
-                <a:solidFill>
-                  <a:srgbClr val="303437"/>
-                </a:solidFill>
-                <a:latin typeface="Noto Sans"/>
-              </a:defRPr>
-            </a:pPr>
-            <a:r>
-              <a:rPr sz="810" b="0" lang="ja-JP" altLang="en-US">
-                <a:solidFill>
-                  <a:srgbClr val="626669"/>
-                </a:solidFill>
-                <a:latin typeface="Noto Sans"/>
-                <a:ea typeface="Noto Sans CJK JP"/>
-                <a:cs typeface="Noto Sans"/>
-              </a:rPr>
-              <a:t>[1] Sun et al. C³ official repository. commit 1f41682e.</a:t>
-            </a:r>
-            <a:r>
-              <a:rPr sz="810" b="0" lang="ja-JP" altLang="en-US">
-                <a:solidFill>
-                  <a:srgbClr val="626669"/>
-                </a:solidFill>
-                <a:latin typeface="Noto Sans"/>
-                <a:ea typeface="Noto Sans CJK JP"/>
-                <a:cs typeface="Noto Sans"/>
-              </a:rPr>
-              <a:t>  </a:t>
-            </a:r>
-            <a:r>
-              <a:rPr sz="810" b="0" lang="ja-JP" altLang="en-US">
-                <a:solidFill>
-                  <a:srgbClr val="626669"/>
-                </a:solidFill>
-                <a:latin typeface="Noto Sans"/>
-                <a:ea typeface="Noto Sans CJK JP"/>
-                <a:cs typeface="Noto Sans"/>
-                <a:hlinkClick r:id="rId2"/>
-              </a:rPr>
-              <a:t>https://github.com/nlpdata/c3</a:t>
-            </a:r>
-          </a:p>
-        </p:txBody>
-      </p:sp>
-    </p:spTree>
-  </p:cSld>
-  <p:clrMapOvr>
-    <a:masterClrMapping/>
-  </p:clrMapOvr>
-</p:sld>
-</file>
-
-<file path=ppt/slides/slide54.xml><?xml version="1.0" encoding="utf-8"?>
-<p:sld xmlns:a="http://schemas.openxmlformats.org/drawingml/2006/main" xmlns:p="http://schemas.openxmlformats.org/presentationml/2006/main" xmlns:r="http://schemas.openxmlformats.org/officeDocument/2006/relationships">
-  <p:cSld>
-    <p:spTree>
-      <p:nvGrpSpPr>
-        <p:cNvPr id="1" name=""/>
-        <p:cNvGrpSpPr/>
-        <p:nvPr/>
-      </p:nvGrpSpPr>
-      <p:grpSpPr/>
-      <p:sp>
-        <p:nvSpPr>
-          <p:cNvPr id="2" name="Title 1"/>
-          <p:cNvSpPr>
-            <a:spLocks noGrp="1"/>
-          </p:cNvSpPr>
-          <p:nvPr>
-            <p:ph type="title"/>
-          </p:nvPr>
-        </p:nvSpPr>
-        <p:spPr>
-          <a:xfrm>
-            <a:off x="468172" y="650138"/>
-            <a:ext cx="8206740" cy="616305"/>
-          </a:xfrm>
-        </p:spPr>
-        <p:txBody>
-          <a:bodyPr wrap="square" lIns="0" rIns="0" tIns="0" bIns="0">
-            <a:noAutofit/>
-          </a:bodyPr>
-          <a:lstStyle/>
-          <a:p>
-            <a:pPr algn="l">
-              <a:lnSpc>
-                <a:spcPct val="110000"/>
-              </a:lnSpc>
-              <a:buNone/>
-              <a:defRPr sz="2800" b="0">
-                <a:solidFill>
-                  <a:srgbClr val="303437"/>
-                </a:solidFill>
-                <a:latin typeface="Noto Sans"/>
-              </a:defRPr>
-            </a:pPr>
-            <a:r>
-              <a:rPr sz="2800" b="1" lang="ja-JP" altLang="en-US">
-                <a:solidFill>
-                  <a:srgbClr val="303437"/>
-                </a:solidFill>
-                <a:latin typeface="Noto Sans"/>
-                <a:ea typeface="Noto Sans CJK JP"/>
-                <a:cs typeface="Noto Sans"/>
-              </a:rPr>
-              <a:t>13実例の公開位置を固定する</a:t>
-            </a:r>
-          </a:p>
-        </p:txBody>
-      </p:sp>
-      <p:sp>
-        <p:nvSpPr>
-          <p:cNvPr id="3" name="Title 2"/>
-          <p:cNvSpPr>
-            <a:spLocks noGrp="1"/>
-          </p:cNvSpPr>
-          <p:nvPr>
-            <p:ph type="title" idx="2"/>
-          </p:nvPr>
-        </p:nvSpPr>
-        <p:spPr>
-          <a:xfrm>
-            <a:off x="75895" y="0"/>
-            <a:ext cx="8115300" cy="480060"/>
-          </a:xfrm>
-        </p:spPr>
-        <p:txBody>
-          <a:bodyPr wrap="square" lIns="0" rIns="0" tIns="0" bIns="0" anchor="ctr">
-            <a:noAutofit/>
-          </a:bodyPr>
-          <a:lstStyle/>
-          <a:p>
-            <a:pPr algn="l">
-              <a:lnSpc>
-                <a:spcPct val="110000"/>
-              </a:lnSpc>
-              <a:buNone/>
-              <a:defRPr sz="1400" b="0">
-                <a:solidFill>
-                  <a:srgbClr val="303437"/>
-                </a:solidFill>
-                <a:latin typeface="Noto Sans"/>
-              </a:defRPr>
-            </a:pPr>
-            <a:r>
-              <a:rPr sz="1400" b="1" lang="ja-JP" altLang="en-US">
-                <a:solidFill>
-                  <a:srgbClr val="FFFEF8"/>
-                </a:solidFill>
-                <a:latin typeface="Noto Sans"/>
-                <a:ea typeface="Noto Sans CJK JP"/>
-                <a:cs typeface="Noto Sans"/>
-              </a:rPr>
-              <a:t>Appendix: 2. 版・原位置・再現</a:t>
-            </a:r>
-          </a:p>
-        </p:txBody>
-      </p:sp>
-      <p:graphicFrame>
-        <p:nvGraphicFramePr>
-          <p:cNvPr id="4" name="Table 3"/>
-          <p:cNvGraphicFramePr>
-            <a:graphicFrameLocks noGrp="1"/>
-          </p:cNvGraphicFramePr>
-          <p:nvPr/>
-        </p:nvGraphicFramePr>
-        <p:xfrm>
-          <a:off x="548640" y="1508760"/>
-          <a:ext cx="8046720" cy="2435860"/>
-        </p:xfrm>
-        <a:graphic>
-          <a:graphicData uri="http://schemas.openxmlformats.org/drawingml/2006/table">
-            <a:tbl>
-              <a:tblPr firstRow="0" bandRow="0"/>
-              <a:tblGrid>
-                <a:gridCol w="2194560"/>
-                <a:gridCol w="2926080"/>
-                <a:gridCol w="2926080"/>
-              </a:tblGrid>
-              <a:tr h="347980">
-                <a:tc>
-                  <a:txBody>
-                    <a:bodyPr wrap="square">
-                      <a:noAutofit/>
-                    </a:bodyPr>
-                    <a:lstStyle/>
-                    <a:p>
-                      <a:pPr algn="l">
-                        <a:lnSpc>
-                          <a:spcPts val="1839"/>
-                        </a:lnSpc>
-                        <a:buNone/>
-                        <a:defRPr sz="1600" b="0">
-                          <a:solidFill>
-                            <a:srgbClr val="303437"/>
-                          </a:solidFill>
-                          <a:latin typeface="Noto Sans"/>
-                        </a:defRPr>
-                      </a:pPr>
-                      <a:r>
-                        <a:rPr sz="1600" b="0" lang="ja-JP" altLang="en-US">
-                          <a:solidFill>
-                            <a:srgbClr val="303437"/>
-                          </a:solidFill>
-                          <a:latin typeface="Noto Sans"/>
-                          <a:ea typeface="Noto Sans CJK JP"/>
-                          <a:cs typeface="Noto Sans"/>
-                        </a:rPr>
-                        <a:t>実例 / 文書ID</a:t>
-                      </a:r>
-                    </a:p>
-                  </a:txBody>
-                  <a:tcPr marL="63500" marR="63500" marT="38100" marB="38100" anchor="ctr">
-                    <a:lnL w="7620">
-                      <a:noFill/>
-                    </a:lnL>
-                    <a:lnR w="7620">
-                      <a:noFill/>
-                    </a:lnR>
-                    <a:lnT w="15240">
-                      <a:solidFill>
-                        <a:srgbClr val="626669"/>
-                      </a:solidFill>
-                      <a:prstDash val="solid"/>
-                    </a:lnT>
-                    <a:lnB w="7620">
-                      <a:solidFill>
-                        <a:srgbClr val="626669"/>
-                      </a:solidFill>
-                      <a:prstDash val="solid"/>
-                    </a:lnB>
-                    <a:solidFill>
-                      <a:srgbClr val="FFFEF8"/>
-                    </a:solidFill>
-                  </a:tcPr>
-                </a:tc>
-                <a:tc>
-                  <a:txBody>
-                    <a:bodyPr wrap="square">
-                      <a:noAutofit/>
-                    </a:bodyPr>
-                    <a:lstStyle/>
-                    <a:p>
-                      <a:pPr algn="l">
-                        <a:lnSpc>
-                          <a:spcPts val="1839"/>
-                        </a:lnSpc>
-                        <a:buNone/>
-                        <a:defRPr sz="1600" b="0">
-                          <a:solidFill>
-                            <a:srgbClr val="303437"/>
-                          </a:solidFill>
-                          <a:latin typeface="Noto Sans"/>
-                        </a:defRPr>
-                      </a:pPr>
-                      <a:r>
-                        <a:rPr sz="1600" b="0" lang="ja-JP" altLang="en-US">
-                          <a:solidFill>
-                            <a:srgbClr val="303437"/>
-                          </a:solidFill>
-                          <a:latin typeface="Noto Sans"/>
-                          <a:ea typeface="Noto Sans CJK JP"/>
-                          <a:cs typeface="Noto Sans"/>
-                        </a:rPr>
-                        <a:t>ファイル</a:t>
-                      </a:r>
-                    </a:p>
-                  </a:txBody>
-                  <a:tcPr marL="63500" marR="63500" marT="38100" marB="38100" anchor="ctr">
-                    <a:lnL w="7620">
-                      <a:noFill/>
-                    </a:lnL>
-                    <a:lnR w="7620">
-                      <a:noFill/>
-                    </a:lnR>
-                    <a:lnT w="15240">
-                      <a:solidFill>
-                        <a:srgbClr val="626669"/>
-                      </a:solidFill>
-                      <a:prstDash val="solid"/>
-                    </a:lnT>
-                    <a:lnB w="7620">
-                      <a:solidFill>
-                        <a:srgbClr val="626669"/>
-                      </a:solidFill>
-                      <a:prstDash val="solid"/>
-                    </a:lnB>
-                    <a:solidFill>
-                      <a:srgbClr val="FFFEF8"/>
-                    </a:solidFill>
-                  </a:tcPr>
-                </a:tc>
-                <a:tc>
-                  <a:txBody>
-                    <a:bodyPr wrap="square">
-                      <a:noAutofit/>
-                    </a:bodyPr>
-                    <a:lstStyle/>
-                    <a:p>
-                      <a:pPr algn="r">
-                        <a:lnSpc>
-                          <a:spcPts val="1839"/>
-                        </a:lnSpc>
-                        <a:buNone/>
-                        <a:defRPr sz="1600" b="0">
-                          <a:solidFill>
-                            <a:srgbClr val="303437"/>
-                          </a:solidFill>
-                          <a:latin typeface="Noto Sans"/>
-                        </a:defRPr>
-                      </a:pPr>
-                      <a:r>
-                        <a:rPr sz="1600" b="0" lang="ja-JP" altLang="en-US">
-                          <a:solidFill>
-                            <a:srgbClr val="303437"/>
-                          </a:solidFill>
-                          <a:latin typeface="Noto Sans"/>
-                          <a:ea typeface="Noto Sans CJK JP"/>
-                          <a:cs typeface="Noto Sans"/>
-                        </a:rPr>
-                        <a:t>配列index / 質問index</a:t>
-                      </a:r>
-                    </a:p>
-                  </a:txBody>
-                  <a:tcPr marL="63500" marR="63500" marT="38100" marB="38100" anchor="ctr">
-                    <a:lnL w="7620">
-                      <a:noFill/>
-                    </a:lnL>
-                    <a:lnR w="7620">
-                      <a:noFill/>
-                    </a:lnR>
-                    <a:lnT w="15240">
-                      <a:solidFill>
-                        <a:srgbClr val="626669"/>
-                      </a:solidFill>
-                      <a:prstDash val="solid"/>
-                    </a:lnT>
-                    <a:lnB w="7620">
-                      <a:solidFill>
-                        <a:srgbClr val="626669"/>
-                      </a:solidFill>
-                      <a:prstDash val="solid"/>
-                    </a:lnB>
-                    <a:solidFill>
-                      <a:srgbClr val="FFFEF8"/>
-                    </a:solidFill>
-                  </a:tcPr>
-                </a:tc>
-              </a:tr>
-              <a:tr h="347980">
-                <a:tc>
-                  <a:txBody>
-                    <a:bodyPr wrap="square">
-                      <a:noAutofit/>
-                    </a:bodyPr>
-                    <a:lstStyle/>
-                    <a:p>
-                      <a:pPr algn="l">
-                        <a:lnSpc>
-                          <a:spcPts val="1839"/>
-                        </a:lnSpc>
-                        <a:buNone/>
-                        <a:defRPr sz="1600" b="0">
-                          <a:solidFill>
-                            <a:srgbClr val="303437"/>
-                          </a:solidFill>
-                          <a:latin typeface="Noto Sans"/>
-                        </a:defRPr>
-                      </a:pPr>
-                      <a:r>
-                        <a:rPr sz="1600" b="0" lang="ja-JP" altLang="en-US">
-                          <a:solidFill>
-                            <a:srgbClr val="303437"/>
-                          </a:solidFill>
-                          <a:latin typeface="Noto Sans"/>
-                          <a:ea typeface="Noto Sans CJK JP"/>
-                          <a:cs typeface="Noto Sans"/>
-                        </a:rPr>
-                        <a:t>8 / 37-120</a:t>
-                      </a:r>
-                    </a:p>
-                  </a:txBody>
-                  <a:tcPr marL="63500" marR="63500" marT="38100" marB="38100" anchor="ctr">
-                    <a:lnL w="7620">
-                      <a:noFill/>
-                    </a:lnL>
-                    <a:lnR w="7620">
-                      <a:noFill/>
-                    </a:lnR>
-                    <a:lnT w="7620">
-                      <a:solidFill>
-                        <a:srgbClr val="626669"/>
-                      </a:solidFill>
-                      <a:prstDash val="solid"/>
-                    </a:lnT>
-                    <a:lnB w="7620">
-                      <a:noFill/>
-                    </a:lnB>
-                    <a:solidFill>
-                      <a:srgbClr val="FFFEF8"/>
-                    </a:solidFill>
-                  </a:tcPr>
-                </a:tc>
-                <a:tc>
-                  <a:txBody>
-                    <a:bodyPr wrap="square">
-                      <a:noAutofit/>
-                    </a:bodyPr>
-                    <a:lstStyle/>
-                    <a:p>
-                      <a:pPr algn="l">
-                        <a:lnSpc>
-                          <a:spcPts val="1839"/>
-                        </a:lnSpc>
-                        <a:buNone/>
-                        <a:defRPr sz="1600" b="0">
-                          <a:solidFill>
-                            <a:srgbClr val="303437"/>
-                          </a:solidFill>
-                          <a:latin typeface="Noto Sans"/>
-                        </a:defRPr>
-                      </a:pPr>
-                      <a:r>
-                        <a:rPr sz="1600" b="0" lang="ja-JP" altLang="en-US">
-                          <a:solidFill>
-                            <a:srgbClr val="303437"/>
-                          </a:solidFill>
-                          <a:latin typeface="Noto Sans"/>
-                          <a:ea typeface="Noto Sans CJK JP"/>
-                          <a:cs typeface="Noto Sans"/>
-                        </a:rPr>
-                        <a:t>c3-d-dev.json</a:t>
-                      </a:r>
-                    </a:p>
-                  </a:txBody>
-                  <a:tcPr marL="63500" marR="63500" marT="38100" marB="38100" anchor="ctr">
-                    <a:lnL w="7620">
-                      <a:noFill/>
-                    </a:lnL>
-                    <a:lnR w="7620">
-                      <a:noFill/>
-                    </a:lnR>
-                    <a:lnT w="7620">
-                      <a:solidFill>
-                        <a:srgbClr val="626669"/>
-                      </a:solidFill>
-                      <a:prstDash val="solid"/>
-                    </a:lnT>
-                    <a:lnB w="7620">
-                      <a:noFill/>
-                    </a:lnB>
-                    <a:solidFill>
-                      <a:srgbClr val="FFFEF8"/>
-                    </a:solidFill>
-                  </a:tcPr>
-                </a:tc>
-                <a:tc>
-                  <a:txBody>
-                    <a:bodyPr wrap="square">
-                      <a:noAutofit/>
-                    </a:bodyPr>
-                    <a:lstStyle/>
-                    <a:p>
-                      <a:pPr algn="r">
-                        <a:lnSpc>
-                          <a:spcPts val="1839"/>
-                        </a:lnSpc>
-                        <a:buNone/>
-                        <a:defRPr sz="1600" b="0">
-                          <a:solidFill>
-                            <a:srgbClr val="303437"/>
-                          </a:solidFill>
-                          <a:latin typeface="Noto Sans"/>
-                        </a:defRPr>
-                      </a:pPr>
-                      <a:r>
-                        <a:rPr sz="1600" b="0" lang="ja-JP" altLang="en-US">
-                          <a:solidFill>
-                            <a:srgbClr val="303437"/>
-                          </a:solidFill>
-                          <a:latin typeface="Noto Sans"/>
-                          <a:ea typeface="Noto Sans CJK JP"/>
-                          <a:cs typeface="Noto Sans"/>
-                        </a:rPr>
-                        <a:t>11 / 0</a:t>
-                      </a:r>
-                    </a:p>
-                  </a:txBody>
-                  <a:tcPr marL="63500" marR="63500" marT="38100" marB="38100" anchor="ctr">
-                    <a:lnL w="7620">
-                      <a:noFill/>
-                    </a:lnL>
-                    <a:lnR w="7620">
-                      <a:noFill/>
-                    </a:lnR>
-                    <a:lnT w="7620">
-                      <a:solidFill>
-                        <a:srgbClr val="626669"/>
-                      </a:solidFill>
-                      <a:prstDash val="solid"/>
-                    </a:lnT>
-                    <a:lnB w="7620">
-                      <a:noFill/>
-                    </a:lnB>
-                    <a:solidFill>
-                      <a:srgbClr val="FFFEF8"/>
-                    </a:solidFill>
-                  </a:tcPr>
-                </a:tc>
-              </a:tr>
-              <a:tr h="347980">
-                <a:tc>
-                  <a:txBody>
-                    <a:bodyPr wrap="square">
-                      <a:noAutofit/>
-                    </a:bodyPr>
-                    <a:lstStyle/>
-                    <a:p>
-                      <a:pPr algn="l">
-                        <a:lnSpc>
-                          <a:spcPts val="1839"/>
-                        </a:lnSpc>
-                        <a:buNone/>
-                        <a:defRPr sz="1600" b="0">
-                          <a:solidFill>
-                            <a:srgbClr val="303437"/>
-                          </a:solidFill>
-                          <a:latin typeface="Noto Sans"/>
-                        </a:defRPr>
-                      </a:pPr>
-                      <a:r>
-                        <a:rPr sz="1600" b="0" lang="ja-JP" altLang="en-US">
-                          <a:solidFill>
-                            <a:srgbClr val="303437"/>
-                          </a:solidFill>
-                          <a:latin typeface="Noto Sans"/>
-                          <a:ea typeface="Noto Sans CJK JP"/>
-                          <a:cs typeface="Noto Sans"/>
-                        </a:rPr>
-                        <a:t>9 / 8-707</a:t>
-                      </a:r>
-                    </a:p>
-                  </a:txBody>
-                  <a:tcPr marL="63500" marR="63500" marT="38100" marB="38100" anchor="ctr">
-                    <a:lnL w="7620">
-                      <a:noFill/>
-                    </a:lnL>
-                    <a:lnR w="7620">
-                      <a:noFill/>
-                    </a:lnR>
-                    <a:lnT w="7620">
-                      <a:noFill/>
-                    </a:lnT>
-                    <a:lnB w="7620">
-                      <a:noFill/>
-                    </a:lnB>
-                    <a:solidFill>
-                      <a:srgbClr val="FFFEF8"/>
-                    </a:solidFill>
-                  </a:tcPr>
-                </a:tc>
-                <a:tc>
-                  <a:txBody>
-                    <a:bodyPr wrap="square">
-                      <a:noAutofit/>
-                    </a:bodyPr>
-                    <a:lstStyle/>
-                    <a:p>
-                      <a:pPr algn="l">
-                        <a:lnSpc>
-                          <a:spcPts val="1839"/>
-                        </a:lnSpc>
-                        <a:buNone/>
-                        <a:defRPr sz="1600" b="0">
-                          <a:solidFill>
-                            <a:srgbClr val="303437"/>
-                          </a:solidFill>
-                          <a:latin typeface="Noto Sans"/>
-                        </a:defRPr>
-                      </a:pPr>
-                      <a:r>
-                        <a:rPr sz="1600" b="0" lang="ja-JP" altLang="en-US">
-                          <a:solidFill>
-                            <a:srgbClr val="303437"/>
-                          </a:solidFill>
-                          <a:latin typeface="Noto Sans"/>
-                          <a:ea typeface="Noto Sans CJK JP"/>
-                          <a:cs typeface="Noto Sans"/>
-                        </a:rPr>
-                        <a:t>c3-m-dev.json</a:t>
-                      </a:r>
-                    </a:p>
-                  </a:txBody>
-                  <a:tcPr marL="63500" marR="63500" marT="38100" marB="38100" anchor="ctr">
-                    <a:lnL w="7620">
-                      <a:noFill/>
-                    </a:lnL>
-                    <a:lnR w="7620">
-                      <a:noFill/>
-                    </a:lnR>
-                    <a:lnT w="7620">
-                      <a:noFill/>
-                    </a:lnT>
-                    <a:lnB w="7620">
-                      <a:noFill/>
-                    </a:lnB>
-                    <a:solidFill>
-                      <a:srgbClr val="FFFEF8"/>
-                    </a:solidFill>
-                  </a:tcPr>
-                </a:tc>
-                <a:tc>
-                  <a:txBody>
-                    <a:bodyPr wrap="square">
-                      <a:noAutofit/>
-                    </a:bodyPr>
-                    <a:lstStyle/>
-                    <a:p>
-                      <a:pPr algn="r">
-                        <a:lnSpc>
-                          <a:spcPts val="1839"/>
-                        </a:lnSpc>
-                        <a:buNone/>
-                        <a:defRPr sz="1600" b="0">
-                          <a:solidFill>
-                            <a:srgbClr val="303437"/>
-                          </a:solidFill>
-                          <a:latin typeface="Noto Sans"/>
-                        </a:defRPr>
-                      </a:pPr>
-                      <a:r>
-                        <a:rPr sz="1600" b="0" lang="ja-JP" altLang="en-US">
-                          <a:solidFill>
-                            <a:srgbClr val="303437"/>
-                          </a:solidFill>
-                          <a:latin typeface="Noto Sans"/>
-                          <a:ea typeface="Noto Sans CJK JP"/>
-                          <a:cs typeface="Noto Sans"/>
-                        </a:rPr>
-                        <a:t>1 / 0</a:t>
-                      </a:r>
-                    </a:p>
-                  </a:txBody>
-                  <a:tcPr marL="63500" marR="63500" marT="38100" marB="38100" anchor="ctr">
-                    <a:lnL w="7620">
-                      <a:noFill/>
-                    </a:lnL>
-                    <a:lnR w="7620">
-                      <a:noFill/>
-                    </a:lnR>
-                    <a:lnT w="7620">
-                      <a:noFill/>
-                    </a:lnT>
-                    <a:lnB w="7620">
-                      <a:noFill/>
-                    </a:lnB>
-                    <a:solidFill>
-                      <a:srgbClr val="FFFEF8"/>
-                    </a:solidFill>
-                  </a:tcPr>
-                </a:tc>
-              </a:tr>
-              <a:tr h="347980">
-                <a:tc>
-                  <a:txBody>
-                    <a:bodyPr wrap="square">
-                      <a:noAutofit/>
-                    </a:bodyPr>
-                    <a:lstStyle/>
-                    <a:p>
-                      <a:pPr algn="l">
-                        <a:lnSpc>
-                          <a:spcPts val="1839"/>
-                        </a:lnSpc>
-                        <a:buNone/>
-                        <a:defRPr sz="1600" b="0">
-                          <a:solidFill>
-                            <a:srgbClr val="303437"/>
-                          </a:solidFill>
-                          <a:latin typeface="Noto Sans"/>
-                        </a:defRPr>
-                      </a:pPr>
-                      <a:r>
-                        <a:rPr sz="1600" b="0" lang="ja-JP" altLang="en-US">
-                          <a:solidFill>
-                            <a:srgbClr val="303437"/>
-                          </a:solidFill>
-                          <a:latin typeface="Noto Sans"/>
-                          <a:ea typeface="Noto Sans CJK JP"/>
-                          <a:cs typeface="Noto Sans"/>
-                        </a:rPr>
-                        <a:t>10 / 8-160</a:t>
-                      </a:r>
-                    </a:p>
-                  </a:txBody>
-                  <a:tcPr marL="63500" marR="63500" marT="38100" marB="38100" anchor="ctr">
-                    <a:lnL w="7620">
-                      <a:noFill/>
-                    </a:lnL>
-                    <a:lnR w="7620">
-                      <a:noFill/>
-                    </a:lnR>
-                    <a:lnT w="7620">
-                      <a:noFill/>
-                    </a:lnT>
-                    <a:lnB w="7620">
-                      <a:noFill/>
-                    </a:lnB>
-                    <a:solidFill>
-                      <a:srgbClr val="FFFEF8"/>
-                    </a:solidFill>
-                  </a:tcPr>
-                </a:tc>
-                <a:tc>
-                  <a:txBody>
-                    <a:bodyPr wrap="square">
-                      <a:noAutofit/>
-                    </a:bodyPr>
-                    <a:lstStyle/>
-                    <a:p>
-                      <a:pPr algn="l">
-                        <a:lnSpc>
-                          <a:spcPts val="1839"/>
-                        </a:lnSpc>
-                        <a:buNone/>
-                        <a:defRPr sz="1600" b="0">
-                          <a:solidFill>
-                            <a:srgbClr val="303437"/>
-                          </a:solidFill>
-                          <a:latin typeface="Noto Sans"/>
-                        </a:defRPr>
-                      </a:pPr>
-                      <a:r>
-                        <a:rPr sz="1600" b="0" lang="ja-JP" altLang="en-US">
-                          <a:solidFill>
-                            <a:srgbClr val="303437"/>
-                          </a:solidFill>
-                          <a:latin typeface="Noto Sans"/>
-                          <a:ea typeface="Noto Sans CJK JP"/>
-                          <a:cs typeface="Noto Sans"/>
-                        </a:rPr>
-                        <a:t>c3-m-dev.json</a:t>
-                      </a:r>
-                    </a:p>
-                  </a:txBody>
-                  <a:tcPr marL="63500" marR="63500" marT="38100" marB="38100" anchor="ctr">
-                    <a:lnL w="7620">
-                      <a:noFill/>
-                    </a:lnL>
-                    <a:lnR w="7620">
-                      <a:noFill/>
-                    </a:lnR>
-                    <a:lnT w="7620">
-                      <a:noFill/>
-                    </a:lnT>
-                    <a:lnB w="7620">
-                      <a:noFill/>
-                    </a:lnB>
-                    <a:solidFill>
-                      <a:srgbClr val="FFFEF8"/>
-                    </a:solidFill>
-                  </a:tcPr>
-                </a:tc>
-                <a:tc>
-                  <a:txBody>
-                    <a:bodyPr wrap="square">
-                      <a:noAutofit/>
-                    </a:bodyPr>
-                    <a:lstStyle/>
-                    <a:p>
-                      <a:pPr algn="r">
-                        <a:lnSpc>
-                          <a:spcPts val="1839"/>
-                        </a:lnSpc>
-                        <a:buNone/>
-                        <a:defRPr sz="1600" b="0">
-                          <a:solidFill>
-                            <a:srgbClr val="303437"/>
-                          </a:solidFill>
-                          <a:latin typeface="Noto Sans"/>
-                        </a:defRPr>
-                      </a:pPr>
-                      <a:r>
-                        <a:rPr sz="1600" b="0" lang="ja-JP" altLang="en-US">
-                          <a:solidFill>
-                            <a:srgbClr val="303437"/>
-                          </a:solidFill>
-                          <a:latin typeface="Noto Sans"/>
-                          <a:ea typeface="Noto Sans CJK JP"/>
-                          <a:cs typeface="Noto Sans"/>
-                        </a:rPr>
-                        <a:t>4 / 0</a:t>
-                      </a:r>
-                    </a:p>
-                  </a:txBody>
-                  <a:tcPr marL="63500" marR="63500" marT="38100" marB="38100" anchor="ctr">
-                    <a:lnL w="7620">
-                      <a:noFill/>
-                    </a:lnL>
-                    <a:lnR w="7620">
-                      <a:noFill/>
-                    </a:lnR>
-                    <a:lnT w="7620">
-                      <a:noFill/>
-                    </a:lnT>
-                    <a:lnB w="7620">
-                      <a:noFill/>
-                    </a:lnB>
-                    <a:solidFill>
-                      <a:srgbClr val="FFFEF8"/>
-                    </a:solidFill>
-                  </a:tcPr>
-                </a:tc>
-              </a:tr>
-              <a:tr h="347980">
-                <a:tc>
-                  <a:txBody>
-                    <a:bodyPr wrap="square">
-                      <a:noAutofit/>
-                    </a:bodyPr>
-                    <a:lstStyle/>
-                    <a:p>
-                      <a:pPr algn="l">
-                        <a:lnSpc>
-                          <a:spcPts val="1839"/>
-                        </a:lnSpc>
-                        <a:buNone/>
-                        <a:defRPr sz="1600" b="0">
-                          <a:solidFill>
-                            <a:srgbClr val="303437"/>
-                          </a:solidFill>
-                          <a:latin typeface="Noto Sans"/>
-                        </a:defRPr>
-                      </a:pPr>
-                      <a:r>
-                        <a:rPr sz="1600" b="0" lang="ja-JP" altLang="en-US">
-                          <a:solidFill>
-                            <a:srgbClr val="303437"/>
-                          </a:solidFill>
-                          <a:latin typeface="Noto Sans"/>
-                          <a:ea typeface="Noto Sans CJK JP"/>
-                          <a:cs typeface="Noto Sans"/>
-                        </a:rPr>
-                        <a:t>11 / 9-269</a:t>
-                      </a:r>
-                    </a:p>
-                  </a:txBody>
-                  <a:tcPr marL="63500" marR="63500" marT="38100" marB="38100" anchor="ctr">
-                    <a:lnL w="7620">
-                      <a:noFill/>
-                    </a:lnL>
-                    <a:lnR w="7620">
-                      <a:noFill/>
-                    </a:lnR>
-                    <a:lnT w="7620">
-                      <a:noFill/>
-                    </a:lnT>
-                    <a:lnB w="7620">
-                      <a:noFill/>
-                    </a:lnB>
-                    <a:solidFill>
-                      <a:srgbClr val="FFFEF8"/>
-                    </a:solidFill>
-                  </a:tcPr>
-                </a:tc>
-                <a:tc>
-                  <a:txBody>
-                    <a:bodyPr wrap="square">
-                      <a:noAutofit/>
-                    </a:bodyPr>
-                    <a:lstStyle/>
-                    <a:p>
-                      <a:pPr algn="l">
-                        <a:lnSpc>
-                          <a:spcPts val="1839"/>
-                        </a:lnSpc>
-                        <a:buNone/>
-                        <a:defRPr sz="1600" b="0">
-                          <a:solidFill>
-                            <a:srgbClr val="303437"/>
-                          </a:solidFill>
-                          <a:latin typeface="Noto Sans"/>
-                        </a:defRPr>
-                      </a:pPr>
-                      <a:r>
-                        <a:rPr sz="1600" b="0" lang="ja-JP" altLang="en-US">
-                          <a:solidFill>
-                            <a:srgbClr val="303437"/>
-                          </a:solidFill>
-                          <a:latin typeface="Noto Sans"/>
-                          <a:ea typeface="Noto Sans CJK JP"/>
-                          <a:cs typeface="Noto Sans"/>
-                        </a:rPr>
-                        <a:t>c3-m-dev.json</a:t>
-                      </a:r>
-                    </a:p>
-                  </a:txBody>
-                  <a:tcPr marL="63500" marR="63500" marT="38100" marB="38100" anchor="ctr">
-                    <a:lnL w="7620">
-                      <a:noFill/>
-                    </a:lnL>
-                    <a:lnR w="7620">
-                      <a:noFill/>
-                    </a:lnR>
-                    <a:lnT w="7620">
-                      <a:noFill/>
-                    </a:lnT>
-                    <a:lnB w="7620">
-                      <a:noFill/>
-                    </a:lnB>
-                    <a:solidFill>
-                      <a:srgbClr val="FFFEF8"/>
-                    </a:solidFill>
-                  </a:tcPr>
-                </a:tc>
-                <a:tc>
-                  <a:txBody>
-                    <a:bodyPr wrap="square">
-                      <a:noAutofit/>
-                    </a:bodyPr>
-                    <a:lstStyle/>
-                    <a:p>
-                      <a:pPr algn="r">
-                        <a:lnSpc>
-                          <a:spcPts val="1839"/>
-                        </a:lnSpc>
-                        <a:buNone/>
-                        <a:defRPr sz="1600" b="0">
-                          <a:solidFill>
-                            <a:srgbClr val="303437"/>
-                          </a:solidFill>
-                          <a:latin typeface="Noto Sans"/>
-                        </a:defRPr>
-                      </a:pPr>
-                      <a:r>
-                        <a:rPr sz="1600" b="0" lang="ja-JP" altLang="en-US">
-                          <a:solidFill>
-                            <a:srgbClr val="303437"/>
-                          </a:solidFill>
-                          <a:latin typeface="Noto Sans"/>
-                          <a:ea typeface="Noto Sans CJK JP"/>
-                          <a:cs typeface="Noto Sans"/>
-                        </a:rPr>
-                        <a:t>8 / 0</a:t>
-                      </a:r>
-                    </a:p>
-                  </a:txBody>
-                  <a:tcPr marL="63500" marR="63500" marT="38100" marB="38100" anchor="ctr">
-                    <a:lnL w="7620">
-                      <a:noFill/>
-                    </a:lnL>
-                    <a:lnR w="7620">
-                      <a:noFill/>
-                    </a:lnR>
-                    <a:lnT w="7620">
-                      <a:noFill/>
-                    </a:lnT>
-                    <a:lnB w="7620">
-                      <a:noFill/>
-                    </a:lnB>
-                    <a:solidFill>
-                      <a:srgbClr val="FFFEF8"/>
-                    </a:solidFill>
-                  </a:tcPr>
-                </a:tc>
-              </a:tr>
-              <a:tr h="347980">
-                <a:tc>
-                  <a:txBody>
-                    <a:bodyPr wrap="square">
-                      <a:noAutofit/>
-                    </a:bodyPr>
-                    <a:lstStyle/>
-                    <a:p>
-                      <a:pPr algn="l">
-                        <a:lnSpc>
-                          <a:spcPts val="1839"/>
-                        </a:lnSpc>
-                        <a:buNone/>
-                        <a:defRPr sz="1600" b="0">
-                          <a:solidFill>
-                            <a:srgbClr val="303437"/>
-                          </a:solidFill>
-                          <a:latin typeface="Noto Sans"/>
-                        </a:defRPr>
-                      </a:pPr>
-                      <a:r>
-                        <a:rPr sz="1600" b="0" lang="ja-JP" altLang="en-US">
-                          <a:solidFill>
-                            <a:srgbClr val="303437"/>
-                          </a:solidFill>
-                          <a:latin typeface="Noto Sans"/>
-                          <a:ea typeface="Noto Sans CJK JP"/>
-                          <a:cs typeface="Noto Sans"/>
-                        </a:rPr>
-                        <a:t>12 / 11-14</a:t>
-                      </a:r>
-                    </a:p>
-                  </a:txBody>
-                  <a:tcPr marL="63500" marR="63500" marT="38100" marB="38100" anchor="ctr">
-                    <a:lnL w="7620">
-                      <a:noFill/>
-                    </a:lnL>
-                    <a:lnR w="7620">
-                      <a:noFill/>
-                    </a:lnR>
-                    <a:lnT w="7620">
-                      <a:noFill/>
-                    </a:lnT>
-                    <a:lnB w="7620">
-                      <a:noFill/>
-                    </a:lnB>
-                    <a:solidFill>
-                      <a:srgbClr val="FFFEF8"/>
-                    </a:solidFill>
-                  </a:tcPr>
-                </a:tc>
-                <a:tc>
-                  <a:txBody>
-                    <a:bodyPr wrap="square">
-                      <a:noAutofit/>
-                    </a:bodyPr>
-                    <a:lstStyle/>
-                    <a:p>
-                      <a:pPr algn="l">
-                        <a:lnSpc>
-                          <a:spcPts val="1839"/>
-                        </a:lnSpc>
-                        <a:buNone/>
-                        <a:defRPr sz="1600" b="0">
-                          <a:solidFill>
-                            <a:srgbClr val="303437"/>
-                          </a:solidFill>
-                          <a:latin typeface="Noto Sans"/>
-                        </a:defRPr>
-                      </a:pPr>
-                      <a:r>
-                        <a:rPr sz="1600" b="0" lang="ja-JP" altLang="en-US">
-                          <a:solidFill>
-                            <a:srgbClr val="303437"/>
-                          </a:solidFill>
-                          <a:latin typeface="Noto Sans"/>
-                          <a:ea typeface="Noto Sans CJK JP"/>
-                          <a:cs typeface="Noto Sans"/>
-                        </a:rPr>
-                        <a:t>c3-m-dev.json</a:t>
-                      </a:r>
-                    </a:p>
-                  </a:txBody>
-                  <a:tcPr marL="63500" marR="63500" marT="38100" marB="38100" anchor="ctr">
-                    <a:lnL w="7620">
-                      <a:noFill/>
-                    </a:lnL>
-                    <a:lnR w="7620">
-                      <a:noFill/>
-                    </a:lnR>
-                    <a:lnT w="7620">
-                      <a:noFill/>
-                    </a:lnT>
-                    <a:lnB w="7620">
-                      <a:noFill/>
-                    </a:lnB>
-                    <a:solidFill>
-                      <a:srgbClr val="FFFEF8"/>
-                    </a:solidFill>
-                  </a:tcPr>
-                </a:tc>
-                <a:tc>
-                  <a:txBody>
-                    <a:bodyPr wrap="square">
-                      <a:noAutofit/>
-                    </a:bodyPr>
-                    <a:lstStyle/>
-                    <a:p>
-                      <a:pPr algn="r">
-                        <a:lnSpc>
-                          <a:spcPts val="1839"/>
-                        </a:lnSpc>
-                        <a:buNone/>
-                        <a:defRPr sz="1600" b="0">
-                          <a:solidFill>
-                            <a:srgbClr val="303437"/>
-                          </a:solidFill>
-                          <a:latin typeface="Noto Sans"/>
-                        </a:defRPr>
-                      </a:pPr>
-                      <a:r>
-                        <a:rPr sz="1600" b="0" lang="ja-JP" altLang="en-US">
-                          <a:solidFill>
-                            <a:srgbClr val="303437"/>
-                          </a:solidFill>
-                          <a:latin typeface="Noto Sans"/>
-                          <a:ea typeface="Noto Sans CJK JP"/>
-                          <a:cs typeface="Noto Sans"/>
-                        </a:rPr>
-                        <a:t>39 / 0</a:t>
-                      </a:r>
-                    </a:p>
-                  </a:txBody>
-                  <a:tcPr marL="63500" marR="63500" marT="38100" marB="38100" anchor="ctr">
-                    <a:lnL w="7620">
-                      <a:noFill/>
-                    </a:lnL>
-                    <a:lnR w="7620">
-                      <a:noFill/>
-                    </a:lnR>
-                    <a:lnT w="7620">
-                      <a:noFill/>
-                    </a:lnT>
-                    <a:lnB w="7620">
-                      <a:noFill/>
-                    </a:lnB>
-                    <a:solidFill>
-                      <a:srgbClr val="FFFEF8"/>
-                    </a:solidFill>
-                  </a:tcPr>
-                </a:tc>
-              </a:tr>
-              <a:tr h="347980">
-                <a:tc>
-                  <a:txBody>
-                    <a:bodyPr wrap="square">
-                      <a:noAutofit/>
-                    </a:bodyPr>
-                    <a:lstStyle/>
-                    <a:p>
-                      <a:pPr algn="l">
-                        <a:lnSpc>
-                          <a:spcPts val="1839"/>
-                        </a:lnSpc>
-                        <a:buNone/>
-                        <a:defRPr sz="1600" b="0">
-                          <a:solidFill>
-                            <a:srgbClr val="303437"/>
-                          </a:solidFill>
-                          <a:latin typeface="Noto Sans"/>
-                        </a:defRPr>
-                      </a:pPr>
-                      <a:r>
-                        <a:rPr sz="1600" b="0" lang="ja-JP" altLang="en-US">
-                          <a:solidFill>
-                            <a:srgbClr val="303437"/>
-                          </a:solidFill>
-                          <a:latin typeface="Noto Sans"/>
-                          <a:ea typeface="Noto Sans CJK JP"/>
-                          <a:cs typeface="Noto Sans"/>
-                        </a:rPr>
-                        <a:t>13 / 8-255</a:t>
-                      </a:r>
-                    </a:p>
-                  </a:txBody>
-                  <a:tcPr marL="63500" marR="63500" marT="38100" marB="38100" anchor="ctr">
-                    <a:lnL w="7620">
-                      <a:noFill/>
-                    </a:lnL>
-                    <a:lnR w="7620">
-                      <a:noFill/>
-                    </a:lnR>
-                    <a:lnT w="7620">
-                      <a:noFill/>
-                    </a:lnT>
-                    <a:lnB w="15240">
-                      <a:solidFill>
-                        <a:srgbClr val="626669"/>
-                      </a:solidFill>
-                      <a:prstDash val="solid"/>
-                    </a:lnB>
-                    <a:solidFill>
-                      <a:srgbClr val="FFFEF8"/>
-                    </a:solidFill>
-                  </a:tcPr>
-                </a:tc>
-                <a:tc>
-                  <a:txBody>
-                    <a:bodyPr wrap="square">
-                      <a:noAutofit/>
-                    </a:bodyPr>
-                    <a:lstStyle/>
-                    <a:p>
-                      <a:pPr algn="l">
-                        <a:lnSpc>
-                          <a:spcPts val="1839"/>
-                        </a:lnSpc>
-                        <a:buNone/>
-                        <a:defRPr sz="1600" b="0">
-                          <a:solidFill>
-                            <a:srgbClr val="303437"/>
-                          </a:solidFill>
-                          <a:latin typeface="Noto Sans"/>
-                        </a:defRPr>
-                      </a:pPr>
-                      <a:r>
-                        <a:rPr sz="1600" b="0" lang="ja-JP" altLang="en-US">
-                          <a:solidFill>
-                            <a:srgbClr val="303437"/>
-                          </a:solidFill>
-                          <a:latin typeface="Noto Sans"/>
-                          <a:ea typeface="Noto Sans CJK JP"/>
-                          <a:cs typeface="Noto Sans"/>
-                        </a:rPr>
-                        <a:t>c3-m-test.json</a:t>
-                      </a:r>
-                    </a:p>
-                  </a:txBody>
-                  <a:tcPr marL="63500" marR="63500" marT="38100" marB="38100" anchor="ctr">
-                    <a:lnL w="7620">
-                      <a:noFill/>
-                    </a:lnL>
-                    <a:lnR w="7620">
-                      <a:noFill/>
-                    </a:lnR>
-                    <a:lnT w="7620">
-                      <a:noFill/>
-                    </a:lnT>
-                    <a:lnB w="15240">
-                      <a:solidFill>
-                        <a:srgbClr val="626669"/>
-                      </a:solidFill>
-                      <a:prstDash val="solid"/>
-                    </a:lnB>
-                    <a:solidFill>
-                      <a:srgbClr val="FFFEF8"/>
-                    </a:solidFill>
-                  </a:tcPr>
-                </a:tc>
-                <a:tc>
-                  <a:txBody>
-                    <a:bodyPr wrap="square">
-                      <a:noAutofit/>
-                    </a:bodyPr>
-                    <a:lstStyle/>
-                    <a:p>
-                      <a:pPr algn="r">
-                        <a:lnSpc>
-                          <a:spcPts val="1839"/>
-                        </a:lnSpc>
-                        <a:buNone/>
-                        <a:defRPr sz="1600" b="0">
-                          <a:solidFill>
-                            <a:srgbClr val="303437"/>
-                          </a:solidFill>
-                          <a:latin typeface="Noto Sans"/>
-                        </a:defRPr>
-                      </a:pPr>
-                      <a:r>
-                        <a:rPr sz="1600" b="0" lang="ja-JP" altLang="en-US">
-                          <a:solidFill>
-                            <a:srgbClr val="303437"/>
-                          </a:solidFill>
-                          <a:latin typeface="Noto Sans"/>
-                          <a:ea typeface="Noto Sans CJK JP"/>
-                          <a:cs typeface="Noto Sans"/>
-                        </a:rPr>
-                        <a:t>38 / 0</a:t>
-                      </a:r>
-                    </a:p>
-                  </a:txBody>
-                  <a:tcPr marL="63500" marR="63500" marT="38100" marB="38100" anchor="ctr">
-                    <a:lnL w="7620">
-                      <a:noFill/>
-                    </a:lnL>
-                    <a:lnR w="7620">
-                      <a:noFill/>
-                    </a:lnR>
-                    <a:lnT w="7620">
-                      <a:noFill/>
-                    </a:lnT>
-                    <a:lnB w="15240">
-                      <a:solidFill>
-                        <a:srgbClr val="626669"/>
-                      </a:solidFill>
-                      <a:prstDash val="solid"/>
-                    </a:lnB>
-                    <a:solidFill>
-                      <a:srgbClr val="FFFEF8"/>
-                    </a:solidFill>
-                  </a:tcPr>
-                </a:tc>
-              </a:tr>
-            </a:tbl>
-          </a:graphicData>
-        </a:graphic>
-      </p:graphicFrame>
-      <p:sp>
-        <p:nvSpPr>
-          <p:cNvPr id="5" name="TextBox 4"/>
-          <p:cNvSpPr txBox="1"/>
-          <p:nvPr/>
-        </p:nvSpPr>
-        <p:spPr>
-          <a:xfrm>
-            <a:off x="594360" y="4036059"/>
-            <a:ext cx="7955279" cy="658368"/>
-          </a:xfrm>
-          <a:prstGeom prst="rect">
-            <a:avLst/>
-          </a:prstGeom>
-          <a:noFill/>
-        </p:spPr>
-        <p:txBody>
-          <a:bodyPr wrap="square" lIns="0" rIns="0" tIns="0" bIns="0">
-            <a:noAutofit/>
-          </a:bodyPr>
-          <a:lstStyle/>
-          <a:p>
-            <a:pPr algn="l">
-              <a:lnSpc>
-                <a:spcPts val="1568"/>
-              </a:lnSpc>
-              <a:spcBef>
-                <a:spcPts val="0"/>
-              </a:spcBef>
-              <a:spcAft>
-                <a:spcPts val="0"/>
-              </a:spcAft>
-              <a:buNone/>
-              <a:defRPr sz="1400" b="0">
-                <a:solidFill>
-                  <a:srgbClr val="303437"/>
-                </a:solidFill>
-                <a:latin typeface="Noto Sans"/>
-              </a:defRPr>
-            </a:pPr>
-            <a:r>
-              <a:rPr sz="1400" b="0" lang="ja-JP" altLang="en-US">
-                <a:solidFill>
-                  <a:srgbClr val="303437"/>
-                </a:solidFill>
-                <a:latin typeface="Noto Sans"/>
-                <a:ea typeface="Noto Sans CJK JP"/>
-                <a:cs typeface="Noto Sans"/>
-              </a:rPr>
-              <a:t>indexは0起算。固定commit 1f41682…、各ファイルSHA256と原レコードを付属記録へ保存。</a:t>
-            </a:r>
-          </a:p>
-        </p:txBody>
-      </p:sp>
-      <p:sp>
-        <p:nvSpPr>
-          <p:cNvPr id="6" name="sources"/>
-          <p:cNvSpPr txBox="1"/>
-          <p:nvPr/>
-        </p:nvSpPr>
-        <p:spPr>
-          <a:xfrm>
-            <a:off x="502920" y="4700016"/>
-            <a:ext cx="8183879" cy="530352"/>
-          </a:xfrm>
-          <a:prstGeom prst="rect">
-            <a:avLst/>
-          </a:prstGeom>
-          <a:noFill/>
-        </p:spPr>
-        <p:txBody>
-          <a:bodyPr wrap="square" lIns="0" rIns="0" tIns="0" bIns="0">
-            <a:noAutofit/>
-          </a:bodyPr>
-          <a:lstStyle/>
-          <a:p>
-            <a:pPr algn="l">
-              <a:lnSpc>
-                <a:spcPts val="940"/>
-              </a:lnSpc>
-              <a:spcBef>
-                <a:spcPts val="0"/>
-              </a:spcBef>
-              <a:spcAft>
-                <a:spcPts val="400"/>
-              </a:spcAft>
-              <a:buNone/>
-              <a:defRPr sz="810" b="0">
-                <a:solidFill>
-                  <a:srgbClr val="303437"/>
-                </a:solidFill>
-                <a:latin typeface="Noto Sans"/>
-              </a:defRPr>
-            </a:pPr>
-            <a:r>
-              <a:rPr sz="810" b="0" lang="ja-JP" altLang="en-US">
-                <a:solidFill>
-                  <a:srgbClr val="626669"/>
-                </a:solidFill>
-                <a:latin typeface="Noto Sans"/>
-                <a:ea typeface="Noto Sans CJK JP"/>
-                <a:cs typeface="Noto Sans"/>
-              </a:rPr>
-              <a:t>[1] Sun et al. C³ official repository. commit 1f41682e.</a:t>
-            </a:r>
-            <a:r>
-              <a:rPr sz="810" b="0" lang="ja-JP" altLang="en-US">
-                <a:solidFill>
-                  <a:srgbClr val="626669"/>
-                </a:solidFill>
-                <a:latin typeface="Noto Sans"/>
-                <a:ea typeface="Noto Sans CJK JP"/>
-                <a:cs typeface="Noto Sans"/>
-              </a:rPr>
-              <a:t>  </a:t>
-            </a:r>
-            <a:r>
-              <a:rPr sz="810" b="0" lang="ja-JP" altLang="en-US">
-                <a:solidFill>
-                  <a:srgbClr val="626669"/>
-                </a:solidFill>
-                <a:latin typeface="Noto Sans"/>
-                <a:ea typeface="Noto Sans CJK JP"/>
-                <a:cs typeface="Noto Sans"/>
-                <a:hlinkClick r:id="rId2"/>
-              </a:rPr>
-              <a:t>https://github.com/nlpdata/c3</a:t>
+              <a:t>Appendix: 2. データの読み方</a:t>
             </a:r>
           </a:p>
         </p:txBody>
@@ -35734,7 +30653,7 @@
                 <a:ea typeface="Noto Sans CJK JP"/>
                 <a:cs typeface="Noto Sans"/>
               </a:rPr>
-              <a:t>候補数は、一律4個ではない</a:t>
+              <a:t>2〜4個の候補から、一つを選ぶ</a:t>
             </a:r>
           </a:p>
         </p:txBody>
@@ -35782,7 +30701,7 @@
                 <a:ea typeface="Noto Sans CJK JP"/>
                 <a:cs typeface="Noto Sans"/>
               </a:rPr>
-              <a:t>Appendix: 2. 版・原位置・再現</a:t>
+              <a:t>Appendix: 2. データの読み方</a:t>
             </a:r>
           </a:p>
         </p:txBody>
@@ -36505,7 +31424,7 @@
                 <a:ea typeface="Noto Sans CJK JP"/>
                 <a:cs typeface="Noto Sans"/>
               </a:rPr>
-              <a:t>固定6ファイルから再集計。2候補の真偽判定も、同じ一問一正解の読解形式に含まれる。</a:t>
+              <a:t>2候補の真偽問題も、正解を一つ選ぶ同じ形式で収録される。</a:t>
             </a:r>
           </a:p>
         </p:txBody>
@@ -36540,7 +31459,7 @@
                 <a:spcPts val="0"/>
               </a:spcBef>
               <a:spcAft>
-                <a:spcPts val="400"/>
+                <a:spcPts val="140"/>
               </a:spcAft>
               <a:buNone/>
               <a:defRPr sz="810" b="0">
@@ -36559,7 +31478,7 @@
                 <a:ea typeface="Noto Sans CJK JP"/>
                 <a:cs typeface="Noto Sans"/>
               </a:rPr>
-              <a:t>[1] Sun et al. C³ official repository. commit 1f41682e.</a:t>
+              <a:t>[1] Sun et al. C³ 公式データ・実装。</a:t>
             </a:r>
             <a:r>
               <a:rPr sz="810" b="0" lang="ja-JP" altLang="en-US">
@@ -36583,310 +31502,6 @@
                 <a:hlinkClick r:id="rId2"/>
               </a:rPr>
               <a:t>https://github.com/nlpdata/c3</a:t>
-            </a:r>
-          </a:p>
-        </p:txBody>
-      </p:sp>
-    </p:spTree>
-  </p:cSld>
-  <p:clrMapOvr>
-    <a:masterClrMapping/>
-  </p:clrMapOvr>
-</p:sld>
-</file>
-
-<file path=ppt/slides/slide56.xml><?xml version="1.0" encoding="utf-8"?>
-<p:sld xmlns:a="http://schemas.openxmlformats.org/drawingml/2006/main" xmlns:p="http://schemas.openxmlformats.org/presentationml/2006/main" xmlns:r="http://schemas.openxmlformats.org/officeDocument/2006/relationships">
-  <p:cSld>
-    <p:spTree>
-      <p:nvGrpSpPr>
-        <p:cNvPr id="1" name=""/>
-        <p:cNvGrpSpPr/>
-        <p:nvPr/>
-      </p:nvGrpSpPr>
-      <p:grpSpPr/>
-      <p:sp>
-        <p:nvSpPr>
-          <p:cNvPr id="2" name="Title 1"/>
-          <p:cNvSpPr>
-            <a:spLocks noGrp="1"/>
-          </p:cNvSpPr>
-          <p:nvPr>
-            <p:ph type="title"/>
-          </p:nvPr>
-        </p:nvSpPr>
-        <p:spPr>
-          <a:xfrm>
-            <a:off x="468172" y="650138"/>
-            <a:ext cx="8206740" cy="616305"/>
-          </a:xfrm>
-        </p:spPr>
-        <p:txBody>
-          <a:bodyPr wrap="square" lIns="0" rIns="0" tIns="0" bIns="0">
-            <a:noAutofit/>
-          </a:bodyPr>
-          <a:lstStyle/>
-          <a:p>
-            <a:pPr algn="l">
-              <a:lnSpc>
-                <a:spcPct val="110000"/>
-              </a:lnSpc>
-              <a:buNone/>
-              <a:defRPr sz="2800" b="0">
-                <a:solidFill>
-                  <a:srgbClr val="303437"/>
-                </a:solidFill>
-                <a:latin typeface="Noto Sans"/>
-              </a:defRPr>
-            </a:pPr>
-            <a:r>
-              <a:rPr sz="2800" b="1" lang="ja-JP" altLang="en-US">
-                <a:solidFill>
-                  <a:srgbClr val="303437"/>
-                </a:solidFill>
-                <a:latin typeface="Noto Sans"/>
-                <a:ea typeface="Noto Sans CJK JP"/>
-                <a:cs typeface="Noto Sans"/>
-              </a:rPr>
-              <a:t>600問の注釈を、全19,577問へ拡張しない</a:t>
-            </a:r>
-          </a:p>
-        </p:txBody>
-      </p:sp>
-      <p:sp>
-        <p:nvSpPr>
-          <p:cNvPr id="3" name="Text Placeholder 2"/>
-          <p:cNvSpPr>
-            <a:spLocks noGrp="1"/>
-          </p:cNvSpPr>
-          <p:nvPr>
-            <p:ph type="body" idx="1"/>
-          </p:nvPr>
-        </p:nvSpPr>
-        <p:spPr>
-          <a:xfrm>
-            <a:off x="594360" y="1463040"/>
-            <a:ext cx="7955279" cy="3044952"/>
-          </a:xfrm>
-        </p:spPr>
-        <p:txBody>
-          <a:bodyPr wrap="square" tIns="91440" bIns="91440">
-            <a:noAutofit/>
-          </a:bodyPr>
-          <a:lstStyle/>
-          <a:p>
-            <a:pPr marL="457200" indent="-355600">
-              <a:lnSpc>
-                <a:spcPts val="2320"/>
-              </a:lnSpc>
-              <a:spcAft>
-                <a:spcPts val="700"/>
-              </a:spcAft>
-              <a:buSzPct val="68205"/>
-              <a:buFont typeface="Noto Sans CJK JP"/>
-              <a:buChar char="●"/>
-              <a:defRPr sz="1950" b="0">
-                <a:solidFill>
-                  <a:srgbClr val="303437"/>
-                </a:solidFill>
-                <a:latin typeface="Noto Sans"/>
-              </a:defRPr>
-            </a:pPr>
-            <a:r>
-              <a:rPr sz="1950" b="0" lang="ja-JP" altLang="en-US">
-                <a:solidFill>
-                  <a:srgbClr val="303437"/>
-                </a:solidFill>
-                <a:latin typeface="Noto Sans"/>
-                <a:ea typeface="Noto Sans CJK JP"/>
-                <a:cs typeface="Noto Sans"/>
-              </a:rPr>
-              <a:t>公開注釈はDialogueとMixedそれぞれの開発・テストに150問ずつ、計600問。documentIDとquestionIndexで元質問に結び付く。</a:t>
-            </a:r>
-          </a:p>
-          <a:p>
-            <a:pPr marL="457200" indent="-355600">
-              <a:lnSpc>
-                <a:spcPts val="2320"/>
-              </a:lnSpc>
-              <a:spcAft>
-                <a:spcPts val="700"/>
-              </a:spcAft>
-              <a:buSzPct val="68205"/>
-              <a:buFont typeface="Noto Sans CJK JP"/>
-              <a:buChar char="●"/>
-              <a:defRPr sz="1950" b="0">
-                <a:solidFill>
-                  <a:srgbClr val="303437"/>
-                </a:solidFill>
-                <a:latin typeface="Noto Sans"/>
-              </a:defRPr>
-            </a:pPr>
-            <a:r>
-              <a:rPr sz="1950" b="0" lang="ja-JP" altLang="en-US">
-                <a:solidFill>
-                  <a:srgbClr val="303437"/>
-                </a:solidFill>
-                <a:latin typeface="Noto Sans"/>
-                <a:ea typeface="Noto Sans CJK JP"/>
-                <a:cs typeface="Noto Sans"/>
-              </a:rPr>
-              <a:t>mは語句の照合、lは言語知識、sは専門知識。c-で始まる8種は一般常識。複数の知識は|で併記される。</a:t>
-            </a:r>
-          </a:p>
-          <a:p>
-            <a:pPr marL="457200" indent="-355600">
-              <a:lnSpc>
-                <a:spcPts val="2320"/>
-              </a:lnSpc>
-              <a:spcAft>
-                <a:spcPts val="0"/>
-              </a:spcAft>
-              <a:buSzPct val="68205"/>
-              <a:buFont typeface="Noto Sans CJK JP"/>
-              <a:buChar char="●"/>
-              <a:defRPr sz="1950" b="0">
-                <a:solidFill>
-                  <a:srgbClr val="303437"/>
-                </a:solidFill>
-                <a:latin typeface="Noto Sans"/>
-              </a:defRPr>
-            </a:pPr>
-            <a:r>
-              <a:rPr sz="1950" b="0" lang="ja-JP" altLang="en-US">
-                <a:solidFill>
-                  <a:srgbClr val="303437"/>
-                </a:solidFill>
-                <a:latin typeface="Noto Sans"/>
-                <a:ea typeface="Noto Sans CJK JP"/>
-                <a:cs typeface="Noto Sans"/>
-              </a:rPr>
-              <a:t>||の後の0は1文、1は複数文、2は文脈に依存しない問題を表す。これは正解の候補番号ではない。</a:t>
-            </a:r>
-          </a:p>
-        </p:txBody>
-      </p:sp>
-      <p:sp>
-        <p:nvSpPr>
-          <p:cNvPr id="4" name="Title 3"/>
-          <p:cNvSpPr>
-            <a:spLocks noGrp="1"/>
-          </p:cNvSpPr>
-          <p:nvPr>
-            <p:ph type="title" idx="2"/>
-          </p:nvPr>
-        </p:nvSpPr>
-        <p:spPr>
-          <a:xfrm>
-            <a:off x="75895" y="0"/>
-            <a:ext cx="8115300" cy="480060"/>
-          </a:xfrm>
-        </p:spPr>
-        <p:txBody>
-          <a:bodyPr wrap="square" lIns="0" rIns="0" tIns="0" bIns="0" anchor="ctr">
-            <a:noAutofit/>
-          </a:bodyPr>
-          <a:lstStyle/>
-          <a:p>
-            <a:pPr algn="l">
-              <a:lnSpc>
-                <a:spcPct val="110000"/>
-              </a:lnSpc>
-              <a:buNone/>
-              <a:defRPr sz="1400" b="0">
-                <a:solidFill>
-                  <a:srgbClr val="303437"/>
-                </a:solidFill>
-                <a:latin typeface="Noto Sans"/>
-              </a:defRPr>
-            </a:pPr>
-            <a:r>
-              <a:rPr sz="1400" b="1" lang="ja-JP" altLang="en-US">
-                <a:solidFill>
-                  <a:srgbClr val="FFFEF8"/>
-                </a:solidFill>
-                <a:latin typeface="Noto Sans"/>
-                <a:ea typeface="Noto Sans CJK JP"/>
-                <a:cs typeface="Noto Sans"/>
-              </a:rPr>
-              <a:t>Appendix: 2. 版・原位置・再現</a:t>
-            </a:r>
-          </a:p>
-        </p:txBody>
-      </p:sp>
-      <p:sp>
-        <p:nvSpPr>
-          <p:cNvPr id="5" name="sources"/>
-          <p:cNvSpPr txBox="1"/>
-          <p:nvPr/>
-        </p:nvSpPr>
-        <p:spPr>
-          <a:xfrm>
-            <a:off x="502920" y="4700016"/>
-            <a:ext cx="8183879" cy="530352"/>
-          </a:xfrm>
-          <a:prstGeom prst="rect">
-            <a:avLst/>
-          </a:prstGeom>
-          <a:noFill/>
-        </p:spPr>
-        <p:txBody>
-          <a:bodyPr wrap="square" lIns="0" rIns="0" tIns="0" bIns="0">
-            <a:noAutofit/>
-          </a:bodyPr>
-          <a:lstStyle/>
-          <a:p>
-            <a:pPr algn="l">
-              <a:lnSpc>
-                <a:spcPts val="940"/>
-              </a:lnSpc>
-              <a:spcBef>
-                <a:spcPts val="0"/>
-              </a:spcBef>
-              <a:spcAft>
-                <a:spcPts val="400"/>
-              </a:spcAft>
-              <a:buNone/>
-              <a:defRPr sz="810" b="0">
-                <a:solidFill>
-                  <a:srgbClr val="303437"/>
-                </a:solidFill>
-                <a:latin typeface="Noto Sans"/>
-              </a:defRPr>
-            </a:pPr>
-            <a:r>
-              <a:rPr sz="810" b="0" lang="ja-JP" altLang="en-US">
-                <a:solidFill>
-                  <a:srgbClr val="626669"/>
-                </a:solidFill>
-                <a:latin typeface="Noto Sans"/>
-                <a:ea typeface="Noto Sans CJK JP"/>
-                <a:cs typeface="Noto Sans"/>
-              </a:rPr>
-              <a:t>[1] Sun et al. C³ knowledge annotations, dev/test.</a:t>
-            </a:r>
-            <a:r>
-              <a:rPr sz="810" b="0" lang="ja-JP" altLang="en-US">
-                <a:solidFill>
-                  <a:srgbClr val="626669"/>
-                </a:solidFill>
-                <a:latin typeface="Noto Sans"/>
-                <a:ea typeface="Noto Sans CJK JP"/>
-                <a:cs typeface="Noto Sans"/>
-              </a:rPr>
-              <a:t>  </a:t>
-            </a:r>
-            <a:r>
-              <a:rPr sz="810" b="0" lang="ja-JP" altLang="en-US">
-                <a:solidFill>
-                  <a:srgbClr val="626669"/>
-                </a:solidFill>
-                <a:latin typeface="Noto Sans"/>
-                <a:ea typeface="Noto Sans CJK JP"/>
-                <a:cs typeface="Noto Sans"/>
-                <a:hlinkClick r:id="rId2"/>
-              </a:rPr>
-              <a:t>https://github.com/nlpdata/c3/tree/1f41682ebb684d63afe7c583c8f38e137fc8a826/annotation</a:t>
             </a:r>
           </a:p>
         </p:txBody>
@@ -36952,7 +31567,7 @@
                 <a:ea typeface="Noto Sans CJK JP"/>
                 <a:cs typeface="Noto Sans"/>
               </a:rPr>
-              <a:t>公開元の一問を、ID付きで読み出す</a:t>
+              <a:t>JSONから、実例1の文書と設問を読む</a:t>
             </a:r>
           </a:p>
         </p:txBody>
@@ -37000,7 +31615,7 @@
                 <a:ea typeface="Noto Sans CJK JP"/>
                 <a:cs typeface="Noto Sans"/>
               </a:rPr>
-              <a:t>Appendix: 2. 版・原位置・再現</a:t>
+              <a:t>Appendix: 2. データの読み方</a:t>
             </a:r>
           </a:p>
         </p:txBody>
@@ -37014,7 +31629,7 @@
         <p:spPr>
           <a:xfrm>
             <a:off x="548640" y="1554480"/>
-            <a:ext cx="8046720" cy="2192866"/>
+            <a:ext cx="8046720" cy="2103120"/>
           </a:xfrm>
           <a:prstGeom prst="rect">
             <a:avLst/>
@@ -37049,7 +31664,7 @@
           <a:p>
             <a:pPr algn="l">
               <a:lnSpc>
-                <a:spcPts val="1784"/>
+                <a:spcPts val="1700"/>
               </a:lnSpc>
               <a:spcBef>
                 <a:spcPts val="0"/>
@@ -37080,7 +31695,7 @@
           <a:p>
             <a:pPr algn="l">
               <a:lnSpc>
-                <a:spcPts val="1784"/>
+                <a:spcPts val="1700"/>
               </a:lnSpc>
               <a:spcBef>
                 <a:spcPts val="0"/>
@@ -37105,13 +31720,13 @@
                 <a:ea typeface="Noto Sans CJK JP"/>
                 <a:cs typeface="Liberation Mono"/>
               </a:rPr>
-              <a:t>with open('c3-d-train.json', encoding='utf-8') as f:</a:t>
-            </a:r>
-          </a:p>
-          <a:p>
-            <a:pPr algn="l">
-              <a:lnSpc>
-                <a:spcPts val="1784"/>
+              <a:t>with open("c3-d-train.json", encoding="utf-8") as f:</a:t>
+            </a:r>
+          </a:p>
+          <a:p>
+            <a:pPr algn="l">
+              <a:lnSpc>
+                <a:spcPts val="1700"/>
               </a:lnSpc>
               <a:spcBef>
                 <a:spcPts val="0"/>
@@ -37142,7 +31757,7 @@
           <a:p>
             <a:pPr algn="l">
               <a:lnSpc>
-                <a:spcPts val="1784"/>
+                <a:spcPts val="1700"/>
               </a:lnSpc>
               <a:spcBef>
                 <a:spcPts val="0"/>
@@ -37167,13 +31782,13 @@
                 <a:ea typeface="Noto Sans CJK JP"/>
                 <a:cs typeface="Liberation Mono"/>
               </a:rPr>
-              <a:t>document, questions, doc_id = rows[941]</a:t>
-            </a:r>
-          </a:p>
-          <a:p>
-            <a:pPr algn="l">
-              <a:lnSpc>
-                <a:spcPts val="1784"/>
+              <a:t>document, questions, _ = next(r for r in rows if r[2] == "37-153")</a:t>
+            </a:r>
+          </a:p>
+          <a:p>
+            <a:pPr algn="l">
+              <a:lnSpc>
+                <a:spcPts val="1700"/>
               </a:lnSpc>
               <a:spcBef>
                 <a:spcPts val="0"/>
@@ -37204,7 +31819,7 @@
           <a:p>
             <a:pPr algn="l">
               <a:lnSpc>
-                <a:spcPts val="1784"/>
+                <a:spcPts val="1700"/>
               </a:lnSpc>
               <a:spcBef>
                 <a:spcPts val="0"/>
@@ -37229,13 +31844,13 @@
                 <a:ea typeface="Noto Sans CJK JP"/>
                 <a:cs typeface="Liberation Mono"/>
               </a:rPr>
-              <a:t>assert doc_id == '37-153'</a:t>
-            </a:r>
-          </a:p>
-          <a:p>
-            <a:pPr algn="l">
-              <a:lnSpc>
-                <a:spcPts val="1784"/>
+              <a:t>print("\n".join(document))</a:t>
+            </a:r>
+          </a:p>
+          <a:p>
+            <a:pPr algn="l">
+              <a:lnSpc>
+                <a:spcPts val="1700"/>
               </a:lnSpc>
               <a:spcBef>
                 <a:spcPts val="0"/>
@@ -37260,13 +31875,13 @@
                 <a:ea typeface="Noto Sans CJK JP"/>
                 <a:cs typeface="Liberation Mono"/>
               </a:rPr>
-              <a:t>assert question['answer'] in question['choice']</a:t>
-            </a:r>
-          </a:p>
-          <a:p>
-            <a:pPr algn="l">
-              <a:lnSpc>
-                <a:spcPts val="1784"/>
+              <a:t>print(question["question"])</a:t>
+            </a:r>
+          </a:p>
+          <a:p>
+            <a:pPr algn="l">
+              <a:lnSpc>
+                <a:spcPts val="1700"/>
               </a:lnSpc>
               <a:spcBef>
                 <a:spcPts val="0"/>
@@ -37291,13 +31906,13 @@
                 <a:ea typeface="Noto Sans CJK JP"/>
                 <a:cs typeface="Liberation Mono"/>
               </a:rPr>
-              <a:t>print(document, question['question'])</a:t>
-            </a:r>
-          </a:p>
-          <a:p>
-            <a:pPr algn="l">
-              <a:lnSpc>
-                <a:spcPts val="1784"/>
+              <a:t>print(question["choice"])</a:t>
+            </a:r>
+          </a:p>
+          <a:p>
+            <a:pPr algn="l">
+              <a:lnSpc>
+                <a:spcPts val="1700"/>
               </a:lnSpc>
               <a:spcBef>
                 <a:spcPts val="0"/>
@@ -37322,7 +31937,7 @@
                 <a:ea typeface="Noto Sans CJK JP"/>
                 <a:cs typeface="Liberation Mono"/>
               </a:rPr>
-              <a:t>print(question['choice'], question['answer'])</a:t>
+              <a:t>print(question["answer"])</a:t>
             </a:r>
           </a:p>
         </p:txBody>
@@ -37376,7 +31991,7 @@
                 <a:ea typeface="Noto Sans CJK JP"/>
                 <a:cs typeface="Noto Sans"/>
               </a:rPr>
-              <a:t>配列の位置と元IDを併用する。正解文字列と候補の順序を保つ。</a:t>
+              <a:t>実例1の文書、質問、全選択肢、正解の文字列が得られる。</a:t>
             </a:r>
           </a:p>
         </p:txBody>
@@ -37411,7 +32026,7 @@
                 <a:spcPts val="0"/>
               </a:spcBef>
               <a:spcAft>
-                <a:spcPts val="400"/>
+                <a:spcPts val="140"/>
               </a:spcAft>
               <a:buNone/>
               <a:defRPr sz="810" b="0">
@@ -37430,7 +32045,7 @@
                 <a:ea typeface="Noto Sans CJK JP"/>
                 <a:cs typeface="Noto Sans"/>
               </a:rPr>
-              <a:t>[1] Sun et al. C³-D / train / 37-153 / question 1.</a:t>
+              <a:t>[1] Sun et al. C³ データセット。</a:t>
             </a:r>
             <a:r>
               <a:rPr sz="810" b="0" lang="ja-JP" altLang="en-US">
@@ -37451,737 +32066,9 @@
                 <a:latin typeface="Noto Sans"/>
                 <a:ea typeface="Noto Sans CJK JP"/>
                 <a:cs typeface="Noto Sans"/>
-                <a:hlinkClick r:id="rId2"/>
-              </a:rPr>
-              <a:t>https://github.com/nlpdata/c3/blob/1f41682ebb684d63afe7c583c8f38e137fc8a826/data/c3-d-train.json</a:t>
-            </a:r>
-          </a:p>
-        </p:txBody>
-      </p:sp>
-    </p:spTree>
-  </p:cSld>
-  <p:clrMapOvr>
-    <a:masterClrMapping/>
-  </p:clrMapOvr>
-</p:sld>
-</file>
-
-<file path=ppt/slides/slide58.xml><?xml version="1.0" encoding="utf-8"?>
-<p:sld xmlns:a="http://schemas.openxmlformats.org/drawingml/2006/main" xmlns:p="http://schemas.openxmlformats.org/presentationml/2006/main" xmlns:r="http://schemas.openxmlformats.org/officeDocument/2006/relationships">
-  <p:cSld>
-    <p:spTree>
-      <p:nvGrpSpPr>
-        <p:cNvPr id="1" name=""/>
-        <p:cNvGrpSpPr/>
-        <p:nvPr/>
-      </p:nvGrpSpPr>
-      <p:grpSpPr/>
-      <p:sp>
-        <p:nvSpPr>
-          <p:cNvPr id="2" name="Title 1"/>
-          <p:cNvSpPr>
-            <a:spLocks noGrp="1"/>
-          </p:cNvSpPr>
-          <p:nvPr>
-            <p:ph type="title"/>
-          </p:nvPr>
-        </p:nvSpPr>
-        <p:spPr>
-          <a:xfrm>
-            <a:off x="468172" y="650138"/>
-            <a:ext cx="8206740" cy="616305"/>
-          </a:xfrm>
-        </p:spPr>
-        <p:txBody>
-          <a:bodyPr wrap="square" lIns="0" rIns="0" tIns="0" bIns="0">
-            <a:noAutofit/>
-          </a:bodyPr>
-          <a:lstStyle/>
-          <a:p>
-            <a:pPr algn="l">
-              <a:lnSpc>
-                <a:spcPct val="110000"/>
-              </a:lnSpc>
-              <a:buNone/>
-              <a:defRPr sz="2800" b="0">
-                <a:solidFill>
-                  <a:srgbClr val="303437"/>
-                </a:solidFill>
-                <a:latin typeface="Noto Sans"/>
-              </a:defRPr>
-            </a:pPr>
-            <a:r>
-              <a:rPr sz="2800" b="1" lang="ja-JP" altLang="en-US">
-                <a:solidFill>
-                  <a:srgbClr val="303437"/>
-                </a:solidFill>
-                <a:latin typeface="Noto Sans"/>
-                <a:ea typeface="Noto Sans CJK JP"/>
-                <a:cs typeface="Noto Sans"/>
-              </a:rPr>
-              <a:t>CLEVAの設定と、実際の公開実行は別</a:t>
-            </a:r>
-          </a:p>
-        </p:txBody>
-      </p:sp>
-      <p:sp>
-        <p:nvSpPr>
-          <p:cNvPr id="3" name="Text Placeholder 2"/>
-          <p:cNvSpPr>
-            <a:spLocks noGrp="1"/>
-          </p:cNvSpPr>
-          <p:nvPr>
-            <p:ph type="body" idx="1"/>
-          </p:nvPr>
-        </p:nvSpPr>
-        <p:spPr>
-          <a:xfrm>
-            <a:off x="594360" y="1463040"/>
-            <a:ext cx="7955279" cy="3044952"/>
-          </a:xfrm>
-        </p:spPr>
-        <p:txBody>
-          <a:bodyPr wrap="square" tIns="91440" bIns="91440">
-            <a:noAutofit/>
-          </a:bodyPr>
-          <a:lstStyle/>
-          <a:p>
-            <a:pPr marL="457200" indent="-355600">
-              <a:lnSpc>
-                <a:spcPts val="2201"/>
-              </a:lnSpc>
-              <a:spcAft>
-                <a:spcPts val="700"/>
-              </a:spcAft>
-              <a:buSzPct val="71892"/>
-              <a:buFont typeface="Noto Sans CJK JP"/>
-              <a:buChar char="●"/>
-              <a:defRPr sz="1850" b="0">
-                <a:solidFill>
-                  <a:srgbClr val="303437"/>
-                </a:solidFill>
-                <a:latin typeface="Noto Sans"/>
-              </a:defRPr>
-            </a:pPr>
-            <a:r>
-              <a:rPr sz="1850" b="0" lang="ja-JP" altLang="en-US">
-                <a:solidFill>
-                  <a:srgbClr val="303437"/>
-                </a:solidFill>
-                <a:latin typeface="Noto Sans"/>
-                <a:ea typeface="Noto Sans CJK JP"/>
-                <a:cs typeface="Noto Sans"/>
-              </a:rPr>
-              <a:t>Converterは候補をReferenceへ変換し、labelに含まれる候補indexへCORRECTタグを付ける。テンプレートで文書・質問・候補を整形する。</a:t>
-            </a:r>
-          </a:p>
-          <a:p>
-            <a:pPr marL="457200" indent="-355600">
-              <a:lnSpc>
-                <a:spcPts val="2201"/>
-              </a:lnSpc>
-              <a:spcAft>
-                <a:spcPts val="700"/>
-              </a:spcAft>
-              <a:buSzPct val="71892"/>
-              <a:buFont typeface="Noto Sans CJK JP"/>
-              <a:buChar char="●"/>
-              <a:defRPr sz="1850" b="0">
-                <a:solidFill>
-                  <a:srgbClr val="303437"/>
-                </a:solidFill>
-                <a:latin typeface="Noto Sans"/>
-              </a:defRPr>
-            </a:pPr>
-            <a:r>
-              <a:rPr sz="1850" b="0" lang="ja-JP" altLang="en-US">
-                <a:solidFill>
-                  <a:srgbClr val="303437"/>
-                </a:solidFill>
-                <a:latin typeface="Noto Sans"/>
-                <a:ea typeface="Noto Sans CJK JP"/>
-                <a:cs typeface="Noto Sans"/>
-              </a:rPr>
-              <a:t>promptのmeta.mul_as_genに応じ、生成、選択肢の一括提示、候補ごとの比較を切り替える。具体的な推論値はinfer_params.jsonから読む。</a:t>
-            </a:r>
-          </a:p>
-          <a:p>
-            <a:pPr marL="457200" indent="-355600">
-              <a:lnSpc>
-                <a:spcPts val="2201"/>
-              </a:lnSpc>
-              <a:spcAft>
-                <a:spcPts val="0"/>
-              </a:spcAft>
-              <a:buSzPct val="71892"/>
-              <a:buFont typeface="Noto Sans CJK JP"/>
-              <a:buChar char="●"/>
-              <a:defRPr sz="1850" b="0">
-                <a:solidFill>
-                  <a:srgbClr val="303437"/>
-                </a:solidFill>
-                <a:latin typeface="Noto Sans"/>
-              </a:defRPr>
-            </a:pPr>
-            <a:r>
-              <a:rPr sz="1850" b="0" lang="ja-JP" altLang="en-US">
-                <a:solidFill>
-                  <a:srgbClr val="303437"/>
-                </a:solidFill>
-                <a:latin typeface="Noto Sans"/>
-                <a:ea typeface="Noto Sans CJK JP"/>
-                <a:cs typeface="Noto Sans"/>
-              </a:rPr>
-              <a:t>この調査ではCLEVA v1の変換済み読解データ全体と推論パラメータを取得できていない。元C³の分割や全問数を、そのまま実行条件に置き換えない。</a:t>
-            </a:r>
-          </a:p>
-        </p:txBody>
-      </p:sp>
-      <p:sp>
-        <p:nvSpPr>
-          <p:cNvPr id="4" name="Title 3"/>
-          <p:cNvSpPr>
-            <a:spLocks noGrp="1"/>
-          </p:cNvSpPr>
-          <p:nvPr>
-            <p:ph type="title" idx="2"/>
-          </p:nvPr>
-        </p:nvSpPr>
-        <p:spPr>
-          <a:xfrm>
-            <a:off x="75895" y="0"/>
-            <a:ext cx="8115300" cy="480060"/>
-          </a:xfrm>
-        </p:spPr>
-        <p:txBody>
-          <a:bodyPr wrap="square" lIns="0" rIns="0" tIns="0" bIns="0" anchor="ctr">
-            <a:noAutofit/>
-          </a:bodyPr>
-          <a:lstStyle/>
-          <a:p>
-            <a:pPr algn="l">
-              <a:lnSpc>
-                <a:spcPct val="110000"/>
-              </a:lnSpc>
-              <a:buNone/>
-              <a:defRPr sz="1400" b="0">
-                <a:solidFill>
-                  <a:srgbClr val="303437"/>
-                </a:solidFill>
-                <a:latin typeface="Noto Sans"/>
-              </a:defRPr>
-            </a:pPr>
-            <a:r>
-              <a:rPr sz="1400" b="1" lang="ja-JP" altLang="en-US">
-                <a:solidFill>
-                  <a:srgbClr val="FFFEF8"/>
-                </a:solidFill>
-                <a:latin typeface="Noto Sans"/>
-                <a:ea typeface="Noto Sans CJK JP"/>
-                <a:cs typeface="Noto Sans"/>
-              </a:rPr>
-              <a:t>Appendix: 2. 版・原位置・再現</a:t>
-            </a:r>
-          </a:p>
-        </p:txBody>
-      </p:sp>
-      <p:sp>
-        <p:nvSpPr>
-          <p:cNvPr id="5" name="sources"/>
-          <p:cNvSpPr txBox="1"/>
-          <p:nvPr/>
-        </p:nvSpPr>
-        <p:spPr>
-          <a:xfrm>
-            <a:off x="502920" y="4517136"/>
-            <a:ext cx="8183879" cy="530352"/>
-          </a:xfrm>
-          <a:prstGeom prst="rect">
-            <a:avLst/>
-          </a:prstGeom>
-          <a:noFill/>
-        </p:spPr>
-        <p:txBody>
-          <a:bodyPr wrap="square" lIns="0" rIns="0" tIns="0" bIns="0">
-            <a:noAutofit/>
-          </a:bodyPr>
-          <a:lstStyle/>
-          <a:p>
-            <a:pPr algn="l">
-              <a:lnSpc>
-                <a:spcPts val="940"/>
-              </a:lnSpc>
-              <a:spcBef>
-                <a:spcPts val="0"/>
-              </a:spcBef>
-              <a:spcAft>
-                <a:spcPts val="400"/>
-              </a:spcAft>
-              <a:buNone/>
-              <a:defRPr sz="810" b="0">
-                <a:solidFill>
-                  <a:srgbClr val="303437"/>
-                </a:solidFill>
-                <a:latin typeface="Noto Sans"/>
-              </a:defRPr>
-            </a:pPr>
-            <a:r>
-              <a:rPr sz="810" b="0" lang="ja-JP" altLang="en-US">
-                <a:solidFill>
-                  <a:srgbClr val="626669"/>
-                </a:solidFill>
-                <a:latin typeface="Noto Sans"/>
-                <a:ea typeface="Noto Sans CJK JP"/>
-                <a:cs typeface="Noto Sans"/>
-              </a:rPr>
-              <a:t>[1] Stanford CRFM. CLEVAReadingComprehensionScenario / Converter. HELM v0.4.0.</a:t>
-            </a:r>
-          </a:p>
-          <a:p>
-            <a:pPr>
-              <a:lnSpc>
-                <a:spcPts val="940"/>
-              </a:lnSpc>
-              <a:spcAft>
-                <a:spcPts val="400"/>
-              </a:spcAft>
-              <a:buNone/>
-              <a:defRPr sz="810" b="0">
-                <a:solidFill>
-                  <a:srgbClr val="303437"/>
-                </a:solidFill>
-                <a:latin typeface="Noto Sans"/>
-              </a:defRPr>
-            </a:pPr>
-            <a:r>
-              <a:rPr sz="810" b="0" lang="ja-JP" altLang="en-US">
-                <a:solidFill>
-                  <a:srgbClr val="626669"/>
-                </a:solidFill>
-                <a:latin typeface="Noto Sans"/>
-                <a:ea typeface="Noto Sans CJK JP"/>
-                <a:cs typeface="Noto Sans"/>
-                <a:hlinkClick r:id="rId2"/>
-              </a:rPr>
-              <a:t>https://github.com/stanford-crfm/helm/blob/v0.4.0/src/helm/benchmark/scenarios/cleva_scenario.py</a:t>
-            </a:r>
-          </a:p>
-          <a:p>
-            <a:pPr>
-              <a:lnSpc>
-                <a:spcPts val="940"/>
-              </a:lnSpc>
-              <a:spcAft>
-                <a:spcPts val="400"/>
-              </a:spcAft>
-              <a:buNone/>
-              <a:defRPr sz="810" b="0">
-                <a:solidFill>
-                  <a:srgbClr val="303437"/>
-                </a:solidFill>
-                <a:latin typeface="Noto Sans"/>
-              </a:defRPr>
-            </a:pPr>
-            <a:r>
-              <a:rPr sz="810" b="0" lang="ja-JP" altLang="en-US">
-                <a:solidFill>
-                  <a:srgbClr val="626669"/>
-                </a:solidFill>
-                <a:latin typeface="Noto Sans"/>
-                <a:ea typeface="Noto Sans CJK JP"/>
-                <a:cs typeface="Noto Sans"/>
-              </a:rPr>
-              <a:t>[2] Stanford CRFM. CLEVA v1 run configuration. HELM v0.4.0.</a:t>
-            </a:r>
-          </a:p>
-          <a:p>
-            <a:pPr>
-              <a:lnSpc>
-                <a:spcPts val="940"/>
-              </a:lnSpc>
-              <a:spcAft>
-                <a:spcPts val="400"/>
-              </a:spcAft>
-              <a:buNone/>
-              <a:defRPr sz="810" b="0">
-                <a:solidFill>
-                  <a:srgbClr val="303437"/>
-                </a:solidFill>
-                <a:latin typeface="Noto Sans"/>
-              </a:defRPr>
-            </a:pPr>
-            <a:r>
-              <a:rPr sz="810" b="0" lang="ja-JP" altLang="en-US">
-                <a:solidFill>
-                  <a:srgbClr val="626669"/>
-                </a:solidFill>
-                <a:latin typeface="Noto Sans"/>
-                <a:ea typeface="Noto Sans CJK JP"/>
-                <a:cs typeface="Noto Sans"/>
                 <a:hlinkClick r:id="rId3"/>
               </a:rPr>
-              <a:t>https://github.com/stanford-crfm/helm/blob/v0.4.0/src/helm/benchmark/presentation/run_specs_cleva_v1.conf</a:t>
-            </a:r>
-          </a:p>
-        </p:txBody>
-      </p:sp>
-    </p:spTree>
-  </p:cSld>
-  <p:clrMapOvr>
-    <a:masterClrMapping/>
-  </p:clrMapOvr>
-</p:sld>
-</file>
-
-<file path=ppt/slides/slide59.xml><?xml version="1.0" encoding="utf-8"?>
-<p:sld xmlns:a="http://schemas.openxmlformats.org/drawingml/2006/main" xmlns:p="http://schemas.openxmlformats.org/presentationml/2006/main" xmlns:r="http://schemas.openxmlformats.org/officeDocument/2006/relationships">
-  <p:cSld>
-    <p:spTree>
-      <p:nvGrpSpPr>
-        <p:cNvPr id="1" name=""/>
-        <p:cNvGrpSpPr/>
-        <p:nvPr/>
-      </p:nvGrpSpPr>
-      <p:grpSpPr/>
-      <p:sp>
-        <p:nvSpPr>
-          <p:cNvPr id="2" name="Title 1"/>
-          <p:cNvSpPr>
-            <a:spLocks noGrp="1"/>
-          </p:cNvSpPr>
-          <p:nvPr>
-            <p:ph type="title"/>
-          </p:nvPr>
-        </p:nvSpPr>
-        <p:spPr>
-          <a:xfrm>
-            <a:off x="468172" y="650138"/>
-            <a:ext cx="8206740" cy="616305"/>
-          </a:xfrm>
-        </p:spPr>
-        <p:txBody>
-          <a:bodyPr wrap="square" lIns="0" rIns="0" tIns="0" bIns="0">
-            <a:noAutofit/>
-          </a:bodyPr>
-          <a:lstStyle/>
-          <a:p>
-            <a:pPr algn="l">
-              <a:lnSpc>
-                <a:spcPct val="110000"/>
-              </a:lnSpc>
-              <a:buNone/>
-              <a:defRPr sz="2800" b="0">
-                <a:solidFill>
-                  <a:srgbClr val="303437"/>
-                </a:solidFill>
-                <a:latin typeface="Noto Sans"/>
-              </a:defRPr>
-            </a:pPr>
-            <a:r>
-              <a:rPr sz="2800" b="1" lang="ja-JP" altLang="en-US">
-                <a:solidFill>
-                  <a:srgbClr val="303437"/>
-                </a:solidFill>
-                <a:latin typeface="Noto Sans"/>
-                <a:ea typeface="Noto Sans CJK JP"/>
-                <a:cs typeface="Noto Sans"/>
-              </a:rPr>
-              <a:t>公開run索引0件の確認範囲</a:t>
-            </a:r>
-          </a:p>
-        </p:txBody>
-      </p:sp>
-      <p:sp>
-        <p:nvSpPr>
-          <p:cNvPr id="3" name="Text Placeholder 2"/>
-          <p:cNvSpPr>
-            <a:spLocks noGrp="1"/>
-          </p:cNvSpPr>
-          <p:nvPr>
-            <p:ph type="body" idx="1"/>
-          </p:nvPr>
-        </p:nvSpPr>
-        <p:spPr>
-          <a:xfrm>
-            <a:off x="594360" y="1463040"/>
-            <a:ext cx="7955279" cy="3044952"/>
-          </a:xfrm>
-        </p:spPr>
-        <p:txBody>
-          <a:bodyPr wrap="square" tIns="91440" bIns="91440">
-            <a:noAutofit/>
-          </a:bodyPr>
-          <a:lstStyle/>
-          <a:p>
-            <a:pPr marL="457200" indent="-355600">
-              <a:lnSpc>
-                <a:spcPts val="2261"/>
-              </a:lnSpc>
-              <a:spcAft>
-                <a:spcPts val="700"/>
-              </a:spcAft>
-              <a:buSzPct val="70000"/>
-              <a:buFont typeface="Noto Sans CJK JP"/>
-              <a:buChar char="●"/>
-              <a:defRPr sz="1900" b="0">
-                <a:solidFill>
-                  <a:srgbClr val="303437"/>
-                </a:solidFill>
-                <a:latin typeface="Noto Sans"/>
-              </a:defRPr>
-            </a:pPr>
-            <a:r>
-              <a:rPr sz="1900" b="0" lang="ja-JP" altLang="en-US">
-                <a:solidFill>
-                  <a:srgbClr val="303437"/>
-                </a:solidFill>
-                <a:latin typeface="Noto Sans"/>
-                <a:ea typeface="Noto Sans CJK JP"/>
-                <a:cs typeface="Noto Sans"/>
-              </a:rPr>
-              <a:t>Classic v0.4.0のrun_specs公開リスト8,526件と、runs_to_run_suitesのキーを対象に、clevaを名に含む項目を照合した。該当は0件だった。</a:t>
-            </a:r>
-          </a:p>
-          <a:p>
-            <a:pPr marL="457200" indent="-355600">
-              <a:lnSpc>
-                <a:spcPts val="2261"/>
-              </a:lnSpc>
-              <a:spcAft>
-                <a:spcPts val="700"/>
-              </a:spcAft>
-              <a:buSzPct val="70000"/>
-              <a:buFont typeface="Noto Sans CJK JP"/>
-              <a:buChar char="●"/>
-              <a:defRPr sz="1900" b="0">
-                <a:solidFill>
-                  <a:srgbClr val="303437"/>
-                </a:solidFill>
-                <a:latin typeface="Noto Sans"/>
-              </a:defRPr>
-            </a:pPr>
-            <a:r>
-              <a:rPr sz="1900" b="0" lang="ja-JP" altLang="en-US">
-                <a:solidFill>
-                  <a:srgbClr val="303437"/>
-                </a:solidFill>
-                <a:latin typeface="Noto Sans"/>
-                <a:ea typeface="Noto Sans CJK JP"/>
-                <a:cs typeface="Noto Sans"/>
-              </a:rPr>
-              <a:t>一方、同リリースにはCLEVA v1の実行設定が含まれ、reading_comprehensionのprompt_id 0〜5を指定している。</a:t>
-            </a:r>
-          </a:p>
-          <a:p>
-            <a:pPr marL="457200" indent="-355600">
-              <a:lnSpc>
-                <a:spcPts val="2261"/>
-              </a:lnSpc>
-              <a:spcAft>
-                <a:spcPts val="0"/>
-              </a:spcAft>
-              <a:buSzPct val="70000"/>
-              <a:buFont typeface="Noto Sans CJK JP"/>
-              <a:buChar char="●"/>
-              <a:defRPr sz="1900" b="0">
-                <a:solidFill>
-                  <a:srgbClr val="303437"/>
-                </a:solidFill>
-                <a:latin typeface="Noto Sans"/>
-              </a:defRPr>
-            </a:pPr>
-            <a:r>
-              <a:rPr sz="1900" b="0" lang="ja-JP" altLang="en-US">
-                <a:solidFill>
-                  <a:srgbClr val="303437"/>
-                </a:solidFill>
-                <a:latin typeface="Noto Sans"/>
-                <a:ea typeface="Noto Sans CJK JP"/>
-                <a:cs typeface="Noto Sans"/>
-              </a:rPr>
-              <a:t>設定が存在することは、公開済みのモデル出力や集計結果があることを意味しない。CLEVA全体の論文結果と、ここで確認した公開runを区別する。</a:t>
-            </a:r>
-          </a:p>
-        </p:txBody>
-      </p:sp>
-      <p:sp>
-        <p:nvSpPr>
-          <p:cNvPr id="4" name="Title 3"/>
-          <p:cNvSpPr>
-            <a:spLocks noGrp="1"/>
-          </p:cNvSpPr>
-          <p:nvPr>
-            <p:ph type="title" idx="2"/>
-          </p:nvPr>
-        </p:nvSpPr>
-        <p:spPr>
-          <a:xfrm>
-            <a:off x="75895" y="0"/>
-            <a:ext cx="8115300" cy="480060"/>
-          </a:xfrm>
-        </p:spPr>
-        <p:txBody>
-          <a:bodyPr wrap="square" lIns="0" rIns="0" tIns="0" bIns="0" anchor="ctr">
-            <a:noAutofit/>
-          </a:bodyPr>
-          <a:lstStyle/>
-          <a:p>
-            <a:pPr algn="l">
-              <a:lnSpc>
-                <a:spcPct val="110000"/>
-              </a:lnSpc>
-              <a:buNone/>
-              <a:defRPr sz="1400" b="0">
-                <a:solidFill>
-                  <a:srgbClr val="303437"/>
-                </a:solidFill>
-                <a:latin typeface="Noto Sans"/>
-              </a:defRPr>
-            </a:pPr>
-            <a:r>
-              <a:rPr sz="1400" b="1" lang="ja-JP" altLang="en-US">
-                <a:solidFill>
-                  <a:srgbClr val="FFFEF8"/>
-                </a:solidFill>
-                <a:latin typeface="Noto Sans"/>
-                <a:ea typeface="Noto Sans CJK JP"/>
-                <a:cs typeface="Noto Sans"/>
-              </a:rPr>
-              <a:t>Appendix: 2. 版・原位置・再現</a:t>
-            </a:r>
-          </a:p>
-        </p:txBody>
-      </p:sp>
-      <p:sp>
-        <p:nvSpPr>
-          <p:cNvPr id="5" name="sources"/>
-          <p:cNvSpPr txBox="1"/>
-          <p:nvPr/>
-        </p:nvSpPr>
-        <p:spPr>
-          <a:xfrm>
-            <a:off x="502920" y="4517136"/>
-            <a:ext cx="8183879" cy="530352"/>
-          </a:xfrm>
-          <a:prstGeom prst="rect">
-            <a:avLst/>
-          </a:prstGeom>
-          <a:noFill/>
-        </p:spPr>
-        <p:txBody>
-          <a:bodyPr wrap="square" lIns="0" rIns="0" tIns="0" bIns="0">
-            <a:noAutofit/>
-          </a:bodyPr>
-          <a:lstStyle/>
-          <a:p>
-            <a:pPr algn="l">
-              <a:lnSpc>
-                <a:spcPts val="940"/>
-              </a:lnSpc>
-              <a:spcBef>
-                <a:spcPts val="0"/>
-              </a:spcBef>
-              <a:spcAft>
-                <a:spcPts val="400"/>
-              </a:spcAft>
-              <a:buNone/>
-              <a:defRPr sz="810" b="0">
-                <a:solidFill>
-                  <a:srgbClr val="303437"/>
-                </a:solidFill>
-                <a:latin typeface="Noto Sans"/>
-              </a:defRPr>
-            </a:pPr>
-            <a:r>
-              <a:rPr sz="810" b="0" lang="ja-JP" altLang="en-US">
-                <a:solidFill>
-                  <a:srgbClr val="626669"/>
-                </a:solidFill>
-                <a:latin typeface="Noto Sans"/>
-                <a:ea typeface="Noto Sans CJK JP"/>
-                <a:cs typeface="Noto Sans"/>
-              </a:rPr>
-              <a:t>[1] Stanford CRFM. HELM Classic release v0.4.0, public run index.</a:t>
-            </a:r>
-            <a:r>
-              <a:rPr sz="810" b="0" lang="ja-JP" altLang="en-US">
-                <a:solidFill>
-                  <a:srgbClr val="626669"/>
-                </a:solidFill>
-                <a:latin typeface="Noto Sans"/>
-                <a:ea typeface="Noto Sans CJK JP"/>
-                <a:cs typeface="Noto Sans"/>
-              </a:rPr>
-              <a:t>  </a:t>
-            </a:r>
-            <a:r>
-              <a:rPr sz="810" b="0" lang="ja-JP" altLang="en-US">
-                <a:solidFill>
-                  <a:srgbClr val="626669"/>
-                </a:solidFill>
-                <a:latin typeface="Noto Sans"/>
-                <a:ea typeface="Noto Sans CJK JP"/>
-                <a:cs typeface="Noto Sans"/>
-                <a:hlinkClick r:id="rId2"/>
-              </a:rPr>
-              <a:t>https://crfm.stanford.edu/helm/classic/v0.4.0/</a:t>
-            </a:r>
-          </a:p>
-          <a:p>
-            <a:pPr>
-              <a:lnSpc>
-                <a:spcPts val="940"/>
-              </a:lnSpc>
-              <a:spcAft>
-                <a:spcPts val="400"/>
-              </a:spcAft>
-              <a:buNone/>
-              <a:defRPr sz="810" b="0">
-                <a:solidFill>
-                  <a:srgbClr val="303437"/>
-                </a:solidFill>
-                <a:latin typeface="Noto Sans"/>
-              </a:defRPr>
-            </a:pPr>
-            <a:r>
-              <a:rPr sz="810" b="0" lang="ja-JP" altLang="en-US">
-                <a:solidFill>
-                  <a:srgbClr val="626669"/>
-                </a:solidFill>
-                <a:latin typeface="Noto Sans"/>
-                <a:ea typeface="Noto Sans CJK JP"/>
-                <a:cs typeface="Noto Sans"/>
-              </a:rPr>
-              <a:t>[2] Stanford CRFM. CLEVA v1 run configuration. HELM v0.4.0.</a:t>
-            </a:r>
-          </a:p>
-          <a:p>
-            <a:pPr>
-              <a:lnSpc>
-                <a:spcPts val="940"/>
-              </a:lnSpc>
-              <a:spcAft>
-                <a:spcPts val="400"/>
-              </a:spcAft>
-              <a:buNone/>
-              <a:defRPr sz="810" b="0">
-                <a:solidFill>
-                  <a:srgbClr val="303437"/>
-                </a:solidFill>
-                <a:latin typeface="Noto Sans"/>
-              </a:defRPr>
-            </a:pPr>
-            <a:r>
-              <a:rPr sz="810" b="0" lang="ja-JP" altLang="en-US">
-                <a:solidFill>
-                  <a:srgbClr val="626669"/>
-                </a:solidFill>
-                <a:latin typeface="Noto Sans"/>
-                <a:ea typeface="Noto Sans CJK JP"/>
-                <a:cs typeface="Noto Sans"/>
-                <a:hlinkClick r:id="rId3"/>
-              </a:rPr>
-              <a:t>https://github.com/stanford-crfm/helm/blob/v0.4.0/src/helm/benchmark/presentation/run_specs_cleva_v1.conf</a:t>
+              <a:t>https://github.com/nlpdata/c3/tree/master/data</a:t>
             </a:r>
           </a:p>
         </p:txBody>
@@ -38296,60 +32183,6 @@
                 <a:cs typeface="Noto Sans"/>
               </a:rPr>
               <a:t>1. 文書から、正しい選択肢を選ぶ</a:t>
-            </a:r>
-          </a:p>
-        </p:txBody>
-      </p:sp>
-      <p:sp>
-        <p:nvSpPr>
-          <p:cNvPr id="4" name="TextBox 3"/>
-          <p:cNvSpPr txBox="1"/>
-          <p:nvPr/>
-        </p:nvSpPr>
-        <p:spPr>
-          <a:xfrm>
-            <a:off x="548640" y="1271016"/>
-            <a:ext cx="8046720" cy="201168"/>
-          </a:xfrm>
-          <a:prstGeom prst="rect">
-            <a:avLst/>
-          </a:prstGeom>
-          <a:noFill/>
-        </p:spPr>
-        <p:txBody>
-          <a:bodyPr wrap="square" lIns="0" rIns="0" tIns="0" bIns="0">
-            <a:noAutofit/>
-          </a:bodyPr>
-          <a:lstStyle/>
-          <a:p>
-            <a:pPr algn="l">
-              <a:lnSpc>
-                <a:spcPts val="1287"/>
-              </a:lnSpc>
-              <a:spcBef>
-                <a:spcPts val="0"/>
-              </a:spcBef>
-              <a:spcAft>
-                <a:spcPts val="0"/>
-              </a:spcAft>
-              <a:buNone/>
-              <a:defRPr sz="1100" b="0">
-                <a:solidFill>
-                  <a:srgbClr val="303437"/>
-                </a:solidFill>
-                <a:latin typeface="Noto Sans"/>
-              </a:defRPr>
-            </a:pPr>
-            <a:r>
-              <a:rPr sz="1100" b="0" lang="ja-JP" altLang="en-US">
-                <a:solidFill>
-                  <a:srgbClr val="626669"/>
-                </a:solidFill>
-                <a:latin typeface="Noto Sans"/>
-                <a:ea typeface="Noto Sans CJK JP"/>
-                <a:cs typeface="Noto Sans"/>
-              </a:rPr>
-              <a:t>C³-Dialogue / train / ID 37-153 / 質問1</a:t>
             </a:r>
           </a:p>
         </p:txBody>
@@ -38752,7 +32585,7 @@
                 <a:spcPts val="0"/>
               </a:spcBef>
               <a:spcAft>
-                <a:spcPts val="400"/>
+                <a:spcPts val="140"/>
               </a:spcAft>
               <a:buNone/>
               <a:defRPr sz="810" b="0">
@@ -38771,7 +32604,7 @@
                 <a:ea typeface="Noto Sans CJK JP"/>
                 <a:cs typeface="Noto Sans"/>
               </a:rPr>
-              <a:t>[1] Sun et al. C³-D / train / 37-153 / question 1.</a:t>
+              <a:t>[1] Sun et al. C³ データセット。</a:t>
             </a:r>
             <a:r>
               <a:rPr sz="810" b="0" lang="ja-JP" altLang="en-US">
@@ -38792,376 +32625,9 @@
                 <a:latin typeface="Noto Sans"/>
                 <a:ea typeface="Noto Sans CJK JP"/>
                 <a:cs typeface="Noto Sans"/>
-                <a:hlinkClick r:id="rId2"/>
-              </a:rPr>
-              <a:t>https://github.com/nlpdata/c3/blob/1f41682ebb684d63afe7c583c8f38e137fc8a826/data/c3-d-train.json</a:t>
-            </a:r>
-          </a:p>
-        </p:txBody>
-      </p:sp>
-    </p:spTree>
-  </p:cSld>
-  <p:clrMapOvr>
-    <a:masterClrMapping/>
-  </p:clrMapOvr>
-</p:sld>
-</file>
-
-<file path=ppt/slides/slide60.xml><?xml version="1.0" encoding="utf-8"?>
-<p:sld xmlns:a="http://schemas.openxmlformats.org/drawingml/2006/main" xmlns:p="http://schemas.openxmlformats.org/presentationml/2006/main" xmlns:r="http://schemas.openxmlformats.org/officeDocument/2006/relationships">
-  <p:cSld>
-    <p:spTree>
-      <p:nvGrpSpPr>
-        <p:cNvPr id="1" name=""/>
-        <p:cNvGrpSpPr/>
-        <p:nvPr/>
-      </p:nvGrpSpPr>
-      <p:grpSpPr/>
-      <p:sp>
-        <p:nvSpPr>
-          <p:cNvPr id="2" name="Title 1"/>
-          <p:cNvSpPr>
-            <a:spLocks noGrp="1"/>
-          </p:cNvSpPr>
-          <p:nvPr>
-            <p:ph type="title"/>
-          </p:nvPr>
-        </p:nvSpPr>
-        <p:spPr>
-          <a:xfrm>
-            <a:off x="468172" y="650138"/>
-            <a:ext cx="8206740" cy="616305"/>
-          </a:xfrm>
-        </p:spPr>
-        <p:txBody>
-          <a:bodyPr wrap="square" lIns="0" rIns="0" tIns="0" bIns="0">
-            <a:noAutofit/>
-          </a:bodyPr>
-          <a:lstStyle/>
-          <a:p>
-            <a:pPr algn="l">
-              <a:lnSpc>
-                <a:spcPct val="110000"/>
-              </a:lnSpc>
-              <a:buNone/>
-              <a:defRPr sz="2800" b="0">
-                <a:solidFill>
-                  <a:srgbClr val="303437"/>
-                </a:solidFill>
-                <a:latin typeface="Noto Sans"/>
-              </a:defRPr>
-            </a:pPr>
-            <a:r>
-              <a:rPr sz="2800" b="1" lang="ja-JP" altLang="en-US">
-                <a:solidFill>
-                  <a:srgbClr val="303437"/>
-                </a:solidFill>
-                <a:latin typeface="Noto Sans"/>
-                <a:ea typeface="Noto Sans CJK JP"/>
-                <a:cs typeface="Noto Sans"/>
-              </a:rPr>
-              <a:t>初回公開と、正式刊行を分けて記録</a:t>
-            </a:r>
-          </a:p>
-        </p:txBody>
-      </p:sp>
-      <p:sp>
-        <p:nvSpPr>
-          <p:cNvPr id="3" name="Text Placeholder 2"/>
-          <p:cNvSpPr>
-            <a:spLocks noGrp="1"/>
-          </p:cNvSpPr>
-          <p:nvPr>
-            <p:ph type="body" idx="1"/>
-          </p:nvPr>
-        </p:nvSpPr>
-        <p:spPr>
-          <a:xfrm>
-            <a:off x="594360" y="1463040"/>
-            <a:ext cx="7955279" cy="3044952"/>
-          </a:xfrm>
-        </p:spPr>
-        <p:txBody>
-          <a:bodyPr wrap="square" tIns="91440" bIns="91440">
-            <a:noAutofit/>
-          </a:bodyPr>
-          <a:lstStyle/>
-          <a:p>
-            <a:pPr marL="457200" indent="-355600">
-              <a:lnSpc>
-                <a:spcPts val="2261"/>
-              </a:lnSpc>
-              <a:spcAft>
-                <a:spcPts val="700"/>
-              </a:spcAft>
-              <a:buSzPct val="70000"/>
-              <a:buFont typeface="Noto Sans CJK JP"/>
-              <a:buChar char="●"/>
-              <a:defRPr sz="1900" b="0">
-                <a:solidFill>
-                  <a:srgbClr val="303437"/>
-                </a:solidFill>
-                <a:latin typeface="Noto Sans"/>
-              </a:defRPr>
-            </a:pPr>
-            <a:r>
-              <a:rPr sz="1900" b="0" lang="ja-JP" altLang="en-US">
-                <a:solidFill>
-                  <a:srgbClr val="303437"/>
-                </a:solidFill>
-                <a:latin typeface="Noto Sans"/>
-                <a:ea typeface="Noto Sans CJK JP"/>
-                <a:cs typeface="Noto Sans"/>
-              </a:rPr>
-              <a:t>arXivの初回投稿は2019年4月21日。初期版の題名はProbing Prior Knowledge Needed in Challenging Chinese Machine Reading Comprehension。</a:t>
-            </a:r>
-          </a:p>
-          <a:p>
-            <a:pPr marL="457200" indent="-355600">
-              <a:lnSpc>
-                <a:spcPts val="2261"/>
-              </a:lnSpc>
-              <a:spcAft>
-                <a:spcPts val="700"/>
-              </a:spcAft>
-              <a:buSzPct val="70000"/>
-              <a:buFont typeface="Noto Sans CJK JP"/>
-              <a:buChar char="●"/>
-              <a:defRPr sz="1900" b="0">
-                <a:solidFill>
-                  <a:srgbClr val="303437"/>
-                </a:solidFill>
-                <a:latin typeface="Noto Sans"/>
-              </a:defRPr>
-            </a:pPr>
-            <a:r>
-              <a:rPr sz="1900" b="0" lang="ja-JP" altLang="en-US">
-                <a:solidFill>
-                  <a:srgbClr val="303437"/>
-                </a:solidFill>
-                <a:latin typeface="Noto Sans"/>
-                <a:ea typeface="Noto Sans CJK JP"/>
-                <a:cs typeface="Noto Sans"/>
-              </a:rPr>
-              <a:t>正式刊行名はInvestigating Prior Knowledge for Challenging Chinese Machine Reading Comprehension。TACL第8巻、141〜155頁、2020年に掲載された。</a:t>
-            </a:r>
-          </a:p>
-          <a:p>
-            <a:pPr marL="457200" indent="-355600">
-              <a:lnSpc>
-                <a:spcPts val="2261"/>
-              </a:lnSpc>
-              <a:spcAft>
-                <a:spcPts val="0"/>
-              </a:spcAft>
-              <a:buSzPct val="70000"/>
-              <a:buFont typeface="Noto Sans CJK JP"/>
-              <a:buChar char="●"/>
-              <a:defRPr sz="1900" b="0">
-                <a:solidFill>
-                  <a:srgbClr val="303437"/>
-                </a:solidFill>
-                <a:latin typeface="Noto Sans"/>
-              </a:defRPr>
-            </a:pPr>
-            <a:r>
-              <a:rPr sz="1900" b="0" lang="ja-JP" altLang="en-US">
-                <a:solidFill>
-                  <a:srgbClr val="303437"/>
-                </a:solidFill>
-                <a:latin typeface="Noto Sans"/>
-                <a:ea typeface="Noto Sans CJK JP"/>
-                <a:cs typeface="Noto Sans"/>
-              </a:rPr>
-              <a:t>C³の公開年は2019年として扱い、正式論文は2020年、CLEVAによる後続利用は2023年として区別する。</a:t>
-            </a:r>
-          </a:p>
-        </p:txBody>
-      </p:sp>
-      <p:sp>
-        <p:nvSpPr>
-          <p:cNvPr id="4" name="Title 3"/>
-          <p:cNvSpPr>
-            <a:spLocks noGrp="1"/>
-          </p:cNvSpPr>
-          <p:nvPr>
-            <p:ph type="title" idx="2"/>
-          </p:nvPr>
-        </p:nvSpPr>
-        <p:spPr>
-          <a:xfrm>
-            <a:off x="75895" y="0"/>
-            <a:ext cx="8115300" cy="480060"/>
-          </a:xfrm>
-        </p:spPr>
-        <p:txBody>
-          <a:bodyPr wrap="square" lIns="0" rIns="0" tIns="0" bIns="0" anchor="ctr">
-            <a:noAutofit/>
-          </a:bodyPr>
-          <a:lstStyle/>
-          <a:p>
-            <a:pPr algn="l">
-              <a:lnSpc>
-                <a:spcPct val="110000"/>
-              </a:lnSpc>
-              <a:buNone/>
-              <a:defRPr sz="1400" b="0">
-                <a:solidFill>
-                  <a:srgbClr val="303437"/>
-                </a:solidFill>
-                <a:latin typeface="Noto Sans"/>
-              </a:defRPr>
-            </a:pPr>
-            <a:r>
-              <a:rPr sz="1400" b="1" lang="ja-JP" altLang="en-US">
-                <a:solidFill>
-                  <a:srgbClr val="FFFEF8"/>
-                </a:solidFill>
-                <a:latin typeface="Noto Sans"/>
-                <a:ea typeface="Noto Sans CJK JP"/>
-                <a:cs typeface="Noto Sans"/>
-              </a:rPr>
-              <a:t>Appendix: 2. 版・原位置・再現</a:t>
-            </a:r>
-          </a:p>
-        </p:txBody>
-      </p:sp>
-      <p:sp>
-        <p:nvSpPr>
-          <p:cNvPr id="5" name="sources"/>
-          <p:cNvSpPr txBox="1"/>
-          <p:nvPr/>
-        </p:nvSpPr>
-        <p:spPr>
-          <a:xfrm>
-            <a:off x="502920" y="4462272"/>
-            <a:ext cx="8183879" cy="658368"/>
-          </a:xfrm>
-          <a:prstGeom prst="rect">
-            <a:avLst/>
-          </a:prstGeom>
-          <a:noFill/>
-        </p:spPr>
-        <p:txBody>
-          <a:bodyPr wrap="square" lIns="0" rIns="0" tIns="0" bIns="0">
-            <a:noAutofit/>
-          </a:bodyPr>
-          <a:lstStyle/>
-          <a:p>
-            <a:pPr algn="l">
-              <a:lnSpc>
-                <a:spcPts val="940"/>
-              </a:lnSpc>
-              <a:spcBef>
-                <a:spcPts val="0"/>
-              </a:spcBef>
-              <a:spcAft>
-                <a:spcPts val="200"/>
-              </a:spcAft>
-              <a:buNone/>
-              <a:defRPr sz="810" b="0">
-                <a:solidFill>
-                  <a:srgbClr val="303437"/>
-                </a:solidFill>
-                <a:latin typeface="Noto Sans"/>
-              </a:defRPr>
-            </a:pPr>
-            <a:r>
-              <a:rPr sz="810" b="0" lang="ja-JP" altLang="en-US">
-                <a:solidFill>
-                  <a:srgbClr val="626669"/>
-                </a:solidFill>
-                <a:latin typeface="Noto Sans"/>
-                <a:ea typeface="Noto Sans CJK JP"/>
-                <a:cs typeface="Noto Sans"/>
-              </a:rPr>
-              <a:t>[1] Sun et al. (2019). Probing Prior Knowledge Needed in Challenging Chinese Machine Reading Comprehension. arXiv:1904.09679v1.</a:t>
-            </a:r>
-          </a:p>
-          <a:p>
-            <a:pPr>
-              <a:lnSpc>
-                <a:spcPts val="940"/>
-              </a:lnSpc>
-              <a:spcAft>
-                <a:spcPts val="200"/>
-              </a:spcAft>
-              <a:buNone/>
-              <a:defRPr sz="810" b="0">
-                <a:solidFill>
-                  <a:srgbClr val="303437"/>
-                </a:solidFill>
-                <a:latin typeface="Noto Sans"/>
-              </a:defRPr>
-            </a:pPr>
-            <a:r>
-              <a:rPr sz="810" b="0" lang="ja-JP" altLang="en-US">
-                <a:solidFill>
-                  <a:srgbClr val="626669"/>
-                </a:solidFill>
-                <a:latin typeface="Noto Sans"/>
-                <a:ea typeface="Noto Sans CJK JP"/>
-                <a:cs typeface="Noto Sans"/>
-                <a:hlinkClick r:id="rId4"/>
-              </a:rPr>
-              <a:t>https://arxiv.org/abs/1904.09679v1</a:t>
-            </a:r>
-          </a:p>
-          <a:p>
-            <a:pPr>
-              <a:lnSpc>
-                <a:spcPts val="940"/>
-              </a:lnSpc>
-              <a:spcAft>
-                <a:spcPts val="200"/>
-              </a:spcAft>
-              <a:buNone/>
-              <a:defRPr sz="810" b="0">
-                <a:solidFill>
-                  <a:srgbClr val="303437"/>
-                </a:solidFill>
-                <a:latin typeface="Noto Sans"/>
-              </a:defRPr>
-            </a:pPr>
-            <a:r>
-              <a:rPr sz="810" b="0" lang="ja-JP" altLang="en-US">
-                <a:solidFill>
-                  <a:srgbClr val="626669"/>
-                </a:solidFill>
-                <a:latin typeface="Noto Sans"/>
-                <a:ea typeface="Noto Sans CJK JP"/>
-                <a:cs typeface="Noto Sans"/>
-              </a:rPr>
-              <a:t>[2] Sun, Yu, Yu &amp; Cardie (2020). Investigating Prior Knowledge for Challenging Chinese Machine Reading Comprehension. TACL 8:141–155.</a:t>
-            </a:r>
-          </a:p>
-          <a:p>
-            <a:pPr>
-              <a:lnSpc>
-                <a:spcPts val="940"/>
-              </a:lnSpc>
-              <a:spcAft>
-                <a:spcPts val="200"/>
-              </a:spcAft>
-              <a:buNone/>
-              <a:defRPr sz="810" b="0">
-                <a:solidFill>
-                  <a:srgbClr val="303437"/>
-                </a:solidFill>
-                <a:latin typeface="Noto Sans"/>
-              </a:defRPr>
-            </a:pPr>
-            <a:r>
-              <a:rPr sz="810" b="0" lang="ja-JP" altLang="en-US">
-                <a:solidFill>
-                  <a:srgbClr val="626669"/>
-                </a:solidFill>
-                <a:latin typeface="Noto Sans"/>
-                <a:ea typeface="Noto Sans CJK JP"/>
-                <a:cs typeface="Noto Sans"/>
                 <a:hlinkClick r:id="rId3"/>
               </a:rPr>
-              <a:t>https://aclanthology.org/2020.tacl-1.10/</a:t>
+              <a:t>https://github.com/nlpdata/c3/tree/master/data</a:t>
             </a:r>
           </a:p>
         </p:txBody>
@@ -39424,7 +32890,7 @@
                 <a:ea typeface="Noto Sans CJK JP"/>
                 <a:cs typeface="Noto Sans"/>
               </a:rPr>
-              <a:t>英語のRACEとDREAMに対応する、中国語の単一テキスト・対話の両方を含む。既存の中国語データで多かった抜出し型の読解を補う位置付けを持つ。</a:t>
+              <a:t>英語のRACEとDREAMに対応する、中国語の単一テキスト・対話の両方を含む。既存の中国語データで多かった抜き出し型の読解を補う位置付けを持つ。</a:t>
             </a:r>
           </a:p>
           <a:p>
@@ -39537,7 +33003,7 @@
                 <a:spcPts val="0"/>
               </a:spcBef>
               <a:spcAft>
-                <a:spcPts val="400"/>
+                <a:spcPts val="140"/>
               </a:spcAft>
               <a:buNone/>
               <a:defRPr sz="810" b="0">
@@ -39556,25 +33022,19 @@
                 <a:ea typeface="Noto Sans CJK JP"/>
                 <a:cs typeface="Noto Sans"/>
               </a:rPr>
-              <a:t>[1] Sun, Yu, Yu &amp; Cardie (2020). Investigating Prior Knowledge for Challenging Chinese Machine Reading Comprehension. TACL 8:141–155.</a:t>
-            </a:r>
-          </a:p>
-          <a:p>
-            <a:pPr>
-              <a:lnSpc>
-                <a:spcPts val="940"/>
-              </a:lnSpc>
-              <a:spcAft>
-                <a:spcPts val="400"/>
-              </a:spcAft>
-              <a:buNone/>
-              <a:defRPr sz="810" b="0">
-                <a:solidFill>
-                  <a:srgbClr val="303437"/>
-                </a:solidFill>
-                <a:latin typeface="Noto Sans"/>
-              </a:defRPr>
-            </a:pPr>
+              <a:t>[1] Sun et al. (2020). Investigating Prior Knowledge for Challenging Chinese Machine Reading Comprehension. TACL.</a:t>
+            </a:r>
+            <a:r>
+              <a:rPr sz="810" b="0" lang="ja-JP" altLang="en-US">
+                <a:solidFill>
+                  <a:srgbClr val="626669"/>
+                </a:solidFill>
+                <a:latin typeface="Noto Sans"/>
+                <a:ea typeface="Noto Sans CJK JP"/>
+                <a:cs typeface="Noto Sans"/>
+              </a:rPr>
+              <a:t>  </a:t>
+            </a:r>
             <a:r>
               <a:rPr sz="810" b="0" lang="ja-JP" altLang="en-US">
                 <a:solidFill>
@@ -40355,7 +33815,7 @@
                 <a:ea typeface="Noto Sans CJK JP"/>
                 <a:cs typeface="Noto Sans"/>
               </a:rPr>
-              <a:t>Kai Sun et al. · nlpdata/c3 · commit 1f41682…</a:t>
+              <a:t>Kai Sun et al. (n.d.). nlpdata/c3。参照2026-10-19。</a:t>
             </a:r>
           </a:p>
         </p:txBody>
@@ -40572,7 +34032,7 @@
                 <a:ea typeface="Noto Sans CJK JP"/>
                 <a:cs typeface="Noto Sans"/>
               </a:rPr>
-              <a:t>CLUEbenchmark · CLUE public distribution</a:t>
+              <a:t>CLUEbenchmark (n.d.). CLUE public distribution。参照2026-10-19。</a:t>
             </a:r>
           </a:p>
         </p:txBody>
@@ -40957,7 +34417,7 @@
                 <a:ea typeface="Noto Sans CJK JP"/>
                 <a:cs typeface="Noto Sans"/>
               </a:rPr>
-              <a:t>中国語モデルの多面的評価基盤。付録B.2にC³由来の選択式読解と父子会話例を示す。</a:t>
+              <a:t>中国語モデルの多面的評価基盤。C³由来の選択式読解と父子会話の実例を示す。</a:t>
             </a:r>
           </a:p>
         </p:txBody>
@@ -41344,60 +34804,6 @@
                 <a:cs typeface="Noto Sans"/>
               </a:rPr>
               <a:t>1. 文書から、正しい選択肢を選ぶ</a:t>
-            </a:r>
-          </a:p>
-        </p:txBody>
-      </p:sp>
-      <p:sp>
-        <p:nvSpPr>
-          <p:cNvPr id="4" name="TextBox 3"/>
-          <p:cNvSpPr txBox="1"/>
-          <p:nvPr/>
-        </p:nvSpPr>
-        <p:spPr>
-          <a:xfrm>
-            <a:off x="548640" y="1271016"/>
-            <a:ext cx="8046720" cy="201168"/>
-          </a:xfrm>
-          <a:prstGeom prst="rect">
-            <a:avLst/>
-          </a:prstGeom>
-          <a:noFill/>
-        </p:spPr>
-        <p:txBody>
-          <a:bodyPr wrap="square" lIns="0" rIns="0" tIns="0" bIns="0">
-            <a:noAutofit/>
-          </a:bodyPr>
-          <a:lstStyle/>
-          <a:p>
-            <a:pPr algn="l">
-              <a:lnSpc>
-                <a:spcPts val="1287"/>
-              </a:lnSpc>
-              <a:spcBef>
-                <a:spcPts val="0"/>
-              </a:spcBef>
-              <a:spcAft>
-                <a:spcPts val="0"/>
-              </a:spcAft>
-              <a:buNone/>
-              <a:defRPr sz="1100" b="0">
-                <a:solidFill>
-                  <a:srgbClr val="303437"/>
-                </a:solidFill>
-                <a:latin typeface="Noto Sans"/>
-              </a:defRPr>
-            </a:pPr>
-            <a:r>
-              <a:rPr sz="1100" b="0" lang="ja-JP" altLang="en-US">
-                <a:solidFill>
-                  <a:srgbClr val="626669"/>
-                </a:solidFill>
-                <a:latin typeface="Noto Sans"/>
-                <a:ea typeface="Noto Sans CJK JP"/>
-                <a:cs typeface="Noto Sans"/>
-              </a:rPr>
-              <a:t>C³-Dialogue / train / ID 37-153 / 質問1</a:t>
             </a:r>
           </a:p>
         </p:txBody>
@@ -41800,7 +35206,7 @@
                 <a:spcPts val="0"/>
               </a:spcBef>
               <a:spcAft>
-                <a:spcPts val="400"/>
+                <a:spcPts val="140"/>
               </a:spcAft>
               <a:buNone/>
               <a:defRPr sz="810" b="0">
@@ -41819,7 +35225,7 @@
                 <a:ea typeface="Noto Sans CJK JP"/>
                 <a:cs typeface="Noto Sans"/>
               </a:rPr>
-              <a:t>[1] Sun et al. C³-D / train / 37-153 / question 1.</a:t>
+              <a:t>[1] Sun et al. C³ データセット。</a:t>
             </a:r>
             <a:r>
               <a:rPr sz="810" b="0" lang="ja-JP" altLang="en-US">
@@ -41840,9 +35246,9 @@
                 <a:latin typeface="Noto Sans"/>
                 <a:ea typeface="Noto Sans CJK JP"/>
                 <a:cs typeface="Noto Sans"/>
-                <a:hlinkClick r:id="rId2"/>
-              </a:rPr>
-              <a:t>https://github.com/nlpdata/c3/blob/1f41682ebb684d63afe7c583c8f38e137fc8a826/data/c3-d-train.json</a:t>
+                <a:hlinkClick r:id="rId3"/>
+              </a:rPr>
+              <a:t>https://github.com/nlpdata/c3/tree/master/data</a:t>
             </a:r>
           </a:p>
         </p:txBody>
@@ -41908,7 +35314,7 @@
                 <a:ea typeface="Noto Sans CJK JP"/>
                 <a:cs typeface="Noto Sans"/>
               </a:rPr>
-              <a:t>似た語があっても、理由の主体は違う</a:t>
+              <a:t>父親は、会話の不足を理由に挙げている</a:t>
             </a:r>
           </a:p>
         </p:txBody>
@@ -41961,7 +35367,7 @@
                 <a:ea typeface="Noto Sans CJK JP"/>
                 <a:cs typeface="Noto Sans"/>
               </a:rPr>
-              <a:t>父親が明言する「ほとんど会話がない」が理由。息子にかかる重圧を、父親自身の重圧と取り違えない。</a:t>
+              <a:t>父親が理由として述べたのは、息子との会話がほとんどないこと。重圧がかかっているのは息子である。</a:t>
             </a:r>
           </a:p>
           <a:p>
@@ -42021,7 +35427,7 @@
                 <a:ea typeface="Noto Sans CJK JP"/>
                 <a:cs typeface="Noto Sans"/>
               </a:rPr>
-              <a:t>この父子会話はCLEVAの論文にも例として載る。ここでは、元C³の公開学習データにある一問として示した。</a:t>
+              <a:t>この父子会話は、CLEVAの論文にも読解の例として掲載されている。</a:t>
             </a:r>
           </a:p>
         </p:txBody>
@@ -42104,7 +35510,7 @@
                 <a:spcPts val="0"/>
               </a:spcBef>
               <a:spcAft>
-                <a:spcPts val="400"/>
+                <a:spcPts val="140"/>
               </a:spcAft>
               <a:buNone/>
               <a:defRPr sz="810" b="0">
@@ -42123,7 +35529,7 @@
                 <a:ea typeface="Noto Sans CJK JP"/>
                 <a:cs typeface="Noto Sans"/>
               </a:rPr>
-              <a:t>[1] Sun et al. C³-D / train / 37-153 / question 1.</a:t>
+              <a:t>[1] Sun et al. C³ データセット。</a:t>
             </a:r>
             <a:r>
               <a:rPr sz="810" b="0" lang="ja-JP" altLang="en-US">
@@ -42144,9 +35550,9 @@
                 <a:latin typeface="Noto Sans"/>
                 <a:ea typeface="Noto Sans CJK JP"/>
                 <a:cs typeface="Noto Sans"/>
-                <a:hlinkClick r:id="rId2"/>
-              </a:rPr>
-              <a:t>https://github.com/nlpdata/c3/blob/1f41682ebb684d63afe7c583c8f38e137fc8a826/data/c3-d-train.json</a:t>
+                <a:hlinkClick r:id="rId4"/>
+              </a:rPr>
+              <a:t>https://github.com/nlpdata/c3/tree/master/data</a:t>
             </a:r>
           </a:p>
           <a:p>
@@ -42155,7 +35561,7 @@
                 <a:spcPts val="940"/>
               </a:lnSpc>
               <a:spcAft>
-                <a:spcPts val="400"/>
+                <a:spcPts val="140"/>
               </a:spcAft>
               <a:buNone/>
               <a:defRPr sz="810" b="0">
@@ -42174,7 +35580,7 @@
                 <a:ea typeface="Noto Sans CJK JP"/>
                 <a:cs typeface="Noto Sans"/>
               </a:rPr>
-              <a:t>[2] Li et al. (2023). CLEVA: Chinese Language Models EVAluation Platform. EMNLP System Demonstrations.</a:t>
+              <a:t>[2] Li et al. (2023). CLEVA. EMNLP System Demonstrations.</a:t>
             </a:r>
             <a:r>
               <a:rPr sz="810" b="0" lang="ja-JP" altLang="en-US">
@@ -42312,60 +35718,6 @@
                 <a:cs typeface="Noto Sans"/>
               </a:rPr>
               <a:t>1. 文書から、正しい選択肢を選ぶ</a:t>
-            </a:r>
-          </a:p>
-        </p:txBody>
-      </p:sp>
-      <p:sp>
-        <p:nvSpPr>
-          <p:cNvPr id="4" name="TextBox 3"/>
-          <p:cNvSpPr txBox="1"/>
-          <p:nvPr/>
-        </p:nvSpPr>
-        <p:spPr>
-          <a:xfrm>
-            <a:off x="548640" y="1271016"/>
-            <a:ext cx="8046720" cy="201168"/>
-          </a:xfrm>
-          <a:prstGeom prst="rect">
-            <a:avLst/>
-          </a:prstGeom>
-          <a:noFill/>
-        </p:spPr>
-        <p:txBody>
-          <a:bodyPr wrap="square" lIns="0" rIns="0" tIns="0" bIns="0">
-            <a:noAutofit/>
-          </a:bodyPr>
-          <a:lstStyle/>
-          <a:p>
-            <a:pPr algn="l">
-              <a:lnSpc>
-                <a:spcPts val="1287"/>
-              </a:lnSpc>
-              <a:spcBef>
-                <a:spcPts val="0"/>
-              </a:spcBef>
-              <a:spcAft>
-                <a:spcPts val="0"/>
-              </a:spcAft>
-              <a:buNone/>
-              <a:defRPr sz="1100" b="0">
-                <a:solidFill>
-                  <a:srgbClr val="303437"/>
-                </a:solidFill>
-                <a:latin typeface="Noto Sans"/>
-              </a:defRPr>
-            </a:pPr>
-            <a:r>
-              <a:rPr sz="1100" b="0" lang="ja-JP" altLang="en-US">
-                <a:solidFill>
-                  <a:srgbClr val="626669"/>
-                </a:solidFill>
-                <a:latin typeface="Noto Sans"/>
-                <a:ea typeface="Noto Sans CJK JP"/>
-                <a:cs typeface="Noto Sans"/>
-              </a:rPr>
-              <a:t>C³-Mixed / dev / ID 11-67 / 質問1</a:t>
             </a:r>
           </a:p>
         </p:txBody>
@@ -42737,7 +36089,7 @@
                 <a:spcPts val="0"/>
               </a:spcBef>
               <a:spcAft>
-                <a:spcPts val="400"/>
+                <a:spcPts val="140"/>
               </a:spcAft>
               <a:buNone/>
               <a:defRPr sz="810" b="0">
@@ -42756,7 +36108,7 @@
                 <a:ea typeface="Noto Sans CJK JP"/>
                 <a:cs typeface="Noto Sans"/>
               </a:rPr>
-              <a:t>[1] Sun et al. C³-M / dev / 11-67 / question 1.</a:t>
+              <a:t>[1] Sun et al. C³ データセット。</a:t>
             </a:r>
             <a:r>
               <a:rPr sz="810" b="0" lang="ja-JP" altLang="en-US">
@@ -42777,9 +36129,9 @@
                 <a:latin typeface="Noto Sans"/>
                 <a:ea typeface="Noto Sans CJK JP"/>
                 <a:cs typeface="Noto Sans"/>
-                <a:hlinkClick r:id="rId2"/>
-              </a:rPr>
-              <a:t>https://github.com/nlpdata/c3/blob/1f41682ebb684d63afe7c583c8f38e137fc8a826/data/c3-m-dev.json</a:t>
+                <a:hlinkClick r:id="rId3"/>
+              </a:rPr>
+              <a:t>https://github.com/nlpdata/c3/tree/master/data</a:t>
             </a:r>
           </a:p>
         </p:txBody>

--- a/slides/datasets-in-10-minutes-c3.pptx
+++ b/slides/datasets-in-10-minutes-c3.pptx
@@ -31,8 +31,6 @@
     <p:sldId id="280" r:id="rId30"/>
     <p:sldId id="281" r:id="rId31"/>
     <p:sldId id="282" r:id="rId32"/>
-    <p:sldId id="283" r:id="rId33"/>
-    <p:sldId id="285" r:id="rId35"/>
     <p:sldId id="286" r:id="rId36"/>
     <p:sldId id="287" r:id="rId37"/>
     <p:sldId id="288" r:id="rId38"/>
@@ -61,7 +59,6 @@
     <p:sldId id="317" r:id="rId67"/>
     <p:sldId id="318" r:id="rId68"/>
     <p:sldId id="319" r:id="rId69"/>
-    <p:sldId id="320" r:id="rId70"/>
   </p:sldIdLst>
   <p:sldSz cx="9144000" cy="5143500" type="screen16x9"/>
   <p:notesSz cx="6858000" cy="9144000"/>
@@ -9511,7 +9508,7 @@
 </p:sld>
 </file>
 
-<file path=ppt/slides/slide15.xml><?xml version="1.0" encoding="utf-8"?>
+<file path=ppt/slides/slide14.xml><?xml version="1.0" encoding="utf-8"?>
 <p:sld xmlns:a="http://schemas.openxmlformats.org/drawingml/2006/main" xmlns:p="http://schemas.openxmlformats.org/presentationml/2006/main" xmlns:r="http://schemas.openxmlformats.org/officeDocument/2006/relationships">
   <p:cSld>
     <p:spTree>
@@ -9625,7 +9622,7 @@
 </p:sld>
 </file>
 
-<file path=ppt/slides/slide16.xml><?xml version="1.0" encoding="utf-8"?>
+<file path=ppt/slides/slide15.xml><?xml version="1.0" encoding="utf-8"?>
 <p:sld xmlns:a="http://schemas.openxmlformats.org/drawingml/2006/main" xmlns:p="http://schemas.openxmlformats.org/presentationml/2006/main" xmlns:r="http://schemas.openxmlformats.org/officeDocument/2006/relationships">
   <p:cSld>
     <p:spTree>
@@ -9929,7 +9926,7 @@
 </p:sld>
 </file>
 
-<file path=ppt/slides/slide17.xml><?xml version="1.0" encoding="utf-8"?>
+<file path=ppt/slides/slide16.xml><?xml version="1.0" encoding="utf-8"?>
 <p:sld xmlns:a="http://schemas.openxmlformats.org/drawingml/2006/main" xmlns:p="http://schemas.openxmlformats.org/presentationml/2006/main" xmlns:r="http://schemas.openxmlformats.org/officeDocument/2006/relationships">
   <p:cSld>
     <p:spTree>
@@ -11258,7 +11255,7 @@
 </p:sld>
 </file>
 
-<file path=ppt/slides/slide18.xml><?xml version="1.0" encoding="utf-8"?>
+<file path=ppt/slides/slide17.xml><?xml version="1.0" encoding="utf-8"?>
 <p:sld xmlns:a="http://schemas.openxmlformats.org/drawingml/2006/main" xmlns:p="http://schemas.openxmlformats.org/presentationml/2006/main" xmlns:r="http://schemas.openxmlformats.org/officeDocument/2006/relationships">
   <p:cSld>
     <p:spTree>
@@ -12324,7 +12321,7 @@
 </p:sld>
 </file>
 
-<file path=ppt/slides/slide19.xml><?xml version="1.0" encoding="utf-8"?>
+<file path=ppt/slides/slide18.xml><?xml version="1.0" encoding="utf-8"?>
 <p:sld xmlns:a="http://schemas.openxmlformats.org/drawingml/2006/main" xmlns:p="http://schemas.openxmlformats.org/presentationml/2006/main" xmlns:r="http://schemas.openxmlformats.org/officeDocument/2006/relationships">
   <p:cSld>
     <p:spTree>
@@ -12628,222 +12625,7 @@
 </p:sld>
 </file>
 
-<file path=ppt/slides/slide2.xml><?xml version="1.0" encoding="utf-8"?>
-<p:sld xmlns:a="http://schemas.openxmlformats.org/drawingml/2006/main" xmlns:p="http://schemas.openxmlformats.org/presentationml/2006/main" xmlns:r="http://schemas.openxmlformats.org/officeDocument/2006/relationships">
-  <p:cSld>
-    <p:spTree>
-      <p:nvGrpSpPr>
-        <p:cNvPr id="1" name=""/>
-        <p:cNvGrpSpPr/>
-        <p:nvPr/>
-      </p:nvGrpSpPr>
-      <p:grpSpPr/>
-      <p:sp>
-        <p:nvSpPr>
-          <p:cNvPr id="2" name="Title 1"/>
-          <p:cNvSpPr>
-            <a:spLocks noGrp="1"/>
-          </p:cNvSpPr>
-          <p:nvPr>
-            <p:ph type="title"/>
-          </p:nvPr>
-        </p:nvSpPr>
-        <p:spPr>
-          <a:xfrm>
-            <a:off x="468172" y="650138"/>
-            <a:ext cx="8206740" cy="616305"/>
-          </a:xfrm>
-        </p:spPr>
-        <p:txBody>
-          <a:bodyPr wrap="square" lIns="0" rIns="0" tIns="0" bIns="0">
-            <a:noAutofit/>
-          </a:bodyPr>
-          <a:lstStyle/>
-          <a:p>
-            <a:pPr algn="l">
-              <a:lnSpc>
-                <a:spcPct val="110000"/>
-              </a:lnSpc>
-              <a:buNone/>
-              <a:defRPr sz="2800" b="0">
-                <a:solidFill>
-                  <a:srgbClr val="303437"/>
-                </a:solidFill>
-                <a:latin typeface="Noto Sans"/>
-              </a:defRPr>
-            </a:pPr>
-            <a:r>
-              <a:rPr sz="2800" b="1" lang="ja-JP" altLang="en-US">
-                <a:solidFill>
-                  <a:srgbClr val="303437"/>
-                </a:solidFill>
-                <a:latin typeface="Noto Sans"/>
-                <a:ea typeface="Noto Sans CJK JP"/>
-                <a:cs typeface="Noto Sans"/>
-              </a:rPr>
-              <a:t>C³の公式公開リポジトリ</a:t>
-            </a:r>
-          </a:p>
-        </p:txBody>
-      </p:sp>
-      <p:sp>
-        <p:nvSpPr>
-          <p:cNvPr id="3" name="Title 2"/>
-          <p:cNvSpPr>
-            <a:spLocks noGrp="1"/>
-          </p:cNvSpPr>
-          <p:nvPr>
-            <p:ph type="title" idx="2"/>
-          </p:nvPr>
-        </p:nvSpPr>
-        <p:spPr>
-          <a:xfrm>
-            <a:off x="75895" y="0"/>
-            <a:ext cx="8115300" cy="480060"/>
-          </a:xfrm>
-        </p:spPr>
-        <p:txBody>
-          <a:bodyPr wrap="square" lIns="0" rIns="0" tIns="0" bIns="0" anchor="ctr">
-            <a:noAutofit/>
-          </a:bodyPr>
-          <a:lstStyle/>
-          <a:p>
-            <a:pPr algn="l">
-              <a:lnSpc>
-                <a:spcPct val="110000"/>
-              </a:lnSpc>
-              <a:buNone/>
-              <a:defRPr sz="1400" b="0">
-                <a:solidFill>
-                  <a:srgbClr val="303437"/>
-                </a:solidFill>
-                <a:latin typeface="Noto Sans"/>
-              </a:defRPr>
-            </a:pPr>
-            <a:r>
-              <a:rPr sz="1400" b="1" lang="ja-JP" altLang="en-US">
-                <a:solidFill>
-                  <a:srgbClr val="FFFEF8"/>
-                </a:solidFill>
-                <a:latin typeface="Noto Sans"/>
-                <a:ea typeface="Noto Sans CJK JP"/>
-                <a:cs typeface="Noto Sans"/>
-              </a:rPr>
-              <a:t>C³</a:t>
-            </a:r>
-          </a:p>
-        </p:txBody>
-      </p:sp>
-      <p:pic>
-        <p:nvPicPr>
-          <p:cNvPr id="4" name="Picture 3" descr="official-site.png"/>
-          <p:cNvPicPr>
-            <a:picLocks noChangeAspect="1"/>
-          </p:cNvPicPr>
-          <p:nvPr/>
-        </p:nvPicPr>
-        <p:blipFill>
-          <a:blip r:embed="rId2"/>
-          <a:stretch>
-            <a:fillRect/>
-          </a:stretch>
-        </p:blipFill>
-        <p:spPr>
-          <a:xfrm>
-            <a:off x="1178872" y="1481328"/>
-            <a:ext cx="6786254" cy="3063240"/>
-          </a:xfrm>
-          <a:prstGeom prst="rect">
-            <a:avLst/>
-          </a:prstGeom>
-        </p:spPr>
-      </p:pic>
-      <p:sp>
-        <p:nvSpPr>
-          <p:cNvPr id="5" name="sources"/>
-          <p:cNvSpPr txBox="1"/>
-          <p:nvPr/>
-        </p:nvSpPr>
-        <p:spPr>
-          <a:xfrm>
-            <a:off x="502920" y="4700016"/>
-            <a:ext cx="8183879" cy="530352"/>
-          </a:xfrm>
-          <a:prstGeom prst="rect">
-            <a:avLst/>
-          </a:prstGeom>
-          <a:noFill/>
-        </p:spPr>
-        <p:txBody>
-          <a:bodyPr wrap="square" lIns="0" rIns="0" tIns="0" bIns="0">
-            <a:noAutofit/>
-          </a:bodyPr>
-          <a:lstStyle/>
-          <a:p>
-            <a:pPr algn="l">
-              <a:lnSpc>
-                <a:spcPts val="940"/>
-              </a:lnSpc>
-              <a:spcBef>
-                <a:spcPts val="0"/>
-              </a:spcBef>
-              <a:spcAft>
-                <a:spcPts val="140"/>
-              </a:spcAft>
-              <a:buNone/>
-              <a:defRPr sz="810" b="0">
-                <a:solidFill>
-                  <a:srgbClr val="303437"/>
-                </a:solidFill>
-                <a:latin typeface="Noto Sans"/>
-              </a:defRPr>
-            </a:pPr>
-            <a:r>
-              <a:rPr sz="810" b="0" lang="ja-JP" altLang="en-US">
-                <a:solidFill>
-                  <a:srgbClr val="626669"/>
-                </a:solidFill>
-                <a:latin typeface="Noto Sans"/>
-                <a:ea typeface="Noto Sans CJK JP"/>
-                <a:cs typeface="Noto Sans"/>
-              </a:rPr>
-              <a:t>[1] Sun et al. C³ 公式データ・実装。</a:t>
-            </a:r>
-            <a:r>
-              <a:rPr sz="810" b="0" lang="ja-JP" altLang="en-US">
-                <a:solidFill>
-                  <a:srgbClr val="626669"/>
-                </a:solidFill>
-                <a:latin typeface="Noto Sans"/>
-                <a:ea typeface="Noto Sans CJK JP"/>
-                <a:cs typeface="Noto Sans"/>
-              </a:rPr>
-              <a:t>  </a:t>
-            </a:r>
-            <a:r>
-              <a:rPr sz="810" b="0" lang="ja-JP" altLang="en-US">
-                <a:solidFill>
-                  <a:srgbClr val="626669"/>
-                </a:solidFill>
-                <a:latin typeface="Noto Sans"/>
-                <a:ea typeface="Noto Sans CJK JP"/>
-                <a:cs typeface="Noto Sans"/>
-                <a:hlinkClick r:id="rId3"/>
-              </a:rPr>
-              <a:t>https://github.com/nlpdata/c3</a:t>
-            </a:r>
-          </a:p>
-        </p:txBody>
-      </p:sp>
-    </p:spTree>
-  </p:cSld>
-  <p:clrMapOvr>
-    <a:masterClrMapping/>
-  </p:clrMapOvr>
-</p:sld>
-</file>
-
-<file path=ppt/slides/slide20.xml><?xml version="1.0" encoding="utf-8"?>
+<file path=ppt/slides/slide19.xml><?xml version="1.0" encoding="utf-8"?>
 <p:sld xmlns:a="http://schemas.openxmlformats.org/drawingml/2006/main" xmlns:p="http://schemas.openxmlformats.org/presentationml/2006/main" xmlns:r="http://schemas.openxmlformats.org/officeDocument/2006/relationships">
   <p:cSld>
     <p:spTree>
@@ -13748,7 +13530,7 @@
 </p:sld>
 </file>
 
-<file path=ppt/slides/slide21.xml><?xml version="1.0" encoding="utf-8"?>
+<file path=ppt/slides/slide2.xml><?xml version="1.0" encoding="utf-8"?>
 <p:sld xmlns:a="http://schemas.openxmlformats.org/drawingml/2006/main" xmlns:p="http://schemas.openxmlformats.org/presentationml/2006/main" xmlns:r="http://schemas.openxmlformats.org/officeDocument/2006/relationships">
   <p:cSld>
     <p:spTree>
@@ -13801,6 +13583,221 @@
                 <a:ea typeface="Noto Sans CJK JP"/>
                 <a:cs typeface="Noto Sans"/>
               </a:rPr>
+              <a:t>C³の公式公開リポジトリ</a:t>
+            </a:r>
+          </a:p>
+        </p:txBody>
+      </p:sp>
+      <p:sp>
+        <p:nvSpPr>
+          <p:cNvPr id="3" name="Title 2"/>
+          <p:cNvSpPr>
+            <a:spLocks noGrp="1"/>
+          </p:cNvSpPr>
+          <p:nvPr>
+            <p:ph type="title" idx="2"/>
+          </p:nvPr>
+        </p:nvSpPr>
+        <p:spPr>
+          <a:xfrm>
+            <a:off x="75895" y="0"/>
+            <a:ext cx="8115300" cy="480060"/>
+          </a:xfrm>
+        </p:spPr>
+        <p:txBody>
+          <a:bodyPr wrap="square" lIns="0" rIns="0" tIns="0" bIns="0" anchor="ctr">
+            <a:noAutofit/>
+          </a:bodyPr>
+          <a:lstStyle/>
+          <a:p>
+            <a:pPr algn="l">
+              <a:lnSpc>
+                <a:spcPct val="110000"/>
+              </a:lnSpc>
+              <a:buNone/>
+              <a:defRPr sz="1400" b="0">
+                <a:solidFill>
+                  <a:srgbClr val="303437"/>
+                </a:solidFill>
+                <a:latin typeface="Noto Sans"/>
+              </a:defRPr>
+            </a:pPr>
+            <a:r>
+              <a:rPr sz="1400" b="1" lang="ja-JP" altLang="en-US">
+                <a:solidFill>
+                  <a:srgbClr val="FFFEF8"/>
+                </a:solidFill>
+                <a:latin typeface="Noto Sans"/>
+                <a:ea typeface="Noto Sans CJK JP"/>
+                <a:cs typeface="Noto Sans"/>
+              </a:rPr>
+              <a:t>C³</a:t>
+            </a:r>
+          </a:p>
+        </p:txBody>
+      </p:sp>
+      <p:pic>
+        <p:nvPicPr>
+          <p:cNvPr id="4" name="Picture 3" descr="official-site.png"/>
+          <p:cNvPicPr>
+            <a:picLocks noChangeAspect="1"/>
+          </p:cNvPicPr>
+          <p:nvPr/>
+        </p:nvPicPr>
+        <p:blipFill>
+          <a:blip r:embed="rId2"/>
+          <a:stretch>
+            <a:fillRect/>
+          </a:stretch>
+        </p:blipFill>
+        <p:spPr>
+          <a:xfrm>
+            <a:off x="1178872" y="1481328"/>
+            <a:ext cx="6786254" cy="3063240"/>
+          </a:xfrm>
+          <a:prstGeom prst="rect">
+            <a:avLst/>
+          </a:prstGeom>
+        </p:spPr>
+      </p:pic>
+      <p:sp>
+        <p:nvSpPr>
+          <p:cNvPr id="5" name="sources"/>
+          <p:cNvSpPr txBox="1"/>
+          <p:nvPr/>
+        </p:nvSpPr>
+        <p:spPr>
+          <a:xfrm>
+            <a:off x="502920" y="4700016"/>
+            <a:ext cx="8183879" cy="530352"/>
+          </a:xfrm>
+          <a:prstGeom prst="rect">
+            <a:avLst/>
+          </a:prstGeom>
+          <a:noFill/>
+        </p:spPr>
+        <p:txBody>
+          <a:bodyPr wrap="square" lIns="0" rIns="0" tIns="0" bIns="0">
+            <a:noAutofit/>
+          </a:bodyPr>
+          <a:lstStyle/>
+          <a:p>
+            <a:pPr algn="l">
+              <a:lnSpc>
+                <a:spcPts val="940"/>
+              </a:lnSpc>
+              <a:spcBef>
+                <a:spcPts val="0"/>
+              </a:spcBef>
+              <a:spcAft>
+                <a:spcPts val="140"/>
+              </a:spcAft>
+              <a:buNone/>
+              <a:defRPr sz="810" b="0">
+                <a:solidFill>
+                  <a:srgbClr val="303437"/>
+                </a:solidFill>
+                <a:latin typeface="Noto Sans"/>
+              </a:defRPr>
+            </a:pPr>
+            <a:r>
+              <a:rPr sz="810" b="0" lang="ja-JP" altLang="en-US">
+                <a:solidFill>
+                  <a:srgbClr val="626669"/>
+                </a:solidFill>
+                <a:latin typeface="Noto Sans"/>
+                <a:ea typeface="Noto Sans CJK JP"/>
+                <a:cs typeface="Noto Sans"/>
+              </a:rPr>
+              <a:t>[1] Sun et al. C³ 公式データ・実装。</a:t>
+            </a:r>
+            <a:r>
+              <a:rPr sz="810" b="0" lang="ja-JP" altLang="en-US">
+                <a:solidFill>
+                  <a:srgbClr val="626669"/>
+                </a:solidFill>
+                <a:latin typeface="Noto Sans"/>
+                <a:ea typeface="Noto Sans CJK JP"/>
+                <a:cs typeface="Noto Sans"/>
+              </a:rPr>
+              <a:t>  </a:t>
+            </a:r>
+            <a:r>
+              <a:rPr sz="810" b="0" lang="ja-JP" altLang="en-US">
+                <a:solidFill>
+                  <a:srgbClr val="626669"/>
+                </a:solidFill>
+                <a:latin typeface="Noto Sans"/>
+                <a:ea typeface="Noto Sans CJK JP"/>
+                <a:cs typeface="Noto Sans"/>
+                <a:hlinkClick r:id="rId3"/>
+              </a:rPr>
+              <a:t>https://github.com/nlpdata/c3</a:t>
+            </a:r>
+          </a:p>
+        </p:txBody>
+      </p:sp>
+    </p:spTree>
+  </p:cSld>
+  <p:clrMapOvr>
+    <a:masterClrMapping/>
+  </p:clrMapOvr>
+</p:sld>
+</file>
+
+<file path=ppt/slides/slide20.xml><?xml version="1.0" encoding="utf-8"?>
+<p:sld xmlns:a="http://schemas.openxmlformats.org/drawingml/2006/main" xmlns:p="http://schemas.openxmlformats.org/presentationml/2006/main" xmlns:r="http://schemas.openxmlformats.org/officeDocument/2006/relationships">
+  <p:cSld>
+    <p:spTree>
+      <p:nvGrpSpPr>
+        <p:cNvPr id="1" name=""/>
+        <p:cNvGrpSpPr/>
+        <p:nvPr/>
+      </p:nvGrpSpPr>
+      <p:grpSpPr/>
+      <p:sp>
+        <p:nvSpPr>
+          <p:cNvPr id="2" name="Title 1"/>
+          <p:cNvSpPr>
+            <a:spLocks noGrp="1"/>
+          </p:cNvSpPr>
+          <p:nvPr>
+            <p:ph type="title"/>
+          </p:nvPr>
+        </p:nvSpPr>
+        <p:spPr>
+          <a:xfrm>
+            <a:off x="468172" y="650138"/>
+            <a:ext cx="8206740" cy="616305"/>
+          </a:xfrm>
+        </p:spPr>
+        <p:txBody>
+          <a:bodyPr wrap="square" lIns="0" rIns="0" tIns="0" bIns="0">
+            <a:noAutofit/>
+          </a:bodyPr>
+          <a:lstStyle/>
+          <a:p>
+            <a:pPr algn="l">
+              <a:lnSpc>
+                <a:spcPct val="110000"/>
+              </a:lnSpc>
+              <a:buNone/>
+              <a:defRPr sz="2800" b="0">
+                <a:solidFill>
+                  <a:srgbClr val="303437"/>
+                </a:solidFill>
+                <a:latin typeface="Noto Sans"/>
+              </a:defRPr>
+            </a:pPr>
+            <a:r>
+              <a:rPr sz="2800" b="1" lang="ja-JP" altLang="en-US">
+                <a:solidFill>
+                  <a:srgbClr val="303437"/>
+                </a:solidFill>
+                <a:latin typeface="Noto Sans"/>
+                <a:ea typeface="Noto Sans CJK JP"/>
+                <a:cs typeface="Noto Sans"/>
+              </a:rPr>
               <a:t>答えを支える範囲にも差がある</a:t>
             </a:r>
           </a:p>
@@ -14040,6 +14037,120 @@
                 <a:hlinkClick r:id="rId2"/>
               </a:rPr>
               <a:t>https://aclanthology.org/2020.tacl-1.10/</a:t>
+            </a:r>
+          </a:p>
+        </p:txBody>
+      </p:sp>
+    </p:spTree>
+  </p:cSld>
+  <p:clrMapOvr>
+    <a:masterClrMapping/>
+  </p:clrMapOvr>
+</p:sld>
+</file>
+
+<file path=ppt/slides/slide21.xml><?xml version="1.0" encoding="utf-8"?>
+<p:sld xmlns:a="http://schemas.openxmlformats.org/drawingml/2006/main" xmlns:p="http://schemas.openxmlformats.org/presentationml/2006/main" xmlns:r="http://schemas.openxmlformats.org/officeDocument/2006/relationships">
+  <p:cSld>
+    <p:spTree>
+      <p:nvGrpSpPr>
+        <p:cNvPr id="1" name=""/>
+        <p:cNvGrpSpPr/>
+        <p:nvPr/>
+      </p:nvGrpSpPr>
+      <p:grpSpPr/>
+      <p:sp>
+        <p:nvSpPr>
+          <p:cNvPr id="2" name="Title 1"/>
+          <p:cNvSpPr>
+            <a:spLocks noGrp="1"/>
+          </p:cNvSpPr>
+          <p:nvPr>
+            <p:ph type="title"/>
+          </p:nvPr>
+        </p:nvSpPr>
+        <p:spPr>
+          <a:xfrm>
+            <a:off x="548640" y="2506875"/>
+            <a:ext cx="8046720" cy="585216"/>
+          </a:xfrm>
+        </p:spPr>
+        <p:txBody>
+          <a:bodyPr wrap="square" lIns="0" rIns="0" tIns="0" bIns="0" anchor="ctr">
+            <a:noAutofit/>
+          </a:bodyPr>
+          <a:lstStyle/>
+          <a:p>
+            <a:pPr algn="ctr">
+              <a:lnSpc>
+                <a:spcPct val="110000"/>
+              </a:lnSpc>
+              <a:buNone/>
+              <a:defRPr sz="3600" b="0">
+                <a:solidFill>
+                  <a:srgbClr val="303437"/>
+                </a:solidFill>
+                <a:latin typeface="Noto Sans"/>
+              </a:defRPr>
+            </a:pPr>
+            <a:r>
+              <a:rPr sz="3600" b="1" lang="ja-JP" altLang="en-US">
+                <a:solidFill>
+                  <a:srgbClr val="303437"/>
+                </a:solidFill>
+                <a:latin typeface="Noto Sans"/>
+                <a:ea typeface="Noto Sans CJK JP"/>
+                <a:cs typeface="Noto Sans"/>
+              </a:rPr>
+              <a:t>正答率と構築時の性能</a:t>
+            </a:r>
+          </a:p>
+        </p:txBody>
+      </p:sp>
+      <p:sp>
+        <p:nvSpPr>
+          <p:cNvPr id="3" name="Title 2"/>
+          <p:cNvSpPr>
+            <a:spLocks noGrp="1"/>
+          </p:cNvSpPr>
+          <p:nvPr>
+            <p:ph type="title" idx="2"/>
+          </p:nvPr>
+        </p:nvSpPr>
+        <p:spPr>
+          <a:xfrm>
+            <a:off x="75895" y="0"/>
+            <a:ext cx="8115300" cy="480060"/>
+          </a:xfrm>
+        </p:spPr>
+        <p:txBody>
+          <a:bodyPr wrap="square" lIns="0" rIns="0" tIns="0" bIns="0" anchor="ctr">
+            <a:noAutofit/>
+          </a:bodyPr>
+          <a:lstStyle/>
+          <a:p>
+            <a:pPr algn="l">
+              <a:lnSpc>
+                <a:spcPct val="110000"/>
+              </a:lnSpc>
+              <a:buNone/>
+              <a:defRPr sz="1400" b="0">
+                <a:solidFill>
+                  <a:srgbClr val="303437"/>
+                </a:solidFill>
+                <a:latin typeface="Noto Sans"/>
+              </a:defRPr>
+            </a:pPr>
+            <a:r>
+              <a:rPr sz="1400" b="1" lang="ja-JP" altLang="en-US">
+                <a:solidFill>
+                  <a:srgbClr val="FFFEF8"/>
+                </a:solidFill>
+                <a:latin typeface="Noto Sans"/>
+                <a:ea typeface="Noto Sans CJK JP"/>
+                <a:cs typeface="Noto Sans"/>
+              </a:rPr>
+              <a:t>3. 正答率と構築時の性能</a:t>
             </a:r>
           </a:p>
         </p:txBody>
@@ -14074,45 +14185,158 @@
         </p:nvSpPr>
         <p:spPr>
           <a:xfrm>
-            <a:off x="548640" y="2506875"/>
-            <a:ext cx="8046720" cy="585216"/>
+            <a:off x="468172" y="650138"/>
+            <a:ext cx="8206740" cy="616305"/>
           </a:xfrm>
         </p:spPr>
         <p:txBody>
-          <a:bodyPr wrap="square" lIns="0" rIns="0" tIns="0" bIns="0" anchor="ctr">
+          <a:bodyPr wrap="square" lIns="0" rIns="0" tIns="0" bIns="0">
             <a:noAutofit/>
           </a:bodyPr>
           <a:lstStyle/>
           <a:p>
-            <a:pPr algn="ctr">
+            <a:pPr algn="l">
               <a:lnSpc>
                 <a:spcPct val="110000"/>
               </a:lnSpc>
               <a:buNone/>
-              <a:defRPr sz="3600" b="0">
-                <a:solidFill>
-                  <a:srgbClr val="303437"/>
-                </a:solidFill>
-                <a:latin typeface="Noto Sans"/>
-              </a:defRPr>
-            </a:pPr>
-            <a:r>
-              <a:rPr sz="3600" b="1" lang="ja-JP" altLang="en-US">
-                <a:solidFill>
-                  <a:srgbClr val="303437"/>
-                </a:solidFill>
-                <a:latin typeface="Noto Sans"/>
-                <a:ea typeface="Noto Sans CJK JP"/>
-                <a:cs typeface="Noto Sans"/>
-              </a:rPr>
-              <a:t>正答率と構築時の性能</a:t>
+              <a:defRPr sz="2800" b="0">
+                <a:solidFill>
+                  <a:srgbClr val="303437"/>
+                </a:solidFill>
+                <a:latin typeface="Noto Sans"/>
+              </a:defRPr>
+            </a:pPr>
+            <a:r>
+              <a:rPr sz="2800" b="1" lang="ja-JP" altLang="en-US">
+                <a:solidFill>
+                  <a:srgbClr val="303437"/>
+                </a:solidFill>
+                <a:latin typeface="Noto Sans"/>
+                <a:ea typeface="Noto Sans CJK JP"/>
+                <a:cs typeface="Noto Sans"/>
+              </a:rPr>
+              <a:t>正しい候補を選んだ割合で評価する</a:t>
             </a:r>
           </a:p>
         </p:txBody>
       </p:sp>
       <p:sp>
         <p:nvSpPr>
-          <p:cNvPr id="3" name="Title 2"/>
+          <p:cNvPr id="3" name="Text Placeholder 2"/>
+          <p:cNvSpPr>
+            <a:spLocks noGrp="1"/>
+          </p:cNvSpPr>
+          <p:nvPr>
+            <p:ph type="body" idx="1"/>
+          </p:nvPr>
+        </p:nvSpPr>
+        <p:spPr>
+          <a:xfrm>
+            <a:off x="594360" y="1463040"/>
+            <a:ext cx="7955279" cy="3044952"/>
+          </a:xfrm>
+        </p:spPr>
+        <p:txBody>
+          <a:bodyPr wrap="square" tIns="91440" bIns="91440">
+            <a:noAutofit/>
+          </a:bodyPr>
+          <a:lstStyle/>
+          <a:p>
+            <a:pPr marL="457200" indent="-355600">
+              <a:lnSpc>
+                <a:spcPts val="2379"/>
+              </a:lnSpc>
+              <a:spcAft>
+                <a:spcPts val="700"/>
+              </a:spcAft>
+              <a:buSzPct val="66500"/>
+              <a:buFont typeface="Noto Sans CJK JP"/>
+              <a:buChar char="●"/>
+              <a:defRPr sz="2000" b="0">
+                <a:solidFill>
+                  <a:srgbClr val="303437"/>
+                </a:solidFill>
+                <a:latin typeface="Noto Sans"/>
+              </a:defRPr>
+            </a:pPr>
+            <a:r>
+              <a:rPr sz="2000" b="0" lang="ja-JP" altLang="en-US">
+                <a:solidFill>
+                  <a:srgbClr val="303437"/>
+                </a:solidFill>
+                <a:latin typeface="Noto Sans"/>
+                <a:ea typeface="Noto Sans CJK JP"/>
+                <a:cs typeface="Noto Sans"/>
+              </a:rPr>
+              <a:t>基本指標は正答率。正しい候補を選べた質問数を、評価した質問数で割る。</a:t>
+            </a:r>
+          </a:p>
+          <a:p>
+            <a:pPr marL="457200" indent="-355600">
+              <a:lnSpc>
+                <a:spcPts val="2379"/>
+              </a:lnSpc>
+              <a:spcAft>
+                <a:spcPts val="700"/>
+              </a:spcAft>
+              <a:buSzPct val="66500"/>
+              <a:buFont typeface="Noto Sans CJK JP"/>
+              <a:buChar char="●"/>
+              <a:defRPr sz="2000" b="0">
+                <a:solidFill>
+                  <a:srgbClr val="303437"/>
+                </a:solidFill>
+                <a:latin typeface="Noto Sans"/>
+              </a:defRPr>
+            </a:pPr>
+            <a:r>
+              <a:rPr sz="2000" b="0" lang="ja-JP" altLang="en-US">
+                <a:solidFill>
+                  <a:srgbClr val="303437"/>
+                </a:solidFill>
+                <a:latin typeface="Noto Sans"/>
+                <a:ea typeface="Noto Sans CJK JP"/>
+                <a:cs typeface="Noto Sans"/>
+              </a:rPr>
+              <a:t>BERT系モデルを微調整して評価した。長い入力は、文書・質問・候補のうち最長の列から切り詰める。</a:t>
+            </a:r>
+          </a:p>
+          <a:p>
+            <a:pPr marL="457200" indent="-355600">
+              <a:lnSpc>
+                <a:spcPts val="2379"/>
+              </a:lnSpc>
+              <a:spcAft>
+                <a:spcPts val="0"/>
+              </a:spcAft>
+              <a:buSzPct val="66500"/>
+              <a:buFont typeface="Noto Sans CJK JP"/>
+              <a:buChar char="●"/>
+              <a:defRPr sz="2000" b="0">
+                <a:solidFill>
+                  <a:srgbClr val="303437"/>
+                </a:solidFill>
+                <a:latin typeface="Noto Sans"/>
+              </a:defRPr>
+            </a:pPr>
+            <a:r>
+              <a:rPr sz="2000" b="0" lang="ja-JP" altLang="en-US">
+                <a:solidFill>
+                  <a:srgbClr val="303437"/>
+                </a:solidFill>
+                <a:latin typeface="Noto Sans"/>
+                <a:ea typeface="Noto Sans CJK JP"/>
+                <a:cs typeface="Noto Sans"/>
+              </a:rPr>
+              <a:t>候補の表面上の似方にも影響される。本文に似ているだけの誤答候補があると、正解を選びにくくなる。</a:t>
+            </a:r>
+          </a:p>
+        </p:txBody>
+      </p:sp>
+      <p:sp>
+        <p:nvSpPr>
+          <p:cNvPr id="4" name="Title 3"/>
           <p:cNvSpPr>
             <a:spLocks noGrp="1"/>
           </p:cNvSpPr>
@@ -14154,6 +14378,83 @@
                 <a:cs typeface="Noto Sans"/>
               </a:rPr>
               <a:t>3. 正答率と構築時の性能</a:t>
+            </a:r>
+          </a:p>
+        </p:txBody>
+      </p:sp>
+      <p:sp>
+        <p:nvSpPr>
+          <p:cNvPr id="5" name="sources"/>
+          <p:cNvSpPr txBox="1"/>
+          <p:nvPr/>
+        </p:nvSpPr>
+        <p:spPr>
+          <a:xfrm>
+            <a:off x="502920" y="4700016"/>
+            <a:ext cx="8183879" cy="530352"/>
+          </a:xfrm>
+          <a:prstGeom prst="rect">
+            <a:avLst/>
+          </a:prstGeom>
+          <a:noFill/>
+        </p:spPr>
+        <p:txBody>
+          <a:bodyPr wrap="square" lIns="0" rIns="0" tIns="0" bIns="0">
+            <a:noAutofit/>
+          </a:bodyPr>
+          <a:lstStyle/>
+          <a:p>
+            <a:pPr algn="l">
+              <a:lnSpc>
+                <a:spcPts val="940"/>
+              </a:lnSpc>
+              <a:spcBef>
+                <a:spcPts val="0"/>
+              </a:spcBef>
+              <a:spcAft>
+                <a:spcPts val="140"/>
+              </a:spcAft>
+              <a:buNone/>
+              <a:defRPr sz="810" b="0">
+                <a:solidFill>
+                  <a:srgbClr val="303437"/>
+                </a:solidFill>
+                <a:latin typeface="Noto Sans"/>
+              </a:defRPr>
+            </a:pPr>
+            <a:r>
+              <a:rPr sz="810" b="0" lang="ja-JP" altLang="en-US">
+                <a:solidFill>
+                  <a:srgbClr val="626669"/>
+                </a:solidFill>
+                <a:latin typeface="Noto Sans"/>
+                <a:ea typeface="Noto Sans CJK JP"/>
+                <a:cs typeface="Noto Sans"/>
+              </a:rPr>
+              <a:t>[1] Sun et al. (2020). Investigating Prior Knowledge for Challenging Chinese Machine Reading Comprehension. TACL.</a:t>
+            </a:r>
+            <a:r>
+              <a:rPr sz="810" b="0" lang="ja-JP" altLang="en-US">
+                <a:solidFill>
+                  <a:srgbClr val="626669"/>
+                </a:solidFill>
+                <a:latin typeface="Noto Sans"/>
+                <a:ea typeface="Noto Sans CJK JP"/>
+                <a:cs typeface="Noto Sans"/>
+              </a:rPr>
+              <a:t>  </a:t>
+            </a:r>
+            <a:r>
+              <a:rPr sz="810" b="0" lang="ja-JP" altLang="en-US">
+                <a:solidFill>
+                  <a:srgbClr val="626669"/>
+                </a:solidFill>
+                <a:latin typeface="Noto Sans"/>
+                <a:ea typeface="Noto Sans CJK JP"/>
+                <a:cs typeface="Noto Sans"/>
+                <a:hlinkClick r:id="rId2"/>
+              </a:rPr>
+              <a:t>https://aclanthology.org/2020.tacl-1.10/</a:t>
             </a:r>
           </a:p>
         </p:txBody>
@@ -14219,310 +14520,6 @@
                 <a:ea typeface="Noto Sans CJK JP"/>
                 <a:cs typeface="Noto Sans"/>
               </a:rPr>
-              <a:t>正しい候補を選んだ割合で評価する</a:t>
-            </a:r>
-          </a:p>
-        </p:txBody>
-      </p:sp>
-      <p:sp>
-        <p:nvSpPr>
-          <p:cNvPr id="3" name="Text Placeholder 2"/>
-          <p:cNvSpPr>
-            <a:spLocks noGrp="1"/>
-          </p:cNvSpPr>
-          <p:nvPr>
-            <p:ph type="body" idx="1"/>
-          </p:nvPr>
-        </p:nvSpPr>
-        <p:spPr>
-          <a:xfrm>
-            <a:off x="594360" y="1463040"/>
-            <a:ext cx="7955279" cy="3044952"/>
-          </a:xfrm>
-        </p:spPr>
-        <p:txBody>
-          <a:bodyPr wrap="square" tIns="91440" bIns="91440">
-            <a:noAutofit/>
-          </a:bodyPr>
-          <a:lstStyle/>
-          <a:p>
-            <a:pPr marL="457200" indent="-355600">
-              <a:lnSpc>
-                <a:spcPts val="2379"/>
-              </a:lnSpc>
-              <a:spcAft>
-                <a:spcPts val="700"/>
-              </a:spcAft>
-              <a:buSzPct val="66500"/>
-              <a:buFont typeface="Noto Sans CJK JP"/>
-              <a:buChar char="●"/>
-              <a:defRPr sz="2000" b="0">
-                <a:solidFill>
-                  <a:srgbClr val="303437"/>
-                </a:solidFill>
-                <a:latin typeface="Noto Sans"/>
-              </a:defRPr>
-            </a:pPr>
-            <a:r>
-              <a:rPr sz="2000" b="0" lang="ja-JP" altLang="en-US">
-                <a:solidFill>
-                  <a:srgbClr val="303437"/>
-                </a:solidFill>
-                <a:latin typeface="Noto Sans"/>
-                <a:ea typeface="Noto Sans CJK JP"/>
-                <a:cs typeface="Noto Sans"/>
-              </a:rPr>
-              <a:t>基本指標は正答率。正しい候補を選べた質問数を、評価した質問数で割る。</a:t>
-            </a:r>
-          </a:p>
-          <a:p>
-            <a:pPr marL="457200" indent="-355600">
-              <a:lnSpc>
-                <a:spcPts val="2379"/>
-              </a:lnSpc>
-              <a:spcAft>
-                <a:spcPts val="700"/>
-              </a:spcAft>
-              <a:buSzPct val="66500"/>
-              <a:buFont typeface="Noto Sans CJK JP"/>
-              <a:buChar char="●"/>
-              <a:defRPr sz="2000" b="0">
-                <a:solidFill>
-                  <a:srgbClr val="303437"/>
-                </a:solidFill>
-                <a:latin typeface="Noto Sans"/>
-              </a:defRPr>
-            </a:pPr>
-            <a:r>
-              <a:rPr sz="2000" b="0" lang="ja-JP" altLang="en-US">
-                <a:solidFill>
-                  <a:srgbClr val="303437"/>
-                </a:solidFill>
-                <a:latin typeface="Noto Sans"/>
-                <a:ea typeface="Noto Sans CJK JP"/>
-                <a:cs typeface="Noto Sans"/>
-              </a:rPr>
-              <a:t>BERT系モデルを微調整して評価した。長い入力は、文書・質問・候補のうち最長の列から切り詰める。</a:t>
-            </a:r>
-          </a:p>
-          <a:p>
-            <a:pPr marL="457200" indent="-355600">
-              <a:lnSpc>
-                <a:spcPts val="2379"/>
-              </a:lnSpc>
-              <a:spcAft>
-                <a:spcPts val="0"/>
-              </a:spcAft>
-              <a:buSzPct val="66500"/>
-              <a:buFont typeface="Noto Sans CJK JP"/>
-              <a:buChar char="●"/>
-              <a:defRPr sz="2000" b="0">
-                <a:solidFill>
-                  <a:srgbClr val="303437"/>
-                </a:solidFill>
-                <a:latin typeface="Noto Sans"/>
-              </a:defRPr>
-            </a:pPr>
-            <a:r>
-              <a:rPr sz="2000" b="0" lang="ja-JP" altLang="en-US">
-                <a:solidFill>
-                  <a:srgbClr val="303437"/>
-                </a:solidFill>
-                <a:latin typeface="Noto Sans"/>
-                <a:ea typeface="Noto Sans CJK JP"/>
-                <a:cs typeface="Noto Sans"/>
-              </a:rPr>
-              <a:t>候補の表面上の似方にも影響される。本文に似ているだけの誤答候補があると、正解を選びにくくなる。</a:t>
-            </a:r>
-          </a:p>
-        </p:txBody>
-      </p:sp>
-      <p:sp>
-        <p:nvSpPr>
-          <p:cNvPr id="4" name="Title 3"/>
-          <p:cNvSpPr>
-            <a:spLocks noGrp="1"/>
-          </p:cNvSpPr>
-          <p:nvPr>
-            <p:ph type="title" idx="2"/>
-          </p:nvPr>
-        </p:nvSpPr>
-        <p:spPr>
-          <a:xfrm>
-            <a:off x="75895" y="0"/>
-            <a:ext cx="8115300" cy="480060"/>
-          </a:xfrm>
-        </p:spPr>
-        <p:txBody>
-          <a:bodyPr wrap="square" lIns="0" rIns="0" tIns="0" bIns="0" anchor="ctr">
-            <a:noAutofit/>
-          </a:bodyPr>
-          <a:lstStyle/>
-          <a:p>
-            <a:pPr algn="l">
-              <a:lnSpc>
-                <a:spcPct val="110000"/>
-              </a:lnSpc>
-              <a:buNone/>
-              <a:defRPr sz="1400" b="0">
-                <a:solidFill>
-                  <a:srgbClr val="303437"/>
-                </a:solidFill>
-                <a:latin typeface="Noto Sans"/>
-              </a:defRPr>
-            </a:pPr>
-            <a:r>
-              <a:rPr sz="1400" b="1" lang="ja-JP" altLang="en-US">
-                <a:solidFill>
-                  <a:srgbClr val="FFFEF8"/>
-                </a:solidFill>
-                <a:latin typeface="Noto Sans"/>
-                <a:ea typeface="Noto Sans CJK JP"/>
-                <a:cs typeface="Noto Sans"/>
-              </a:rPr>
-              <a:t>3. 正答率と構築時の性能</a:t>
-            </a:r>
-          </a:p>
-        </p:txBody>
-      </p:sp>
-      <p:sp>
-        <p:nvSpPr>
-          <p:cNvPr id="5" name="sources"/>
-          <p:cNvSpPr txBox="1"/>
-          <p:nvPr/>
-        </p:nvSpPr>
-        <p:spPr>
-          <a:xfrm>
-            <a:off x="502920" y="4700016"/>
-            <a:ext cx="8183879" cy="530352"/>
-          </a:xfrm>
-          <a:prstGeom prst="rect">
-            <a:avLst/>
-          </a:prstGeom>
-          <a:noFill/>
-        </p:spPr>
-        <p:txBody>
-          <a:bodyPr wrap="square" lIns="0" rIns="0" tIns="0" bIns="0">
-            <a:noAutofit/>
-          </a:bodyPr>
-          <a:lstStyle/>
-          <a:p>
-            <a:pPr algn="l">
-              <a:lnSpc>
-                <a:spcPts val="940"/>
-              </a:lnSpc>
-              <a:spcBef>
-                <a:spcPts val="0"/>
-              </a:spcBef>
-              <a:spcAft>
-                <a:spcPts val="140"/>
-              </a:spcAft>
-              <a:buNone/>
-              <a:defRPr sz="810" b="0">
-                <a:solidFill>
-                  <a:srgbClr val="303437"/>
-                </a:solidFill>
-                <a:latin typeface="Noto Sans"/>
-              </a:defRPr>
-            </a:pPr>
-            <a:r>
-              <a:rPr sz="810" b="0" lang="ja-JP" altLang="en-US">
-                <a:solidFill>
-                  <a:srgbClr val="626669"/>
-                </a:solidFill>
-                <a:latin typeface="Noto Sans"/>
-                <a:ea typeface="Noto Sans CJK JP"/>
-                <a:cs typeface="Noto Sans"/>
-              </a:rPr>
-              <a:t>[1] Sun et al. (2020). Investigating Prior Knowledge for Challenging Chinese Machine Reading Comprehension. TACL.</a:t>
-            </a:r>
-            <a:r>
-              <a:rPr sz="810" b="0" lang="ja-JP" altLang="en-US">
-                <a:solidFill>
-                  <a:srgbClr val="626669"/>
-                </a:solidFill>
-                <a:latin typeface="Noto Sans"/>
-                <a:ea typeface="Noto Sans CJK JP"/>
-                <a:cs typeface="Noto Sans"/>
-              </a:rPr>
-              <a:t>  </a:t>
-            </a:r>
-            <a:r>
-              <a:rPr sz="810" b="0" lang="ja-JP" altLang="en-US">
-                <a:solidFill>
-                  <a:srgbClr val="626669"/>
-                </a:solidFill>
-                <a:latin typeface="Noto Sans"/>
-                <a:ea typeface="Noto Sans CJK JP"/>
-                <a:cs typeface="Noto Sans"/>
-                <a:hlinkClick r:id="rId2"/>
-              </a:rPr>
-              <a:t>https://aclanthology.org/2020.tacl-1.10/</a:t>
-            </a:r>
-          </a:p>
-        </p:txBody>
-      </p:sp>
-    </p:spTree>
-  </p:cSld>
-  <p:clrMapOvr>
-    <a:masterClrMapping/>
-  </p:clrMapOvr>
-</p:sld>
-</file>
-
-<file path=ppt/slides/slide24.xml><?xml version="1.0" encoding="utf-8"?>
-<p:sld xmlns:a="http://schemas.openxmlformats.org/drawingml/2006/main" xmlns:p="http://schemas.openxmlformats.org/presentationml/2006/main" xmlns:r="http://schemas.openxmlformats.org/officeDocument/2006/relationships">
-  <p:cSld>
-    <p:spTree>
-      <p:nvGrpSpPr>
-        <p:cNvPr id="1" name=""/>
-        <p:cNvGrpSpPr/>
-        <p:nvPr/>
-      </p:nvGrpSpPr>
-      <p:grpSpPr/>
-      <p:sp>
-        <p:nvSpPr>
-          <p:cNvPr id="2" name="Title 1"/>
-          <p:cNvSpPr>
-            <a:spLocks noGrp="1"/>
-          </p:cNvSpPr>
-          <p:nvPr>
-            <p:ph type="title"/>
-          </p:nvPr>
-        </p:nvSpPr>
-        <p:spPr>
-          <a:xfrm>
-            <a:off x="468172" y="650138"/>
-            <a:ext cx="8206740" cy="616305"/>
-          </a:xfrm>
-        </p:spPr>
-        <p:txBody>
-          <a:bodyPr wrap="square" lIns="0" rIns="0" tIns="0" bIns="0">
-            <a:noAutofit/>
-          </a:bodyPr>
-          <a:lstStyle/>
-          <a:p>
-            <a:pPr algn="l">
-              <a:lnSpc>
-                <a:spcPct val="110000"/>
-              </a:lnSpc>
-              <a:buNone/>
-              <a:defRPr sz="2800" b="0">
-                <a:solidFill>
-                  <a:srgbClr val="303437"/>
-                </a:solidFill>
-                <a:latin typeface="Noto Sans"/>
-              </a:defRPr>
-            </a:pPr>
-            <a:r>
-              <a:rPr sz="2800" b="1" lang="ja-JP" altLang="en-US">
-                <a:solidFill>
-                  <a:srgbClr val="303437"/>
-                </a:solidFill>
-                <a:latin typeface="Noto Sans"/>
-                <a:ea typeface="Noto Sans CJK JP"/>
-                <a:cs typeface="Noto Sans"/>
-              </a:rPr>
               <a:t>構築時のモデルは、テスト正答率68.5％</a:t>
             </a:r>
           </a:p>
@@ -14679,7 +14676,7 @@
 </p:sld>
 </file>
 
-<file path=ppt/slides/slide25.xml><?xml version="1.0" encoding="utf-8"?>
+<file path=ppt/slides/slide24.xml><?xml version="1.0" encoding="utf-8"?>
 <p:sld xmlns:a="http://schemas.openxmlformats.org/drawingml/2006/main" xmlns:p="http://schemas.openxmlformats.org/presentationml/2006/main" xmlns:r="http://schemas.openxmlformats.org/officeDocument/2006/relationships">
   <p:cSld>
     <p:spTree>
@@ -15604,7 +15601,7 @@
 </p:sld>
 </file>
 
-<file path=ppt/slides/slide26.xml><?xml version="1.0" encoding="utf-8"?>
+<file path=ppt/slides/slide25.xml><?xml version="1.0" encoding="utf-8"?>
 <p:sld xmlns:a="http://schemas.openxmlformats.org/drawingml/2006/main" xmlns:p="http://schemas.openxmlformats.org/presentationml/2006/main" xmlns:r="http://schemas.openxmlformats.org/officeDocument/2006/relationships">
   <p:cSld>
     <p:spTree>
@@ -15908,7 +15905,7 @@
 </p:sld>
 </file>
 
-<file path=ppt/slides/slide27.xml><?xml version="1.0" encoding="utf-8"?>
+<file path=ppt/slides/slide26.xml><?xml version="1.0" encoding="utf-8"?>
 <p:sld xmlns:a="http://schemas.openxmlformats.org/drawingml/2006/main" xmlns:p="http://schemas.openxmlformats.org/presentationml/2006/main" xmlns:r="http://schemas.openxmlformats.org/officeDocument/2006/relationships">
   <p:cSld>
     <p:spTree>
@@ -15961,7 +15958,7 @@
                 <a:ea typeface="Noto Sans CJK JP"/>
                 <a:cs typeface="Noto Sans"/>
               </a:rPr>
-              <a:t>入手方法とCLUE・CLEVA</a:t>
+              <a:t>公式データの入手と使い方</a:t>
             </a:r>
           </a:p>
         </p:txBody>
@@ -16009,7 +16006,7 @@
                 <a:ea typeface="Noto Sans CJK JP"/>
                 <a:cs typeface="Noto Sans"/>
               </a:rPr>
-              <a:t>4. 入手方法とCLUE・CLEVA</a:t>
+              <a:t>4. 公式データの入手と使い方</a:t>
             </a:r>
           </a:p>
         </p:txBody>
@@ -16022,7 +16019,7 @@
 </p:sld>
 </file>
 
-<file path=ppt/slides/slide28.xml><?xml version="1.0" encoding="utf-8"?>
+<file path=ppt/slides/slide29.xml><?xml version="1.0" encoding="utf-8"?>
 <p:sld xmlns:a="http://schemas.openxmlformats.org/drawingml/2006/main" xmlns:p="http://schemas.openxmlformats.org/presentationml/2006/main" xmlns:r="http://schemas.openxmlformats.org/officeDocument/2006/relationships">
   <p:cSld>
     <p:spTree>
@@ -16075,14 +16072,127 @@
                 <a:ea typeface="Noto Sans CJK JP"/>
                 <a:cs typeface="Noto Sans"/>
               </a:rPr>
-              <a:t>C³とCLUEは、テストの正解公開が異なる</a:t>
+              <a:t>公式データと知識注釈をJSONで取得する</a:t>
             </a:r>
           </a:p>
         </p:txBody>
       </p:sp>
       <p:sp>
         <p:nvSpPr>
-          <p:cNvPr id="3" name="Title 2"/>
+          <p:cNvPr id="3" name="Text Placeholder 2"/>
+          <p:cNvSpPr>
+            <a:spLocks noGrp="1"/>
+          </p:cNvSpPr>
+          <p:nvPr>
+            <p:ph type="body" idx="1"/>
+          </p:nvPr>
+        </p:nvSpPr>
+        <p:spPr>
+          <a:xfrm>
+            <a:off x="594360" y="1463040"/>
+            <a:ext cx="7955279" cy="3044952"/>
+          </a:xfrm>
+        </p:spPr>
+        <p:txBody>
+          <a:bodyPr wrap="square" tIns="91440" bIns="91440">
+            <a:noAutofit/>
+          </a:bodyPr>
+          <a:lstStyle/>
+          <a:p>
+            <a:pPr marL="457200" indent="-355600">
+              <a:lnSpc>
+                <a:spcPts val="2261"/>
+              </a:lnSpc>
+              <a:spcAft>
+                <a:spcPts val="700"/>
+              </a:spcAft>
+              <a:buSzPct val="70000"/>
+              <a:buFont typeface="Noto Sans CJK JP"/>
+              <a:buChar char="●"/>
+              <a:defRPr sz="1900" b="0">
+                <a:solidFill>
+                  <a:srgbClr val="303437"/>
+                </a:solidFill>
+                <a:latin typeface="Noto Sans"/>
+              </a:defRPr>
+            </a:pPr>
+            <a:r>
+              <a:rPr sz="1900" b="0" lang="ja-JP" altLang="en-US">
+                <a:solidFill>
+                  <a:srgbClr val="303437"/>
+                </a:solidFill>
+                <a:latin typeface="Noto Sans"/>
+                <a:ea typeface="Noto Sans CJK JP"/>
+                <a:cs typeface="Noto Sans"/>
+              </a:rPr>
+              <a:t>公式リポジトリでは、文書・質問・候補・正解を含む6個のJSONと、600問の知識注釈が公開されている。</a:t>
+            </a:r>
+          </a:p>
+          <a:p>
+            <a:pPr marL="457200" indent="-355600">
+              <a:lnSpc>
+                <a:spcPts val="2261"/>
+              </a:lnSpc>
+              <a:spcAft>
+                <a:spcPts val="700"/>
+              </a:spcAft>
+              <a:buSzPct val="70000"/>
+              <a:buFont typeface="Noto Sans CJK JP"/>
+              <a:buChar char="●"/>
+              <a:defRPr sz="1900" b="0">
+                <a:solidFill>
+                  <a:srgbClr val="303437"/>
+                </a:solidFill>
+                <a:latin typeface="Noto Sans"/>
+              </a:defRPr>
+            </a:pPr>
+            <a:r>
+              <a:rPr sz="1900" b="0" lang="ja-JP" altLang="en-US">
+                <a:solidFill>
+                  <a:srgbClr val="303437"/>
+                </a:solidFill>
+                <a:latin typeface="Noto Sans"/>
+                <a:ea typeface="Noto Sans CJK JP"/>
+                <a:cs typeface="Noto Sans"/>
+              </a:rPr>
+              <a:t>テストを含む全問に正解が付き、各問のanswerには、choiceに並んだ候補のうち正解の文字列が入る。正答率の評価に加え、知識注釈を使った問題種別の分析にも使える。</a:t>
+            </a:r>
+          </a:p>
+          <a:p>
+            <a:pPr marL="457200" indent="-355600">
+              <a:lnSpc>
+                <a:spcPts val="2261"/>
+              </a:lnSpc>
+              <a:spcAft>
+                <a:spcPts val="0"/>
+              </a:spcAft>
+              <a:buSzPct val="70000"/>
+              <a:buFont typeface="Noto Sans CJK JP"/>
+              <a:buChar char="●"/>
+              <a:defRPr sz="1900" b="0">
+                <a:solidFill>
+                  <a:srgbClr val="303437"/>
+                </a:solidFill>
+                <a:latin typeface="Noto Sans"/>
+              </a:defRPr>
+            </a:pPr>
+            <a:r>
+              <a:rPr sz="1900" b="0" lang="ja-JP" altLang="en-US">
+                <a:solidFill>
+                  <a:srgbClr val="303437"/>
+                </a:solidFill>
+                <a:latin typeface="Noto Sans"/>
+                <a:ea typeface="Noto Sans CJK JP"/>
+                <a:cs typeface="Noto Sans"/>
+              </a:rPr>
+              <a:t>license.txtに記載された利用条件は「非商用の研究目的のみ」である。</a:t>
+            </a:r>
+          </a:p>
+        </p:txBody>
+      </p:sp>
+      <p:sp>
+        <p:nvSpPr>
+          <p:cNvPr id="4" name="Title 3"/>
           <p:cNvSpPr>
             <a:spLocks noGrp="1"/>
           </p:cNvSpPr>
@@ -16123,569 +16233,11 @@
                 <a:ea typeface="Noto Sans CJK JP"/>
                 <a:cs typeface="Noto Sans"/>
               </a:rPr>
-              <a:t>4. 入手方法とCLUE・CLEVA</a:t>
+              <a:t>4. 公式データの入手と使い方</a:t>
             </a:r>
           </a:p>
         </p:txBody>
       </p:sp>
-      <p:graphicFrame>
-        <p:nvGraphicFramePr>
-          <p:cNvPr id="4" name="Table 3"/>
-          <p:cNvGraphicFramePr>
-            <a:graphicFrameLocks noGrp="1"/>
-          </p:cNvGraphicFramePr>
-          <p:nvPr/>
-        </p:nvGraphicFramePr>
-        <p:xfrm>
-          <a:off x="548640" y="1508760"/>
-          <a:ext cx="8046719" cy="2557780"/>
-        </p:xfrm>
-        <a:graphic>
-          <a:graphicData uri="http://schemas.openxmlformats.org/drawingml/2006/table">
-            <a:tbl>
-              <a:tblPr firstRow="0" bandRow="0"/>
-              <a:tblGrid>
-                <a:gridCol w="1874519"/>
-                <a:gridCol w="6172200"/>
-              </a:tblGrid>
-              <a:tr h="362585">
-                <a:tc>
-                  <a:txBody>
-                    <a:bodyPr wrap="square">
-                      <a:noAutofit/>
-                    </a:bodyPr>
-                    <a:lstStyle/>
-                    <a:p>
-                      <a:pPr algn="l">
-                        <a:lnSpc>
-                          <a:spcPts val="1954"/>
-                        </a:lnSpc>
-                        <a:buNone/>
-                        <a:defRPr sz="1700" b="0">
-                          <a:solidFill>
-                            <a:srgbClr val="303437"/>
-                          </a:solidFill>
-                          <a:latin typeface="Noto Sans"/>
-                        </a:defRPr>
-                      </a:pPr>
-                      <a:r>
-                        <a:rPr sz="1700" b="0" lang="ja-JP" altLang="en-US">
-                          <a:solidFill>
-                            <a:srgbClr val="303437"/>
-                          </a:solidFill>
-                          <a:latin typeface="Noto Sans"/>
-                          <a:ea typeface="Noto Sans CJK JP"/>
-                          <a:cs typeface="Noto Sans"/>
-                        </a:rPr>
-                        <a:t>系列</a:t>
-                      </a:r>
-                    </a:p>
-                  </a:txBody>
-                  <a:tcPr marL="63500" marR="63500" marT="38100" marB="38100" anchor="ctr">
-                    <a:lnL w="7620">
-                      <a:noFill/>
-                    </a:lnL>
-                    <a:lnR w="7620">
-                      <a:noFill/>
-                    </a:lnR>
-                    <a:lnT w="15240">
-                      <a:solidFill>
-                        <a:srgbClr val="626669"/>
-                      </a:solidFill>
-                      <a:prstDash val="solid"/>
-                    </a:lnT>
-                    <a:lnB w="7620">
-                      <a:solidFill>
-                        <a:srgbClr val="626669"/>
-                      </a:solidFill>
-                      <a:prstDash val="solid"/>
-                    </a:lnB>
-                    <a:solidFill>
-                      <a:srgbClr val="FFFEF8"/>
-                    </a:solidFill>
-                  </a:tcPr>
-                </a:tc>
-                <a:tc>
-                  <a:txBody>
-                    <a:bodyPr wrap="square">
-                      <a:noAutofit/>
-                    </a:bodyPr>
-                    <a:lstStyle/>
-                    <a:p>
-                      <a:pPr algn="l">
-                        <a:lnSpc>
-                          <a:spcPts val="1954"/>
-                        </a:lnSpc>
-                        <a:buNone/>
-                        <a:defRPr sz="1700" b="0">
-                          <a:solidFill>
-                            <a:srgbClr val="303437"/>
-                          </a:solidFill>
-                          <a:latin typeface="Noto Sans"/>
-                        </a:defRPr>
-                      </a:pPr>
-                      <a:r>
-                        <a:rPr sz="1700" b="0" lang="ja-JP" altLang="en-US">
-                          <a:solidFill>
-                            <a:srgbClr val="303437"/>
-                          </a:solidFill>
-                          <a:latin typeface="Noto Sans"/>
-                          <a:ea typeface="Noto Sans CJK JP"/>
-                          <a:cs typeface="Noto Sans"/>
-                        </a:rPr>
-                        <a:t>含まれるもの・役割</a:t>
-                      </a:r>
-                    </a:p>
-                  </a:txBody>
-                  <a:tcPr marL="63500" marR="63500" marT="38100" marB="38100" anchor="ctr">
-                    <a:lnL w="7620">
-                      <a:noFill/>
-                    </a:lnL>
-                    <a:lnR w="7620">
-                      <a:noFill/>
-                    </a:lnR>
-                    <a:lnT w="15240">
-                      <a:solidFill>
-                        <a:srgbClr val="626669"/>
-                      </a:solidFill>
-                      <a:prstDash val="solid"/>
-                    </a:lnT>
-                    <a:lnB w="7620">
-                      <a:solidFill>
-                        <a:srgbClr val="626669"/>
-                      </a:solidFill>
-                      <a:prstDash val="solid"/>
-                    </a:lnB>
-                    <a:solidFill>
-                      <a:srgbClr val="FFFEF8"/>
-                    </a:solidFill>
-                  </a:tcPr>
-                </a:tc>
-              </a:tr>
-              <a:tr h="362585">
-                <a:tc>
-                  <a:txBody>
-                    <a:bodyPr wrap="square">
-                      <a:noAutofit/>
-                    </a:bodyPr>
-                    <a:lstStyle/>
-                    <a:p>
-                      <a:pPr algn="l">
-                        <a:lnSpc>
-                          <a:spcPts val="1954"/>
-                        </a:lnSpc>
-                        <a:buNone/>
-                        <a:defRPr sz="1700" b="0">
-                          <a:solidFill>
-                            <a:srgbClr val="303437"/>
-                          </a:solidFill>
-                          <a:latin typeface="Noto Sans"/>
-                        </a:defRPr>
-                      </a:pPr>
-                      <a:r>
-                        <a:rPr sz="1700" b="0" lang="ja-JP" altLang="en-US">
-                          <a:solidFill>
-                            <a:srgbClr val="303437"/>
-                          </a:solidFill>
-                          <a:latin typeface="Noto Sans"/>
-                          <a:ea typeface="Noto Sans CJK JP"/>
-                          <a:cs typeface="Noto Sans"/>
-                        </a:rPr>
-                        <a:t>C³ 公開元</a:t>
-                      </a:r>
-                    </a:p>
-                  </a:txBody>
-                  <a:tcPr marL="63500" marR="63500" marT="38100" marB="38100" anchor="ctr">
-                    <a:lnL w="7620">
-                      <a:noFill/>
-                    </a:lnL>
-                    <a:lnR w="7620">
-                      <a:noFill/>
-                    </a:lnR>
-                    <a:lnT w="7620">
-                      <a:solidFill>
-                        <a:srgbClr val="626669"/>
-                      </a:solidFill>
-                      <a:prstDash val="solid"/>
-                    </a:lnT>
-                    <a:lnB w="7620">
-                      <a:noFill/>
-                    </a:lnB>
-                    <a:solidFill>
-                      <a:srgbClr val="FFFEF8"/>
-                    </a:solidFill>
-                  </a:tcPr>
-                </a:tc>
-                <a:tc>
-                  <a:txBody>
-                    <a:bodyPr wrap="square">
-                      <a:noAutofit/>
-                    </a:bodyPr>
-                    <a:lstStyle/>
-                    <a:p>
-                      <a:pPr algn="l">
-                        <a:lnSpc>
-                          <a:spcPts val="1954"/>
-                        </a:lnSpc>
-                        <a:buNone/>
-                        <a:defRPr sz="1700" b="0">
-                          <a:solidFill>
-                            <a:srgbClr val="303437"/>
-                          </a:solidFill>
-                          <a:latin typeface="Noto Sans"/>
-                        </a:defRPr>
-                      </a:pPr>
-                      <a:r>
-                        <a:rPr sz="1700" b="0" lang="ja-JP" altLang="en-US">
-                          <a:solidFill>
-                            <a:srgbClr val="303437"/>
-                          </a:solidFill>
-                          <a:latin typeface="Noto Sans"/>
-                          <a:ea typeface="Noto Sans CJK JP"/>
-                          <a:cs typeface="Noto Sans"/>
-                        </a:rPr>
-                        <a:t>Dialogue / Mixed の学習・開発・テスト。全て正解付き。</a:t>
-                      </a:r>
-                    </a:p>
-                  </a:txBody>
-                  <a:tcPr marL="63500" marR="63500" marT="38100" marB="38100" anchor="ctr">
-                    <a:lnL w="7620">
-                      <a:noFill/>
-                    </a:lnL>
-                    <a:lnR w="7620">
-                      <a:noFill/>
-                    </a:lnR>
-                    <a:lnT w="7620">
-                      <a:solidFill>
-                        <a:srgbClr val="626669"/>
-                      </a:solidFill>
-                      <a:prstDash val="solid"/>
-                    </a:lnT>
-                    <a:lnB w="7620">
-                      <a:noFill/>
-                    </a:lnB>
-                    <a:solidFill>
-                      <a:srgbClr val="FFFEF8"/>
-                    </a:solidFill>
-                  </a:tcPr>
-                </a:tc>
-              </a:tr>
-              <a:tr h="610870">
-                <a:tc>
-                  <a:txBody>
-                    <a:bodyPr wrap="square">
-                      <a:noAutofit/>
-                    </a:bodyPr>
-                    <a:lstStyle/>
-                    <a:p>
-                      <a:pPr algn="l">
-                        <a:lnSpc>
-                          <a:spcPts val="1954"/>
-                        </a:lnSpc>
-                        <a:buNone/>
-                        <a:defRPr sz="1700" b="0">
-                          <a:solidFill>
-                            <a:srgbClr val="303437"/>
-                          </a:solidFill>
-                          <a:latin typeface="Noto Sans"/>
-                        </a:defRPr>
-                      </a:pPr>
-                      <a:r>
-                        <a:rPr sz="1700" b="0" lang="ja-JP" altLang="en-US">
-                          <a:solidFill>
-                            <a:srgbClr val="303437"/>
-                          </a:solidFill>
-                          <a:latin typeface="Noto Sans"/>
-                          <a:ea typeface="Noto Sans CJK JP"/>
-                          <a:cs typeface="Noto Sans"/>
-                        </a:rPr>
-                        <a:t>CLUE 1.0</a:t>
-                      </a:r>
-                    </a:p>
-                  </a:txBody>
-                  <a:tcPr marL="63500" marR="63500" marT="38100" marB="38100" anchor="ctr">
-                    <a:lnL w="7620">
-                      <a:noFill/>
-                    </a:lnL>
-                    <a:lnR w="7620">
-                      <a:noFill/>
-                    </a:lnR>
-                    <a:lnT w="7620">
-                      <a:noFill/>
-                    </a:lnT>
-                    <a:lnB w="7620">
-                      <a:noFill/>
-                    </a:lnB>
-                    <a:solidFill>
-                      <a:srgbClr val="FFFEF8"/>
-                    </a:solidFill>
-                  </a:tcPr>
-                </a:tc>
-                <a:tc>
-                  <a:txBody>
-                    <a:bodyPr wrap="square">
-                      <a:noAutofit/>
-                    </a:bodyPr>
-                    <a:lstStyle/>
-                    <a:p>
-                      <a:pPr algn="l">
-                        <a:lnSpc>
-                          <a:spcPts val="1954"/>
-                        </a:lnSpc>
-                        <a:buNone/>
-                        <a:defRPr sz="1700" b="0">
-                          <a:solidFill>
-                            <a:srgbClr val="303437"/>
-                          </a:solidFill>
-                          <a:latin typeface="Noto Sans"/>
-                        </a:defRPr>
-                      </a:pPr>
-                      <a:r>
-                        <a:rPr sz="1700" b="0" lang="ja-JP" altLang="en-US">
-                          <a:solidFill>
-                            <a:srgbClr val="303437"/>
-                          </a:solidFill>
-                          <a:latin typeface="Noto Sans"/>
-                          <a:ea typeface="Noto Sans CJK JP"/>
-                          <a:cs typeface="Noto Sans"/>
-                        </a:rPr>
-                        <a:t>元の学習・開発を利用。旧テストは3,892問、配布ZIPでは正解なし。</a:t>
-                      </a:r>
-                    </a:p>
-                  </a:txBody>
-                  <a:tcPr marL="63500" marR="63500" marT="38100" marB="38100" anchor="ctr">
-                    <a:lnL w="7620">
-                      <a:noFill/>
-                    </a:lnL>
-                    <a:lnR w="7620">
-                      <a:noFill/>
-                    </a:lnR>
-                    <a:lnT w="7620">
-                      <a:noFill/>
-                    </a:lnT>
-                    <a:lnB w="7620">
-                      <a:noFill/>
-                    </a:lnB>
-                    <a:solidFill>
-                      <a:srgbClr val="FFFEF8"/>
-                    </a:solidFill>
-                  </a:tcPr>
-                </a:tc>
-              </a:tr>
-              <a:tr h="610870">
-                <a:tc>
-                  <a:txBody>
-                    <a:bodyPr wrap="square">
-                      <a:noAutofit/>
-                    </a:bodyPr>
-                    <a:lstStyle/>
-                    <a:p>
-                      <a:pPr algn="l">
-                        <a:lnSpc>
-                          <a:spcPts val="1954"/>
-                        </a:lnSpc>
-                        <a:buNone/>
-                        <a:defRPr sz="1700" b="0">
-                          <a:solidFill>
-                            <a:srgbClr val="303437"/>
-                          </a:solidFill>
-                          <a:latin typeface="Noto Sans"/>
-                        </a:defRPr>
-                      </a:pPr>
-                      <a:r>
-                        <a:rPr sz="1700" b="0" lang="ja-JP" altLang="en-US">
-                          <a:solidFill>
-                            <a:srgbClr val="303437"/>
-                          </a:solidFill>
-                          <a:latin typeface="Noto Sans"/>
-                          <a:ea typeface="Noto Sans CJK JP"/>
-                          <a:cs typeface="Noto Sans"/>
-                        </a:rPr>
-                        <a:t>CLUE 1.1</a:t>
-                      </a:r>
-                    </a:p>
-                  </a:txBody>
-                  <a:tcPr marL="63500" marR="63500" marT="38100" marB="38100" anchor="ctr">
-                    <a:lnL w="7620">
-                      <a:noFill/>
-                    </a:lnL>
-                    <a:lnR w="7620">
-                      <a:noFill/>
-                    </a:lnR>
-                    <a:lnT w="7620">
-                      <a:noFill/>
-                    </a:lnT>
-                    <a:lnB w="7620">
-                      <a:noFill/>
-                    </a:lnB>
-                    <a:solidFill>
-                      <a:srgbClr val="FFFEF8"/>
-                    </a:solidFill>
-                  </a:tcPr>
-                </a:tc>
-                <a:tc>
-                  <a:txBody>
-                    <a:bodyPr wrap="square">
-                      <a:noAutofit/>
-                    </a:bodyPr>
-                    <a:lstStyle/>
-                    <a:p>
-                      <a:pPr algn="l">
-                        <a:lnSpc>
-                          <a:spcPts val="1954"/>
-                        </a:lnSpc>
-                        <a:buNone/>
-                        <a:defRPr sz="1700" b="0">
-                          <a:solidFill>
-                            <a:srgbClr val="303437"/>
-                          </a:solidFill>
-                          <a:latin typeface="Noto Sans"/>
-                        </a:defRPr>
-                      </a:pPr>
-                      <a:r>
-                        <a:rPr sz="1700" b="0" lang="ja-JP" altLang="en-US">
-                          <a:solidFill>
-                            <a:srgbClr val="303437"/>
-                          </a:solidFill>
-                          <a:latin typeface="Noto Sans"/>
-                          <a:ea typeface="Noto Sans CJK JP"/>
-                          <a:cs typeface="Noto Sans"/>
-                        </a:rPr>
-                        <a:t>学習・開発は同じ。新テストは1,625問、配布ZIPでは正解なし。</a:t>
-                      </a:r>
-                    </a:p>
-                  </a:txBody>
-                  <a:tcPr marL="63500" marR="63500" marT="38100" marB="38100" anchor="ctr">
-                    <a:lnL w="7620">
-                      <a:noFill/>
-                    </a:lnL>
-                    <a:lnR w="7620">
-                      <a:noFill/>
-                    </a:lnR>
-                    <a:lnT w="7620">
-                      <a:noFill/>
-                    </a:lnT>
-                    <a:lnB w="7620">
-                      <a:noFill/>
-                    </a:lnB>
-                    <a:solidFill>
-                      <a:srgbClr val="FFFEF8"/>
-                    </a:solidFill>
-                  </a:tcPr>
-                </a:tc>
-              </a:tr>
-              <a:tr h="610870">
-                <a:tc>
-                  <a:txBody>
-                    <a:bodyPr wrap="square">
-                      <a:noAutofit/>
-                    </a:bodyPr>
-                    <a:lstStyle/>
-                    <a:p>
-                      <a:pPr algn="l">
-                        <a:lnSpc>
-                          <a:spcPts val="1954"/>
-                        </a:lnSpc>
-                        <a:buNone/>
-                        <a:defRPr sz="1700" b="0">
-                          <a:solidFill>
-                            <a:srgbClr val="303437"/>
-                          </a:solidFill>
-                          <a:latin typeface="Noto Sans"/>
-                        </a:defRPr>
-                      </a:pPr>
-                      <a:r>
-                        <a:rPr sz="1700" b="0" lang="ja-JP" altLang="en-US">
-                          <a:solidFill>
-                            <a:srgbClr val="303437"/>
-                          </a:solidFill>
-                          <a:latin typeface="Noto Sans"/>
-                          <a:ea typeface="Noto Sans CJK JP"/>
-                          <a:cs typeface="Noto Sans"/>
-                        </a:rPr>
-                        <a:t>CLEVA</a:t>
-                      </a:r>
-                    </a:p>
-                  </a:txBody>
-                  <a:tcPr marL="63500" marR="63500" marT="38100" marB="38100" anchor="ctr">
-                    <a:lnL w="7620">
-                      <a:noFill/>
-                    </a:lnL>
-                    <a:lnR w="7620">
-                      <a:noFill/>
-                    </a:lnR>
-                    <a:lnT w="7620">
-                      <a:noFill/>
-                    </a:lnT>
-                    <a:lnB w="15240">
-                      <a:solidFill>
-                        <a:srgbClr val="626669"/>
-                      </a:solidFill>
-                      <a:prstDash val="solid"/>
-                    </a:lnB>
-                    <a:solidFill>
-                      <a:srgbClr val="FFFEF8"/>
-                    </a:solidFill>
-                  </a:tcPr>
-                </a:tc>
-                <a:tc>
-                  <a:txBody>
-                    <a:bodyPr wrap="square">
-                      <a:noAutofit/>
-                    </a:bodyPr>
-                    <a:lstStyle/>
-                    <a:p>
-                      <a:pPr algn="l">
-                        <a:lnSpc>
-                          <a:spcPts val="1954"/>
-                        </a:lnSpc>
-                        <a:buNone/>
-                        <a:defRPr sz="1700" b="0">
-                          <a:solidFill>
-                            <a:srgbClr val="303437"/>
-                          </a:solidFill>
-                          <a:latin typeface="Noto Sans"/>
-                        </a:defRPr>
-                      </a:pPr>
-                      <a:r>
-                        <a:rPr sz="1700" b="0" lang="ja-JP" altLang="en-US">
-                          <a:solidFill>
-                            <a:srgbClr val="303437"/>
-                          </a:solidFill>
-                          <a:latin typeface="Noto Sans"/>
-                          <a:ea typeface="Noto Sans CJK JP"/>
-                          <a:cs typeface="Noto Sans"/>
-                        </a:rPr>
-                        <a:t>C³の一部を採用。専用データとプロンプトで読解を評価。</a:t>
-                      </a:r>
-                    </a:p>
-                  </a:txBody>
-                  <a:tcPr marL="63500" marR="63500" marT="38100" marB="38100" anchor="ctr">
-                    <a:lnL w="7620">
-                      <a:noFill/>
-                    </a:lnL>
-                    <a:lnR w="7620">
-                      <a:noFill/>
-                    </a:lnR>
-                    <a:lnT w="7620">
-                      <a:noFill/>
-                    </a:lnT>
-                    <a:lnB w="15240">
-                      <a:solidFill>
-                        <a:srgbClr val="626669"/>
-                      </a:solidFill>
-                      <a:prstDash val="solid"/>
-                    </a:lnB>
-                    <a:solidFill>
-                      <a:srgbClr val="FFFEF8"/>
-                    </a:solidFill>
-                  </a:tcPr>
-                </a:tc>
-              </a:tr>
-            </a:tbl>
-          </a:graphicData>
-        </a:graphic>
-      </p:graphicFrame>
       <p:sp>
         <p:nvSpPr>
           <p:cNvPr id="5" name="sources"/>
@@ -16735,7 +16287,7 @@
                 <a:ea typeface="Noto Sans CJK JP"/>
                 <a:cs typeface="Noto Sans"/>
               </a:rPr>
-              <a:t>[1] CLUEbenchmark. C3 公開データ。</a:t>
+              <a:t>[1] Sun et al. C³ 公式データ・実装。</a:t>
             </a:r>
             <a:r>
               <a:rPr sz="810" b="0" lang="ja-JP" altLang="en-US">
@@ -16758,7 +16310,7 @@
                 <a:cs typeface="Noto Sans"/>
                 <a:hlinkClick r:id="rId2"/>
               </a:rPr>
-              <a:t>https://storage.googleapis.com/cluebenchmark/tasks/c3_public.zip</a:t>
+              <a:t>https://github.com/nlpdata/c3</a:t>
             </a:r>
           </a:p>
           <a:p>
@@ -16786,7 +16338,7 @@
                 <a:ea typeface="Noto Sans CJK JP"/>
                 <a:cs typeface="Noto Sans"/>
               </a:rPr>
-              <a:t>[2] Li et al. (2023). CLEVA. EMNLP System Demonstrations.</a:t>
+              <a:t>[2] Sun et al. C³ 利用条件。</a:t>
             </a:r>
             <a:r>
               <a:rPr sz="810" b="0" lang="ja-JP" altLang="en-US">
@@ -16807,9 +16359,9 @@
                 <a:latin typeface="Noto Sans"/>
                 <a:ea typeface="Noto Sans CJK JP"/>
                 <a:cs typeface="Noto Sans"/>
-                <a:hlinkClick r:id="rId3"/>
-              </a:rPr>
-              <a:t>https://aclanthology.org/2023.emnlp-demo.17/</a:t>
+                <a:hlinkClick r:id="rId4"/>
+              </a:rPr>
+              <a:t>https://github.com/nlpdata/c3/blob/master/license.txt</a:t>
             </a:r>
           </a:p>
         </p:txBody>
@@ -17018,7 +16570,7 @@
                 <a:ea typeface="Noto Sans CJK JP"/>
                 <a:cs typeface="Noto Sans"/>
               </a:rPr>
-              <a:t>入手方法とCLUE・CLEVA</a:t>
+              <a:t>公式データの入手と使い方</a:t>
             </a:r>
           </a:p>
         </p:txBody>
@@ -17132,7 +16684,7 @@
                 <a:ea typeface="Noto Sans CJK JP"/>
                 <a:cs typeface="Noto Sans"/>
               </a:rPr>
-              <a:t>CLEVAでは、中国語の読解課題として採用</a:t>
+              <a:t>C³は、文書と日常知識を結ぶ読解データ</a:t>
             </a:r>
           </a:p>
         </p:txBody>
@@ -17161,91 +16713,61 @@
           <a:p>
             <a:pPr marL="457200" indent="-355600">
               <a:lnSpc>
-                <a:spcPts val="2261"/>
+                <a:spcPts val="2379"/>
               </a:lnSpc>
               <a:spcAft>
                 <a:spcPts val="700"/>
               </a:spcAft>
-              <a:buSzPct val="70000"/>
+              <a:buSzPct val="66500"/>
               <a:buFont typeface="Noto Sans CJK JP"/>
               <a:buChar char="●"/>
-              <a:defRPr sz="1900" b="0">
-                <a:solidFill>
-                  <a:srgbClr val="303437"/>
-                </a:solidFill>
-                <a:latin typeface="Noto Sans"/>
-              </a:defRPr>
-            </a:pPr>
-            <a:r>
-              <a:rPr sz="1900" b="0" lang="ja-JP" altLang="en-US">
-                <a:solidFill>
-                  <a:srgbClr val="303437"/>
-                </a:solidFill>
-                <a:latin typeface="Noto Sans"/>
-                <a:ea typeface="Noto Sans CJK JP"/>
-                <a:cs typeface="Noto Sans"/>
-              </a:rPr>
-              <a:t>CLEVAは2023年に発表された中国語モデルの評価基盤で、読解課題にはC³から採った選択式問題を使い、正答率で評価する。</a:t>
+              <a:defRPr sz="2000" b="0">
+                <a:solidFill>
+                  <a:srgbClr val="303437"/>
+                </a:solidFill>
+                <a:latin typeface="Noto Sans"/>
+              </a:defRPr>
+            </a:pPr>
+            <a:r>
+              <a:rPr sz="2000" b="0" lang="ja-JP" altLang="en-US">
+                <a:solidFill>
+                  <a:srgbClr val="303437"/>
+                </a:solidFill>
+                <a:latin typeface="Noto Sans"/>
+                <a:ea typeface="Noto Sans CJK JP"/>
+                <a:cs typeface="Noto Sans"/>
+              </a:rPr>
+              <a:t>中国語の試験から集めた19,577問。対話と多様な単一テキストを読み、2〜4候補から唯一の正解を選ぶ。</a:t>
             </a:r>
           </a:p>
           <a:p>
             <a:pPr marL="457200" indent="-355600">
               <a:lnSpc>
-                <a:spcPts val="2261"/>
+                <a:spcPts val="2379"/>
               </a:lnSpc>
               <a:spcAft>
                 <a:spcPts val="700"/>
               </a:spcAft>
-              <a:buSzPct val="70000"/>
+              <a:buSzPct val="66500"/>
               <a:buFont typeface="Noto Sans CJK JP"/>
               <a:buChar char="●"/>
-              <a:defRPr sz="1900" b="0">
-                <a:solidFill>
-                  <a:srgbClr val="303437"/>
-                </a:solidFill>
-                <a:latin typeface="Noto Sans"/>
-              </a:defRPr>
-            </a:pPr>
-            <a:r>
-              <a:rPr sz="1900" b="0" lang="ja-JP" altLang="en-US">
-                <a:solidFill>
-                  <a:srgbClr val="303437"/>
-                </a:solidFill>
-                <a:latin typeface="Noto Sans"/>
-                <a:ea typeface="Noto Sans CJK JP"/>
-                <a:cs typeface="Noto Sans"/>
-              </a:rPr>
-              <a:t>公開実装は、文書・質問・全選択肢をテンプレートで整形し、生成または候補の比較によって解答する。</a:t>
-            </a:r>
-          </a:p>
-          <a:p>
-            <a:pPr marL="457200" indent="-355600">
-              <a:lnSpc>
-                <a:spcPts val="2261"/>
-              </a:lnSpc>
-              <a:spcAft>
-                <a:spcPts val="0"/>
-              </a:spcAft>
-              <a:buSzPct val="70000"/>
-              <a:buFont typeface="Noto Sans CJK JP"/>
-              <a:buChar char="●"/>
-              <a:defRPr sz="1900" b="0">
-                <a:solidFill>
-                  <a:srgbClr val="303437"/>
-                </a:solidFill>
-                <a:latin typeface="Noto Sans"/>
-              </a:defRPr>
-            </a:pPr>
-            <a:r>
-              <a:rPr sz="1900" b="0" lang="ja-JP" altLang="en-US">
-                <a:solidFill>
-                  <a:srgbClr val="303437"/>
-                </a:solidFill>
-                <a:latin typeface="Noto Sans"/>
-                <a:ea typeface="Noto Sans CJK JP"/>
-                <a:cs typeface="Noto Sans"/>
-              </a:rPr>
-              <a:t>CLEVAで使われた全問題や抽出範囲、詳しい推論条件は公開説明から確認できない。</a:t>
+              <a:defRPr sz="2000" b="0">
+                <a:solidFill>
+                  <a:srgbClr val="303437"/>
+                </a:solidFill>
+                <a:latin typeface="Noto Sans"/>
+              </a:defRPr>
+            </a:pPr>
+            <a:r>
+              <a:rPr sz="2000" b="0" lang="ja-JP" altLang="en-US">
+                <a:solidFill>
+                  <a:srgbClr val="303437"/>
+                </a:solidFill>
+                <a:latin typeface="Noto Sans"/>
+                <a:ea typeface="Noto Sans CJK JP"/>
+                <a:cs typeface="Noto Sans"/>
+              </a:rPr>
+              <a:t>語句照合だけでなく、言い換え・場面・因果・計算などが必要になる。600問の知識注釈が、その性質を具体的に示す。</a:t>
             </a:r>
           </a:p>
         </p:txBody>
@@ -17293,7 +16815,7 @@
                 <a:ea typeface="Noto Sans CJK JP"/>
                 <a:cs typeface="Noto Sans"/>
               </a:rPr>
-              <a:t>4. 入手方法とCLUE・CLEVA</a:t>
+              <a:t>4. 公式データの入手と使い方</a:t>
             </a:r>
           </a:p>
         </p:txBody>
@@ -17306,7 +16828,7 @@
         </p:nvSpPr>
         <p:spPr>
           <a:xfrm>
-            <a:off x="502920" y="4517136"/>
+            <a:off x="502920" y="4700016"/>
             <a:ext cx="8183879" cy="530352"/>
           </a:xfrm>
           <a:prstGeom prst="rect">
@@ -17347,7 +16869,7 @@
                 <a:ea typeface="Noto Sans CJK JP"/>
                 <a:cs typeface="Noto Sans"/>
               </a:rPr>
-              <a:t>[1] Li et al. (2023). CLEVA. EMNLP System Demonstrations.</a:t>
+              <a:t>[1] Sun et al. (2020). Investigating Prior Knowledge for Challenging Chinese Machine Reading Comprehension. TACL.</a:t>
             </a:r>
             <a:r>
               <a:rPr sz="810" b="0" lang="ja-JP" altLang="en-US">
@@ -17370,61 +16892,7 @@
                 <a:cs typeface="Noto Sans"/>
                 <a:hlinkClick r:id="rId2"/>
               </a:rPr>
-              <a:t>https://aclanthology.org/2023.emnlp-demo.17/</a:t>
-            </a:r>
-          </a:p>
-          <a:p>
-            <a:pPr>
-              <a:lnSpc>
-                <a:spcPts val="940"/>
-              </a:lnSpc>
-              <a:spcAft>
-                <a:spcPts val="140"/>
-              </a:spcAft>
-              <a:buNone/>
-              <a:defRPr sz="810" b="0">
-                <a:solidFill>
-                  <a:srgbClr val="303437"/>
-                </a:solidFill>
-                <a:latin typeface="Noto Sans"/>
-              </a:defRPr>
-            </a:pPr>
-            <a:r>
-              <a:rPr sz="810" b="0" lang="ja-JP" altLang="en-US">
-                <a:solidFill>
-                  <a:srgbClr val="626669"/>
-                </a:solidFill>
-                <a:latin typeface="Noto Sans"/>
-                <a:ea typeface="Noto Sans CJK JP"/>
-                <a:cs typeface="Noto Sans"/>
-              </a:rPr>
-              <a:t>[2] Stanford CRFM. HELM: CLEVAReadingComprehensionScenario.</a:t>
-            </a:r>
-          </a:p>
-          <a:p>
-            <a:pPr>
-              <a:lnSpc>
-                <a:spcPts val="940"/>
-              </a:lnSpc>
-              <a:buNone/>
-              <a:defRPr sz="810" b="0">
-                <a:solidFill>
-                  <a:srgbClr val="303437"/>
-                </a:solidFill>
-                <a:latin typeface="Noto Sans"/>
-              </a:defRPr>
-            </a:pPr>
-            <a:r>
-              <a:rPr sz="810" b="0" lang="ja-JP" altLang="en-US">
-                <a:solidFill>
-                  <a:srgbClr val="626669"/>
-                </a:solidFill>
-                <a:latin typeface="Noto Sans"/>
-                <a:ea typeface="Noto Sans CJK JP"/>
-                <a:cs typeface="Noto Sans"/>
-                <a:hlinkClick r:id="rId3"/>
-              </a:rPr>
-              <a:t>https://github.com/stanford-crfm/helm/blob/v0.4.0/src/helm/benchmark/scenarios/cleva_scenario.py</a:t>
+              <a:t>https://aclanthology.org/2020.tacl-1.10/</a:t>
             </a:r>
           </a:p>
         </p:txBody>
@@ -17459,158 +16927,45 @@
         </p:nvSpPr>
         <p:spPr>
           <a:xfrm>
-            <a:off x="468172" y="650138"/>
-            <a:ext cx="8206740" cy="616305"/>
+            <a:off x="548640" y="2484835"/>
+            <a:ext cx="8046720" cy="686816"/>
           </a:xfrm>
         </p:spPr>
         <p:txBody>
-          <a:bodyPr wrap="square" lIns="0" rIns="0" tIns="0" bIns="0">
+          <a:bodyPr wrap="square" lIns="0" rIns="0" tIns="0" bIns="101600" anchor="ctr">
             <a:noAutofit/>
           </a:bodyPr>
           <a:lstStyle/>
           <a:p>
-            <a:pPr algn="l">
+            <a:pPr algn="ctr">
               <a:lnSpc>
                 <a:spcPct val="110000"/>
               </a:lnSpc>
               <a:buNone/>
-              <a:defRPr sz="2800" b="0">
-                <a:solidFill>
-                  <a:srgbClr val="303437"/>
-                </a:solidFill>
-                <a:latin typeface="Noto Sans"/>
-              </a:defRPr>
-            </a:pPr>
-            <a:r>
-              <a:rPr sz="2800" b="1" lang="ja-JP" altLang="en-US">
-                <a:solidFill>
-                  <a:srgbClr val="303437"/>
-                </a:solidFill>
-                <a:latin typeface="Noto Sans"/>
-                <a:ea typeface="Noto Sans CJK JP"/>
-                <a:cs typeface="Noto Sans"/>
-              </a:rPr>
-              <a:t>公式データと知識注釈をJSONで取得する</a:t>
+              <a:defRPr sz="3600" b="0">
+                <a:solidFill>
+                  <a:srgbClr val="303437"/>
+                </a:solidFill>
+                <a:latin typeface="Noto Sans"/>
+              </a:defRPr>
+            </a:pPr>
+            <a:r>
+              <a:rPr sz="3600" b="1" lang="ja-JP" altLang="en-US">
+                <a:solidFill>
+                  <a:srgbClr val="303437"/>
+                </a:solidFill>
+                <a:latin typeface="Noto Sans"/>
+                <a:ea typeface="Noto Sans CJK JP"/>
+                <a:cs typeface="Noto Sans"/>
+              </a:rPr>
+              <a:t>Appendix</a:t>
             </a:r>
           </a:p>
         </p:txBody>
       </p:sp>
       <p:sp>
         <p:nvSpPr>
-          <p:cNvPr id="3" name="Text Placeholder 2"/>
-          <p:cNvSpPr>
-            <a:spLocks noGrp="1"/>
-          </p:cNvSpPr>
-          <p:nvPr>
-            <p:ph type="body" idx="1"/>
-          </p:nvPr>
-        </p:nvSpPr>
-        <p:spPr>
-          <a:xfrm>
-            <a:off x="594360" y="1463040"/>
-            <a:ext cx="7955279" cy="3044952"/>
-          </a:xfrm>
-        </p:spPr>
-        <p:txBody>
-          <a:bodyPr wrap="square" tIns="91440" bIns="91440">
-            <a:noAutofit/>
-          </a:bodyPr>
-          <a:lstStyle/>
-          <a:p>
-            <a:pPr marL="457200" indent="-355600">
-              <a:lnSpc>
-                <a:spcPts val="2261"/>
-              </a:lnSpc>
-              <a:spcAft>
-                <a:spcPts val="700"/>
-              </a:spcAft>
-              <a:buSzPct val="70000"/>
-              <a:buFont typeface="Noto Sans CJK JP"/>
-              <a:buChar char="●"/>
-              <a:defRPr sz="1900" b="0">
-                <a:solidFill>
-                  <a:srgbClr val="303437"/>
-                </a:solidFill>
-                <a:latin typeface="Noto Sans"/>
-              </a:defRPr>
-            </a:pPr>
-            <a:r>
-              <a:rPr sz="1900" b="0" lang="ja-JP" altLang="en-US">
-                <a:solidFill>
-                  <a:srgbClr val="303437"/>
-                </a:solidFill>
-                <a:latin typeface="Noto Sans"/>
-                <a:ea typeface="Noto Sans CJK JP"/>
-                <a:cs typeface="Noto Sans"/>
-              </a:rPr>
-              <a:t>公式リポジトリでは、文書・質問・候補・正解を含むJSONと、600問の知識注釈が公開されている。</a:t>
-            </a:r>
-          </a:p>
-          <a:p>
-            <a:pPr marL="457200" indent="-355600">
-              <a:lnSpc>
-                <a:spcPts val="2261"/>
-              </a:lnSpc>
-              <a:spcAft>
-                <a:spcPts val="700"/>
-              </a:spcAft>
-              <a:buSzPct val="70000"/>
-              <a:buFont typeface="Noto Sans CJK JP"/>
-              <a:buChar char="●"/>
-              <a:defRPr sz="1900" b="0">
-                <a:solidFill>
-                  <a:srgbClr val="303437"/>
-                </a:solidFill>
-                <a:latin typeface="Noto Sans"/>
-              </a:defRPr>
-            </a:pPr>
-            <a:r>
-              <a:rPr sz="1900" b="0" lang="ja-JP" altLang="en-US">
-                <a:solidFill>
-                  <a:srgbClr val="303437"/>
-                </a:solidFill>
-                <a:latin typeface="Noto Sans"/>
-                <a:ea typeface="Noto Sans CJK JP"/>
-                <a:cs typeface="Noto Sans"/>
-              </a:rPr>
-              <a:t>各問のanswerには、choiceに並んだ候補のうち正解の文字列が入る。正答率の評価に加え、知識注釈を使った問題種別の分析にも使える。</a:t>
-            </a:r>
-          </a:p>
-          <a:p>
-            <a:pPr marL="457200" indent="-355600">
-              <a:lnSpc>
-                <a:spcPts val="2261"/>
-              </a:lnSpc>
-              <a:spcAft>
-                <a:spcPts val="0"/>
-              </a:spcAft>
-              <a:buSzPct val="70000"/>
-              <a:buFont typeface="Noto Sans CJK JP"/>
-              <a:buChar char="●"/>
-              <a:defRPr sz="1900" b="0">
-                <a:solidFill>
-                  <a:srgbClr val="303437"/>
-                </a:solidFill>
-                <a:latin typeface="Noto Sans"/>
-              </a:defRPr>
-            </a:pPr>
-            <a:r>
-              <a:rPr sz="1900" b="0" lang="ja-JP" altLang="en-US">
-                <a:solidFill>
-                  <a:srgbClr val="303437"/>
-                </a:solidFill>
-                <a:latin typeface="Noto Sans"/>
-                <a:ea typeface="Noto Sans CJK JP"/>
-                <a:cs typeface="Noto Sans"/>
-              </a:rPr>
-              <a:t>license.txtに記載された利用条件は「非商用の研究目的のみ」である。</a:t>
-            </a:r>
-          </a:p>
-        </p:txBody>
-      </p:sp>
-      <p:sp>
-        <p:nvSpPr>
-          <p:cNvPr id="4" name="Title 3"/>
+          <p:cNvPr id="3" name="Title 2"/>
           <p:cNvSpPr>
             <a:spLocks noGrp="1"/>
           </p:cNvSpPr>
@@ -17651,135 +17006,7 @@
                 <a:ea typeface="Noto Sans CJK JP"/>
                 <a:cs typeface="Noto Sans"/>
               </a:rPr>
-              <a:t>4. 入手方法とCLUE・CLEVA</a:t>
-            </a:r>
-          </a:p>
-        </p:txBody>
-      </p:sp>
-      <p:sp>
-        <p:nvSpPr>
-          <p:cNvPr id="5" name="sources"/>
-          <p:cNvSpPr txBox="1"/>
-          <p:nvPr/>
-        </p:nvSpPr>
-        <p:spPr>
-          <a:xfrm>
-            <a:off x="502920" y="4700016"/>
-            <a:ext cx="8183879" cy="530352"/>
-          </a:xfrm>
-          <a:prstGeom prst="rect">
-            <a:avLst/>
-          </a:prstGeom>
-          <a:noFill/>
-        </p:spPr>
-        <p:txBody>
-          <a:bodyPr wrap="square" lIns="0" rIns="0" tIns="0" bIns="0">
-            <a:noAutofit/>
-          </a:bodyPr>
-          <a:lstStyle/>
-          <a:p>
-            <a:pPr algn="l">
-              <a:lnSpc>
-                <a:spcPts val="940"/>
-              </a:lnSpc>
-              <a:spcBef>
-                <a:spcPts val="0"/>
-              </a:spcBef>
-              <a:spcAft>
-                <a:spcPts val="140"/>
-              </a:spcAft>
-              <a:buNone/>
-              <a:defRPr sz="810" b="0">
-                <a:solidFill>
-                  <a:srgbClr val="303437"/>
-                </a:solidFill>
-                <a:latin typeface="Noto Sans"/>
-              </a:defRPr>
-            </a:pPr>
-            <a:r>
-              <a:rPr sz="810" b="0" lang="ja-JP" altLang="en-US">
-                <a:solidFill>
-                  <a:srgbClr val="626669"/>
-                </a:solidFill>
-                <a:latin typeface="Noto Sans"/>
-                <a:ea typeface="Noto Sans CJK JP"/>
-                <a:cs typeface="Noto Sans"/>
-              </a:rPr>
-              <a:t>[1] Sun et al. C³ 公式データ・実装。</a:t>
-            </a:r>
-            <a:r>
-              <a:rPr sz="810" b="0" lang="ja-JP" altLang="en-US">
-                <a:solidFill>
-                  <a:srgbClr val="626669"/>
-                </a:solidFill>
-                <a:latin typeface="Noto Sans"/>
-                <a:ea typeface="Noto Sans CJK JP"/>
-                <a:cs typeface="Noto Sans"/>
-              </a:rPr>
-              <a:t>  </a:t>
-            </a:r>
-            <a:r>
-              <a:rPr sz="810" b="0" lang="ja-JP" altLang="en-US">
-                <a:solidFill>
-                  <a:srgbClr val="626669"/>
-                </a:solidFill>
-                <a:latin typeface="Noto Sans"/>
-                <a:ea typeface="Noto Sans CJK JP"/>
-                <a:cs typeface="Noto Sans"/>
-                <a:hlinkClick r:id="rId2"/>
-              </a:rPr>
-              <a:t>https://github.com/nlpdata/c3</a:t>
-            </a:r>
-          </a:p>
-          <a:p>
-            <a:pPr>
-              <a:lnSpc>
-                <a:spcPts val="940"/>
-              </a:lnSpc>
-              <a:spcAft>
-                <a:spcPts val="140"/>
-              </a:spcAft>
-              <a:buNone/>
-              <a:defRPr sz="810" b="0">
-                <a:solidFill>
-                  <a:srgbClr val="303437"/>
-                </a:solidFill>
-                <a:latin typeface="Noto Sans"/>
-              </a:defRPr>
-            </a:pPr>
-            <a:r>
-              <a:rPr sz="810" b="0" lang="ja-JP" altLang="en-US">
-                <a:solidFill>
-                  <a:srgbClr val="626669"/>
-                </a:solidFill>
-                <a:latin typeface="Noto Sans"/>
-                <a:ea typeface="Noto Sans CJK JP"/>
-                <a:cs typeface="Noto Sans"/>
-              </a:rPr>
-              <a:t>[2] Sun et al. C³ 利用条件。</a:t>
-            </a:r>
-            <a:r>
-              <a:rPr sz="810" b="0" lang="ja-JP" altLang="en-US">
-                <a:solidFill>
-                  <a:srgbClr val="626669"/>
-                </a:solidFill>
-                <a:latin typeface="Noto Sans"/>
-                <a:ea typeface="Noto Sans CJK JP"/>
-                <a:cs typeface="Noto Sans"/>
-              </a:rPr>
-              <a:t>  </a:t>
-            </a:r>
-            <a:r>
-              <a:rPr sz="810" b="0" lang="ja-JP" altLang="en-US">
-                <a:solidFill>
-                  <a:srgbClr val="626669"/>
-                </a:solidFill>
-                <a:latin typeface="Noto Sans"/>
-                <a:ea typeface="Noto Sans CJK JP"/>
-                <a:cs typeface="Noto Sans"/>
-                <a:hlinkClick r:id="rId4"/>
-              </a:rPr>
-              <a:t>https://github.com/nlpdata/c3/blob/master/license.txt</a:t>
+              <a:t>Appendix</a:t>
             </a:r>
           </a:p>
         </p:txBody>
@@ -17845,7 +17072,7 @@
                 <a:ea typeface="Noto Sans CJK JP"/>
                 <a:cs typeface="Noto Sans"/>
               </a:rPr>
-              <a:t>C³は、文書と日常知識を結ぶ読解データ</a:t>
+              <a:t/>
             </a:r>
           </a:p>
         </p:txBody>
@@ -17862,73 +17089,103 @@
         </p:nvSpPr>
         <p:spPr>
           <a:xfrm>
-            <a:off x="594360" y="1463040"/>
-            <a:ext cx="7955279" cy="3044952"/>
+            <a:off x="640080" y="1972511"/>
+            <a:ext cx="7863840" cy="1744980"/>
           </a:xfrm>
         </p:spPr>
         <p:txBody>
-          <a:bodyPr wrap="square" tIns="91440" bIns="91440">
+          <a:bodyPr lIns="0" rIns="0" tIns="0" bIns="0">
             <a:noAutofit/>
           </a:bodyPr>
           <a:lstStyle/>
           <a:p>
-            <a:pPr marL="457200" indent="-355600">
-              <a:lnSpc>
-                <a:spcPts val="2379"/>
-              </a:lnSpc>
-              <a:spcAft>
-                <a:spcPts val="700"/>
-              </a:spcAft>
-              <a:buSzPct val="66500"/>
+            <a:pPr marL="457200" indent="-457200">
+              <a:lnSpc>
+                <a:spcPts val="3660"/>
+              </a:lnSpc>
+              <a:spcAft>
+                <a:spcPts val="1200"/>
+              </a:spcAft>
+              <a:buSzPct val="100000"/>
               <a:buFont typeface="Noto Sans CJK JP"/>
-              <a:buChar char="●"/>
-              <a:defRPr sz="2000" b="0">
-                <a:solidFill>
-                  <a:srgbClr val="303437"/>
-                </a:solidFill>
-                <a:latin typeface="Noto Sans"/>
-              </a:defRPr>
-            </a:pPr>
-            <a:r>
-              <a:rPr sz="2000" b="0" lang="ja-JP" altLang="en-US">
-                <a:solidFill>
-                  <a:srgbClr val="303437"/>
-                </a:solidFill>
-                <a:latin typeface="Noto Sans"/>
-                <a:ea typeface="Noto Sans CJK JP"/>
-                <a:cs typeface="Noto Sans"/>
-              </a:rPr>
-              <a:t>中国語の試験から集めた19,577問。対話と多様な単一テキストを読み、2〜4候補から唯一の正解を選ぶ。</a:t>
-            </a:r>
-          </a:p>
-          <a:p>
-            <a:pPr marL="457200" indent="-355600">
-              <a:lnSpc>
-                <a:spcPts val="2379"/>
-              </a:lnSpc>
-              <a:spcAft>
-                <a:spcPts val="700"/>
-              </a:spcAft>
-              <a:buSzPct val="66500"/>
+              <a:buAutoNum type="arabicPeriod" startAt="1"/>
+              <a:defRPr sz="3000" b="1">
+                <a:solidFill>
+                  <a:srgbClr val="303437"/>
+                </a:solidFill>
+                <a:latin typeface="Noto Sans"/>
+              </a:defRPr>
+            </a:pPr>
+            <a:r>
+              <a:rPr sz="3000" b="1" lang="ja-JP" altLang="en-US">
+                <a:solidFill>
+                  <a:srgbClr val="303437"/>
+                </a:solidFill>
+                <a:latin typeface="Noto Sans"/>
+                <a:ea typeface="Noto Sans CJK JP"/>
+                <a:cs typeface="Noto Sans"/>
+              </a:rPr>
+              <a:t>追加の公開実例</a:t>
+            </a:r>
+          </a:p>
+          <a:p>
+            <a:pPr marL="457200" indent="-457200">
+              <a:lnSpc>
+                <a:spcPts val="3660"/>
+              </a:lnSpc>
+              <a:spcAft>
+                <a:spcPts val="1200"/>
+              </a:spcAft>
+              <a:buSzPct val="100000"/>
               <a:buFont typeface="Noto Sans CJK JP"/>
-              <a:buChar char="●"/>
-              <a:defRPr sz="2000" b="0">
-                <a:solidFill>
-                  <a:srgbClr val="303437"/>
-                </a:solidFill>
-                <a:latin typeface="Noto Sans"/>
-              </a:defRPr>
-            </a:pPr>
-            <a:r>
-              <a:rPr sz="2000" b="0" lang="ja-JP" altLang="en-US">
-                <a:solidFill>
-                  <a:srgbClr val="303437"/>
-                </a:solidFill>
-                <a:latin typeface="Noto Sans"/>
-                <a:ea typeface="Noto Sans CJK JP"/>
-                <a:cs typeface="Noto Sans"/>
-              </a:rPr>
-              <a:t>語句照合だけでなく、言い換え・場面・因果・計算などが必要になる。600問の知識注釈が、その性質を具体的に示す。</a:t>
+              <a:buAutoNum type="arabicPeriod" startAt="2"/>
+              <a:defRPr sz="3000" b="1">
+                <a:solidFill>
+                  <a:srgbClr val="303437"/>
+                </a:solidFill>
+                <a:latin typeface="Noto Sans"/>
+              </a:defRPr>
+            </a:pPr>
+            <a:r>
+              <a:rPr sz="3000" b="1" lang="ja-JP" altLang="en-US">
+                <a:solidFill>
+                  <a:srgbClr val="303437"/>
+                </a:solidFill>
+                <a:latin typeface="Noto Sans"/>
+                <a:ea typeface="Noto Sans CJK JP"/>
+                <a:cs typeface="Noto Sans"/>
+              </a:rPr>
+              <a:t>データの読み方</a:t>
+            </a:r>
+          </a:p>
+          <a:p>
+            <a:pPr marL="457200" indent="-457200">
+              <a:lnSpc>
+                <a:spcPts val="3660"/>
+              </a:lnSpc>
+              <a:spcAft>
+                <a:spcPts val="0"/>
+              </a:spcAft>
+              <a:buSzPct val="100000"/>
+              <a:buFont typeface="Noto Sans CJK JP"/>
+              <a:buAutoNum type="arabicPeriod" startAt="3"/>
+              <a:defRPr sz="3000" b="1">
+                <a:solidFill>
+                  <a:srgbClr val="303437"/>
+                </a:solidFill>
+                <a:latin typeface="Noto Sans"/>
+              </a:defRPr>
+            </a:pPr>
+            <a:r>
+              <a:rPr sz="3000" b="1" lang="ja-JP" altLang="en-US">
+                <a:solidFill>
+                  <a:srgbClr val="303437"/>
+                </a:solidFill>
+                <a:latin typeface="Noto Sans"/>
+                <a:ea typeface="Noto Sans CJK JP"/>
+                <a:cs typeface="Noto Sans"/>
+              </a:rPr>
+              <a:t>研究と参考文献</a:t>
             </a:r>
           </a:p>
         </p:txBody>
@@ -17976,84 +17233,7 @@
                 <a:ea typeface="Noto Sans CJK JP"/>
                 <a:cs typeface="Noto Sans"/>
               </a:rPr>
-              <a:t>4. 入手方法とCLUE・CLEVA</a:t>
-            </a:r>
-          </a:p>
-        </p:txBody>
-      </p:sp>
-      <p:sp>
-        <p:nvSpPr>
-          <p:cNvPr id="5" name="sources"/>
-          <p:cNvSpPr txBox="1"/>
-          <p:nvPr/>
-        </p:nvSpPr>
-        <p:spPr>
-          <a:xfrm>
-            <a:off x="502920" y="4700016"/>
-            <a:ext cx="8183879" cy="530352"/>
-          </a:xfrm>
-          <a:prstGeom prst="rect">
-            <a:avLst/>
-          </a:prstGeom>
-          <a:noFill/>
-        </p:spPr>
-        <p:txBody>
-          <a:bodyPr wrap="square" lIns="0" rIns="0" tIns="0" bIns="0">
-            <a:noAutofit/>
-          </a:bodyPr>
-          <a:lstStyle/>
-          <a:p>
-            <a:pPr algn="l">
-              <a:lnSpc>
-                <a:spcPts val="940"/>
-              </a:lnSpc>
-              <a:spcBef>
-                <a:spcPts val="0"/>
-              </a:spcBef>
-              <a:spcAft>
-                <a:spcPts val="140"/>
-              </a:spcAft>
-              <a:buNone/>
-              <a:defRPr sz="810" b="0">
-                <a:solidFill>
-                  <a:srgbClr val="303437"/>
-                </a:solidFill>
-                <a:latin typeface="Noto Sans"/>
-              </a:defRPr>
-            </a:pPr>
-            <a:r>
-              <a:rPr sz="810" b="0" lang="ja-JP" altLang="en-US">
-                <a:solidFill>
-                  <a:srgbClr val="626669"/>
-                </a:solidFill>
-                <a:latin typeface="Noto Sans"/>
-                <a:ea typeface="Noto Sans CJK JP"/>
-                <a:cs typeface="Noto Sans"/>
-              </a:rPr>
-              <a:t>[1] Sun et al. (2020). Investigating Prior Knowledge for Challenging Chinese Machine Reading Comprehension. TACL.</a:t>
-            </a:r>
-            <a:r>
-              <a:rPr sz="810" b="0" lang="ja-JP" altLang="en-US">
-                <a:solidFill>
-                  <a:srgbClr val="626669"/>
-                </a:solidFill>
-                <a:latin typeface="Noto Sans"/>
-                <a:ea typeface="Noto Sans CJK JP"/>
-                <a:cs typeface="Noto Sans"/>
-              </a:rPr>
-              <a:t>  </a:t>
-            </a:r>
-            <a:r>
-              <a:rPr sz="810" b="0" lang="ja-JP" altLang="en-US">
-                <a:solidFill>
-                  <a:srgbClr val="626669"/>
-                </a:solidFill>
-                <a:latin typeface="Noto Sans"/>
-                <a:ea typeface="Noto Sans CJK JP"/>
-                <a:cs typeface="Noto Sans"/>
-                <a:hlinkClick r:id="rId2"/>
-              </a:rPr>
-              <a:t>https://aclanthology.org/2020.tacl-1.10/</a:t>
+              <a:t>Appendix: 目次</a:t>
             </a:r>
           </a:p>
         </p:txBody>
@@ -18088,12 +17268,12 @@
         </p:nvSpPr>
         <p:spPr>
           <a:xfrm>
-            <a:off x="548640" y="2484835"/>
-            <a:ext cx="8046720" cy="686816"/>
+            <a:off x="548640" y="2506875"/>
+            <a:ext cx="8046720" cy="585216"/>
           </a:xfrm>
         </p:spPr>
         <p:txBody>
-          <a:bodyPr wrap="square" lIns="0" rIns="0" tIns="0" bIns="101600" anchor="ctr">
+          <a:bodyPr wrap="square" lIns="0" rIns="0" tIns="0" bIns="0" anchor="ctr">
             <a:noAutofit/>
           </a:bodyPr>
           <a:lstStyle/>
@@ -18119,7 +17299,7 @@
                 <a:ea typeface="Noto Sans CJK JP"/>
                 <a:cs typeface="Noto Sans"/>
               </a:rPr>
-              <a:t>Appendix</a:t>
+              <a:t>追加の公開実例</a:t>
             </a:r>
           </a:p>
         </p:txBody>
@@ -18167,7 +17347,7 @@
                 <a:ea typeface="Noto Sans CJK JP"/>
                 <a:cs typeface="Noto Sans"/>
               </a:rPr>
-              <a:t>Appendix</a:t>
+              <a:t>Appendix: 1. 追加の公開実例</a:t>
             </a:r>
           </a:p>
         </p:txBody>
@@ -18181,347 +17361,6 @@
 </file>
 
 <file path=ppt/slides/slide34.xml><?xml version="1.0" encoding="utf-8"?>
-<p:sld xmlns:a="http://schemas.openxmlformats.org/drawingml/2006/main" xmlns:p="http://schemas.openxmlformats.org/presentationml/2006/main" xmlns:r="http://schemas.openxmlformats.org/officeDocument/2006/relationships">
-  <p:cSld>
-    <p:spTree>
-      <p:nvGrpSpPr>
-        <p:cNvPr id="1" name=""/>
-        <p:cNvGrpSpPr/>
-        <p:nvPr/>
-      </p:nvGrpSpPr>
-      <p:grpSpPr/>
-      <p:sp>
-        <p:nvSpPr>
-          <p:cNvPr id="2" name="Title 1"/>
-          <p:cNvSpPr>
-            <a:spLocks noGrp="1"/>
-          </p:cNvSpPr>
-          <p:nvPr>
-            <p:ph type="title"/>
-          </p:nvPr>
-        </p:nvSpPr>
-        <p:spPr>
-          <a:xfrm>
-            <a:off x="468172" y="650138"/>
-            <a:ext cx="8206740" cy="616305"/>
-          </a:xfrm>
-        </p:spPr>
-        <p:txBody>
-          <a:bodyPr wrap="square" lIns="0" rIns="0" tIns="0" bIns="0">
-            <a:noAutofit/>
-          </a:bodyPr>
-          <a:lstStyle/>
-          <a:p>
-            <a:pPr algn="l">
-              <a:lnSpc>
-                <a:spcPct val="110000"/>
-              </a:lnSpc>
-              <a:buNone/>
-              <a:defRPr sz="2800" b="0">
-                <a:solidFill>
-                  <a:srgbClr val="303437"/>
-                </a:solidFill>
-                <a:latin typeface="Noto Sans"/>
-              </a:defRPr>
-            </a:pPr>
-            <a:r>
-              <a:rPr sz="2800" b="1" lang="ja-JP" altLang="en-US">
-                <a:solidFill>
-                  <a:srgbClr val="303437"/>
-                </a:solidFill>
-                <a:latin typeface="Noto Sans"/>
-                <a:ea typeface="Noto Sans CJK JP"/>
-                <a:cs typeface="Noto Sans"/>
-              </a:rPr>
-              <a:t/>
-            </a:r>
-          </a:p>
-        </p:txBody>
-      </p:sp>
-      <p:sp>
-        <p:nvSpPr>
-          <p:cNvPr id="3" name="Text Placeholder 2"/>
-          <p:cNvSpPr>
-            <a:spLocks noGrp="1"/>
-          </p:cNvSpPr>
-          <p:nvPr>
-            <p:ph type="body" idx="1"/>
-          </p:nvPr>
-        </p:nvSpPr>
-        <p:spPr>
-          <a:xfrm>
-            <a:off x="640080" y="1972511"/>
-            <a:ext cx="7863840" cy="1744980"/>
-          </a:xfrm>
-        </p:spPr>
-        <p:txBody>
-          <a:bodyPr lIns="0" rIns="0" tIns="0" bIns="0">
-            <a:noAutofit/>
-          </a:bodyPr>
-          <a:lstStyle/>
-          <a:p>
-            <a:pPr marL="457200" indent="-457200">
-              <a:lnSpc>
-                <a:spcPts val="3660"/>
-              </a:lnSpc>
-              <a:spcAft>
-                <a:spcPts val="1200"/>
-              </a:spcAft>
-              <a:buSzPct val="100000"/>
-              <a:buFont typeface="Noto Sans CJK JP"/>
-              <a:buAutoNum type="arabicPeriod" startAt="1"/>
-              <a:defRPr sz="3000" b="1">
-                <a:solidFill>
-                  <a:srgbClr val="303437"/>
-                </a:solidFill>
-                <a:latin typeface="Noto Sans"/>
-              </a:defRPr>
-            </a:pPr>
-            <a:r>
-              <a:rPr sz="3000" b="1" lang="ja-JP" altLang="en-US">
-                <a:solidFill>
-                  <a:srgbClr val="303437"/>
-                </a:solidFill>
-                <a:latin typeface="Noto Sans"/>
-                <a:ea typeface="Noto Sans CJK JP"/>
-                <a:cs typeface="Noto Sans"/>
-              </a:rPr>
-              <a:t>追加の公開実例</a:t>
-            </a:r>
-          </a:p>
-          <a:p>
-            <a:pPr marL="457200" indent="-457200">
-              <a:lnSpc>
-                <a:spcPts val="3660"/>
-              </a:lnSpc>
-              <a:spcAft>
-                <a:spcPts val="1200"/>
-              </a:spcAft>
-              <a:buSzPct val="100000"/>
-              <a:buFont typeface="Noto Sans CJK JP"/>
-              <a:buAutoNum type="arabicPeriod" startAt="2"/>
-              <a:defRPr sz="3000" b="1">
-                <a:solidFill>
-                  <a:srgbClr val="303437"/>
-                </a:solidFill>
-                <a:latin typeface="Noto Sans"/>
-              </a:defRPr>
-            </a:pPr>
-            <a:r>
-              <a:rPr sz="3000" b="1" lang="ja-JP" altLang="en-US">
-                <a:solidFill>
-                  <a:srgbClr val="303437"/>
-                </a:solidFill>
-                <a:latin typeface="Noto Sans"/>
-                <a:ea typeface="Noto Sans CJK JP"/>
-                <a:cs typeface="Noto Sans"/>
-              </a:rPr>
-              <a:t>データの読み方</a:t>
-            </a:r>
-          </a:p>
-          <a:p>
-            <a:pPr marL="457200" indent="-457200">
-              <a:lnSpc>
-                <a:spcPts val="3660"/>
-              </a:lnSpc>
-              <a:spcAft>
-                <a:spcPts val="0"/>
-              </a:spcAft>
-              <a:buSzPct val="100000"/>
-              <a:buFont typeface="Noto Sans CJK JP"/>
-              <a:buAutoNum type="arabicPeriod" startAt="3"/>
-              <a:defRPr sz="3000" b="1">
-                <a:solidFill>
-                  <a:srgbClr val="303437"/>
-                </a:solidFill>
-                <a:latin typeface="Noto Sans"/>
-              </a:defRPr>
-            </a:pPr>
-            <a:r>
-              <a:rPr sz="3000" b="1" lang="ja-JP" altLang="en-US">
-                <a:solidFill>
-                  <a:srgbClr val="303437"/>
-                </a:solidFill>
-                <a:latin typeface="Noto Sans"/>
-                <a:ea typeface="Noto Sans CJK JP"/>
-                <a:cs typeface="Noto Sans"/>
-              </a:rPr>
-              <a:t>研究と参考文献</a:t>
-            </a:r>
-          </a:p>
-        </p:txBody>
-      </p:sp>
-      <p:sp>
-        <p:nvSpPr>
-          <p:cNvPr id="4" name="Title 3"/>
-          <p:cNvSpPr>
-            <a:spLocks noGrp="1"/>
-          </p:cNvSpPr>
-          <p:nvPr>
-            <p:ph type="title" idx="2"/>
-          </p:nvPr>
-        </p:nvSpPr>
-        <p:spPr>
-          <a:xfrm>
-            <a:off x="75895" y="0"/>
-            <a:ext cx="8115300" cy="480060"/>
-          </a:xfrm>
-        </p:spPr>
-        <p:txBody>
-          <a:bodyPr wrap="square" lIns="0" rIns="0" tIns="0" bIns="0" anchor="ctr">
-            <a:noAutofit/>
-          </a:bodyPr>
-          <a:lstStyle/>
-          <a:p>
-            <a:pPr algn="l">
-              <a:lnSpc>
-                <a:spcPct val="110000"/>
-              </a:lnSpc>
-              <a:buNone/>
-              <a:defRPr sz="1400" b="0">
-                <a:solidFill>
-                  <a:srgbClr val="303437"/>
-                </a:solidFill>
-                <a:latin typeface="Noto Sans"/>
-              </a:defRPr>
-            </a:pPr>
-            <a:r>
-              <a:rPr sz="1400" b="1" lang="ja-JP" altLang="en-US">
-                <a:solidFill>
-                  <a:srgbClr val="FFFEF8"/>
-                </a:solidFill>
-                <a:latin typeface="Noto Sans"/>
-                <a:ea typeface="Noto Sans CJK JP"/>
-                <a:cs typeface="Noto Sans"/>
-              </a:rPr>
-              <a:t>Appendix: 目次</a:t>
-            </a:r>
-          </a:p>
-        </p:txBody>
-      </p:sp>
-    </p:spTree>
-  </p:cSld>
-  <p:clrMapOvr>
-    <a:masterClrMapping/>
-  </p:clrMapOvr>
-</p:sld>
-</file>
-
-<file path=ppt/slides/slide35.xml><?xml version="1.0" encoding="utf-8"?>
-<p:sld xmlns:a="http://schemas.openxmlformats.org/drawingml/2006/main" xmlns:p="http://schemas.openxmlformats.org/presentationml/2006/main" xmlns:r="http://schemas.openxmlformats.org/officeDocument/2006/relationships">
-  <p:cSld>
-    <p:spTree>
-      <p:nvGrpSpPr>
-        <p:cNvPr id="1" name=""/>
-        <p:cNvGrpSpPr/>
-        <p:nvPr/>
-      </p:nvGrpSpPr>
-      <p:grpSpPr/>
-      <p:sp>
-        <p:nvSpPr>
-          <p:cNvPr id="2" name="Title 1"/>
-          <p:cNvSpPr>
-            <a:spLocks noGrp="1"/>
-          </p:cNvSpPr>
-          <p:nvPr>
-            <p:ph type="title"/>
-          </p:nvPr>
-        </p:nvSpPr>
-        <p:spPr>
-          <a:xfrm>
-            <a:off x="548640" y="2506875"/>
-            <a:ext cx="8046720" cy="585216"/>
-          </a:xfrm>
-        </p:spPr>
-        <p:txBody>
-          <a:bodyPr wrap="square" lIns="0" rIns="0" tIns="0" bIns="0" anchor="ctr">
-            <a:noAutofit/>
-          </a:bodyPr>
-          <a:lstStyle/>
-          <a:p>
-            <a:pPr algn="ctr">
-              <a:lnSpc>
-                <a:spcPct val="110000"/>
-              </a:lnSpc>
-              <a:buNone/>
-              <a:defRPr sz="3600" b="0">
-                <a:solidFill>
-                  <a:srgbClr val="303437"/>
-                </a:solidFill>
-                <a:latin typeface="Noto Sans"/>
-              </a:defRPr>
-            </a:pPr>
-            <a:r>
-              <a:rPr sz="3600" b="1" lang="ja-JP" altLang="en-US">
-                <a:solidFill>
-                  <a:srgbClr val="303437"/>
-                </a:solidFill>
-                <a:latin typeface="Noto Sans"/>
-                <a:ea typeface="Noto Sans CJK JP"/>
-                <a:cs typeface="Noto Sans"/>
-              </a:rPr>
-              <a:t>追加の公開実例</a:t>
-            </a:r>
-          </a:p>
-        </p:txBody>
-      </p:sp>
-      <p:sp>
-        <p:nvSpPr>
-          <p:cNvPr id="3" name="Title 2"/>
-          <p:cNvSpPr>
-            <a:spLocks noGrp="1"/>
-          </p:cNvSpPr>
-          <p:nvPr>
-            <p:ph type="title" idx="2"/>
-          </p:nvPr>
-        </p:nvSpPr>
-        <p:spPr>
-          <a:xfrm>
-            <a:off x="75895" y="0"/>
-            <a:ext cx="8115300" cy="480060"/>
-          </a:xfrm>
-        </p:spPr>
-        <p:txBody>
-          <a:bodyPr wrap="square" lIns="0" rIns="0" tIns="0" bIns="0" anchor="ctr">
-            <a:noAutofit/>
-          </a:bodyPr>
-          <a:lstStyle/>
-          <a:p>
-            <a:pPr algn="l">
-              <a:lnSpc>
-                <a:spcPct val="110000"/>
-              </a:lnSpc>
-              <a:buNone/>
-              <a:defRPr sz="1400" b="0">
-                <a:solidFill>
-                  <a:srgbClr val="303437"/>
-                </a:solidFill>
-                <a:latin typeface="Noto Sans"/>
-              </a:defRPr>
-            </a:pPr>
-            <a:r>
-              <a:rPr sz="1400" b="1" lang="ja-JP" altLang="en-US">
-                <a:solidFill>
-                  <a:srgbClr val="FFFEF8"/>
-                </a:solidFill>
-                <a:latin typeface="Noto Sans"/>
-                <a:ea typeface="Noto Sans CJK JP"/>
-                <a:cs typeface="Noto Sans"/>
-              </a:rPr>
-              <a:t>Appendix: 1. 追加の公開実例</a:t>
-            </a:r>
-          </a:p>
-        </p:txBody>
-      </p:sp>
-    </p:spTree>
-  </p:cSld>
-  <p:clrMapOvr>
-    <a:masterClrMapping/>
-  </p:clrMapOvr>
-</p:sld>
-</file>
-
-<file path=ppt/slides/slide36.xml><?xml version="1.0" encoding="utf-8"?>
 <p:sld xmlns:a="http://schemas.openxmlformats.org/drawingml/2006/main" xmlns:p="http://schemas.openxmlformats.org/presentationml/2006/main" xmlns:r="http://schemas.openxmlformats.org/officeDocument/2006/relationships">
   <p:cSld>
     <p:spTree>
@@ -19518,7 +18357,7 @@
 </p:sld>
 </file>
 
-<file path=ppt/slides/slide37.xml><?xml version="1.0" encoding="utf-8"?>
+<file path=ppt/slides/slide35.xml><?xml version="1.0" encoding="utf-8"?>
 <p:sld xmlns:a="http://schemas.openxmlformats.org/drawingml/2006/main" xmlns:p="http://schemas.openxmlformats.org/presentationml/2006/main" xmlns:r="http://schemas.openxmlformats.org/officeDocument/2006/relationships">
   <p:cSld>
     <p:spTree>
@@ -20139,7 +18978,7 @@
 </p:sld>
 </file>
 
-<file path=ppt/slides/slide38.xml><?xml version="1.0" encoding="utf-8"?>
+<file path=ppt/slides/slide36.xml><?xml version="1.0" encoding="utf-8"?>
 <p:sld xmlns:a="http://schemas.openxmlformats.org/drawingml/2006/main" xmlns:p="http://schemas.openxmlformats.org/presentationml/2006/main" xmlns:r="http://schemas.openxmlformats.org/officeDocument/2006/relationships">
   <p:cSld>
     <p:spTree>
@@ -20760,7 +19599,7 @@
 </p:sld>
 </file>
 
-<file path=ppt/slides/slide39.xml><?xml version="1.0" encoding="utf-8"?>
+<file path=ppt/slides/slide37.xml><?xml version="1.0" encoding="utf-8"?>
 <p:sld xmlns:a="http://schemas.openxmlformats.org/drawingml/2006/main" xmlns:p="http://schemas.openxmlformats.org/presentationml/2006/main" xmlns:r="http://schemas.openxmlformats.org/officeDocument/2006/relationships">
   <p:cSld>
     <p:spTree>
@@ -21633,121 +20472,7 @@
 </p:sld>
 </file>
 
-<file path=ppt/slides/slide4.xml><?xml version="1.0" encoding="utf-8"?>
-<p:sld xmlns:a="http://schemas.openxmlformats.org/drawingml/2006/main" xmlns:p="http://schemas.openxmlformats.org/presentationml/2006/main" xmlns:r="http://schemas.openxmlformats.org/officeDocument/2006/relationships">
-  <p:cSld>
-    <p:spTree>
-      <p:nvGrpSpPr>
-        <p:cNvPr id="1" name=""/>
-        <p:cNvGrpSpPr/>
-        <p:nvPr/>
-      </p:nvGrpSpPr>
-      <p:grpSpPr/>
-      <p:sp>
-        <p:nvSpPr>
-          <p:cNvPr id="2" name="Title 1"/>
-          <p:cNvSpPr>
-            <a:spLocks noGrp="1"/>
-          </p:cNvSpPr>
-          <p:nvPr>
-            <p:ph type="title"/>
-          </p:nvPr>
-        </p:nvSpPr>
-        <p:spPr>
-          <a:xfrm>
-            <a:off x="548640" y="2506875"/>
-            <a:ext cx="8046720" cy="585216"/>
-          </a:xfrm>
-        </p:spPr>
-        <p:txBody>
-          <a:bodyPr wrap="square" lIns="0" rIns="0" tIns="0" bIns="0" anchor="ctr">
-            <a:noAutofit/>
-          </a:bodyPr>
-          <a:lstStyle/>
-          <a:p>
-            <a:pPr algn="ctr">
-              <a:lnSpc>
-                <a:spcPct val="110000"/>
-              </a:lnSpc>
-              <a:buNone/>
-              <a:defRPr sz="3600" b="0">
-                <a:solidFill>
-                  <a:srgbClr val="303437"/>
-                </a:solidFill>
-                <a:latin typeface="Noto Sans"/>
-              </a:defRPr>
-            </a:pPr>
-            <a:r>
-              <a:rPr sz="3600" b="1" lang="ja-JP" altLang="en-US">
-                <a:solidFill>
-                  <a:srgbClr val="303437"/>
-                </a:solidFill>
-                <a:latin typeface="Noto Sans"/>
-                <a:ea typeface="Noto Sans CJK JP"/>
-                <a:cs typeface="Noto Sans"/>
-              </a:rPr>
-              <a:t>文書から、正しい選択肢を選ぶ</a:t>
-            </a:r>
-          </a:p>
-        </p:txBody>
-      </p:sp>
-      <p:sp>
-        <p:nvSpPr>
-          <p:cNvPr id="3" name="Title 2"/>
-          <p:cNvSpPr>
-            <a:spLocks noGrp="1"/>
-          </p:cNvSpPr>
-          <p:nvPr>
-            <p:ph type="title" idx="2"/>
-          </p:nvPr>
-        </p:nvSpPr>
-        <p:spPr>
-          <a:xfrm>
-            <a:off x="75895" y="0"/>
-            <a:ext cx="8115300" cy="480060"/>
-          </a:xfrm>
-        </p:spPr>
-        <p:txBody>
-          <a:bodyPr wrap="square" lIns="0" rIns="0" tIns="0" bIns="0" anchor="ctr">
-            <a:noAutofit/>
-          </a:bodyPr>
-          <a:lstStyle/>
-          <a:p>
-            <a:pPr algn="l">
-              <a:lnSpc>
-                <a:spcPct val="110000"/>
-              </a:lnSpc>
-              <a:buNone/>
-              <a:defRPr sz="1400" b="0">
-                <a:solidFill>
-                  <a:srgbClr val="303437"/>
-                </a:solidFill>
-                <a:latin typeface="Noto Sans"/>
-              </a:defRPr>
-            </a:pPr>
-            <a:r>
-              <a:rPr sz="1400" b="1" lang="ja-JP" altLang="en-US">
-                <a:solidFill>
-                  <a:srgbClr val="FFFEF8"/>
-                </a:solidFill>
-                <a:latin typeface="Noto Sans"/>
-                <a:ea typeface="Noto Sans CJK JP"/>
-                <a:cs typeface="Noto Sans"/>
-              </a:rPr>
-              <a:t>1. 文書から、正しい選択肢を選ぶ</a:t>
-            </a:r>
-          </a:p>
-        </p:txBody>
-      </p:sp>
-    </p:spTree>
-  </p:cSld>
-  <p:clrMapOvr>
-    <a:masterClrMapping/>
-  </p:clrMapOvr>
-</p:sld>
-</file>
-
-<file path=ppt/slides/slide40.xml><?xml version="1.0" encoding="utf-8"?>
+<file path=ppt/slides/slide38.xml><?xml version="1.0" encoding="utf-8"?>
 <p:sld xmlns:a="http://schemas.openxmlformats.org/drawingml/2006/main" xmlns:p="http://schemas.openxmlformats.org/presentationml/2006/main" xmlns:r="http://schemas.openxmlformats.org/officeDocument/2006/relationships">
   <p:cSld>
     <p:spTree>
@@ -22558,7 +21283,7 @@
 </p:sld>
 </file>
 
-<file path=ppt/slides/slide41.xml><?xml version="1.0" encoding="utf-8"?>
+<file path=ppt/slides/slide39.xml><?xml version="1.0" encoding="utf-8"?>
 <p:sld xmlns:a="http://schemas.openxmlformats.org/drawingml/2006/main" xmlns:p="http://schemas.openxmlformats.org/presentationml/2006/main" xmlns:r="http://schemas.openxmlformats.org/officeDocument/2006/relationships">
   <p:cSld>
     <p:spTree>
@@ -23179,7 +21904,121 @@
 </p:sld>
 </file>
 
-<file path=ppt/slides/slide42.xml><?xml version="1.0" encoding="utf-8"?>
+<file path=ppt/slides/slide4.xml><?xml version="1.0" encoding="utf-8"?>
+<p:sld xmlns:a="http://schemas.openxmlformats.org/drawingml/2006/main" xmlns:p="http://schemas.openxmlformats.org/presentationml/2006/main" xmlns:r="http://schemas.openxmlformats.org/officeDocument/2006/relationships">
+  <p:cSld>
+    <p:spTree>
+      <p:nvGrpSpPr>
+        <p:cNvPr id="1" name=""/>
+        <p:cNvGrpSpPr/>
+        <p:nvPr/>
+      </p:nvGrpSpPr>
+      <p:grpSpPr/>
+      <p:sp>
+        <p:nvSpPr>
+          <p:cNvPr id="2" name="Title 1"/>
+          <p:cNvSpPr>
+            <a:spLocks noGrp="1"/>
+          </p:cNvSpPr>
+          <p:nvPr>
+            <p:ph type="title"/>
+          </p:nvPr>
+        </p:nvSpPr>
+        <p:spPr>
+          <a:xfrm>
+            <a:off x="548640" y="2506875"/>
+            <a:ext cx="8046720" cy="585216"/>
+          </a:xfrm>
+        </p:spPr>
+        <p:txBody>
+          <a:bodyPr wrap="square" lIns="0" rIns="0" tIns="0" bIns="0" anchor="ctr">
+            <a:noAutofit/>
+          </a:bodyPr>
+          <a:lstStyle/>
+          <a:p>
+            <a:pPr algn="ctr">
+              <a:lnSpc>
+                <a:spcPct val="110000"/>
+              </a:lnSpc>
+              <a:buNone/>
+              <a:defRPr sz="3600" b="0">
+                <a:solidFill>
+                  <a:srgbClr val="303437"/>
+                </a:solidFill>
+                <a:latin typeface="Noto Sans"/>
+              </a:defRPr>
+            </a:pPr>
+            <a:r>
+              <a:rPr sz="3600" b="1" lang="ja-JP" altLang="en-US">
+                <a:solidFill>
+                  <a:srgbClr val="303437"/>
+                </a:solidFill>
+                <a:latin typeface="Noto Sans"/>
+                <a:ea typeface="Noto Sans CJK JP"/>
+                <a:cs typeface="Noto Sans"/>
+              </a:rPr>
+              <a:t>文書から、正しい選択肢を選ぶ</a:t>
+            </a:r>
+          </a:p>
+        </p:txBody>
+      </p:sp>
+      <p:sp>
+        <p:nvSpPr>
+          <p:cNvPr id="3" name="Title 2"/>
+          <p:cNvSpPr>
+            <a:spLocks noGrp="1"/>
+          </p:cNvSpPr>
+          <p:nvPr>
+            <p:ph type="title" idx="2"/>
+          </p:nvPr>
+        </p:nvSpPr>
+        <p:spPr>
+          <a:xfrm>
+            <a:off x="75895" y="0"/>
+            <a:ext cx="8115300" cy="480060"/>
+          </a:xfrm>
+        </p:spPr>
+        <p:txBody>
+          <a:bodyPr wrap="square" lIns="0" rIns="0" tIns="0" bIns="0" anchor="ctr">
+            <a:noAutofit/>
+          </a:bodyPr>
+          <a:lstStyle/>
+          <a:p>
+            <a:pPr algn="l">
+              <a:lnSpc>
+                <a:spcPct val="110000"/>
+              </a:lnSpc>
+              <a:buNone/>
+              <a:defRPr sz="1400" b="0">
+                <a:solidFill>
+                  <a:srgbClr val="303437"/>
+                </a:solidFill>
+                <a:latin typeface="Noto Sans"/>
+              </a:defRPr>
+            </a:pPr>
+            <a:r>
+              <a:rPr sz="1400" b="1" lang="ja-JP" altLang="en-US">
+                <a:solidFill>
+                  <a:srgbClr val="FFFEF8"/>
+                </a:solidFill>
+                <a:latin typeface="Noto Sans"/>
+                <a:ea typeface="Noto Sans CJK JP"/>
+                <a:cs typeface="Noto Sans"/>
+              </a:rPr>
+              <a:t>1. 文書から、正しい選択肢を選ぶ</a:t>
+            </a:r>
+          </a:p>
+        </p:txBody>
+      </p:sp>
+    </p:spTree>
+  </p:cSld>
+  <p:clrMapOvr>
+    <a:masterClrMapping/>
+  </p:clrMapOvr>
+</p:sld>
+</file>
+
+<file path=ppt/slides/slide40.xml><?xml version="1.0" encoding="utf-8"?>
 <p:sld xmlns:a="http://schemas.openxmlformats.org/drawingml/2006/main" xmlns:p="http://schemas.openxmlformats.org/presentationml/2006/main" xmlns:r="http://schemas.openxmlformats.org/officeDocument/2006/relationships">
   <p:cSld>
     <p:spTree>
@@ -23800,7 +22639,7 @@
 </p:sld>
 </file>
 
-<file path=ppt/slides/slide43.xml><?xml version="1.0" encoding="utf-8"?>
+<file path=ppt/slides/slide41.xml><?xml version="1.0" encoding="utf-8"?>
 <p:sld xmlns:a="http://schemas.openxmlformats.org/drawingml/2006/main" xmlns:p="http://schemas.openxmlformats.org/presentationml/2006/main" xmlns:r="http://schemas.openxmlformats.org/officeDocument/2006/relationships">
   <p:cSld>
     <p:spTree>
@@ -24487,7 +23326,7 @@
 </p:sld>
 </file>
 
-<file path=ppt/slides/slide44.xml><?xml version="1.0" encoding="utf-8"?>
+<file path=ppt/slides/slide42.xml><?xml version="1.0" encoding="utf-8"?>
 <p:sld xmlns:a="http://schemas.openxmlformats.org/drawingml/2006/main" xmlns:p="http://schemas.openxmlformats.org/presentationml/2006/main" xmlns:r="http://schemas.openxmlformats.org/officeDocument/2006/relationships">
   <p:cSld>
     <p:spTree>
@@ -25174,7 +24013,7 @@
 </p:sld>
 </file>
 
-<file path=ppt/slides/slide45.xml><?xml version="1.0" encoding="utf-8"?>
+<file path=ppt/slides/slide43.xml><?xml version="1.0" encoding="utf-8"?>
 <p:sld xmlns:a="http://schemas.openxmlformats.org/drawingml/2006/main" xmlns:p="http://schemas.openxmlformats.org/presentationml/2006/main" xmlns:r="http://schemas.openxmlformats.org/officeDocument/2006/relationships">
   <p:cSld>
     <p:spTree>
@@ -25923,7 +24762,7 @@
 </p:sld>
 </file>
 
-<file path=ppt/slides/slide46.xml><?xml version="1.0" encoding="utf-8"?>
+<file path=ppt/slides/slide44.xml><?xml version="1.0" encoding="utf-8"?>
 <p:sld xmlns:a="http://schemas.openxmlformats.org/drawingml/2006/main" xmlns:p="http://schemas.openxmlformats.org/presentationml/2006/main" xmlns:r="http://schemas.openxmlformats.org/officeDocument/2006/relationships">
   <p:cSld>
     <p:spTree>
@@ -26451,7 +25290,7 @@
 </p:sld>
 </file>
 
-<file path=ppt/slides/slide47.xml><?xml version="1.0" encoding="utf-8"?>
+<file path=ppt/slides/slide45.xml><?xml version="1.0" encoding="utf-8"?>
 <p:sld xmlns:a="http://schemas.openxmlformats.org/drawingml/2006/main" xmlns:p="http://schemas.openxmlformats.org/presentationml/2006/main" xmlns:r="http://schemas.openxmlformats.org/officeDocument/2006/relationships">
   <p:cSld>
     <p:spTree>
@@ -26979,7 +25818,7 @@
 </p:sld>
 </file>
 
-<file path=ppt/slides/slide48.xml><?xml version="1.0" encoding="utf-8"?>
+<file path=ppt/slides/slide46.xml><?xml version="1.0" encoding="utf-8"?>
 <p:sld xmlns:a="http://schemas.openxmlformats.org/drawingml/2006/main" xmlns:p="http://schemas.openxmlformats.org/presentationml/2006/main" xmlns:r="http://schemas.openxmlformats.org/officeDocument/2006/relationships">
   <p:cSld>
     <p:spTree>
@@ -27728,7 +26567,7 @@
 </p:sld>
 </file>
 
-<file path=ppt/slides/slide49.xml><?xml version="1.0" encoding="utf-8"?>
+<file path=ppt/slides/slide47.xml><?xml version="1.0" encoding="utf-8"?>
 <p:sld xmlns:a="http://schemas.openxmlformats.org/drawingml/2006/main" xmlns:p="http://schemas.openxmlformats.org/presentationml/2006/main" xmlns:r="http://schemas.openxmlformats.org/officeDocument/2006/relationships">
   <p:cSld>
     <p:spTree>
@@ -28633,362 +27472,7 @@
 </p:sld>
 </file>
 
-<file path=ppt/slides/slide5.xml><?xml version="1.0" encoding="utf-8"?>
-<p:sld xmlns:a="http://schemas.openxmlformats.org/drawingml/2006/main" xmlns:p="http://schemas.openxmlformats.org/presentationml/2006/main" xmlns:r="http://schemas.openxmlformats.org/officeDocument/2006/relationships">
-  <p:cSld>
-    <p:spTree>
-      <p:nvGrpSpPr>
-        <p:cNvPr id="1" name=""/>
-        <p:cNvGrpSpPr/>
-        <p:nvPr/>
-      </p:nvGrpSpPr>
-      <p:grpSpPr/>
-      <p:sp>
-        <p:nvSpPr>
-          <p:cNvPr id="2" name="Title 1"/>
-          <p:cNvSpPr>
-            <a:spLocks noGrp="1"/>
-          </p:cNvSpPr>
-          <p:nvPr>
-            <p:ph type="title"/>
-          </p:nvPr>
-        </p:nvSpPr>
-        <p:spPr>
-          <a:xfrm>
-            <a:off x="468172" y="650138"/>
-            <a:ext cx="8206740" cy="616305"/>
-          </a:xfrm>
-        </p:spPr>
-        <p:txBody>
-          <a:bodyPr wrap="square" lIns="0" rIns="0" tIns="0" bIns="0">
-            <a:noAutofit/>
-          </a:bodyPr>
-          <a:lstStyle/>
-          <a:p>
-            <a:pPr algn="l">
-              <a:lnSpc>
-                <a:spcPct val="110000"/>
-              </a:lnSpc>
-              <a:buNone/>
-              <a:defRPr sz="2800" b="0">
-                <a:solidFill>
-                  <a:srgbClr val="303437"/>
-                </a:solidFill>
-                <a:latin typeface="Noto Sans"/>
-              </a:defRPr>
-            </a:pPr>
-            <a:r>
-              <a:rPr sz="2800" b="1" lang="ja-JP" altLang="en-US">
-                <a:solidFill>
-                  <a:srgbClr val="303437"/>
-                </a:solidFill>
-                <a:latin typeface="Noto Sans"/>
-                <a:ea typeface="Noto Sans CJK JP"/>
-                <a:cs typeface="Noto Sans"/>
-              </a:rPr>
-              <a:t>文書・質問・候補から、正解を一つ選ぶ</a:t>
-            </a:r>
-          </a:p>
-        </p:txBody>
-      </p:sp>
-      <p:sp>
-        <p:nvSpPr>
-          <p:cNvPr id="3" name="Text Placeholder 2"/>
-          <p:cNvSpPr>
-            <a:spLocks noGrp="1"/>
-          </p:cNvSpPr>
-          <p:nvPr>
-            <p:ph type="body" idx="1"/>
-          </p:nvPr>
-        </p:nvSpPr>
-        <p:spPr>
-          <a:xfrm>
-            <a:off x="594360" y="1463040"/>
-            <a:ext cx="7955279" cy="3044952"/>
-          </a:xfrm>
-        </p:spPr>
-        <p:txBody>
-          <a:bodyPr wrap="square" tIns="91440" bIns="91440">
-            <a:noAutofit/>
-          </a:bodyPr>
-          <a:lstStyle/>
-          <a:p>
-            <a:pPr marL="457200" indent="-355600">
-              <a:lnSpc>
-                <a:spcPts val="2320"/>
-              </a:lnSpc>
-              <a:spcAft>
-                <a:spcPts val="700"/>
-              </a:spcAft>
-              <a:buSzPct val="68205"/>
-              <a:buFont typeface="Noto Sans CJK JP"/>
-              <a:buChar char="●"/>
-              <a:defRPr sz="1950" b="0">
-                <a:solidFill>
-                  <a:srgbClr val="303437"/>
-                </a:solidFill>
-                <a:latin typeface="Noto Sans"/>
-              </a:defRPr>
-            </a:pPr>
-            <a:r>
-              <a:rPr sz="1950" b="0" lang="ja-JP" altLang="en-US">
-                <a:solidFill>
-                  <a:srgbClr val="303437"/>
-                </a:solidFill>
-                <a:latin typeface="Noto Sans"/>
-                <a:ea typeface="Noto Sans CJK JP"/>
-                <a:cs typeface="Noto Sans"/>
-              </a:rPr>
-              <a:t>C³は、中国語を第二言語として学ぶ人向けの試験問題から作られた選択式読解データ。対話と、物語・ニュース・独白・広告などの文章を含む。</a:t>
-            </a:r>
-          </a:p>
-          <a:p>
-            <a:pPr marL="457200" indent="-355600">
-              <a:lnSpc>
-                <a:spcPts val="2320"/>
-              </a:lnSpc>
-              <a:spcAft>
-                <a:spcPts val="700"/>
-              </a:spcAft>
-              <a:buSzPct val="68205"/>
-              <a:buFont typeface="Noto Sans CJK JP"/>
-              <a:buChar char="●"/>
-              <a:defRPr sz="1950" b="0">
-                <a:solidFill>
-                  <a:srgbClr val="303437"/>
-                </a:solidFill>
-                <a:latin typeface="Noto Sans"/>
-              </a:defRPr>
-            </a:pPr>
-            <a:r>
-              <a:rPr sz="1950" b="0" lang="ja-JP" altLang="en-US">
-                <a:solidFill>
-                  <a:srgbClr val="303437"/>
-                </a:solidFill>
-                <a:latin typeface="Noto Sans"/>
-                <a:ea typeface="Noto Sans CJK JP"/>
-                <a:cs typeface="Noto Sans"/>
-              </a:rPr>
-              <a:t>入力は文書、自由な形式の質問、全選択肢。正解は必ず一つで、候補は2〜4個ある。文章中の位置をそのまま抜き出す課題ではない。</a:t>
-            </a:r>
-          </a:p>
-          <a:p>
-            <a:pPr marL="457200" indent="-355600">
-              <a:lnSpc>
-                <a:spcPts val="2320"/>
-              </a:lnSpc>
-              <a:spcAft>
-                <a:spcPts val="0"/>
-              </a:spcAft>
-              <a:buSzPct val="68205"/>
-              <a:buFont typeface="Noto Sans CJK JP"/>
-              <a:buChar char="●"/>
-              <a:defRPr sz="1950" b="0">
-                <a:solidFill>
-                  <a:srgbClr val="303437"/>
-                </a:solidFill>
-                <a:latin typeface="Noto Sans"/>
-              </a:defRPr>
-            </a:pPr>
-            <a:r>
-              <a:rPr sz="1950" b="0" lang="ja-JP" altLang="en-US">
-                <a:solidFill>
-                  <a:srgbClr val="303437"/>
-                </a:solidFill>
-                <a:latin typeface="Noto Sans"/>
-                <a:ea typeface="Noto Sans CJK JP"/>
-                <a:cs typeface="Noto Sans"/>
-              </a:rPr>
-              <a:t>2019年に公開され、正式な研究論文は2020年にTACLへ掲載された。後にCLUEやCLEVAの読解課題にも採用された。</a:t>
-            </a:r>
-          </a:p>
-        </p:txBody>
-      </p:sp>
-      <p:sp>
-        <p:nvSpPr>
-          <p:cNvPr id="4" name="Title 3"/>
-          <p:cNvSpPr>
-            <a:spLocks noGrp="1"/>
-          </p:cNvSpPr>
-          <p:nvPr>
-            <p:ph type="title" idx="2"/>
-          </p:nvPr>
-        </p:nvSpPr>
-        <p:spPr>
-          <a:xfrm>
-            <a:off x="75895" y="0"/>
-            <a:ext cx="8115300" cy="480060"/>
-          </a:xfrm>
-        </p:spPr>
-        <p:txBody>
-          <a:bodyPr wrap="square" lIns="0" rIns="0" tIns="0" bIns="0" anchor="ctr">
-            <a:noAutofit/>
-          </a:bodyPr>
-          <a:lstStyle/>
-          <a:p>
-            <a:pPr algn="l">
-              <a:lnSpc>
-                <a:spcPct val="110000"/>
-              </a:lnSpc>
-              <a:buNone/>
-              <a:defRPr sz="1400" b="0">
-                <a:solidFill>
-                  <a:srgbClr val="303437"/>
-                </a:solidFill>
-                <a:latin typeface="Noto Sans"/>
-              </a:defRPr>
-            </a:pPr>
-            <a:r>
-              <a:rPr sz="1400" b="1" lang="ja-JP" altLang="en-US">
-                <a:solidFill>
-                  <a:srgbClr val="FFFEF8"/>
-                </a:solidFill>
-                <a:latin typeface="Noto Sans"/>
-                <a:ea typeface="Noto Sans CJK JP"/>
-                <a:cs typeface="Noto Sans"/>
-              </a:rPr>
-              <a:t>1. 文書から、正しい選択肢を選ぶ</a:t>
-            </a:r>
-          </a:p>
-        </p:txBody>
-      </p:sp>
-      <p:sp>
-        <p:nvSpPr>
-          <p:cNvPr id="5" name="sources"/>
-          <p:cNvSpPr txBox="1"/>
-          <p:nvPr/>
-        </p:nvSpPr>
-        <p:spPr>
-          <a:xfrm>
-            <a:off x="502920" y="4700016"/>
-            <a:ext cx="8183879" cy="530352"/>
-          </a:xfrm>
-          <a:prstGeom prst="rect">
-            <a:avLst/>
-          </a:prstGeom>
-          <a:noFill/>
-        </p:spPr>
-        <p:txBody>
-          <a:bodyPr wrap="square" lIns="0" rIns="0" tIns="0" bIns="0">
-            <a:noAutofit/>
-          </a:bodyPr>
-          <a:lstStyle/>
-          <a:p>
-            <a:pPr algn="l">
-              <a:lnSpc>
-                <a:spcPts val="940"/>
-              </a:lnSpc>
-              <a:spcBef>
-                <a:spcPts val="0"/>
-              </a:spcBef>
-              <a:spcAft>
-                <a:spcPts val="140"/>
-              </a:spcAft>
-              <a:buNone/>
-              <a:defRPr sz="810" b="0">
-                <a:solidFill>
-                  <a:srgbClr val="303437"/>
-                </a:solidFill>
-                <a:latin typeface="Noto Sans"/>
-              </a:defRPr>
-            </a:pPr>
-            <a:r>
-              <a:rPr sz="810" b="0" lang="ja-JP" altLang="en-US">
-                <a:solidFill>
-                  <a:srgbClr val="626669"/>
-                </a:solidFill>
-                <a:latin typeface="Noto Sans"/>
-                <a:ea typeface="Noto Sans CJK JP"/>
-                <a:cs typeface="Noto Sans"/>
-              </a:rPr>
-              <a:t>[1] Sun et al. (2020). Investigating Prior Knowledge for Challenging Chinese Machine Reading Comprehension. TACL.</a:t>
-            </a:r>
-            <a:r>
-              <a:rPr sz="810" b="0" lang="ja-JP" altLang="en-US">
-                <a:solidFill>
-                  <a:srgbClr val="626669"/>
-                </a:solidFill>
-                <a:latin typeface="Noto Sans"/>
-                <a:ea typeface="Noto Sans CJK JP"/>
-                <a:cs typeface="Noto Sans"/>
-              </a:rPr>
-              <a:t>  </a:t>
-            </a:r>
-            <a:r>
-              <a:rPr sz="810" b="0" lang="ja-JP" altLang="en-US">
-                <a:solidFill>
-                  <a:srgbClr val="626669"/>
-                </a:solidFill>
-                <a:latin typeface="Noto Sans"/>
-                <a:ea typeface="Noto Sans CJK JP"/>
-                <a:cs typeface="Noto Sans"/>
-                <a:hlinkClick r:id="rId2"/>
-              </a:rPr>
-              <a:t>https://aclanthology.org/2020.tacl-1.10/</a:t>
-            </a:r>
-          </a:p>
-          <a:p>
-            <a:pPr>
-              <a:lnSpc>
-                <a:spcPts val="940"/>
-              </a:lnSpc>
-              <a:spcAft>
-                <a:spcPts val="140"/>
-              </a:spcAft>
-              <a:buNone/>
-              <a:defRPr sz="810" b="0">
-                <a:solidFill>
-                  <a:srgbClr val="303437"/>
-                </a:solidFill>
-                <a:latin typeface="Noto Sans"/>
-              </a:defRPr>
-            </a:pPr>
-            <a:r>
-              <a:rPr sz="810" b="0" lang="ja-JP" altLang="en-US">
-                <a:solidFill>
-                  <a:srgbClr val="626669"/>
-                </a:solidFill>
-                <a:latin typeface="Noto Sans"/>
-                <a:ea typeface="Noto Sans CJK JP"/>
-                <a:cs typeface="Noto Sans"/>
-              </a:rPr>
-              <a:t>[2] Sun et al. (2019). Probing Prior Knowledge Needed in Challenging Chinese Machine Reading Comprehension.</a:t>
-            </a:r>
-            <a:r>
-              <a:rPr sz="810" b="0" lang="ja-JP" altLang="en-US">
-                <a:solidFill>
-                  <a:srgbClr val="626669"/>
-                </a:solidFill>
-                <a:latin typeface="Noto Sans"/>
-                <a:ea typeface="Noto Sans CJK JP"/>
-                <a:cs typeface="Noto Sans"/>
-              </a:rPr>
-              <a:t>  </a:t>
-            </a:r>
-            <a:r>
-              <a:rPr sz="810" b="0" lang="ja-JP" altLang="en-US">
-                <a:solidFill>
-                  <a:srgbClr val="626669"/>
-                </a:solidFill>
-                <a:latin typeface="Noto Sans"/>
-                <a:ea typeface="Noto Sans CJK JP"/>
-                <a:cs typeface="Noto Sans"/>
-                <a:hlinkClick r:id="rId4"/>
-              </a:rPr>
-              <a:t>https://arxiv.org/abs/1904.09679v1</a:t>
-            </a:r>
-          </a:p>
-        </p:txBody>
-      </p:sp>
-    </p:spTree>
-  </p:cSld>
-  <p:clrMapOvr>
-    <a:masterClrMapping/>
-  </p:clrMapOvr>
-</p:sld>
-</file>
-
-<file path=ppt/slides/slide50.xml><?xml version="1.0" encoding="utf-8"?>
+<file path=ppt/slides/slide48.xml><?xml version="1.0" encoding="utf-8"?>
 <p:sld xmlns:a="http://schemas.openxmlformats.org/drawingml/2006/main" xmlns:p="http://schemas.openxmlformats.org/presentationml/2006/main" xmlns:r="http://schemas.openxmlformats.org/officeDocument/2006/relationships">
   <p:cSld>
     <p:spTree>
@@ -29737,7 +28221,7 @@
 </p:sld>
 </file>
 
-<file path=ppt/slides/slide51.xml><?xml version="1.0" encoding="utf-8"?>
+<file path=ppt/slides/slide49.xml><?xml version="1.0" encoding="utf-8"?>
 <p:sld xmlns:a="http://schemas.openxmlformats.org/drawingml/2006/main" xmlns:p="http://schemas.openxmlformats.org/presentationml/2006/main" xmlns:r="http://schemas.openxmlformats.org/officeDocument/2006/relationships">
   <p:cSld>
     <p:spTree>
@@ -30486,7 +28970,362 @@
 </p:sld>
 </file>
 
-<file path=ppt/slides/slide52.xml><?xml version="1.0" encoding="utf-8"?>
+<file path=ppt/slides/slide5.xml><?xml version="1.0" encoding="utf-8"?>
+<p:sld xmlns:a="http://schemas.openxmlformats.org/drawingml/2006/main" xmlns:p="http://schemas.openxmlformats.org/presentationml/2006/main" xmlns:r="http://schemas.openxmlformats.org/officeDocument/2006/relationships">
+  <p:cSld>
+    <p:spTree>
+      <p:nvGrpSpPr>
+        <p:cNvPr id="1" name=""/>
+        <p:cNvGrpSpPr/>
+        <p:nvPr/>
+      </p:nvGrpSpPr>
+      <p:grpSpPr/>
+      <p:sp>
+        <p:nvSpPr>
+          <p:cNvPr id="2" name="Title 1"/>
+          <p:cNvSpPr>
+            <a:spLocks noGrp="1"/>
+          </p:cNvSpPr>
+          <p:nvPr>
+            <p:ph type="title"/>
+          </p:nvPr>
+        </p:nvSpPr>
+        <p:spPr>
+          <a:xfrm>
+            <a:off x="468172" y="650138"/>
+            <a:ext cx="8206740" cy="616305"/>
+          </a:xfrm>
+        </p:spPr>
+        <p:txBody>
+          <a:bodyPr wrap="square" lIns="0" rIns="0" tIns="0" bIns="0">
+            <a:noAutofit/>
+          </a:bodyPr>
+          <a:lstStyle/>
+          <a:p>
+            <a:pPr algn="l">
+              <a:lnSpc>
+                <a:spcPct val="110000"/>
+              </a:lnSpc>
+              <a:buNone/>
+              <a:defRPr sz="2800" b="0">
+                <a:solidFill>
+                  <a:srgbClr val="303437"/>
+                </a:solidFill>
+                <a:latin typeface="Noto Sans"/>
+              </a:defRPr>
+            </a:pPr>
+            <a:r>
+              <a:rPr sz="2800" b="1" lang="ja-JP" altLang="en-US">
+                <a:solidFill>
+                  <a:srgbClr val="303437"/>
+                </a:solidFill>
+                <a:latin typeface="Noto Sans"/>
+                <a:ea typeface="Noto Sans CJK JP"/>
+                <a:cs typeface="Noto Sans"/>
+              </a:rPr>
+              <a:t>文書・質問・候補から、正解を一つ選ぶ</a:t>
+            </a:r>
+          </a:p>
+        </p:txBody>
+      </p:sp>
+      <p:sp>
+        <p:nvSpPr>
+          <p:cNvPr id="3" name="Text Placeholder 2"/>
+          <p:cNvSpPr>
+            <a:spLocks noGrp="1"/>
+          </p:cNvSpPr>
+          <p:nvPr>
+            <p:ph type="body" idx="1"/>
+          </p:nvPr>
+        </p:nvSpPr>
+        <p:spPr>
+          <a:xfrm>
+            <a:off x="594360" y="1463040"/>
+            <a:ext cx="7955279" cy="3044952"/>
+          </a:xfrm>
+        </p:spPr>
+        <p:txBody>
+          <a:bodyPr wrap="square" tIns="91440" bIns="91440">
+            <a:noAutofit/>
+          </a:bodyPr>
+          <a:lstStyle/>
+          <a:p>
+            <a:pPr marL="457200" indent="-355600">
+              <a:lnSpc>
+                <a:spcPts val="2320"/>
+              </a:lnSpc>
+              <a:spcAft>
+                <a:spcPts val="700"/>
+              </a:spcAft>
+              <a:buSzPct val="68205"/>
+              <a:buFont typeface="Noto Sans CJK JP"/>
+              <a:buChar char="●"/>
+              <a:defRPr sz="1950" b="0">
+                <a:solidFill>
+                  <a:srgbClr val="303437"/>
+                </a:solidFill>
+                <a:latin typeface="Noto Sans"/>
+              </a:defRPr>
+            </a:pPr>
+            <a:r>
+              <a:rPr sz="1950" b="0" lang="ja-JP" altLang="en-US">
+                <a:solidFill>
+                  <a:srgbClr val="303437"/>
+                </a:solidFill>
+                <a:latin typeface="Noto Sans"/>
+                <a:ea typeface="Noto Sans CJK JP"/>
+                <a:cs typeface="Noto Sans"/>
+              </a:rPr>
+              <a:t>C³は、中国語を第二言語として学ぶ人向けの試験問題から作られた選択式読解データ。対話と、物語・ニュース・独白・広告などの文章を含む。</a:t>
+            </a:r>
+          </a:p>
+          <a:p>
+            <a:pPr marL="457200" indent="-355600">
+              <a:lnSpc>
+                <a:spcPts val="2320"/>
+              </a:lnSpc>
+              <a:spcAft>
+                <a:spcPts val="700"/>
+              </a:spcAft>
+              <a:buSzPct val="68205"/>
+              <a:buFont typeface="Noto Sans CJK JP"/>
+              <a:buChar char="●"/>
+              <a:defRPr sz="1950" b="0">
+                <a:solidFill>
+                  <a:srgbClr val="303437"/>
+                </a:solidFill>
+                <a:latin typeface="Noto Sans"/>
+              </a:defRPr>
+            </a:pPr>
+            <a:r>
+              <a:rPr sz="1950" b="0" lang="ja-JP" altLang="en-US">
+                <a:solidFill>
+                  <a:srgbClr val="303437"/>
+                </a:solidFill>
+                <a:latin typeface="Noto Sans"/>
+                <a:ea typeface="Noto Sans CJK JP"/>
+                <a:cs typeface="Noto Sans"/>
+              </a:rPr>
+              <a:t>入力は文書、自由な形式の質問、全選択肢。正解は必ず一つで、候補は2〜4個ある。文章中の位置をそのまま抜き出す課題ではない。</a:t>
+            </a:r>
+          </a:p>
+          <a:p>
+            <a:pPr marL="457200" indent="-355600">
+              <a:lnSpc>
+                <a:spcPts val="2320"/>
+              </a:lnSpc>
+              <a:spcAft>
+                <a:spcPts val="0"/>
+              </a:spcAft>
+              <a:buSzPct val="68205"/>
+              <a:buFont typeface="Noto Sans CJK JP"/>
+              <a:buChar char="●"/>
+              <a:defRPr sz="1950" b="0">
+                <a:solidFill>
+                  <a:srgbClr val="303437"/>
+                </a:solidFill>
+                <a:latin typeface="Noto Sans"/>
+              </a:defRPr>
+            </a:pPr>
+            <a:r>
+              <a:rPr sz="1950" b="0" lang="ja-JP" altLang="en-US">
+                <a:solidFill>
+                  <a:srgbClr val="303437"/>
+                </a:solidFill>
+                <a:latin typeface="Noto Sans"/>
+                <a:ea typeface="Noto Sans CJK JP"/>
+                <a:cs typeface="Noto Sans"/>
+              </a:rPr>
+              <a:t>2019年に公開され、正式な研究論文は2020年にTACLへ掲載された。</a:t>
+            </a:r>
+          </a:p>
+        </p:txBody>
+      </p:sp>
+      <p:sp>
+        <p:nvSpPr>
+          <p:cNvPr id="4" name="Title 3"/>
+          <p:cNvSpPr>
+            <a:spLocks noGrp="1"/>
+          </p:cNvSpPr>
+          <p:nvPr>
+            <p:ph type="title" idx="2"/>
+          </p:nvPr>
+        </p:nvSpPr>
+        <p:spPr>
+          <a:xfrm>
+            <a:off x="75895" y="0"/>
+            <a:ext cx="8115300" cy="480060"/>
+          </a:xfrm>
+        </p:spPr>
+        <p:txBody>
+          <a:bodyPr wrap="square" lIns="0" rIns="0" tIns="0" bIns="0" anchor="ctr">
+            <a:noAutofit/>
+          </a:bodyPr>
+          <a:lstStyle/>
+          <a:p>
+            <a:pPr algn="l">
+              <a:lnSpc>
+                <a:spcPct val="110000"/>
+              </a:lnSpc>
+              <a:buNone/>
+              <a:defRPr sz="1400" b="0">
+                <a:solidFill>
+                  <a:srgbClr val="303437"/>
+                </a:solidFill>
+                <a:latin typeface="Noto Sans"/>
+              </a:defRPr>
+            </a:pPr>
+            <a:r>
+              <a:rPr sz="1400" b="1" lang="ja-JP" altLang="en-US">
+                <a:solidFill>
+                  <a:srgbClr val="FFFEF8"/>
+                </a:solidFill>
+                <a:latin typeface="Noto Sans"/>
+                <a:ea typeface="Noto Sans CJK JP"/>
+                <a:cs typeface="Noto Sans"/>
+              </a:rPr>
+              <a:t>1. 文書から、正しい選択肢を選ぶ</a:t>
+            </a:r>
+          </a:p>
+        </p:txBody>
+      </p:sp>
+      <p:sp>
+        <p:nvSpPr>
+          <p:cNvPr id="5" name="sources"/>
+          <p:cNvSpPr txBox="1"/>
+          <p:nvPr/>
+        </p:nvSpPr>
+        <p:spPr>
+          <a:xfrm>
+            <a:off x="502920" y="4700016"/>
+            <a:ext cx="8183879" cy="530352"/>
+          </a:xfrm>
+          <a:prstGeom prst="rect">
+            <a:avLst/>
+          </a:prstGeom>
+          <a:noFill/>
+        </p:spPr>
+        <p:txBody>
+          <a:bodyPr wrap="square" lIns="0" rIns="0" tIns="0" bIns="0">
+            <a:noAutofit/>
+          </a:bodyPr>
+          <a:lstStyle/>
+          <a:p>
+            <a:pPr algn="l">
+              <a:lnSpc>
+                <a:spcPts val="940"/>
+              </a:lnSpc>
+              <a:spcBef>
+                <a:spcPts val="0"/>
+              </a:spcBef>
+              <a:spcAft>
+                <a:spcPts val="140"/>
+              </a:spcAft>
+              <a:buNone/>
+              <a:defRPr sz="810" b="0">
+                <a:solidFill>
+                  <a:srgbClr val="303437"/>
+                </a:solidFill>
+                <a:latin typeface="Noto Sans"/>
+              </a:defRPr>
+            </a:pPr>
+            <a:r>
+              <a:rPr sz="810" b="0" lang="ja-JP" altLang="en-US">
+                <a:solidFill>
+                  <a:srgbClr val="626669"/>
+                </a:solidFill>
+                <a:latin typeface="Noto Sans"/>
+                <a:ea typeface="Noto Sans CJK JP"/>
+                <a:cs typeface="Noto Sans"/>
+              </a:rPr>
+              <a:t>[1] Sun et al. (2020). Investigating Prior Knowledge for Challenging Chinese Machine Reading Comprehension. TACL.</a:t>
+            </a:r>
+            <a:r>
+              <a:rPr sz="810" b="0" lang="ja-JP" altLang="en-US">
+                <a:solidFill>
+                  <a:srgbClr val="626669"/>
+                </a:solidFill>
+                <a:latin typeface="Noto Sans"/>
+                <a:ea typeface="Noto Sans CJK JP"/>
+                <a:cs typeface="Noto Sans"/>
+              </a:rPr>
+              <a:t>  </a:t>
+            </a:r>
+            <a:r>
+              <a:rPr sz="810" b="0" lang="ja-JP" altLang="en-US">
+                <a:solidFill>
+                  <a:srgbClr val="626669"/>
+                </a:solidFill>
+                <a:latin typeface="Noto Sans"/>
+                <a:ea typeface="Noto Sans CJK JP"/>
+                <a:cs typeface="Noto Sans"/>
+                <a:hlinkClick r:id="rId2"/>
+              </a:rPr>
+              <a:t>https://aclanthology.org/2020.tacl-1.10/</a:t>
+            </a:r>
+          </a:p>
+          <a:p>
+            <a:pPr>
+              <a:lnSpc>
+                <a:spcPts val="940"/>
+              </a:lnSpc>
+              <a:spcAft>
+                <a:spcPts val="140"/>
+              </a:spcAft>
+              <a:buNone/>
+              <a:defRPr sz="810" b="0">
+                <a:solidFill>
+                  <a:srgbClr val="303437"/>
+                </a:solidFill>
+                <a:latin typeface="Noto Sans"/>
+              </a:defRPr>
+            </a:pPr>
+            <a:r>
+              <a:rPr sz="810" b="0" lang="ja-JP" altLang="en-US">
+                <a:solidFill>
+                  <a:srgbClr val="626669"/>
+                </a:solidFill>
+                <a:latin typeface="Noto Sans"/>
+                <a:ea typeface="Noto Sans CJK JP"/>
+                <a:cs typeface="Noto Sans"/>
+              </a:rPr>
+              <a:t>[2] Sun et al. (2019). Probing Prior Knowledge Needed in Challenging Chinese Machine Reading Comprehension.</a:t>
+            </a:r>
+            <a:r>
+              <a:rPr sz="810" b="0" lang="ja-JP" altLang="en-US">
+                <a:solidFill>
+                  <a:srgbClr val="626669"/>
+                </a:solidFill>
+                <a:latin typeface="Noto Sans"/>
+                <a:ea typeface="Noto Sans CJK JP"/>
+                <a:cs typeface="Noto Sans"/>
+              </a:rPr>
+              <a:t>  </a:t>
+            </a:r>
+            <a:r>
+              <a:rPr sz="810" b="0" lang="ja-JP" altLang="en-US">
+                <a:solidFill>
+                  <a:srgbClr val="626669"/>
+                </a:solidFill>
+                <a:latin typeface="Noto Sans"/>
+                <a:ea typeface="Noto Sans CJK JP"/>
+                <a:cs typeface="Noto Sans"/>
+                <a:hlinkClick r:id="rId4"/>
+              </a:rPr>
+              <a:t>https://arxiv.org/abs/1904.09679v1</a:t>
+            </a:r>
+          </a:p>
+        </p:txBody>
+      </p:sp>
+    </p:spTree>
+  </p:cSld>
+  <p:clrMapOvr>
+    <a:masterClrMapping/>
+  </p:clrMapOvr>
+</p:sld>
+</file>
+
+<file path=ppt/slides/slide50.xml><?xml version="1.0" encoding="utf-8"?>
 <p:sld xmlns:a="http://schemas.openxmlformats.org/drawingml/2006/main" xmlns:p="http://schemas.openxmlformats.org/presentationml/2006/main" xmlns:r="http://schemas.openxmlformats.org/officeDocument/2006/relationships">
   <p:cSld>
     <p:spTree>
@@ -30600,7 +29439,7 @@
 </p:sld>
 </file>
 
-<file path=ppt/slides/slide55.xml><?xml version="1.0" encoding="utf-8"?>
+<file path=ppt/slides/slide51.xml><?xml version="1.0" encoding="utf-8"?>
 <p:sld xmlns:a="http://schemas.openxmlformats.org/drawingml/2006/main" xmlns:p="http://schemas.openxmlformats.org/presentationml/2006/main" xmlns:r="http://schemas.openxmlformats.org/officeDocument/2006/relationships">
   <p:cSld>
     <p:spTree>
@@ -31514,7 +30353,7 @@
 </p:sld>
 </file>
 
-<file path=ppt/slides/slide57.xml><?xml version="1.0" encoding="utf-8"?>
+<file path=ppt/slides/slide52.xml><?xml version="1.0" encoding="utf-8"?>
 <p:sld xmlns:a="http://schemas.openxmlformats.org/drawingml/2006/main" xmlns:p="http://schemas.openxmlformats.org/presentationml/2006/main" xmlns:r="http://schemas.openxmlformats.org/officeDocument/2006/relationships">
   <p:cSld>
     <p:spTree>
@@ -32081,6 +30920,1520 @@
 </p:sld>
 </file>
 
+<file path=ppt/slides/slide53.xml><?xml version="1.0" encoding="utf-8"?>
+<p:sld xmlns:a="http://schemas.openxmlformats.org/drawingml/2006/main" xmlns:p="http://schemas.openxmlformats.org/presentationml/2006/main" xmlns:r="http://schemas.openxmlformats.org/officeDocument/2006/relationships">
+  <p:cSld>
+    <p:spTree>
+      <p:nvGrpSpPr>
+        <p:cNvPr id="1" name=""/>
+        <p:cNvGrpSpPr/>
+        <p:nvPr/>
+      </p:nvGrpSpPr>
+      <p:grpSpPr/>
+      <p:sp>
+        <p:nvSpPr>
+          <p:cNvPr id="2" name="Title 1"/>
+          <p:cNvSpPr>
+            <a:spLocks noGrp="1"/>
+          </p:cNvSpPr>
+          <p:nvPr>
+            <p:ph type="title"/>
+          </p:nvPr>
+        </p:nvSpPr>
+        <p:spPr>
+          <a:xfrm>
+            <a:off x="548640" y="2506875"/>
+            <a:ext cx="8046720" cy="585216"/>
+          </a:xfrm>
+        </p:spPr>
+        <p:txBody>
+          <a:bodyPr wrap="square" lIns="0" rIns="0" tIns="0" bIns="0" anchor="ctr">
+            <a:noAutofit/>
+          </a:bodyPr>
+          <a:lstStyle/>
+          <a:p>
+            <a:pPr algn="ctr">
+              <a:lnSpc>
+                <a:spcPct val="110000"/>
+              </a:lnSpc>
+              <a:buNone/>
+              <a:defRPr sz="3600" b="0">
+                <a:solidFill>
+                  <a:srgbClr val="303437"/>
+                </a:solidFill>
+                <a:latin typeface="Noto Sans"/>
+              </a:defRPr>
+            </a:pPr>
+            <a:r>
+              <a:rPr sz="3600" b="1" lang="ja-JP" altLang="en-US">
+                <a:solidFill>
+                  <a:srgbClr val="303437"/>
+                </a:solidFill>
+                <a:latin typeface="Noto Sans"/>
+                <a:ea typeface="Noto Sans CJK JP"/>
+                <a:cs typeface="Noto Sans"/>
+              </a:rPr>
+              <a:t>研究と参考文献</a:t>
+            </a:r>
+          </a:p>
+        </p:txBody>
+      </p:sp>
+      <p:sp>
+        <p:nvSpPr>
+          <p:cNvPr id="3" name="Title 2"/>
+          <p:cNvSpPr>
+            <a:spLocks noGrp="1"/>
+          </p:cNvSpPr>
+          <p:nvPr>
+            <p:ph type="title" idx="2"/>
+          </p:nvPr>
+        </p:nvSpPr>
+        <p:spPr>
+          <a:xfrm>
+            <a:off x="75895" y="0"/>
+            <a:ext cx="8115300" cy="480060"/>
+          </a:xfrm>
+        </p:spPr>
+        <p:txBody>
+          <a:bodyPr wrap="square" lIns="0" rIns="0" tIns="0" bIns="0" anchor="ctr">
+            <a:noAutofit/>
+          </a:bodyPr>
+          <a:lstStyle/>
+          <a:p>
+            <a:pPr algn="l">
+              <a:lnSpc>
+                <a:spcPct val="110000"/>
+              </a:lnSpc>
+              <a:buNone/>
+              <a:defRPr sz="1400" b="0">
+                <a:solidFill>
+                  <a:srgbClr val="303437"/>
+                </a:solidFill>
+                <a:latin typeface="Noto Sans"/>
+              </a:defRPr>
+            </a:pPr>
+            <a:r>
+              <a:rPr sz="1400" b="1" lang="ja-JP" altLang="en-US">
+                <a:solidFill>
+                  <a:srgbClr val="FFFEF8"/>
+                </a:solidFill>
+                <a:latin typeface="Noto Sans"/>
+                <a:ea typeface="Noto Sans CJK JP"/>
+                <a:cs typeface="Noto Sans"/>
+              </a:rPr>
+              <a:t>Appendix: 3. 研究と参考文献</a:t>
+            </a:r>
+          </a:p>
+        </p:txBody>
+      </p:sp>
+    </p:spTree>
+  </p:cSld>
+  <p:clrMapOvr>
+    <a:masterClrMapping/>
+  </p:clrMapOvr>
+</p:sld>
+</file>
+
+<file path=ppt/slides/slide54.xml><?xml version="1.0" encoding="utf-8"?>
+<p:sld xmlns:a="http://schemas.openxmlformats.org/drawingml/2006/main" xmlns:p="http://schemas.openxmlformats.org/presentationml/2006/main" xmlns:r="http://schemas.openxmlformats.org/officeDocument/2006/relationships">
+  <p:cSld>
+    <p:spTree>
+      <p:nvGrpSpPr>
+        <p:cNvPr id="1" name=""/>
+        <p:cNvGrpSpPr/>
+        <p:nvPr/>
+      </p:nvGrpSpPr>
+      <p:grpSpPr/>
+      <p:sp>
+        <p:nvSpPr>
+          <p:cNvPr id="2" name="Title 1"/>
+          <p:cNvSpPr>
+            <a:spLocks noGrp="1"/>
+          </p:cNvSpPr>
+          <p:nvPr>
+            <p:ph type="title"/>
+          </p:nvPr>
+        </p:nvSpPr>
+        <p:spPr>
+          <a:xfrm>
+            <a:off x="468172" y="650138"/>
+            <a:ext cx="8206740" cy="616305"/>
+          </a:xfrm>
+        </p:spPr>
+        <p:txBody>
+          <a:bodyPr wrap="square" lIns="0" rIns="0" tIns="0" bIns="0">
+            <a:noAutofit/>
+          </a:bodyPr>
+          <a:lstStyle/>
+          <a:p>
+            <a:pPr algn="l">
+              <a:lnSpc>
+                <a:spcPct val="110000"/>
+              </a:lnSpc>
+              <a:buNone/>
+              <a:defRPr sz="2800" b="0">
+                <a:solidFill>
+                  <a:srgbClr val="303437"/>
+                </a:solidFill>
+                <a:latin typeface="Noto Sans"/>
+              </a:defRPr>
+            </a:pPr>
+            <a:r>
+              <a:rPr sz="2800" b="1" lang="ja-JP" altLang="en-US">
+                <a:solidFill>
+                  <a:srgbClr val="303437"/>
+                </a:solidFill>
+                <a:latin typeface="Noto Sans"/>
+                <a:ea typeface="Noto Sans CJK JP"/>
+                <a:cs typeface="Noto Sans"/>
+              </a:rPr>
+              <a:t>中国語の読解で、事前知識を分析する</a:t>
+            </a:r>
+          </a:p>
+        </p:txBody>
+      </p:sp>
+      <p:sp>
+        <p:nvSpPr>
+          <p:cNvPr id="3" name="Text Placeholder 2"/>
+          <p:cNvSpPr>
+            <a:spLocks noGrp="1"/>
+          </p:cNvSpPr>
+          <p:nvPr>
+            <p:ph type="body" idx="1"/>
+          </p:nvPr>
+        </p:nvSpPr>
+        <p:spPr>
+          <a:xfrm>
+            <a:off x="594360" y="1463040"/>
+            <a:ext cx="7955279" cy="3044952"/>
+          </a:xfrm>
+        </p:spPr>
+        <p:txBody>
+          <a:bodyPr wrap="square" tIns="91440" bIns="91440">
+            <a:noAutofit/>
+          </a:bodyPr>
+          <a:lstStyle/>
+          <a:p>
+            <a:pPr marL="457200" indent="-355600">
+              <a:lnSpc>
+                <a:spcPts val="2379"/>
+              </a:lnSpc>
+              <a:spcAft>
+                <a:spcPts val="700"/>
+              </a:spcAft>
+              <a:buSzPct val="66500"/>
+              <a:buFont typeface="Noto Sans CJK JP"/>
+              <a:buChar char="●"/>
+              <a:defRPr sz="2000" b="0">
+                <a:solidFill>
+                  <a:srgbClr val="303437"/>
+                </a:solidFill>
+                <a:latin typeface="Noto Sans"/>
+              </a:defRPr>
+            </a:pPr>
+            <a:r>
+              <a:rPr sz="2000" b="0" lang="ja-JP" altLang="en-US">
+                <a:solidFill>
+                  <a:srgbClr val="303437"/>
+                </a:solidFill>
+                <a:latin typeface="Noto Sans"/>
+                <a:ea typeface="Noto Sans CJK JP"/>
+                <a:cs typeface="Noto Sans"/>
+              </a:rPr>
+              <a:t>Kai Sun、Dian Yu、Dong Yu、Claire Cardieによる共同研究。中国語の自由な質問形式の選択式読解を整備し、知識が必要な問題を分類した。</a:t>
+            </a:r>
+          </a:p>
+          <a:p>
+            <a:pPr marL="457200" indent="-355600">
+              <a:lnSpc>
+                <a:spcPts val="2379"/>
+              </a:lnSpc>
+              <a:spcAft>
+                <a:spcPts val="700"/>
+              </a:spcAft>
+              <a:buSzPct val="66500"/>
+              <a:buFont typeface="Noto Sans CJK JP"/>
+              <a:buChar char="●"/>
+              <a:defRPr sz="2000" b="0">
+                <a:solidFill>
+                  <a:srgbClr val="303437"/>
+                </a:solidFill>
+                <a:latin typeface="Noto Sans"/>
+              </a:defRPr>
+            </a:pPr>
+            <a:r>
+              <a:rPr sz="2000" b="0" lang="ja-JP" altLang="en-US">
+                <a:solidFill>
+                  <a:srgbClr val="303437"/>
+                </a:solidFill>
+                <a:latin typeface="Noto Sans"/>
+                <a:ea typeface="Noto Sans CJK JP"/>
+                <a:cs typeface="Noto Sans"/>
+              </a:rPr>
+              <a:t>英語のRACEとDREAMに対応する、中国語の単一テキスト・対話の両方を含む。既存の中国語データで多かった抜き出し型の読解を補う位置付けを持つ。</a:t>
+            </a:r>
+          </a:p>
+          <a:p>
+            <a:pPr marL="457200" indent="-355600">
+              <a:lnSpc>
+                <a:spcPts val="2379"/>
+              </a:lnSpc>
+              <a:spcAft>
+                <a:spcPts val="0"/>
+              </a:spcAft>
+              <a:buSzPct val="66500"/>
+              <a:buFont typeface="Noto Sans CJK JP"/>
+              <a:buChar char="●"/>
+              <a:defRPr sz="2000" b="0">
+                <a:solidFill>
+                  <a:srgbClr val="303437"/>
+                </a:solidFill>
+                <a:latin typeface="Noto Sans"/>
+              </a:defRPr>
+            </a:pPr>
+            <a:r>
+              <a:rPr sz="2000" b="0" lang="ja-JP" altLang="en-US">
+                <a:solidFill>
+                  <a:srgbClr val="303437"/>
+                </a:solidFill>
+                <a:latin typeface="Noto Sans"/>
+                <a:ea typeface="Noto Sans CJK JP"/>
+                <a:cs typeface="Noto Sans"/>
+              </a:rPr>
+              <a:t>公開データと注釈が分かれているため、全体を使った正答率の評価と、600問を使った知識種別の分析を組み合わせられる。</a:t>
+            </a:r>
+          </a:p>
+        </p:txBody>
+      </p:sp>
+      <p:sp>
+        <p:nvSpPr>
+          <p:cNvPr id="4" name="Title 3"/>
+          <p:cNvSpPr>
+            <a:spLocks noGrp="1"/>
+          </p:cNvSpPr>
+          <p:nvPr>
+            <p:ph type="title" idx="2"/>
+          </p:nvPr>
+        </p:nvSpPr>
+        <p:spPr>
+          <a:xfrm>
+            <a:off x="75895" y="0"/>
+            <a:ext cx="8115300" cy="480060"/>
+          </a:xfrm>
+        </p:spPr>
+        <p:txBody>
+          <a:bodyPr wrap="square" lIns="0" rIns="0" tIns="0" bIns="0" anchor="ctr">
+            <a:noAutofit/>
+          </a:bodyPr>
+          <a:lstStyle/>
+          <a:p>
+            <a:pPr algn="l">
+              <a:lnSpc>
+                <a:spcPct val="110000"/>
+              </a:lnSpc>
+              <a:buNone/>
+              <a:defRPr sz="1400" b="0">
+                <a:solidFill>
+                  <a:srgbClr val="303437"/>
+                </a:solidFill>
+                <a:latin typeface="Noto Sans"/>
+              </a:defRPr>
+            </a:pPr>
+            <a:r>
+              <a:rPr sz="1400" b="1" lang="ja-JP" altLang="en-US">
+                <a:solidFill>
+                  <a:srgbClr val="FFFEF8"/>
+                </a:solidFill>
+                <a:latin typeface="Noto Sans"/>
+                <a:ea typeface="Noto Sans CJK JP"/>
+                <a:cs typeface="Noto Sans"/>
+              </a:rPr>
+              <a:t>Appendix: 3. 研究と参考文献</a:t>
+            </a:r>
+          </a:p>
+        </p:txBody>
+      </p:sp>
+      <p:sp>
+        <p:nvSpPr>
+          <p:cNvPr id="5" name="sources"/>
+          <p:cNvSpPr txBox="1"/>
+          <p:nvPr/>
+        </p:nvSpPr>
+        <p:spPr>
+          <a:xfrm>
+            <a:off x="502920" y="4700016"/>
+            <a:ext cx="8183879" cy="530352"/>
+          </a:xfrm>
+          <a:prstGeom prst="rect">
+            <a:avLst/>
+          </a:prstGeom>
+          <a:noFill/>
+        </p:spPr>
+        <p:txBody>
+          <a:bodyPr wrap="square" lIns="0" rIns="0" tIns="0" bIns="0">
+            <a:noAutofit/>
+          </a:bodyPr>
+          <a:lstStyle/>
+          <a:p>
+            <a:pPr algn="l">
+              <a:lnSpc>
+                <a:spcPts val="940"/>
+              </a:lnSpc>
+              <a:spcBef>
+                <a:spcPts val="0"/>
+              </a:spcBef>
+              <a:spcAft>
+                <a:spcPts val="140"/>
+              </a:spcAft>
+              <a:buNone/>
+              <a:defRPr sz="810" b="0">
+                <a:solidFill>
+                  <a:srgbClr val="303437"/>
+                </a:solidFill>
+                <a:latin typeface="Noto Sans"/>
+              </a:defRPr>
+            </a:pPr>
+            <a:r>
+              <a:rPr sz="810" b="0" lang="ja-JP" altLang="en-US">
+                <a:solidFill>
+                  <a:srgbClr val="626669"/>
+                </a:solidFill>
+                <a:latin typeface="Noto Sans"/>
+                <a:ea typeface="Noto Sans CJK JP"/>
+                <a:cs typeface="Noto Sans"/>
+              </a:rPr>
+              <a:t>[1] Sun et al. (2020). Investigating Prior Knowledge for Challenging Chinese Machine Reading Comprehension. TACL.</a:t>
+            </a:r>
+            <a:r>
+              <a:rPr sz="810" b="0" lang="ja-JP" altLang="en-US">
+                <a:solidFill>
+                  <a:srgbClr val="626669"/>
+                </a:solidFill>
+                <a:latin typeface="Noto Sans"/>
+                <a:ea typeface="Noto Sans CJK JP"/>
+                <a:cs typeface="Noto Sans"/>
+              </a:rPr>
+              <a:t>  </a:t>
+            </a:r>
+            <a:r>
+              <a:rPr sz="810" b="0" lang="ja-JP" altLang="en-US">
+                <a:solidFill>
+                  <a:srgbClr val="626669"/>
+                </a:solidFill>
+                <a:latin typeface="Noto Sans"/>
+                <a:ea typeface="Noto Sans CJK JP"/>
+                <a:cs typeface="Noto Sans"/>
+                <a:hlinkClick r:id="rId2"/>
+              </a:rPr>
+              <a:t>https://aclanthology.org/2020.tacl-1.10/</a:t>
+            </a:r>
+          </a:p>
+        </p:txBody>
+      </p:sp>
+    </p:spTree>
+  </p:cSld>
+  <p:clrMapOvr>
+    <a:masterClrMapping/>
+  </p:clrMapOvr>
+</p:sld>
+</file>
+
+<file path=ppt/slides/slide55.xml><?xml version="1.0" encoding="utf-8"?>
+<p:sld xmlns:a="http://schemas.openxmlformats.org/drawingml/2006/main" xmlns:p="http://schemas.openxmlformats.org/presentationml/2006/main" xmlns:r="http://schemas.openxmlformats.org/officeDocument/2006/relationships">
+  <p:cSld>
+    <p:spTree>
+      <p:nvGrpSpPr>
+        <p:cNvPr id="1" name=""/>
+        <p:cNvGrpSpPr/>
+        <p:nvPr/>
+      </p:nvGrpSpPr>
+      <p:grpSpPr/>
+      <p:sp>
+        <p:nvSpPr>
+          <p:cNvPr id="2" name="Title 1"/>
+          <p:cNvSpPr>
+            <a:spLocks noGrp="1"/>
+          </p:cNvSpPr>
+          <p:nvPr>
+            <p:ph type="title"/>
+          </p:nvPr>
+        </p:nvSpPr>
+        <p:spPr>
+          <a:xfrm>
+            <a:off x="468172" y="650138"/>
+            <a:ext cx="8206740" cy="616305"/>
+          </a:xfrm>
+        </p:spPr>
+        <p:txBody>
+          <a:bodyPr wrap="square" lIns="0" rIns="0" tIns="0" bIns="0">
+            <a:noAutofit/>
+          </a:bodyPr>
+          <a:lstStyle/>
+          <a:p>
+            <a:pPr algn="l">
+              <a:lnSpc>
+                <a:spcPct val="110000"/>
+              </a:lnSpc>
+              <a:buNone/>
+              <a:defRPr sz="2800" b="0">
+                <a:solidFill>
+                  <a:srgbClr val="303437"/>
+                </a:solidFill>
+                <a:latin typeface="Noto Sans"/>
+              </a:defRPr>
+            </a:pPr>
+            <a:r>
+              <a:rPr sz="2800" b="1" lang="ja-JP" altLang="en-US">
+                <a:solidFill>
+                  <a:srgbClr val="303437"/>
+                </a:solidFill>
+                <a:latin typeface="Noto Sans"/>
+                <a:ea typeface="Noto Sans CJK JP"/>
+                <a:cs typeface="Noto Sans"/>
+              </a:rPr>
+              <a:t>参考文献</a:t>
+            </a:r>
+          </a:p>
+        </p:txBody>
+      </p:sp>
+      <p:sp>
+        <p:nvSpPr>
+          <p:cNvPr id="3" name="Title 2"/>
+          <p:cNvSpPr>
+            <a:spLocks noGrp="1"/>
+          </p:cNvSpPr>
+          <p:nvPr>
+            <p:ph type="title" idx="2"/>
+          </p:nvPr>
+        </p:nvSpPr>
+        <p:spPr>
+          <a:xfrm>
+            <a:off x="75895" y="0"/>
+            <a:ext cx="8115300" cy="480060"/>
+          </a:xfrm>
+        </p:spPr>
+        <p:txBody>
+          <a:bodyPr wrap="square" lIns="0" rIns="0" tIns="0" bIns="0" anchor="ctr">
+            <a:noAutofit/>
+          </a:bodyPr>
+          <a:lstStyle/>
+          <a:p>
+            <a:pPr algn="l">
+              <a:lnSpc>
+                <a:spcPct val="110000"/>
+              </a:lnSpc>
+              <a:buNone/>
+              <a:defRPr sz="1400" b="0">
+                <a:solidFill>
+                  <a:srgbClr val="303437"/>
+                </a:solidFill>
+                <a:latin typeface="Noto Sans"/>
+              </a:defRPr>
+            </a:pPr>
+            <a:r>
+              <a:rPr sz="1400" b="1" lang="ja-JP" altLang="en-US">
+                <a:solidFill>
+                  <a:srgbClr val="FFFEF8"/>
+                </a:solidFill>
+                <a:latin typeface="Noto Sans"/>
+                <a:ea typeface="Noto Sans CJK JP"/>
+                <a:cs typeface="Noto Sans"/>
+              </a:rPr>
+              <a:t>Appendix: 3. 研究と参考文献</a:t>
+            </a:r>
+          </a:p>
+        </p:txBody>
+      </p:sp>
+      <p:sp>
+        <p:nvSpPr>
+          <p:cNvPr id="4" name="TextBox 3"/>
+          <p:cNvSpPr txBox="1"/>
+          <p:nvPr/>
+        </p:nvSpPr>
+        <p:spPr>
+          <a:xfrm>
+            <a:off x="548640" y="1325880"/>
+            <a:ext cx="8046720" cy="594360"/>
+          </a:xfrm>
+          <a:prstGeom prst="rect">
+            <a:avLst/>
+          </a:prstGeom>
+          <a:noFill/>
+        </p:spPr>
+        <p:txBody>
+          <a:bodyPr wrap="square" lIns="0" rIns="0" tIns="0" bIns="0">
+            <a:noAutofit/>
+          </a:bodyPr>
+          <a:lstStyle/>
+          <a:p>
+            <a:pPr algn="l">
+              <a:lnSpc>
+                <a:spcPts val="1920"/>
+              </a:lnSpc>
+              <a:spcBef>
+                <a:spcPts val="0"/>
+              </a:spcBef>
+              <a:spcAft>
+                <a:spcPts val="0"/>
+              </a:spcAft>
+              <a:buNone/>
+              <a:defRPr sz="1700" b="0">
+                <a:solidFill>
+                  <a:srgbClr val="303437"/>
+                </a:solidFill>
+                <a:latin typeface="Noto Sans"/>
+              </a:defRPr>
+            </a:pPr>
+            <a:r>
+              <a:rPr sz="1700" b="1" lang="ja-JP" altLang="en-US">
+                <a:solidFill>
+                  <a:srgbClr val="303437"/>
+                </a:solidFill>
+                <a:latin typeface="Noto Sans"/>
+                <a:ea typeface="Noto Sans CJK JP"/>
+                <a:cs typeface="Noto Sans"/>
+              </a:rPr>
+              <a:t>Investigating Prior Knowledge for Challenging Chinese Machine Reading Comprehension</a:t>
+            </a:r>
+          </a:p>
+        </p:txBody>
+      </p:sp>
+      <p:sp>
+        <p:nvSpPr>
+          <p:cNvPr id="5" name="TextBox 4"/>
+          <p:cNvSpPr txBox="1"/>
+          <p:nvPr/>
+        </p:nvSpPr>
+        <p:spPr>
+          <a:xfrm>
+            <a:off x="548640" y="1956815"/>
+            <a:ext cx="8046720" cy="228600"/>
+          </a:xfrm>
+          <a:prstGeom prst="rect">
+            <a:avLst/>
+          </a:prstGeom>
+          <a:noFill/>
+        </p:spPr>
+        <p:txBody>
+          <a:bodyPr wrap="square" lIns="0" rIns="0" tIns="0" bIns="0">
+            <a:noAutofit/>
+          </a:bodyPr>
+          <a:lstStyle/>
+          <a:p>
+            <a:pPr algn="l">
+              <a:lnSpc>
+                <a:spcPts val="1404"/>
+              </a:lnSpc>
+              <a:spcBef>
+                <a:spcPts val="0"/>
+              </a:spcBef>
+              <a:spcAft>
+                <a:spcPts val="0"/>
+              </a:spcAft>
+              <a:buNone/>
+              <a:defRPr sz="1200" b="0">
+                <a:solidFill>
+                  <a:srgbClr val="303437"/>
+                </a:solidFill>
+                <a:latin typeface="Noto Sans"/>
+              </a:defRPr>
+            </a:pPr>
+            <a:r>
+              <a:rPr sz="1200" b="0" lang="ja-JP" altLang="en-US">
+                <a:solidFill>
+                  <a:srgbClr val="626669"/>
+                </a:solidFill>
+                <a:latin typeface="Noto Sans"/>
+                <a:ea typeface="Noto Sans CJK JP"/>
+                <a:cs typeface="Noto Sans"/>
+              </a:rPr>
+              <a:t>Kai Sun, Dian Yu, Dong Yu, Claire Cardie · 2020 · TACL 8:141–155</a:t>
+            </a:r>
+          </a:p>
+        </p:txBody>
+      </p:sp>
+      <p:sp>
+        <p:nvSpPr>
+          <p:cNvPr id="6" name="TextBox 5"/>
+          <p:cNvSpPr txBox="1"/>
+          <p:nvPr/>
+        </p:nvSpPr>
+        <p:spPr>
+          <a:xfrm>
+            <a:off x="548640" y="2240280"/>
+            <a:ext cx="8046720" cy="457200"/>
+          </a:xfrm>
+          <a:prstGeom prst="rect">
+            <a:avLst/>
+          </a:prstGeom>
+          <a:noFill/>
+        </p:spPr>
+        <p:txBody>
+          <a:bodyPr wrap="square" lIns="0" rIns="0" tIns="0" bIns="0">
+            <a:noAutofit/>
+          </a:bodyPr>
+          <a:lstStyle/>
+          <a:p>
+            <a:pPr algn="l">
+              <a:lnSpc>
+                <a:spcPts val="1823"/>
+              </a:lnSpc>
+              <a:spcBef>
+                <a:spcPts val="0"/>
+              </a:spcBef>
+              <a:spcAft>
+                <a:spcPts val="0"/>
+              </a:spcAft>
+              <a:buNone/>
+              <a:defRPr sz="1600" b="0">
+                <a:solidFill>
+                  <a:srgbClr val="303437"/>
+                </a:solidFill>
+                <a:latin typeface="Noto Sans"/>
+              </a:defRPr>
+            </a:pPr>
+            <a:r>
+              <a:rPr sz="1600" b="0" lang="ja-JP" altLang="en-US">
+                <a:solidFill>
+                  <a:srgbClr val="303437"/>
+                </a:solidFill>
+                <a:latin typeface="Noto Sans"/>
+                <a:ea typeface="Noto Sans CJK JP"/>
+                <a:cs typeface="Noto Sans"/>
+              </a:rPr>
+              <a:t>C³の収集、Dialogue/Mixed、知識注釈と構築時の評価を記述する正式論文。</a:t>
+            </a:r>
+          </a:p>
+        </p:txBody>
+      </p:sp>
+      <p:sp>
+        <p:nvSpPr>
+          <p:cNvPr id="7" name="TextBox 6"/>
+          <p:cNvSpPr txBox="1"/>
+          <p:nvPr/>
+        </p:nvSpPr>
+        <p:spPr>
+          <a:xfrm>
+            <a:off x="548640" y="2752344"/>
+            <a:ext cx="8046720" cy="228600"/>
+          </a:xfrm>
+          <a:prstGeom prst="rect">
+            <a:avLst/>
+          </a:prstGeom>
+          <a:noFill/>
+        </p:spPr>
+        <p:txBody>
+          <a:bodyPr wrap="square" lIns="0" rIns="0" tIns="0" bIns="0">
+            <a:noAutofit/>
+          </a:bodyPr>
+          <a:lstStyle/>
+          <a:p>
+            <a:pPr algn="l">
+              <a:lnSpc>
+                <a:spcPts val="1310"/>
+              </a:lnSpc>
+              <a:spcBef>
+                <a:spcPts val="0"/>
+              </a:spcBef>
+              <a:spcAft>
+                <a:spcPts val="0"/>
+              </a:spcAft>
+              <a:buNone/>
+              <a:defRPr sz="1120" b="0">
+                <a:solidFill>
+                  <a:srgbClr val="303437"/>
+                </a:solidFill>
+                <a:latin typeface="Noto Sans"/>
+              </a:defRPr>
+            </a:pPr>
+            <a:r>
+              <a:rPr sz="1120" b="0" lang="ja-JP" altLang="en-US">
+                <a:solidFill>
+                  <a:srgbClr val="2166AC"/>
+                </a:solidFill>
+                <a:latin typeface="Noto Sans"/>
+                <a:ea typeface="Noto Sans CJK JP"/>
+                <a:cs typeface="Noto Sans"/>
+                <a:hlinkClick r:id="rId2"/>
+              </a:rPr>
+              <a:t>https://aclanthology.org/2020.tacl-1.10/</a:t>
+            </a:r>
+          </a:p>
+        </p:txBody>
+      </p:sp>
+      <p:sp>
+        <p:nvSpPr>
+          <p:cNvPr id="8" name="TextBox 7"/>
+          <p:cNvSpPr txBox="1"/>
+          <p:nvPr/>
+        </p:nvSpPr>
+        <p:spPr>
+          <a:xfrm>
+            <a:off x="548640" y="3063239"/>
+            <a:ext cx="8046720" cy="594360"/>
+          </a:xfrm>
+          <a:prstGeom prst="rect">
+            <a:avLst/>
+          </a:prstGeom>
+          <a:noFill/>
+        </p:spPr>
+        <p:txBody>
+          <a:bodyPr wrap="square" lIns="0" rIns="0" tIns="0" bIns="0">
+            <a:noAutofit/>
+          </a:bodyPr>
+          <a:lstStyle/>
+          <a:p>
+            <a:pPr algn="l">
+              <a:lnSpc>
+                <a:spcPts val="1920"/>
+              </a:lnSpc>
+              <a:spcBef>
+                <a:spcPts val="0"/>
+              </a:spcBef>
+              <a:spcAft>
+                <a:spcPts val="0"/>
+              </a:spcAft>
+              <a:buNone/>
+              <a:defRPr sz="1700" b="0">
+                <a:solidFill>
+                  <a:srgbClr val="303437"/>
+                </a:solidFill>
+                <a:latin typeface="Noto Sans"/>
+              </a:defRPr>
+            </a:pPr>
+            <a:r>
+              <a:rPr sz="1700" b="1" lang="ja-JP" altLang="en-US">
+                <a:solidFill>
+                  <a:srgbClr val="303437"/>
+                </a:solidFill>
+                <a:latin typeface="Noto Sans"/>
+                <a:ea typeface="Noto Sans CJK JP"/>
+                <a:cs typeface="Noto Sans"/>
+              </a:rPr>
+              <a:t>Probing Prior Knowledge Needed in Challenging Chinese Machine Reading Comprehension</a:t>
+            </a:r>
+          </a:p>
+        </p:txBody>
+      </p:sp>
+      <p:sp>
+        <p:nvSpPr>
+          <p:cNvPr id="9" name="TextBox 8"/>
+          <p:cNvSpPr txBox="1"/>
+          <p:nvPr/>
+        </p:nvSpPr>
+        <p:spPr>
+          <a:xfrm>
+            <a:off x="548640" y="3694175"/>
+            <a:ext cx="8046720" cy="228600"/>
+          </a:xfrm>
+          <a:prstGeom prst="rect">
+            <a:avLst/>
+          </a:prstGeom>
+          <a:noFill/>
+        </p:spPr>
+        <p:txBody>
+          <a:bodyPr wrap="square" lIns="0" rIns="0" tIns="0" bIns="0">
+            <a:noAutofit/>
+          </a:bodyPr>
+          <a:lstStyle/>
+          <a:p>
+            <a:pPr algn="l">
+              <a:lnSpc>
+                <a:spcPts val="1404"/>
+              </a:lnSpc>
+              <a:spcBef>
+                <a:spcPts val="0"/>
+              </a:spcBef>
+              <a:spcAft>
+                <a:spcPts val="0"/>
+              </a:spcAft>
+              <a:buNone/>
+              <a:defRPr sz="1200" b="0">
+                <a:solidFill>
+                  <a:srgbClr val="303437"/>
+                </a:solidFill>
+                <a:latin typeface="Noto Sans"/>
+              </a:defRPr>
+            </a:pPr>
+            <a:r>
+              <a:rPr sz="1200" b="0" lang="ja-JP" altLang="en-US">
+                <a:solidFill>
+                  <a:srgbClr val="626669"/>
+                </a:solidFill>
+                <a:latin typeface="Noto Sans"/>
+                <a:ea typeface="Noto Sans CJK JP"/>
+                <a:cs typeface="Noto Sans"/>
+              </a:rPr>
+              <a:t>Kai Sun, Dian Yu, Dong Yu, Claire Cardie · 2019 · arXiv:1904.09679v1</a:t>
+            </a:r>
+          </a:p>
+        </p:txBody>
+      </p:sp>
+      <p:sp>
+        <p:nvSpPr>
+          <p:cNvPr id="10" name="TextBox 9"/>
+          <p:cNvSpPr txBox="1"/>
+          <p:nvPr/>
+        </p:nvSpPr>
+        <p:spPr>
+          <a:xfrm>
+            <a:off x="548640" y="3977639"/>
+            <a:ext cx="8046720" cy="457200"/>
+          </a:xfrm>
+          <a:prstGeom prst="rect">
+            <a:avLst/>
+          </a:prstGeom>
+          <a:noFill/>
+        </p:spPr>
+        <p:txBody>
+          <a:bodyPr wrap="square" lIns="0" rIns="0" tIns="0" bIns="0">
+            <a:noAutofit/>
+          </a:bodyPr>
+          <a:lstStyle/>
+          <a:p>
+            <a:pPr algn="l">
+              <a:lnSpc>
+                <a:spcPts val="1823"/>
+              </a:lnSpc>
+              <a:spcBef>
+                <a:spcPts val="0"/>
+              </a:spcBef>
+              <a:spcAft>
+                <a:spcPts val="0"/>
+              </a:spcAft>
+              <a:buNone/>
+              <a:defRPr sz="1600" b="0">
+                <a:solidFill>
+                  <a:srgbClr val="303437"/>
+                </a:solidFill>
+                <a:latin typeface="Noto Sans"/>
+              </a:defRPr>
+            </a:pPr>
+            <a:r>
+              <a:rPr sz="1600" b="0" lang="ja-JP" altLang="en-US">
+                <a:solidFill>
+                  <a:srgbClr val="303437"/>
+                </a:solidFill>
+                <a:latin typeface="Noto Sans"/>
+                <a:ea typeface="Noto Sans CJK JP"/>
+                <a:cs typeface="Noto Sans"/>
+              </a:rPr>
+              <a:t>C³を初めて公開したプレプリント。後続版と正式刊行では題名がInvestigatingへ変わる。</a:t>
+            </a:r>
+          </a:p>
+        </p:txBody>
+      </p:sp>
+      <p:sp>
+        <p:nvSpPr>
+          <p:cNvPr id="11" name="TextBox 10"/>
+          <p:cNvSpPr txBox="1"/>
+          <p:nvPr/>
+        </p:nvSpPr>
+        <p:spPr>
+          <a:xfrm>
+            <a:off x="548640" y="4489704"/>
+            <a:ext cx="8046720" cy="228600"/>
+          </a:xfrm>
+          <a:prstGeom prst="rect">
+            <a:avLst/>
+          </a:prstGeom>
+          <a:noFill/>
+        </p:spPr>
+        <p:txBody>
+          <a:bodyPr wrap="square" lIns="0" rIns="0" tIns="0" bIns="0">
+            <a:noAutofit/>
+          </a:bodyPr>
+          <a:lstStyle/>
+          <a:p>
+            <a:pPr algn="l">
+              <a:lnSpc>
+                <a:spcPts val="1310"/>
+              </a:lnSpc>
+              <a:spcBef>
+                <a:spcPts val="0"/>
+              </a:spcBef>
+              <a:spcAft>
+                <a:spcPts val="0"/>
+              </a:spcAft>
+              <a:buNone/>
+              <a:defRPr sz="1120" b="0">
+                <a:solidFill>
+                  <a:srgbClr val="303437"/>
+                </a:solidFill>
+                <a:latin typeface="Noto Sans"/>
+              </a:defRPr>
+            </a:pPr>
+            <a:r>
+              <a:rPr sz="1120" b="0" lang="ja-JP" altLang="en-US">
+                <a:solidFill>
+                  <a:srgbClr val="2166AC"/>
+                </a:solidFill>
+                <a:latin typeface="Noto Sans"/>
+                <a:ea typeface="Noto Sans CJK JP"/>
+                <a:cs typeface="Noto Sans"/>
+                <a:hlinkClick r:id="rId3"/>
+              </a:rPr>
+              <a:t>https://arxiv.org/abs/1904.09679v1</a:t>
+            </a:r>
+          </a:p>
+        </p:txBody>
+      </p:sp>
+    </p:spTree>
+  </p:cSld>
+  <p:clrMapOvr>
+    <a:masterClrMapping/>
+  </p:clrMapOvr>
+</p:sld>
+</file>
+
+<file path=ppt/slides/slide56.xml><?xml version="1.0" encoding="utf-8"?>
+<p:sld xmlns:a="http://schemas.openxmlformats.org/drawingml/2006/main" xmlns:p="http://schemas.openxmlformats.org/presentationml/2006/main" xmlns:r="http://schemas.openxmlformats.org/officeDocument/2006/relationships">
+  <p:cSld>
+    <p:spTree>
+      <p:nvGrpSpPr>
+        <p:cNvPr id="1" name=""/>
+        <p:cNvGrpSpPr/>
+        <p:nvPr/>
+      </p:nvGrpSpPr>
+      <p:grpSpPr/>
+      <p:sp>
+        <p:nvSpPr>
+          <p:cNvPr id="2" name="Title 1"/>
+          <p:cNvSpPr>
+            <a:spLocks noGrp="1"/>
+          </p:cNvSpPr>
+          <p:nvPr>
+            <p:ph type="title"/>
+          </p:nvPr>
+        </p:nvSpPr>
+        <p:spPr>
+          <a:xfrm>
+            <a:off x="468172" y="650138"/>
+            <a:ext cx="8206740" cy="616305"/>
+          </a:xfrm>
+        </p:spPr>
+        <p:txBody>
+          <a:bodyPr wrap="square" lIns="0" rIns="0" tIns="0" bIns="0">
+            <a:noAutofit/>
+          </a:bodyPr>
+          <a:lstStyle/>
+          <a:p>
+            <a:pPr algn="l">
+              <a:lnSpc>
+                <a:spcPct val="110000"/>
+              </a:lnSpc>
+              <a:buNone/>
+              <a:defRPr sz="2800" b="0">
+                <a:solidFill>
+                  <a:srgbClr val="303437"/>
+                </a:solidFill>
+                <a:latin typeface="Noto Sans"/>
+              </a:defRPr>
+            </a:pPr>
+            <a:r>
+              <a:rPr sz="2800" b="1" lang="ja-JP" altLang="en-US">
+                <a:solidFill>
+                  <a:srgbClr val="303437"/>
+                </a:solidFill>
+                <a:latin typeface="Noto Sans"/>
+                <a:ea typeface="Noto Sans CJK JP"/>
+                <a:cs typeface="Noto Sans"/>
+              </a:rPr>
+              <a:t>参考文献</a:t>
+            </a:r>
+          </a:p>
+        </p:txBody>
+      </p:sp>
+      <p:sp>
+        <p:nvSpPr>
+          <p:cNvPr id="3" name="Title 2"/>
+          <p:cNvSpPr>
+            <a:spLocks noGrp="1"/>
+          </p:cNvSpPr>
+          <p:nvPr>
+            <p:ph type="title" idx="2"/>
+          </p:nvPr>
+        </p:nvSpPr>
+        <p:spPr>
+          <a:xfrm>
+            <a:off x="75895" y="0"/>
+            <a:ext cx="8115300" cy="480060"/>
+          </a:xfrm>
+        </p:spPr>
+        <p:txBody>
+          <a:bodyPr wrap="square" lIns="0" rIns="0" tIns="0" bIns="0" anchor="ctr">
+            <a:noAutofit/>
+          </a:bodyPr>
+          <a:lstStyle/>
+          <a:p>
+            <a:pPr algn="l">
+              <a:lnSpc>
+                <a:spcPct val="110000"/>
+              </a:lnSpc>
+              <a:buNone/>
+              <a:defRPr sz="1400" b="0">
+                <a:solidFill>
+                  <a:srgbClr val="303437"/>
+                </a:solidFill>
+                <a:latin typeface="Noto Sans"/>
+              </a:defRPr>
+            </a:pPr>
+            <a:r>
+              <a:rPr sz="1400" b="1" lang="ja-JP" altLang="en-US">
+                <a:solidFill>
+                  <a:srgbClr val="FFFEF8"/>
+                </a:solidFill>
+                <a:latin typeface="Noto Sans"/>
+                <a:ea typeface="Noto Sans CJK JP"/>
+                <a:cs typeface="Noto Sans"/>
+              </a:rPr>
+              <a:t>Appendix: 3. 研究と参考文献</a:t>
+            </a:r>
+          </a:p>
+        </p:txBody>
+      </p:sp>
+      <p:sp>
+        <p:nvSpPr>
+          <p:cNvPr id="4" name="TextBox 3"/>
+          <p:cNvSpPr txBox="1"/>
+          <p:nvPr/>
+        </p:nvSpPr>
+        <p:spPr>
+          <a:xfrm>
+            <a:off x="548640" y="1325880"/>
+            <a:ext cx="8046720" cy="594360"/>
+          </a:xfrm>
+          <a:prstGeom prst="rect">
+            <a:avLst/>
+          </a:prstGeom>
+          <a:noFill/>
+        </p:spPr>
+        <p:txBody>
+          <a:bodyPr wrap="square" lIns="0" rIns="0" tIns="0" bIns="0">
+            <a:noAutofit/>
+          </a:bodyPr>
+          <a:lstStyle/>
+          <a:p>
+            <a:pPr algn="l">
+              <a:lnSpc>
+                <a:spcPts val="1920"/>
+              </a:lnSpc>
+              <a:spcBef>
+                <a:spcPts val="0"/>
+              </a:spcBef>
+              <a:spcAft>
+                <a:spcPts val="0"/>
+              </a:spcAft>
+              <a:buNone/>
+              <a:defRPr sz="1700" b="0">
+                <a:solidFill>
+                  <a:srgbClr val="303437"/>
+                </a:solidFill>
+                <a:latin typeface="Noto Sans"/>
+              </a:defRPr>
+            </a:pPr>
+            <a:r>
+              <a:rPr sz="1700" b="1" lang="ja-JP" altLang="en-US">
+                <a:solidFill>
+                  <a:srgbClr val="303437"/>
+                </a:solidFill>
+                <a:latin typeface="Noto Sans"/>
+                <a:ea typeface="Noto Sans CJK JP"/>
+                <a:cs typeface="Noto Sans"/>
+              </a:rPr>
+              <a:t>C³: official data, annotations and baseline instructions</a:t>
+            </a:r>
+          </a:p>
+        </p:txBody>
+      </p:sp>
+      <p:sp>
+        <p:nvSpPr>
+          <p:cNvPr id="5" name="TextBox 4"/>
+          <p:cNvSpPr txBox="1"/>
+          <p:nvPr/>
+        </p:nvSpPr>
+        <p:spPr>
+          <a:xfrm>
+            <a:off x="548640" y="1956815"/>
+            <a:ext cx="8046720" cy="228600"/>
+          </a:xfrm>
+          <a:prstGeom prst="rect">
+            <a:avLst/>
+          </a:prstGeom>
+          <a:noFill/>
+        </p:spPr>
+        <p:txBody>
+          <a:bodyPr wrap="square" lIns="0" rIns="0" tIns="0" bIns="0">
+            <a:noAutofit/>
+          </a:bodyPr>
+          <a:lstStyle/>
+          <a:p>
+            <a:pPr algn="l">
+              <a:lnSpc>
+                <a:spcPts val="1404"/>
+              </a:lnSpc>
+              <a:spcBef>
+                <a:spcPts val="0"/>
+              </a:spcBef>
+              <a:spcAft>
+                <a:spcPts val="0"/>
+              </a:spcAft>
+              <a:buNone/>
+              <a:defRPr sz="1200" b="0">
+                <a:solidFill>
+                  <a:srgbClr val="303437"/>
+                </a:solidFill>
+                <a:latin typeface="Noto Sans"/>
+              </a:defRPr>
+            </a:pPr>
+            <a:r>
+              <a:rPr sz="1200" b="0" lang="ja-JP" altLang="en-US">
+                <a:solidFill>
+                  <a:srgbClr val="626669"/>
+                </a:solidFill>
+                <a:latin typeface="Noto Sans"/>
+                <a:ea typeface="Noto Sans CJK JP"/>
+                <a:cs typeface="Noto Sans"/>
+              </a:rPr>
+              <a:t>Kai Sun et al. (n.d.). nlpdata/c3。参照2026-10-19。</a:t>
+            </a:r>
+          </a:p>
+        </p:txBody>
+      </p:sp>
+      <p:sp>
+        <p:nvSpPr>
+          <p:cNvPr id="6" name="TextBox 5"/>
+          <p:cNvSpPr txBox="1"/>
+          <p:nvPr/>
+        </p:nvSpPr>
+        <p:spPr>
+          <a:xfrm>
+            <a:off x="548640" y="2240280"/>
+            <a:ext cx="8046720" cy="457200"/>
+          </a:xfrm>
+          <a:prstGeom prst="rect">
+            <a:avLst/>
+          </a:prstGeom>
+          <a:noFill/>
+        </p:spPr>
+        <p:txBody>
+          <a:bodyPr wrap="square" lIns="0" rIns="0" tIns="0" bIns="0">
+            <a:noAutofit/>
+          </a:bodyPr>
+          <a:lstStyle/>
+          <a:p>
+            <a:pPr algn="l">
+              <a:lnSpc>
+                <a:spcPts val="1823"/>
+              </a:lnSpc>
+              <a:spcBef>
+                <a:spcPts val="0"/>
+              </a:spcBef>
+              <a:spcAft>
+                <a:spcPts val="0"/>
+              </a:spcAft>
+              <a:buNone/>
+              <a:defRPr sz="1600" b="0">
+                <a:solidFill>
+                  <a:srgbClr val="303437"/>
+                </a:solidFill>
+                <a:latin typeface="Noto Sans"/>
+              </a:defRPr>
+            </a:pPr>
+            <a:r>
+              <a:rPr sz="1600" b="0" lang="ja-JP" altLang="en-US">
+                <a:solidFill>
+                  <a:srgbClr val="303437"/>
+                </a:solidFill>
+                <a:latin typeface="Noto Sans"/>
+                <a:ea typeface="Noto Sans CJK JP"/>
+                <a:cs typeface="Noto Sans"/>
+              </a:rPr>
+              <a:t>元の6データファイル、4知識注釈、基準モデルの実行方法、利用条件を公開する。</a:t>
+            </a:r>
+          </a:p>
+        </p:txBody>
+      </p:sp>
+      <p:sp>
+        <p:nvSpPr>
+          <p:cNvPr id="7" name="TextBox 6"/>
+          <p:cNvSpPr txBox="1"/>
+          <p:nvPr/>
+        </p:nvSpPr>
+        <p:spPr>
+          <a:xfrm>
+            <a:off x="548640" y="2752344"/>
+            <a:ext cx="8046720" cy="228600"/>
+          </a:xfrm>
+          <a:prstGeom prst="rect">
+            <a:avLst/>
+          </a:prstGeom>
+          <a:noFill/>
+        </p:spPr>
+        <p:txBody>
+          <a:bodyPr wrap="square" lIns="0" rIns="0" tIns="0" bIns="0">
+            <a:noAutofit/>
+          </a:bodyPr>
+          <a:lstStyle/>
+          <a:p>
+            <a:pPr algn="l">
+              <a:lnSpc>
+                <a:spcPts val="1310"/>
+              </a:lnSpc>
+              <a:spcBef>
+                <a:spcPts val="0"/>
+              </a:spcBef>
+              <a:spcAft>
+                <a:spcPts val="0"/>
+              </a:spcAft>
+              <a:buNone/>
+              <a:defRPr sz="1120" b="0">
+                <a:solidFill>
+                  <a:srgbClr val="303437"/>
+                </a:solidFill>
+                <a:latin typeface="Noto Sans"/>
+              </a:defRPr>
+            </a:pPr>
+            <a:r>
+              <a:rPr sz="1120" b="0" lang="ja-JP" altLang="en-US">
+                <a:solidFill>
+                  <a:srgbClr val="2166AC"/>
+                </a:solidFill>
+                <a:latin typeface="Noto Sans"/>
+                <a:ea typeface="Noto Sans CJK JP"/>
+                <a:cs typeface="Noto Sans"/>
+                <a:hlinkClick r:id="rId2"/>
+              </a:rPr>
+              <a:t>https://github.com/nlpdata/c3</a:t>
+            </a:r>
+          </a:p>
+        </p:txBody>
+      </p:sp>
+      <p:sp>
+        <p:nvSpPr>
+          <p:cNvPr id="8" name="TextBox 7"/>
+          <p:cNvSpPr txBox="1"/>
+          <p:nvPr/>
+        </p:nvSpPr>
+        <p:spPr>
+          <a:xfrm>
+            <a:off x="548640" y="3063239"/>
+            <a:ext cx="8046720" cy="594360"/>
+          </a:xfrm>
+          <a:prstGeom prst="rect">
+            <a:avLst/>
+          </a:prstGeom>
+          <a:noFill/>
+        </p:spPr>
+        <p:txBody>
+          <a:bodyPr wrap="square" lIns="0" rIns="0" tIns="0" bIns="0">
+            <a:noAutofit/>
+          </a:bodyPr>
+          <a:lstStyle/>
+          <a:p>
+            <a:pPr algn="l">
+              <a:lnSpc>
+                <a:spcPts val="1920"/>
+              </a:lnSpc>
+              <a:spcBef>
+                <a:spcPts val="0"/>
+              </a:spcBef>
+              <a:spcAft>
+                <a:spcPts val="0"/>
+              </a:spcAft>
+              <a:buNone/>
+              <a:defRPr sz="1700" b="0">
+                <a:solidFill>
+                  <a:srgbClr val="303437"/>
+                </a:solidFill>
+                <a:latin typeface="Noto Sans"/>
+              </a:defRPr>
+            </a:pPr>
+            <a:r>
+              <a:rPr sz="1700" b="1" lang="ja-JP" altLang="en-US">
+                <a:solidFill>
+                  <a:srgbClr val="303437"/>
+                </a:solidFill>
+                <a:latin typeface="Noto Sans"/>
+                <a:ea typeface="Noto Sans CJK JP"/>
+                <a:cs typeface="Noto Sans"/>
+              </a:rPr>
+              <a:t>C³: data usage conditions</a:t>
+            </a:r>
+          </a:p>
+        </p:txBody>
+      </p:sp>
+      <p:sp>
+        <p:nvSpPr>
+          <p:cNvPr id="9" name="TextBox 8"/>
+          <p:cNvSpPr txBox="1"/>
+          <p:nvPr/>
+        </p:nvSpPr>
+        <p:spPr>
+          <a:xfrm>
+            <a:off x="548640" y="3694175"/>
+            <a:ext cx="8046720" cy="228600"/>
+          </a:xfrm>
+          <a:prstGeom prst="rect">
+            <a:avLst/>
+          </a:prstGeom>
+          <a:noFill/>
+        </p:spPr>
+        <p:txBody>
+          <a:bodyPr wrap="square" lIns="0" rIns="0" tIns="0" bIns="0">
+            <a:noAutofit/>
+          </a:bodyPr>
+          <a:lstStyle/>
+          <a:p>
+            <a:pPr algn="l">
+              <a:lnSpc>
+                <a:spcPts val="1404"/>
+              </a:lnSpc>
+              <a:spcBef>
+                <a:spcPts val="0"/>
+              </a:spcBef>
+              <a:spcAft>
+                <a:spcPts val="0"/>
+              </a:spcAft>
+              <a:buNone/>
+              <a:defRPr sz="1200" b="0">
+                <a:solidFill>
+                  <a:srgbClr val="303437"/>
+                </a:solidFill>
+                <a:latin typeface="Noto Sans"/>
+              </a:defRPr>
+            </a:pPr>
+            <a:r>
+              <a:rPr sz="1200" b="0" lang="ja-JP" altLang="en-US">
+                <a:solidFill>
+                  <a:srgbClr val="626669"/>
+                </a:solidFill>
+                <a:latin typeface="Noto Sans"/>
+                <a:ea typeface="Noto Sans CJK JP"/>
+                <a:cs typeface="Noto Sans"/>
+              </a:rPr>
+              <a:t>Kai Sun et al. (n.d.). 公式利用条件。参照2026-10-19。</a:t>
+            </a:r>
+          </a:p>
+        </p:txBody>
+      </p:sp>
+      <p:sp>
+        <p:nvSpPr>
+          <p:cNvPr id="10" name="TextBox 9"/>
+          <p:cNvSpPr txBox="1"/>
+          <p:nvPr/>
+        </p:nvSpPr>
+        <p:spPr>
+          <a:xfrm>
+            <a:off x="548640" y="3977639"/>
+            <a:ext cx="8046720" cy="457200"/>
+          </a:xfrm>
+          <a:prstGeom prst="rect">
+            <a:avLst/>
+          </a:prstGeom>
+          <a:noFill/>
+        </p:spPr>
+        <p:txBody>
+          <a:bodyPr wrap="square" lIns="0" rIns="0" tIns="0" bIns="0">
+            <a:noAutofit/>
+          </a:bodyPr>
+          <a:lstStyle/>
+          <a:p>
+            <a:pPr algn="l">
+              <a:lnSpc>
+                <a:spcPts val="1823"/>
+              </a:lnSpc>
+              <a:spcBef>
+                <a:spcPts val="0"/>
+              </a:spcBef>
+              <a:spcAft>
+                <a:spcPts val="0"/>
+              </a:spcAft>
+              <a:buNone/>
+              <a:defRPr sz="1600" b="0">
+                <a:solidFill>
+                  <a:srgbClr val="303437"/>
+                </a:solidFill>
+                <a:latin typeface="Noto Sans"/>
+              </a:defRPr>
+            </a:pPr>
+            <a:r>
+              <a:rPr sz="1600" b="0" lang="ja-JP" altLang="en-US">
+                <a:solidFill>
+                  <a:srgbClr val="303437"/>
+                </a:solidFill>
+                <a:latin typeface="Noto Sans"/>
+                <a:ea typeface="Noto Sans CJK JP"/>
+                <a:cs typeface="Noto Sans"/>
+              </a:rPr>
+              <a:t>元データの利用を非商用の研究目的に限定する。</a:t>
+            </a:r>
+          </a:p>
+        </p:txBody>
+      </p:sp>
+      <p:sp>
+        <p:nvSpPr>
+          <p:cNvPr id="11" name="TextBox 10"/>
+          <p:cNvSpPr txBox="1"/>
+          <p:nvPr/>
+        </p:nvSpPr>
+        <p:spPr>
+          <a:xfrm>
+            <a:off x="548640" y="4489704"/>
+            <a:ext cx="8046720" cy="228600"/>
+          </a:xfrm>
+          <a:prstGeom prst="rect">
+            <a:avLst/>
+          </a:prstGeom>
+          <a:noFill/>
+        </p:spPr>
+        <p:txBody>
+          <a:bodyPr wrap="square" lIns="0" rIns="0" tIns="0" bIns="0">
+            <a:noAutofit/>
+          </a:bodyPr>
+          <a:lstStyle/>
+          <a:p>
+            <a:pPr algn="l">
+              <a:lnSpc>
+                <a:spcPts val="1310"/>
+              </a:lnSpc>
+              <a:spcBef>
+                <a:spcPts val="0"/>
+              </a:spcBef>
+              <a:spcAft>
+                <a:spcPts val="0"/>
+              </a:spcAft>
+              <a:buNone/>
+              <a:defRPr sz="1120" b="0">
+                <a:solidFill>
+                  <a:srgbClr val="303437"/>
+                </a:solidFill>
+                <a:latin typeface="Noto Sans"/>
+              </a:defRPr>
+            </a:pPr>
+            <a:r>
+              <a:rPr sz="1120" b="0" lang="ja-JP" altLang="en-US">
+                <a:solidFill>
+                  <a:srgbClr val="2166AC"/>
+                </a:solidFill>
+                <a:latin typeface="Noto Sans"/>
+                <a:ea typeface="Noto Sans CJK JP"/>
+                <a:cs typeface="Noto Sans"/>
+                <a:hlinkClick r:id="rId3"/>
+              </a:rPr>
+              <a:t>https://github.com/nlpdata/c3/blob/master/license.txt</a:t>
+            </a:r>
+          </a:p>
+        </p:txBody>
+      </p:sp>
+    </p:spTree>
+  </p:cSld>
+  <p:clrMapOvr>
+    <a:masterClrMapping/>
+  </p:clrMapOvr>
+</p:sld>
+</file>
+
 <file path=ppt/slides/slide6.xml><?xml version="1.0" encoding="utf-8"?>
 <p:sld xmlns:a="http://schemas.openxmlformats.org/drawingml/2006/main" xmlns:p="http://schemas.openxmlformats.org/presentationml/2006/main" xmlns:r="http://schemas.openxmlformats.org/officeDocument/2006/relationships">
   <p:cSld>
@@ -32640,2068 +32993,6 @@
 </p:sld>
 </file>
 
-<file path=ppt/slides/slide61.xml><?xml version="1.0" encoding="utf-8"?>
-<p:sld xmlns:a="http://schemas.openxmlformats.org/drawingml/2006/main" xmlns:p="http://schemas.openxmlformats.org/presentationml/2006/main" xmlns:r="http://schemas.openxmlformats.org/officeDocument/2006/relationships">
-  <p:cSld>
-    <p:spTree>
-      <p:nvGrpSpPr>
-        <p:cNvPr id="1" name=""/>
-        <p:cNvGrpSpPr/>
-        <p:nvPr/>
-      </p:nvGrpSpPr>
-      <p:grpSpPr/>
-      <p:sp>
-        <p:nvSpPr>
-          <p:cNvPr id="2" name="Title 1"/>
-          <p:cNvSpPr>
-            <a:spLocks noGrp="1"/>
-          </p:cNvSpPr>
-          <p:nvPr>
-            <p:ph type="title"/>
-          </p:nvPr>
-        </p:nvSpPr>
-        <p:spPr>
-          <a:xfrm>
-            <a:off x="548640" y="2506875"/>
-            <a:ext cx="8046720" cy="585216"/>
-          </a:xfrm>
-        </p:spPr>
-        <p:txBody>
-          <a:bodyPr wrap="square" lIns="0" rIns="0" tIns="0" bIns="0" anchor="ctr">
-            <a:noAutofit/>
-          </a:bodyPr>
-          <a:lstStyle/>
-          <a:p>
-            <a:pPr algn="ctr">
-              <a:lnSpc>
-                <a:spcPct val="110000"/>
-              </a:lnSpc>
-              <a:buNone/>
-              <a:defRPr sz="3600" b="0">
-                <a:solidFill>
-                  <a:srgbClr val="303437"/>
-                </a:solidFill>
-                <a:latin typeface="Noto Sans"/>
-              </a:defRPr>
-            </a:pPr>
-            <a:r>
-              <a:rPr sz="3600" b="1" lang="ja-JP" altLang="en-US">
-                <a:solidFill>
-                  <a:srgbClr val="303437"/>
-                </a:solidFill>
-                <a:latin typeface="Noto Sans"/>
-                <a:ea typeface="Noto Sans CJK JP"/>
-                <a:cs typeface="Noto Sans"/>
-              </a:rPr>
-              <a:t>研究と参考文献</a:t>
-            </a:r>
-          </a:p>
-        </p:txBody>
-      </p:sp>
-      <p:sp>
-        <p:nvSpPr>
-          <p:cNvPr id="3" name="Title 2"/>
-          <p:cNvSpPr>
-            <a:spLocks noGrp="1"/>
-          </p:cNvSpPr>
-          <p:nvPr>
-            <p:ph type="title" idx="2"/>
-          </p:nvPr>
-        </p:nvSpPr>
-        <p:spPr>
-          <a:xfrm>
-            <a:off x="75895" y="0"/>
-            <a:ext cx="8115300" cy="480060"/>
-          </a:xfrm>
-        </p:spPr>
-        <p:txBody>
-          <a:bodyPr wrap="square" lIns="0" rIns="0" tIns="0" bIns="0" anchor="ctr">
-            <a:noAutofit/>
-          </a:bodyPr>
-          <a:lstStyle/>
-          <a:p>
-            <a:pPr algn="l">
-              <a:lnSpc>
-                <a:spcPct val="110000"/>
-              </a:lnSpc>
-              <a:buNone/>
-              <a:defRPr sz="1400" b="0">
-                <a:solidFill>
-                  <a:srgbClr val="303437"/>
-                </a:solidFill>
-                <a:latin typeface="Noto Sans"/>
-              </a:defRPr>
-            </a:pPr>
-            <a:r>
-              <a:rPr sz="1400" b="1" lang="ja-JP" altLang="en-US">
-                <a:solidFill>
-                  <a:srgbClr val="FFFEF8"/>
-                </a:solidFill>
-                <a:latin typeface="Noto Sans"/>
-                <a:ea typeface="Noto Sans CJK JP"/>
-                <a:cs typeface="Noto Sans"/>
-              </a:rPr>
-              <a:t>Appendix: 3. 研究と参考文献</a:t>
-            </a:r>
-          </a:p>
-        </p:txBody>
-      </p:sp>
-    </p:spTree>
-  </p:cSld>
-  <p:clrMapOvr>
-    <a:masterClrMapping/>
-  </p:clrMapOvr>
-</p:sld>
-</file>
-
-<file path=ppt/slides/slide62.xml><?xml version="1.0" encoding="utf-8"?>
-<p:sld xmlns:a="http://schemas.openxmlformats.org/drawingml/2006/main" xmlns:p="http://schemas.openxmlformats.org/presentationml/2006/main" xmlns:r="http://schemas.openxmlformats.org/officeDocument/2006/relationships">
-  <p:cSld>
-    <p:spTree>
-      <p:nvGrpSpPr>
-        <p:cNvPr id="1" name=""/>
-        <p:cNvGrpSpPr/>
-        <p:nvPr/>
-      </p:nvGrpSpPr>
-      <p:grpSpPr/>
-      <p:sp>
-        <p:nvSpPr>
-          <p:cNvPr id="2" name="Title 1"/>
-          <p:cNvSpPr>
-            <a:spLocks noGrp="1"/>
-          </p:cNvSpPr>
-          <p:nvPr>
-            <p:ph type="title"/>
-          </p:nvPr>
-        </p:nvSpPr>
-        <p:spPr>
-          <a:xfrm>
-            <a:off x="468172" y="650138"/>
-            <a:ext cx="8206740" cy="616305"/>
-          </a:xfrm>
-        </p:spPr>
-        <p:txBody>
-          <a:bodyPr wrap="square" lIns="0" rIns="0" tIns="0" bIns="0">
-            <a:noAutofit/>
-          </a:bodyPr>
-          <a:lstStyle/>
-          <a:p>
-            <a:pPr algn="l">
-              <a:lnSpc>
-                <a:spcPct val="110000"/>
-              </a:lnSpc>
-              <a:buNone/>
-              <a:defRPr sz="2800" b="0">
-                <a:solidFill>
-                  <a:srgbClr val="303437"/>
-                </a:solidFill>
-                <a:latin typeface="Noto Sans"/>
-              </a:defRPr>
-            </a:pPr>
-            <a:r>
-              <a:rPr sz="2800" b="1" lang="ja-JP" altLang="en-US">
-                <a:solidFill>
-                  <a:srgbClr val="303437"/>
-                </a:solidFill>
-                <a:latin typeface="Noto Sans"/>
-                <a:ea typeface="Noto Sans CJK JP"/>
-                <a:cs typeface="Noto Sans"/>
-              </a:rPr>
-              <a:t>中国語の読解で、事前知識を分析する</a:t>
-            </a:r>
-          </a:p>
-        </p:txBody>
-      </p:sp>
-      <p:sp>
-        <p:nvSpPr>
-          <p:cNvPr id="3" name="Text Placeholder 2"/>
-          <p:cNvSpPr>
-            <a:spLocks noGrp="1"/>
-          </p:cNvSpPr>
-          <p:nvPr>
-            <p:ph type="body" idx="1"/>
-          </p:nvPr>
-        </p:nvSpPr>
-        <p:spPr>
-          <a:xfrm>
-            <a:off x="594360" y="1463040"/>
-            <a:ext cx="7955279" cy="3044952"/>
-          </a:xfrm>
-        </p:spPr>
-        <p:txBody>
-          <a:bodyPr wrap="square" tIns="91440" bIns="91440">
-            <a:noAutofit/>
-          </a:bodyPr>
-          <a:lstStyle/>
-          <a:p>
-            <a:pPr marL="457200" indent="-355600">
-              <a:lnSpc>
-                <a:spcPts val="2379"/>
-              </a:lnSpc>
-              <a:spcAft>
-                <a:spcPts val="700"/>
-              </a:spcAft>
-              <a:buSzPct val="66500"/>
-              <a:buFont typeface="Noto Sans CJK JP"/>
-              <a:buChar char="●"/>
-              <a:defRPr sz="2000" b="0">
-                <a:solidFill>
-                  <a:srgbClr val="303437"/>
-                </a:solidFill>
-                <a:latin typeface="Noto Sans"/>
-              </a:defRPr>
-            </a:pPr>
-            <a:r>
-              <a:rPr sz="2000" b="0" lang="ja-JP" altLang="en-US">
-                <a:solidFill>
-                  <a:srgbClr val="303437"/>
-                </a:solidFill>
-                <a:latin typeface="Noto Sans"/>
-                <a:ea typeface="Noto Sans CJK JP"/>
-                <a:cs typeface="Noto Sans"/>
-              </a:rPr>
-              <a:t>Kai Sun、Dian Yu、Dong Yu、Claire Cardieによる共同研究。中国語の自由な質問形式の選択式読解を整備し、知識が必要な問題を分類した。</a:t>
-            </a:r>
-          </a:p>
-          <a:p>
-            <a:pPr marL="457200" indent="-355600">
-              <a:lnSpc>
-                <a:spcPts val="2379"/>
-              </a:lnSpc>
-              <a:spcAft>
-                <a:spcPts val="700"/>
-              </a:spcAft>
-              <a:buSzPct val="66500"/>
-              <a:buFont typeface="Noto Sans CJK JP"/>
-              <a:buChar char="●"/>
-              <a:defRPr sz="2000" b="0">
-                <a:solidFill>
-                  <a:srgbClr val="303437"/>
-                </a:solidFill>
-                <a:latin typeface="Noto Sans"/>
-              </a:defRPr>
-            </a:pPr>
-            <a:r>
-              <a:rPr sz="2000" b="0" lang="ja-JP" altLang="en-US">
-                <a:solidFill>
-                  <a:srgbClr val="303437"/>
-                </a:solidFill>
-                <a:latin typeface="Noto Sans"/>
-                <a:ea typeface="Noto Sans CJK JP"/>
-                <a:cs typeface="Noto Sans"/>
-              </a:rPr>
-              <a:t>英語のRACEとDREAMに対応する、中国語の単一テキスト・対話の両方を含む。既存の中国語データで多かった抜き出し型の読解を補う位置付けを持つ。</a:t>
-            </a:r>
-          </a:p>
-          <a:p>
-            <a:pPr marL="457200" indent="-355600">
-              <a:lnSpc>
-                <a:spcPts val="2379"/>
-              </a:lnSpc>
-              <a:spcAft>
-                <a:spcPts val="0"/>
-              </a:spcAft>
-              <a:buSzPct val="66500"/>
-              <a:buFont typeface="Noto Sans CJK JP"/>
-              <a:buChar char="●"/>
-              <a:defRPr sz="2000" b="0">
-                <a:solidFill>
-                  <a:srgbClr val="303437"/>
-                </a:solidFill>
-                <a:latin typeface="Noto Sans"/>
-              </a:defRPr>
-            </a:pPr>
-            <a:r>
-              <a:rPr sz="2000" b="0" lang="ja-JP" altLang="en-US">
-                <a:solidFill>
-                  <a:srgbClr val="303437"/>
-                </a:solidFill>
-                <a:latin typeface="Noto Sans"/>
-                <a:ea typeface="Noto Sans CJK JP"/>
-                <a:cs typeface="Noto Sans"/>
-              </a:rPr>
-              <a:t>公開データと注釈が分かれているため、全体を使った正答率の評価と、600問を使った知識種別の分析を組み合わせられる。</a:t>
-            </a:r>
-          </a:p>
-        </p:txBody>
-      </p:sp>
-      <p:sp>
-        <p:nvSpPr>
-          <p:cNvPr id="4" name="Title 3"/>
-          <p:cNvSpPr>
-            <a:spLocks noGrp="1"/>
-          </p:cNvSpPr>
-          <p:nvPr>
-            <p:ph type="title" idx="2"/>
-          </p:nvPr>
-        </p:nvSpPr>
-        <p:spPr>
-          <a:xfrm>
-            <a:off x="75895" y="0"/>
-            <a:ext cx="8115300" cy="480060"/>
-          </a:xfrm>
-        </p:spPr>
-        <p:txBody>
-          <a:bodyPr wrap="square" lIns="0" rIns="0" tIns="0" bIns="0" anchor="ctr">
-            <a:noAutofit/>
-          </a:bodyPr>
-          <a:lstStyle/>
-          <a:p>
-            <a:pPr algn="l">
-              <a:lnSpc>
-                <a:spcPct val="110000"/>
-              </a:lnSpc>
-              <a:buNone/>
-              <a:defRPr sz="1400" b="0">
-                <a:solidFill>
-                  <a:srgbClr val="303437"/>
-                </a:solidFill>
-                <a:latin typeface="Noto Sans"/>
-              </a:defRPr>
-            </a:pPr>
-            <a:r>
-              <a:rPr sz="1400" b="1" lang="ja-JP" altLang="en-US">
-                <a:solidFill>
-                  <a:srgbClr val="FFFEF8"/>
-                </a:solidFill>
-                <a:latin typeface="Noto Sans"/>
-                <a:ea typeface="Noto Sans CJK JP"/>
-                <a:cs typeface="Noto Sans"/>
-              </a:rPr>
-              <a:t>Appendix: 3. 研究と参考文献</a:t>
-            </a:r>
-          </a:p>
-        </p:txBody>
-      </p:sp>
-      <p:sp>
-        <p:nvSpPr>
-          <p:cNvPr id="5" name="sources"/>
-          <p:cNvSpPr txBox="1"/>
-          <p:nvPr/>
-        </p:nvSpPr>
-        <p:spPr>
-          <a:xfrm>
-            <a:off x="502920" y="4700016"/>
-            <a:ext cx="8183879" cy="530352"/>
-          </a:xfrm>
-          <a:prstGeom prst="rect">
-            <a:avLst/>
-          </a:prstGeom>
-          <a:noFill/>
-        </p:spPr>
-        <p:txBody>
-          <a:bodyPr wrap="square" lIns="0" rIns="0" tIns="0" bIns="0">
-            <a:noAutofit/>
-          </a:bodyPr>
-          <a:lstStyle/>
-          <a:p>
-            <a:pPr algn="l">
-              <a:lnSpc>
-                <a:spcPts val="940"/>
-              </a:lnSpc>
-              <a:spcBef>
-                <a:spcPts val="0"/>
-              </a:spcBef>
-              <a:spcAft>
-                <a:spcPts val="140"/>
-              </a:spcAft>
-              <a:buNone/>
-              <a:defRPr sz="810" b="0">
-                <a:solidFill>
-                  <a:srgbClr val="303437"/>
-                </a:solidFill>
-                <a:latin typeface="Noto Sans"/>
-              </a:defRPr>
-            </a:pPr>
-            <a:r>
-              <a:rPr sz="810" b="0" lang="ja-JP" altLang="en-US">
-                <a:solidFill>
-                  <a:srgbClr val="626669"/>
-                </a:solidFill>
-                <a:latin typeface="Noto Sans"/>
-                <a:ea typeface="Noto Sans CJK JP"/>
-                <a:cs typeface="Noto Sans"/>
-              </a:rPr>
-              <a:t>[1] Sun et al. (2020). Investigating Prior Knowledge for Challenging Chinese Machine Reading Comprehension. TACL.</a:t>
-            </a:r>
-            <a:r>
-              <a:rPr sz="810" b="0" lang="ja-JP" altLang="en-US">
-                <a:solidFill>
-                  <a:srgbClr val="626669"/>
-                </a:solidFill>
-                <a:latin typeface="Noto Sans"/>
-                <a:ea typeface="Noto Sans CJK JP"/>
-                <a:cs typeface="Noto Sans"/>
-              </a:rPr>
-              <a:t>  </a:t>
-            </a:r>
-            <a:r>
-              <a:rPr sz="810" b="0" lang="ja-JP" altLang="en-US">
-                <a:solidFill>
-                  <a:srgbClr val="626669"/>
-                </a:solidFill>
-                <a:latin typeface="Noto Sans"/>
-                <a:ea typeface="Noto Sans CJK JP"/>
-                <a:cs typeface="Noto Sans"/>
-                <a:hlinkClick r:id="rId2"/>
-              </a:rPr>
-              <a:t>https://aclanthology.org/2020.tacl-1.10/</a:t>
-            </a:r>
-          </a:p>
-        </p:txBody>
-      </p:sp>
-    </p:spTree>
-  </p:cSld>
-  <p:clrMapOvr>
-    <a:masterClrMapping/>
-  </p:clrMapOvr>
-</p:sld>
-</file>
-
-<file path=ppt/slides/slide63.xml><?xml version="1.0" encoding="utf-8"?>
-<p:sld xmlns:a="http://schemas.openxmlformats.org/drawingml/2006/main" xmlns:p="http://schemas.openxmlformats.org/presentationml/2006/main" xmlns:r="http://schemas.openxmlformats.org/officeDocument/2006/relationships">
-  <p:cSld>
-    <p:spTree>
-      <p:nvGrpSpPr>
-        <p:cNvPr id="1" name=""/>
-        <p:cNvGrpSpPr/>
-        <p:nvPr/>
-      </p:nvGrpSpPr>
-      <p:grpSpPr/>
-      <p:sp>
-        <p:nvSpPr>
-          <p:cNvPr id="2" name="Title 1"/>
-          <p:cNvSpPr>
-            <a:spLocks noGrp="1"/>
-          </p:cNvSpPr>
-          <p:nvPr>
-            <p:ph type="title"/>
-          </p:nvPr>
-        </p:nvSpPr>
-        <p:spPr>
-          <a:xfrm>
-            <a:off x="468172" y="650138"/>
-            <a:ext cx="8206740" cy="616305"/>
-          </a:xfrm>
-        </p:spPr>
-        <p:txBody>
-          <a:bodyPr wrap="square" lIns="0" rIns="0" tIns="0" bIns="0">
-            <a:noAutofit/>
-          </a:bodyPr>
-          <a:lstStyle/>
-          <a:p>
-            <a:pPr algn="l">
-              <a:lnSpc>
-                <a:spcPct val="110000"/>
-              </a:lnSpc>
-              <a:buNone/>
-              <a:defRPr sz="2800" b="0">
-                <a:solidFill>
-                  <a:srgbClr val="303437"/>
-                </a:solidFill>
-                <a:latin typeface="Noto Sans"/>
-              </a:defRPr>
-            </a:pPr>
-            <a:r>
-              <a:rPr sz="2800" b="1" lang="ja-JP" altLang="en-US">
-                <a:solidFill>
-                  <a:srgbClr val="303437"/>
-                </a:solidFill>
-                <a:latin typeface="Noto Sans"/>
-                <a:ea typeface="Noto Sans CJK JP"/>
-                <a:cs typeface="Noto Sans"/>
-              </a:rPr>
-              <a:t>参考文献</a:t>
-            </a:r>
-          </a:p>
-        </p:txBody>
-      </p:sp>
-      <p:sp>
-        <p:nvSpPr>
-          <p:cNvPr id="3" name="Title 2"/>
-          <p:cNvSpPr>
-            <a:spLocks noGrp="1"/>
-          </p:cNvSpPr>
-          <p:nvPr>
-            <p:ph type="title" idx="2"/>
-          </p:nvPr>
-        </p:nvSpPr>
-        <p:spPr>
-          <a:xfrm>
-            <a:off x="75895" y="0"/>
-            <a:ext cx="8115300" cy="480060"/>
-          </a:xfrm>
-        </p:spPr>
-        <p:txBody>
-          <a:bodyPr wrap="square" lIns="0" rIns="0" tIns="0" bIns="0" anchor="ctr">
-            <a:noAutofit/>
-          </a:bodyPr>
-          <a:lstStyle/>
-          <a:p>
-            <a:pPr algn="l">
-              <a:lnSpc>
-                <a:spcPct val="110000"/>
-              </a:lnSpc>
-              <a:buNone/>
-              <a:defRPr sz="1400" b="0">
-                <a:solidFill>
-                  <a:srgbClr val="303437"/>
-                </a:solidFill>
-                <a:latin typeface="Noto Sans"/>
-              </a:defRPr>
-            </a:pPr>
-            <a:r>
-              <a:rPr sz="1400" b="1" lang="ja-JP" altLang="en-US">
-                <a:solidFill>
-                  <a:srgbClr val="FFFEF8"/>
-                </a:solidFill>
-                <a:latin typeface="Noto Sans"/>
-                <a:ea typeface="Noto Sans CJK JP"/>
-                <a:cs typeface="Noto Sans"/>
-              </a:rPr>
-              <a:t>Appendix: 3. 研究と参考文献</a:t>
-            </a:r>
-          </a:p>
-        </p:txBody>
-      </p:sp>
-      <p:sp>
-        <p:nvSpPr>
-          <p:cNvPr id="4" name="TextBox 3"/>
-          <p:cNvSpPr txBox="1"/>
-          <p:nvPr/>
-        </p:nvSpPr>
-        <p:spPr>
-          <a:xfrm>
-            <a:off x="548640" y="1325880"/>
-            <a:ext cx="8046720" cy="594360"/>
-          </a:xfrm>
-          <a:prstGeom prst="rect">
-            <a:avLst/>
-          </a:prstGeom>
-          <a:noFill/>
-        </p:spPr>
-        <p:txBody>
-          <a:bodyPr wrap="square" lIns="0" rIns="0" tIns="0" bIns="0">
-            <a:noAutofit/>
-          </a:bodyPr>
-          <a:lstStyle/>
-          <a:p>
-            <a:pPr algn="l">
-              <a:lnSpc>
-                <a:spcPts val="1920"/>
-              </a:lnSpc>
-              <a:spcBef>
-                <a:spcPts val="0"/>
-              </a:spcBef>
-              <a:spcAft>
-                <a:spcPts val="0"/>
-              </a:spcAft>
-              <a:buNone/>
-              <a:defRPr sz="1700" b="0">
-                <a:solidFill>
-                  <a:srgbClr val="303437"/>
-                </a:solidFill>
-                <a:latin typeface="Noto Sans"/>
-              </a:defRPr>
-            </a:pPr>
-            <a:r>
-              <a:rPr sz="1700" b="1" lang="ja-JP" altLang="en-US">
-                <a:solidFill>
-                  <a:srgbClr val="303437"/>
-                </a:solidFill>
-                <a:latin typeface="Noto Sans"/>
-                <a:ea typeface="Noto Sans CJK JP"/>
-                <a:cs typeface="Noto Sans"/>
-              </a:rPr>
-              <a:t>Investigating Prior Knowledge for Challenging Chinese Machine Reading Comprehension</a:t>
-            </a:r>
-          </a:p>
-        </p:txBody>
-      </p:sp>
-      <p:sp>
-        <p:nvSpPr>
-          <p:cNvPr id="5" name="TextBox 4"/>
-          <p:cNvSpPr txBox="1"/>
-          <p:nvPr/>
-        </p:nvSpPr>
-        <p:spPr>
-          <a:xfrm>
-            <a:off x="548640" y="1956815"/>
-            <a:ext cx="8046720" cy="228600"/>
-          </a:xfrm>
-          <a:prstGeom prst="rect">
-            <a:avLst/>
-          </a:prstGeom>
-          <a:noFill/>
-        </p:spPr>
-        <p:txBody>
-          <a:bodyPr wrap="square" lIns="0" rIns="0" tIns="0" bIns="0">
-            <a:noAutofit/>
-          </a:bodyPr>
-          <a:lstStyle/>
-          <a:p>
-            <a:pPr algn="l">
-              <a:lnSpc>
-                <a:spcPts val="1404"/>
-              </a:lnSpc>
-              <a:spcBef>
-                <a:spcPts val="0"/>
-              </a:spcBef>
-              <a:spcAft>
-                <a:spcPts val="0"/>
-              </a:spcAft>
-              <a:buNone/>
-              <a:defRPr sz="1200" b="0">
-                <a:solidFill>
-                  <a:srgbClr val="303437"/>
-                </a:solidFill>
-                <a:latin typeface="Noto Sans"/>
-              </a:defRPr>
-            </a:pPr>
-            <a:r>
-              <a:rPr sz="1200" b="0" lang="ja-JP" altLang="en-US">
-                <a:solidFill>
-                  <a:srgbClr val="626669"/>
-                </a:solidFill>
-                <a:latin typeface="Noto Sans"/>
-                <a:ea typeface="Noto Sans CJK JP"/>
-                <a:cs typeface="Noto Sans"/>
-              </a:rPr>
-              <a:t>Kai Sun, Dian Yu, Dong Yu, Claire Cardie · 2020 · TACL 8:141–155</a:t>
-            </a:r>
-          </a:p>
-        </p:txBody>
-      </p:sp>
-      <p:sp>
-        <p:nvSpPr>
-          <p:cNvPr id="6" name="TextBox 5"/>
-          <p:cNvSpPr txBox="1"/>
-          <p:nvPr/>
-        </p:nvSpPr>
-        <p:spPr>
-          <a:xfrm>
-            <a:off x="548640" y="2240280"/>
-            <a:ext cx="8046720" cy="457200"/>
-          </a:xfrm>
-          <a:prstGeom prst="rect">
-            <a:avLst/>
-          </a:prstGeom>
-          <a:noFill/>
-        </p:spPr>
-        <p:txBody>
-          <a:bodyPr wrap="square" lIns="0" rIns="0" tIns="0" bIns="0">
-            <a:noAutofit/>
-          </a:bodyPr>
-          <a:lstStyle/>
-          <a:p>
-            <a:pPr algn="l">
-              <a:lnSpc>
-                <a:spcPts val="1823"/>
-              </a:lnSpc>
-              <a:spcBef>
-                <a:spcPts val="0"/>
-              </a:spcBef>
-              <a:spcAft>
-                <a:spcPts val="0"/>
-              </a:spcAft>
-              <a:buNone/>
-              <a:defRPr sz="1600" b="0">
-                <a:solidFill>
-                  <a:srgbClr val="303437"/>
-                </a:solidFill>
-                <a:latin typeface="Noto Sans"/>
-              </a:defRPr>
-            </a:pPr>
-            <a:r>
-              <a:rPr sz="1600" b="0" lang="ja-JP" altLang="en-US">
-                <a:solidFill>
-                  <a:srgbClr val="303437"/>
-                </a:solidFill>
-                <a:latin typeface="Noto Sans"/>
-                <a:ea typeface="Noto Sans CJK JP"/>
-                <a:cs typeface="Noto Sans"/>
-              </a:rPr>
-              <a:t>C³の収集、Dialogue/Mixed、知識注釈と構築時の評価を記述する正式論文。</a:t>
-            </a:r>
-          </a:p>
-        </p:txBody>
-      </p:sp>
-      <p:sp>
-        <p:nvSpPr>
-          <p:cNvPr id="7" name="TextBox 6"/>
-          <p:cNvSpPr txBox="1"/>
-          <p:nvPr/>
-        </p:nvSpPr>
-        <p:spPr>
-          <a:xfrm>
-            <a:off x="548640" y="2752344"/>
-            <a:ext cx="8046720" cy="228600"/>
-          </a:xfrm>
-          <a:prstGeom prst="rect">
-            <a:avLst/>
-          </a:prstGeom>
-          <a:noFill/>
-        </p:spPr>
-        <p:txBody>
-          <a:bodyPr wrap="square" lIns="0" rIns="0" tIns="0" bIns="0">
-            <a:noAutofit/>
-          </a:bodyPr>
-          <a:lstStyle/>
-          <a:p>
-            <a:pPr algn="l">
-              <a:lnSpc>
-                <a:spcPts val="1310"/>
-              </a:lnSpc>
-              <a:spcBef>
-                <a:spcPts val="0"/>
-              </a:spcBef>
-              <a:spcAft>
-                <a:spcPts val="0"/>
-              </a:spcAft>
-              <a:buNone/>
-              <a:defRPr sz="1120" b="0">
-                <a:solidFill>
-                  <a:srgbClr val="303437"/>
-                </a:solidFill>
-                <a:latin typeface="Noto Sans"/>
-              </a:defRPr>
-            </a:pPr>
-            <a:r>
-              <a:rPr sz="1120" b="0" lang="ja-JP" altLang="en-US">
-                <a:solidFill>
-                  <a:srgbClr val="2166AC"/>
-                </a:solidFill>
-                <a:latin typeface="Noto Sans"/>
-                <a:ea typeface="Noto Sans CJK JP"/>
-                <a:cs typeface="Noto Sans"/>
-                <a:hlinkClick r:id="rId2"/>
-              </a:rPr>
-              <a:t>https://aclanthology.org/2020.tacl-1.10/</a:t>
-            </a:r>
-          </a:p>
-        </p:txBody>
-      </p:sp>
-      <p:sp>
-        <p:nvSpPr>
-          <p:cNvPr id="8" name="TextBox 7"/>
-          <p:cNvSpPr txBox="1"/>
-          <p:nvPr/>
-        </p:nvSpPr>
-        <p:spPr>
-          <a:xfrm>
-            <a:off x="548640" y="3063239"/>
-            <a:ext cx="8046720" cy="594360"/>
-          </a:xfrm>
-          <a:prstGeom prst="rect">
-            <a:avLst/>
-          </a:prstGeom>
-          <a:noFill/>
-        </p:spPr>
-        <p:txBody>
-          <a:bodyPr wrap="square" lIns="0" rIns="0" tIns="0" bIns="0">
-            <a:noAutofit/>
-          </a:bodyPr>
-          <a:lstStyle/>
-          <a:p>
-            <a:pPr algn="l">
-              <a:lnSpc>
-                <a:spcPts val="1920"/>
-              </a:lnSpc>
-              <a:spcBef>
-                <a:spcPts val="0"/>
-              </a:spcBef>
-              <a:spcAft>
-                <a:spcPts val="0"/>
-              </a:spcAft>
-              <a:buNone/>
-              <a:defRPr sz="1700" b="0">
-                <a:solidFill>
-                  <a:srgbClr val="303437"/>
-                </a:solidFill>
-                <a:latin typeface="Noto Sans"/>
-              </a:defRPr>
-            </a:pPr>
-            <a:r>
-              <a:rPr sz="1700" b="1" lang="ja-JP" altLang="en-US">
-                <a:solidFill>
-                  <a:srgbClr val="303437"/>
-                </a:solidFill>
-                <a:latin typeface="Noto Sans"/>
-                <a:ea typeface="Noto Sans CJK JP"/>
-                <a:cs typeface="Noto Sans"/>
-              </a:rPr>
-              <a:t>Probing Prior Knowledge Needed in Challenging Chinese Machine Reading Comprehension</a:t>
-            </a:r>
-          </a:p>
-        </p:txBody>
-      </p:sp>
-      <p:sp>
-        <p:nvSpPr>
-          <p:cNvPr id="9" name="TextBox 8"/>
-          <p:cNvSpPr txBox="1"/>
-          <p:nvPr/>
-        </p:nvSpPr>
-        <p:spPr>
-          <a:xfrm>
-            <a:off x="548640" y="3694175"/>
-            <a:ext cx="8046720" cy="228600"/>
-          </a:xfrm>
-          <a:prstGeom prst="rect">
-            <a:avLst/>
-          </a:prstGeom>
-          <a:noFill/>
-        </p:spPr>
-        <p:txBody>
-          <a:bodyPr wrap="square" lIns="0" rIns="0" tIns="0" bIns="0">
-            <a:noAutofit/>
-          </a:bodyPr>
-          <a:lstStyle/>
-          <a:p>
-            <a:pPr algn="l">
-              <a:lnSpc>
-                <a:spcPts val="1404"/>
-              </a:lnSpc>
-              <a:spcBef>
-                <a:spcPts val="0"/>
-              </a:spcBef>
-              <a:spcAft>
-                <a:spcPts val="0"/>
-              </a:spcAft>
-              <a:buNone/>
-              <a:defRPr sz="1200" b="0">
-                <a:solidFill>
-                  <a:srgbClr val="303437"/>
-                </a:solidFill>
-                <a:latin typeface="Noto Sans"/>
-              </a:defRPr>
-            </a:pPr>
-            <a:r>
-              <a:rPr sz="1200" b="0" lang="ja-JP" altLang="en-US">
-                <a:solidFill>
-                  <a:srgbClr val="626669"/>
-                </a:solidFill>
-                <a:latin typeface="Noto Sans"/>
-                <a:ea typeface="Noto Sans CJK JP"/>
-                <a:cs typeface="Noto Sans"/>
-              </a:rPr>
-              <a:t>Kai Sun, Dian Yu, Dong Yu, Claire Cardie · 2019 · arXiv:1904.09679v1</a:t>
-            </a:r>
-          </a:p>
-        </p:txBody>
-      </p:sp>
-      <p:sp>
-        <p:nvSpPr>
-          <p:cNvPr id="10" name="TextBox 9"/>
-          <p:cNvSpPr txBox="1"/>
-          <p:nvPr/>
-        </p:nvSpPr>
-        <p:spPr>
-          <a:xfrm>
-            <a:off x="548640" y="3977639"/>
-            <a:ext cx="8046720" cy="457200"/>
-          </a:xfrm>
-          <a:prstGeom prst="rect">
-            <a:avLst/>
-          </a:prstGeom>
-          <a:noFill/>
-        </p:spPr>
-        <p:txBody>
-          <a:bodyPr wrap="square" lIns="0" rIns="0" tIns="0" bIns="0">
-            <a:noAutofit/>
-          </a:bodyPr>
-          <a:lstStyle/>
-          <a:p>
-            <a:pPr algn="l">
-              <a:lnSpc>
-                <a:spcPts val="1823"/>
-              </a:lnSpc>
-              <a:spcBef>
-                <a:spcPts val="0"/>
-              </a:spcBef>
-              <a:spcAft>
-                <a:spcPts val="0"/>
-              </a:spcAft>
-              <a:buNone/>
-              <a:defRPr sz="1600" b="0">
-                <a:solidFill>
-                  <a:srgbClr val="303437"/>
-                </a:solidFill>
-                <a:latin typeface="Noto Sans"/>
-              </a:defRPr>
-            </a:pPr>
-            <a:r>
-              <a:rPr sz="1600" b="0" lang="ja-JP" altLang="en-US">
-                <a:solidFill>
-                  <a:srgbClr val="303437"/>
-                </a:solidFill>
-                <a:latin typeface="Noto Sans"/>
-                <a:ea typeface="Noto Sans CJK JP"/>
-                <a:cs typeface="Noto Sans"/>
-              </a:rPr>
-              <a:t>C³を初めて公開したプレプリント。後続版と正式刊行では題名がInvestigatingへ変わる。</a:t>
-            </a:r>
-          </a:p>
-        </p:txBody>
-      </p:sp>
-      <p:sp>
-        <p:nvSpPr>
-          <p:cNvPr id="11" name="TextBox 10"/>
-          <p:cNvSpPr txBox="1"/>
-          <p:nvPr/>
-        </p:nvSpPr>
-        <p:spPr>
-          <a:xfrm>
-            <a:off x="548640" y="4489704"/>
-            <a:ext cx="8046720" cy="228600"/>
-          </a:xfrm>
-          <a:prstGeom prst="rect">
-            <a:avLst/>
-          </a:prstGeom>
-          <a:noFill/>
-        </p:spPr>
-        <p:txBody>
-          <a:bodyPr wrap="square" lIns="0" rIns="0" tIns="0" bIns="0">
-            <a:noAutofit/>
-          </a:bodyPr>
-          <a:lstStyle/>
-          <a:p>
-            <a:pPr algn="l">
-              <a:lnSpc>
-                <a:spcPts val="1310"/>
-              </a:lnSpc>
-              <a:spcBef>
-                <a:spcPts val="0"/>
-              </a:spcBef>
-              <a:spcAft>
-                <a:spcPts val="0"/>
-              </a:spcAft>
-              <a:buNone/>
-              <a:defRPr sz="1120" b="0">
-                <a:solidFill>
-                  <a:srgbClr val="303437"/>
-                </a:solidFill>
-                <a:latin typeface="Noto Sans"/>
-              </a:defRPr>
-            </a:pPr>
-            <a:r>
-              <a:rPr sz="1120" b="0" lang="ja-JP" altLang="en-US">
-                <a:solidFill>
-                  <a:srgbClr val="2166AC"/>
-                </a:solidFill>
-                <a:latin typeface="Noto Sans"/>
-                <a:ea typeface="Noto Sans CJK JP"/>
-                <a:cs typeface="Noto Sans"/>
-                <a:hlinkClick r:id="rId3"/>
-              </a:rPr>
-              <a:t>https://arxiv.org/abs/1904.09679v1</a:t>
-            </a:r>
-          </a:p>
-        </p:txBody>
-      </p:sp>
-    </p:spTree>
-  </p:cSld>
-  <p:clrMapOvr>
-    <a:masterClrMapping/>
-  </p:clrMapOvr>
-</p:sld>
-</file>
-
-<file path=ppt/slides/slide64.xml><?xml version="1.0" encoding="utf-8"?>
-<p:sld xmlns:a="http://schemas.openxmlformats.org/drawingml/2006/main" xmlns:p="http://schemas.openxmlformats.org/presentationml/2006/main" xmlns:r="http://schemas.openxmlformats.org/officeDocument/2006/relationships">
-  <p:cSld>
-    <p:spTree>
-      <p:nvGrpSpPr>
-        <p:cNvPr id="1" name=""/>
-        <p:cNvGrpSpPr/>
-        <p:nvPr/>
-      </p:nvGrpSpPr>
-      <p:grpSpPr/>
-      <p:sp>
-        <p:nvSpPr>
-          <p:cNvPr id="2" name="Title 1"/>
-          <p:cNvSpPr>
-            <a:spLocks noGrp="1"/>
-          </p:cNvSpPr>
-          <p:nvPr>
-            <p:ph type="title"/>
-          </p:nvPr>
-        </p:nvSpPr>
-        <p:spPr>
-          <a:xfrm>
-            <a:off x="468172" y="650138"/>
-            <a:ext cx="8206740" cy="616305"/>
-          </a:xfrm>
-        </p:spPr>
-        <p:txBody>
-          <a:bodyPr wrap="square" lIns="0" rIns="0" tIns="0" bIns="0">
-            <a:noAutofit/>
-          </a:bodyPr>
-          <a:lstStyle/>
-          <a:p>
-            <a:pPr algn="l">
-              <a:lnSpc>
-                <a:spcPct val="110000"/>
-              </a:lnSpc>
-              <a:buNone/>
-              <a:defRPr sz="2800" b="0">
-                <a:solidFill>
-                  <a:srgbClr val="303437"/>
-                </a:solidFill>
-                <a:latin typeface="Noto Sans"/>
-              </a:defRPr>
-            </a:pPr>
-            <a:r>
-              <a:rPr sz="2800" b="1" lang="ja-JP" altLang="en-US">
-                <a:solidFill>
-                  <a:srgbClr val="303437"/>
-                </a:solidFill>
-                <a:latin typeface="Noto Sans"/>
-                <a:ea typeface="Noto Sans CJK JP"/>
-                <a:cs typeface="Noto Sans"/>
-              </a:rPr>
-              <a:t>参考文献</a:t>
-            </a:r>
-          </a:p>
-        </p:txBody>
-      </p:sp>
-      <p:sp>
-        <p:nvSpPr>
-          <p:cNvPr id="3" name="Title 2"/>
-          <p:cNvSpPr>
-            <a:spLocks noGrp="1"/>
-          </p:cNvSpPr>
-          <p:nvPr>
-            <p:ph type="title" idx="2"/>
-          </p:nvPr>
-        </p:nvSpPr>
-        <p:spPr>
-          <a:xfrm>
-            <a:off x="75895" y="0"/>
-            <a:ext cx="8115300" cy="480060"/>
-          </a:xfrm>
-        </p:spPr>
-        <p:txBody>
-          <a:bodyPr wrap="square" lIns="0" rIns="0" tIns="0" bIns="0" anchor="ctr">
-            <a:noAutofit/>
-          </a:bodyPr>
-          <a:lstStyle/>
-          <a:p>
-            <a:pPr algn="l">
-              <a:lnSpc>
-                <a:spcPct val="110000"/>
-              </a:lnSpc>
-              <a:buNone/>
-              <a:defRPr sz="1400" b="0">
-                <a:solidFill>
-                  <a:srgbClr val="303437"/>
-                </a:solidFill>
-                <a:latin typeface="Noto Sans"/>
-              </a:defRPr>
-            </a:pPr>
-            <a:r>
-              <a:rPr sz="1400" b="1" lang="ja-JP" altLang="en-US">
-                <a:solidFill>
-                  <a:srgbClr val="FFFEF8"/>
-                </a:solidFill>
-                <a:latin typeface="Noto Sans"/>
-                <a:ea typeface="Noto Sans CJK JP"/>
-                <a:cs typeface="Noto Sans"/>
-              </a:rPr>
-              <a:t>Appendix: 3. 研究と参考文献</a:t>
-            </a:r>
-          </a:p>
-        </p:txBody>
-      </p:sp>
-      <p:sp>
-        <p:nvSpPr>
-          <p:cNvPr id="4" name="TextBox 3"/>
-          <p:cNvSpPr txBox="1"/>
-          <p:nvPr/>
-        </p:nvSpPr>
-        <p:spPr>
-          <a:xfrm>
-            <a:off x="548640" y="1325880"/>
-            <a:ext cx="8046720" cy="594360"/>
-          </a:xfrm>
-          <a:prstGeom prst="rect">
-            <a:avLst/>
-          </a:prstGeom>
-          <a:noFill/>
-        </p:spPr>
-        <p:txBody>
-          <a:bodyPr wrap="square" lIns="0" rIns="0" tIns="0" bIns="0">
-            <a:noAutofit/>
-          </a:bodyPr>
-          <a:lstStyle/>
-          <a:p>
-            <a:pPr algn="l">
-              <a:lnSpc>
-                <a:spcPts val="1920"/>
-              </a:lnSpc>
-              <a:spcBef>
-                <a:spcPts val="0"/>
-              </a:spcBef>
-              <a:spcAft>
-                <a:spcPts val="0"/>
-              </a:spcAft>
-              <a:buNone/>
-              <a:defRPr sz="1700" b="0">
-                <a:solidFill>
-                  <a:srgbClr val="303437"/>
-                </a:solidFill>
-                <a:latin typeface="Noto Sans"/>
-              </a:defRPr>
-            </a:pPr>
-            <a:r>
-              <a:rPr sz="1700" b="1" lang="ja-JP" altLang="en-US">
-                <a:solidFill>
-                  <a:srgbClr val="303437"/>
-                </a:solidFill>
-                <a:latin typeface="Noto Sans"/>
-                <a:ea typeface="Noto Sans CJK JP"/>
-                <a:cs typeface="Noto Sans"/>
-              </a:rPr>
-              <a:t>C³: official data, annotations and baseline instructions</a:t>
-            </a:r>
-          </a:p>
-        </p:txBody>
-      </p:sp>
-      <p:sp>
-        <p:nvSpPr>
-          <p:cNvPr id="5" name="TextBox 4"/>
-          <p:cNvSpPr txBox="1"/>
-          <p:nvPr/>
-        </p:nvSpPr>
-        <p:spPr>
-          <a:xfrm>
-            <a:off x="548640" y="1956815"/>
-            <a:ext cx="8046720" cy="228600"/>
-          </a:xfrm>
-          <a:prstGeom prst="rect">
-            <a:avLst/>
-          </a:prstGeom>
-          <a:noFill/>
-        </p:spPr>
-        <p:txBody>
-          <a:bodyPr wrap="square" lIns="0" rIns="0" tIns="0" bIns="0">
-            <a:noAutofit/>
-          </a:bodyPr>
-          <a:lstStyle/>
-          <a:p>
-            <a:pPr algn="l">
-              <a:lnSpc>
-                <a:spcPts val="1404"/>
-              </a:lnSpc>
-              <a:spcBef>
-                <a:spcPts val="0"/>
-              </a:spcBef>
-              <a:spcAft>
-                <a:spcPts val="0"/>
-              </a:spcAft>
-              <a:buNone/>
-              <a:defRPr sz="1200" b="0">
-                <a:solidFill>
-                  <a:srgbClr val="303437"/>
-                </a:solidFill>
-                <a:latin typeface="Noto Sans"/>
-              </a:defRPr>
-            </a:pPr>
-            <a:r>
-              <a:rPr sz="1200" b="0" lang="ja-JP" altLang="en-US">
-                <a:solidFill>
-                  <a:srgbClr val="626669"/>
-                </a:solidFill>
-                <a:latin typeface="Noto Sans"/>
-                <a:ea typeface="Noto Sans CJK JP"/>
-                <a:cs typeface="Noto Sans"/>
-              </a:rPr>
-              <a:t>Kai Sun et al. (n.d.). nlpdata/c3。参照2026-10-19。</a:t>
-            </a:r>
-          </a:p>
-        </p:txBody>
-      </p:sp>
-      <p:sp>
-        <p:nvSpPr>
-          <p:cNvPr id="6" name="TextBox 5"/>
-          <p:cNvSpPr txBox="1"/>
-          <p:nvPr/>
-        </p:nvSpPr>
-        <p:spPr>
-          <a:xfrm>
-            <a:off x="548640" y="2240280"/>
-            <a:ext cx="8046720" cy="457200"/>
-          </a:xfrm>
-          <a:prstGeom prst="rect">
-            <a:avLst/>
-          </a:prstGeom>
-          <a:noFill/>
-        </p:spPr>
-        <p:txBody>
-          <a:bodyPr wrap="square" lIns="0" rIns="0" tIns="0" bIns="0">
-            <a:noAutofit/>
-          </a:bodyPr>
-          <a:lstStyle/>
-          <a:p>
-            <a:pPr algn="l">
-              <a:lnSpc>
-                <a:spcPts val="1823"/>
-              </a:lnSpc>
-              <a:spcBef>
-                <a:spcPts val="0"/>
-              </a:spcBef>
-              <a:spcAft>
-                <a:spcPts val="0"/>
-              </a:spcAft>
-              <a:buNone/>
-              <a:defRPr sz="1600" b="0">
-                <a:solidFill>
-                  <a:srgbClr val="303437"/>
-                </a:solidFill>
-                <a:latin typeface="Noto Sans"/>
-              </a:defRPr>
-            </a:pPr>
-            <a:r>
-              <a:rPr sz="1600" b="0" lang="ja-JP" altLang="en-US">
-                <a:solidFill>
-                  <a:srgbClr val="303437"/>
-                </a:solidFill>
-                <a:latin typeface="Noto Sans"/>
-                <a:ea typeface="Noto Sans CJK JP"/>
-                <a:cs typeface="Noto Sans"/>
-              </a:rPr>
-              <a:t>元の6データファイル、4知識注釈、基準モデルの実行方法、利用条件を公開する。</a:t>
-            </a:r>
-          </a:p>
-        </p:txBody>
-      </p:sp>
-      <p:sp>
-        <p:nvSpPr>
-          <p:cNvPr id="7" name="TextBox 6"/>
-          <p:cNvSpPr txBox="1"/>
-          <p:nvPr/>
-        </p:nvSpPr>
-        <p:spPr>
-          <a:xfrm>
-            <a:off x="548640" y="2752344"/>
-            <a:ext cx="8046720" cy="228600"/>
-          </a:xfrm>
-          <a:prstGeom prst="rect">
-            <a:avLst/>
-          </a:prstGeom>
-          <a:noFill/>
-        </p:spPr>
-        <p:txBody>
-          <a:bodyPr wrap="square" lIns="0" rIns="0" tIns="0" bIns="0">
-            <a:noAutofit/>
-          </a:bodyPr>
-          <a:lstStyle/>
-          <a:p>
-            <a:pPr algn="l">
-              <a:lnSpc>
-                <a:spcPts val="1310"/>
-              </a:lnSpc>
-              <a:spcBef>
-                <a:spcPts val="0"/>
-              </a:spcBef>
-              <a:spcAft>
-                <a:spcPts val="0"/>
-              </a:spcAft>
-              <a:buNone/>
-              <a:defRPr sz="1120" b="0">
-                <a:solidFill>
-                  <a:srgbClr val="303437"/>
-                </a:solidFill>
-                <a:latin typeface="Noto Sans"/>
-              </a:defRPr>
-            </a:pPr>
-            <a:r>
-              <a:rPr sz="1120" b="0" lang="ja-JP" altLang="en-US">
-                <a:solidFill>
-                  <a:srgbClr val="2166AC"/>
-                </a:solidFill>
-                <a:latin typeface="Noto Sans"/>
-                <a:ea typeface="Noto Sans CJK JP"/>
-                <a:cs typeface="Noto Sans"/>
-                <a:hlinkClick r:id="rId2"/>
-              </a:rPr>
-              <a:t>https://github.com/nlpdata/c3</a:t>
-            </a:r>
-          </a:p>
-        </p:txBody>
-      </p:sp>
-      <p:sp>
-        <p:nvSpPr>
-          <p:cNvPr id="8" name="TextBox 7"/>
-          <p:cNvSpPr txBox="1"/>
-          <p:nvPr/>
-        </p:nvSpPr>
-        <p:spPr>
-          <a:xfrm>
-            <a:off x="548640" y="3063239"/>
-            <a:ext cx="8046720" cy="594360"/>
-          </a:xfrm>
-          <a:prstGeom prst="rect">
-            <a:avLst/>
-          </a:prstGeom>
-          <a:noFill/>
-        </p:spPr>
-        <p:txBody>
-          <a:bodyPr wrap="square" lIns="0" rIns="0" tIns="0" bIns="0">
-            <a:noAutofit/>
-          </a:bodyPr>
-          <a:lstStyle/>
-          <a:p>
-            <a:pPr algn="l">
-              <a:lnSpc>
-                <a:spcPts val="1920"/>
-              </a:lnSpc>
-              <a:spcBef>
-                <a:spcPts val="0"/>
-              </a:spcBef>
-              <a:spcAft>
-                <a:spcPts val="0"/>
-              </a:spcAft>
-              <a:buNone/>
-              <a:defRPr sz="1700" b="0">
-                <a:solidFill>
-                  <a:srgbClr val="303437"/>
-                </a:solidFill>
-                <a:latin typeface="Noto Sans"/>
-              </a:defRPr>
-            </a:pPr>
-            <a:r>
-              <a:rPr sz="1700" b="1" lang="ja-JP" altLang="en-US">
-                <a:solidFill>
-                  <a:srgbClr val="303437"/>
-                </a:solidFill>
-                <a:latin typeface="Noto Sans"/>
-                <a:ea typeface="Noto Sans CJK JP"/>
-                <a:cs typeface="Noto Sans"/>
-              </a:rPr>
-              <a:t>C3 data: CLUE release 1.0 / 1.1</a:t>
-            </a:r>
-          </a:p>
-        </p:txBody>
-      </p:sp>
-      <p:sp>
-        <p:nvSpPr>
-          <p:cNvPr id="9" name="TextBox 8"/>
-          <p:cNvSpPr txBox="1"/>
-          <p:nvPr/>
-        </p:nvSpPr>
-        <p:spPr>
-          <a:xfrm>
-            <a:off x="548640" y="3694175"/>
-            <a:ext cx="8046720" cy="228600"/>
-          </a:xfrm>
-          <a:prstGeom prst="rect">
-            <a:avLst/>
-          </a:prstGeom>
-          <a:noFill/>
-        </p:spPr>
-        <p:txBody>
-          <a:bodyPr wrap="square" lIns="0" rIns="0" tIns="0" bIns="0">
-            <a:noAutofit/>
-          </a:bodyPr>
-          <a:lstStyle/>
-          <a:p>
-            <a:pPr algn="l">
-              <a:lnSpc>
-                <a:spcPts val="1404"/>
-              </a:lnSpc>
-              <a:spcBef>
-                <a:spcPts val="0"/>
-              </a:spcBef>
-              <a:spcAft>
-                <a:spcPts val="0"/>
-              </a:spcAft>
-              <a:buNone/>
-              <a:defRPr sz="1200" b="0">
-                <a:solidFill>
-                  <a:srgbClr val="303437"/>
-                </a:solidFill>
-                <a:latin typeface="Noto Sans"/>
-              </a:defRPr>
-            </a:pPr>
-            <a:r>
-              <a:rPr sz="1200" b="0" lang="ja-JP" altLang="en-US">
-                <a:solidFill>
-                  <a:srgbClr val="626669"/>
-                </a:solidFill>
-                <a:latin typeface="Noto Sans"/>
-                <a:ea typeface="Noto Sans CJK JP"/>
-                <a:cs typeface="Noto Sans"/>
-              </a:rPr>
-              <a:t>CLUEbenchmark (n.d.). CLUE public distribution。参照2026-10-19。</a:t>
-            </a:r>
-          </a:p>
-        </p:txBody>
-      </p:sp>
-      <p:sp>
-        <p:nvSpPr>
-          <p:cNvPr id="10" name="TextBox 9"/>
-          <p:cNvSpPr txBox="1"/>
-          <p:nvPr/>
-        </p:nvSpPr>
-        <p:spPr>
-          <a:xfrm>
-            <a:off x="548640" y="3977639"/>
-            <a:ext cx="8046720" cy="457200"/>
-          </a:xfrm>
-          <a:prstGeom prst="rect">
-            <a:avLst/>
-          </a:prstGeom>
-          <a:noFill/>
-        </p:spPr>
-        <p:txBody>
-          <a:bodyPr wrap="square" lIns="0" rIns="0" tIns="0" bIns="0">
-            <a:noAutofit/>
-          </a:bodyPr>
-          <a:lstStyle/>
-          <a:p>
-            <a:pPr algn="l">
-              <a:lnSpc>
-                <a:spcPts val="1823"/>
-              </a:lnSpc>
-              <a:spcBef>
-                <a:spcPts val="0"/>
-              </a:spcBef>
-              <a:spcAft>
-                <a:spcPts val="0"/>
-              </a:spcAft>
-              <a:buNone/>
-              <a:defRPr sz="1600" b="0">
-                <a:solidFill>
-                  <a:srgbClr val="303437"/>
-                </a:solidFill>
-                <a:latin typeface="Noto Sans"/>
-              </a:defRPr>
-            </a:pPr>
-            <a:r>
-              <a:rPr sz="1600" b="0" lang="ja-JP" altLang="en-US">
-                <a:solidFill>
-                  <a:srgbClr val="303437"/>
-                </a:solidFill>
-                <a:latin typeface="Noto Sans"/>
-                <a:ea typeface="Noto Sans CJK JP"/>
-                <a:cs typeface="Noto Sans"/>
-              </a:rPr>
-              <a:t>学習・開発と、正解を含まない旧・新テストを配布する。READMEがテスト更新を説明する。</a:t>
-            </a:r>
-          </a:p>
-        </p:txBody>
-      </p:sp>
-      <p:sp>
-        <p:nvSpPr>
-          <p:cNvPr id="11" name="TextBox 10"/>
-          <p:cNvSpPr txBox="1"/>
-          <p:nvPr/>
-        </p:nvSpPr>
-        <p:spPr>
-          <a:xfrm>
-            <a:off x="548640" y="4489704"/>
-            <a:ext cx="8046720" cy="228600"/>
-          </a:xfrm>
-          <a:prstGeom prst="rect">
-            <a:avLst/>
-          </a:prstGeom>
-          <a:noFill/>
-        </p:spPr>
-        <p:txBody>
-          <a:bodyPr wrap="square" lIns="0" rIns="0" tIns="0" bIns="0">
-            <a:noAutofit/>
-          </a:bodyPr>
-          <a:lstStyle/>
-          <a:p>
-            <a:pPr algn="l">
-              <a:lnSpc>
-                <a:spcPts val="1310"/>
-              </a:lnSpc>
-              <a:spcBef>
-                <a:spcPts val="0"/>
-              </a:spcBef>
-              <a:spcAft>
-                <a:spcPts val="0"/>
-              </a:spcAft>
-              <a:buNone/>
-              <a:defRPr sz="1120" b="0">
-                <a:solidFill>
-                  <a:srgbClr val="303437"/>
-                </a:solidFill>
-                <a:latin typeface="Noto Sans"/>
-              </a:defRPr>
-            </a:pPr>
-            <a:r>
-              <a:rPr sz="1120" b="0" lang="ja-JP" altLang="en-US">
-                <a:solidFill>
-                  <a:srgbClr val="2166AC"/>
-                </a:solidFill>
-                <a:latin typeface="Noto Sans"/>
-                <a:ea typeface="Noto Sans CJK JP"/>
-                <a:cs typeface="Noto Sans"/>
-                <a:hlinkClick r:id="rId3"/>
-              </a:rPr>
-              <a:t>https://storage.googleapis.com/cluebenchmark/tasks/c3_public.zip</a:t>
-            </a:r>
-          </a:p>
-        </p:txBody>
-      </p:sp>
-    </p:spTree>
-  </p:cSld>
-  <p:clrMapOvr>
-    <a:masterClrMapping/>
-  </p:clrMapOvr>
-</p:sld>
-</file>
-
-<file path=ppt/slides/slide65.xml><?xml version="1.0" encoding="utf-8"?>
-<p:sld xmlns:a="http://schemas.openxmlformats.org/drawingml/2006/main" xmlns:p="http://schemas.openxmlformats.org/presentationml/2006/main" xmlns:r="http://schemas.openxmlformats.org/officeDocument/2006/relationships">
-  <p:cSld>
-    <p:spTree>
-      <p:nvGrpSpPr>
-        <p:cNvPr id="1" name=""/>
-        <p:cNvGrpSpPr/>
-        <p:nvPr/>
-      </p:nvGrpSpPr>
-      <p:grpSpPr/>
-      <p:sp>
-        <p:nvSpPr>
-          <p:cNvPr id="2" name="Title 1"/>
-          <p:cNvSpPr>
-            <a:spLocks noGrp="1"/>
-          </p:cNvSpPr>
-          <p:nvPr>
-            <p:ph type="title"/>
-          </p:nvPr>
-        </p:nvSpPr>
-        <p:spPr>
-          <a:xfrm>
-            <a:off x="468172" y="650138"/>
-            <a:ext cx="8206740" cy="616305"/>
-          </a:xfrm>
-        </p:spPr>
-        <p:txBody>
-          <a:bodyPr wrap="square" lIns="0" rIns="0" tIns="0" bIns="0">
-            <a:noAutofit/>
-          </a:bodyPr>
-          <a:lstStyle/>
-          <a:p>
-            <a:pPr algn="l">
-              <a:lnSpc>
-                <a:spcPct val="110000"/>
-              </a:lnSpc>
-              <a:buNone/>
-              <a:defRPr sz="2800" b="0">
-                <a:solidFill>
-                  <a:srgbClr val="303437"/>
-                </a:solidFill>
-                <a:latin typeface="Noto Sans"/>
-              </a:defRPr>
-            </a:pPr>
-            <a:r>
-              <a:rPr sz="2800" b="1" lang="ja-JP" altLang="en-US">
-                <a:solidFill>
-                  <a:srgbClr val="303437"/>
-                </a:solidFill>
-                <a:latin typeface="Noto Sans"/>
-                <a:ea typeface="Noto Sans CJK JP"/>
-                <a:cs typeface="Noto Sans"/>
-              </a:rPr>
-              <a:t>参考文献</a:t>
-            </a:r>
-          </a:p>
-        </p:txBody>
-      </p:sp>
-      <p:sp>
-        <p:nvSpPr>
-          <p:cNvPr id="3" name="Title 2"/>
-          <p:cNvSpPr>
-            <a:spLocks noGrp="1"/>
-          </p:cNvSpPr>
-          <p:nvPr>
-            <p:ph type="title" idx="2"/>
-          </p:nvPr>
-        </p:nvSpPr>
-        <p:spPr>
-          <a:xfrm>
-            <a:off x="75895" y="0"/>
-            <a:ext cx="8115300" cy="480060"/>
-          </a:xfrm>
-        </p:spPr>
-        <p:txBody>
-          <a:bodyPr wrap="square" lIns="0" rIns="0" tIns="0" bIns="0" anchor="ctr">
-            <a:noAutofit/>
-          </a:bodyPr>
-          <a:lstStyle/>
-          <a:p>
-            <a:pPr algn="l">
-              <a:lnSpc>
-                <a:spcPct val="110000"/>
-              </a:lnSpc>
-              <a:buNone/>
-              <a:defRPr sz="1400" b="0">
-                <a:solidFill>
-                  <a:srgbClr val="303437"/>
-                </a:solidFill>
-                <a:latin typeface="Noto Sans"/>
-              </a:defRPr>
-            </a:pPr>
-            <a:r>
-              <a:rPr sz="1400" b="1" lang="ja-JP" altLang="en-US">
-                <a:solidFill>
-                  <a:srgbClr val="FFFEF8"/>
-                </a:solidFill>
-                <a:latin typeface="Noto Sans"/>
-                <a:ea typeface="Noto Sans CJK JP"/>
-                <a:cs typeface="Noto Sans"/>
-              </a:rPr>
-              <a:t>Appendix: 3. 研究と参考文献</a:t>
-            </a:r>
-          </a:p>
-        </p:txBody>
-      </p:sp>
-      <p:sp>
-        <p:nvSpPr>
-          <p:cNvPr id="4" name="TextBox 3"/>
-          <p:cNvSpPr txBox="1"/>
-          <p:nvPr/>
-        </p:nvSpPr>
-        <p:spPr>
-          <a:xfrm>
-            <a:off x="548640" y="1325880"/>
-            <a:ext cx="8046720" cy="594360"/>
-          </a:xfrm>
-          <a:prstGeom prst="rect">
-            <a:avLst/>
-          </a:prstGeom>
-          <a:noFill/>
-        </p:spPr>
-        <p:txBody>
-          <a:bodyPr wrap="square" lIns="0" rIns="0" tIns="0" bIns="0">
-            <a:noAutofit/>
-          </a:bodyPr>
-          <a:lstStyle/>
-          <a:p>
-            <a:pPr algn="l">
-              <a:lnSpc>
-                <a:spcPts val="1920"/>
-              </a:lnSpc>
-              <a:spcBef>
-                <a:spcPts val="0"/>
-              </a:spcBef>
-              <a:spcAft>
-                <a:spcPts val="0"/>
-              </a:spcAft>
-              <a:buNone/>
-              <a:defRPr sz="1700" b="0">
-                <a:solidFill>
-                  <a:srgbClr val="303437"/>
-                </a:solidFill>
-                <a:latin typeface="Noto Sans"/>
-              </a:defRPr>
-            </a:pPr>
-            <a:r>
-              <a:rPr sz="1700" b="1" lang="ja-JP" altLang="en-US">
-                <a:solidFill>
-                  <a:srgbClr val="303437"/>
-                </a:solidFill>
-                <a:latin typeface="Noto Sans"/>
-                <a:ea typeface="Noto Sans CJK JP"/>
-                <a:cs typeface="Noto Sans"/>
-              </a:rPr>
-              <a:t>CLEVA: Chinese Language Models EVAluation Platform</a:t>
-            </a:r>
-          </a:p>
-        </p:txBody>
-      </p:sp>
-      <p:sp>
-        <p:nvSpPr>
-          <p:cNvPr id="5" name="TextBox 4"/>
-          <p:cNvSpPr txBox="1"/>
-          <p:nvPr/>
-        </p:nvSpPr>
-        <p:spPr>
-          <a:xfrm>
-            <a:off x="548640" y="1956815"/>
-            <a:ext cx="8046720" cy="228600"/>
-          </a:xfrm>
-          <a:prstGeom prst="rect">
-            <a:avLst/>
-          </a:prstGeom>
-          <a:noFill/>
-        </p:spPr>
-        <p:txBody>
-          <a:bodyPr wrap="square" lIns="0" rIns="0" tIns="0" bIns="0">
-            <a:noAutofit/>
-          </a:bodyPr>
-          <a:lstStyle/>
-          <a:p>
-            <a:pPr algn="l">
-              <a:lnSpc>
-                <a:spcPts val="1404"/>
-              </a:lnSpc>
-              <a:spcBef>
-                <a:spcPts val="0"/>
-              </a:spcBef>
-              <a:spcAft>
-                <a:spcPts val="0"/>
-              </a:spcAft>
-              <a:buNone/>
-              <a:defRPr sz="1200" b="0">
-                <a:solidFill>
-                  <a:srgbClr val="303437"/>
-                </a:solidFill>
-                <a:latin typeface="Noto Sans"/>
-              </a:defRPr>
-            </a:pPr>
-            <a:r>
-              <a:rPr sz="1200" b="0" lang="ja-JP" altLang="en-US">
-                <a:solidFill>
-                  <a:srgbClr val="626669"/>
-                </a:solidFill>
-                <a:latin typeface="Noto Sans"/>
-                <a:ea typeface="Noto Sans CJK JP"/>
-                <a:cs typeface="Noto Sans"/>
-              </a:rPr>
-              <a:t>Li et al. · 2023 · EMNLP System Demonstrations</a:t>
-            </a:r>
-          </a:p>
-        </p:txBody>
-      </p:sp>
-      <p:sp>
-        <p:nvSpPr>
-          <p:cNvPr id="6" name="TextBox 5"/>
-          <p:cNvSpPr txBox="1"/>
-          <p:nvPr/>
-        </p:nvSpPr>
-        <p:spPr>
-          <a:xfrm>
-            <a:off x="548640" y="2240280"/>
-            <a:ext cx="8046720" cy="457200"/>
-          </a:xfrm>
-          <a:prstGeom prst="rect">
-            <a:avLst/>
-          </a:prstGeom>
-          <a:noFill/>
-        </p:spPr>
-        <p:txBody>
-          <a:bodyPr wrap="square" lIns="0" rIns="0" tIns="0" bIns="0">
-            <a:noAutofit/>
-          </a:bodyPr>
-          <a:lstStyle/>
-          <a:p>
-            <a:pPr algn="l">
-              <a:lnSpc>
-                <a:spcPts val="1823"/>
-              </a:lnSpc>
-              <a:spcBef>
-                <a:spcPts val="0"/>
-              </a:spcBef>
-              <a:spcAft>
-                <a:spcPts val="0"/>
-              </a:spcAft>
-              <a:buNone/>
-              <a:defRPr sz="1600" b="0">
-                <a:solidFill>
-                  <a:srgbClr val="303437"/>
-                </a:solidFill>
-                <a:latin typeface="Noto Sans"/>
-              </a:defRPr>
-            </a:pPr>
-            <a:r>
-              <a:rPr sz="1600" b="0" lang="ja-JP" altLang="en-US">
-                <a:solidFill>
-                  <a:srgbClr val="303437"/>
-                </a:solidFill>
-                <a:latin typeface="Noto Sans"/>
-                <a:ea typeface="Noto Sans CJK JP"/>
-                <a:cs typeface="Noto Sans"/>
-              </a:rPr>
-              <a:t>中国語モデルの多面的評価基盤。C³由来の選択式読解と父子会話の実例を示す。</a:t>
-            </a:r>
-          </a:p>
-        </p:txBody>
-      </p:sp>
-      <p:sp>
-        <p:nvSpPr>
-          <p:cNvPr id="7" name="TextBox 6"/>
-          <p:cNvSpPr txBox="1"/>
-          <p:nvPr/>
-        </p:nvSpPr>
-        <p:spPr>
-          <a:xfrm>
-            <a:off x="548640" y="2752344"/>
-            <a:ext cx="8046720" cy="228600"/>
-          </a:xfrm>
-          <a:prstGeom prst="rect">
-            <a:avLst/>
-          </a:prstGeom>
-          <a:noFill/>
-        </p:spPr>
-        <p:txBody>
-          <a:bodyPr wrap="square" lIns="0" rIns="0" tIns="0" bIns="0">
-            <a:noAutofit/>
-          </a:bodyPr>
-          <a:lstStyle/>
-          <a:p>
-            <a:pPr algn="l">
-              <a:lnSpc>
-                <a:spcPts val="1310"/>
-              </a:lnSpc>
-              <a:spcBef>
-                <a:spcPts val="0"/>
-              </a:spcBef>
-              <a:spcAft>
-                <a:spcPts val="0"/>
-              </a:spcAft>
-              <a:buNone/>
-              <a:defRPr sz="1120" b="0">
-                <a:solidFill>
-                  <a:srgbClr val="303437"/>
-                </a:solidFill>
-                <a:latin typeface="Noto Sans"/>
-              </a:defRPr>
-            </a:pPr>
-            <a:r>
-              <a:rPr sz="1120" b="0" lang="ja-JP" altLang="en-US">
-                <a:solidFill>
-                  <a:srgbClr val="2166AC"/>
-                </a:solidFill>
-                <a:latin typeface="Noto Sans"/>
-                <a:ea typeface="Noto Sans CJK JP"/>
-                <a:cs typeface="Noto Sans"/>
-                <a:hlinkClick r:id="rId2"/>
-              </a:rPr>
-              <a:t>https://aclanthology.org/2023.emnlp-demo.17/</a:t>
-            </a:r>
-          </a:p>
-        </p:txBody>
-      </p:sp>
-      <p:sp>
-        <p:nvSpPr>
-          <p:cNvPr id="8" name="TextBox 7"/>
-          <p:cNvSpPr txBox="1"/>
-          <p:nvPr/>
-        </p:nvSpPr>
-        <p:spPr>
-          <a:xfrm>
-            <a:off x="548640" y="3063239"/>
-            <a:ext cx="8046720" cy="594360"/>
-          </a:xfrm>
-          <a:prstGeom prst="rect">
-            <a:avLst/>
-          </a:prstGeom>
-          <a:noFill/>
-        </p:spPr>
-        <p:txBody>
-          <a:bodyPr wrap="square" lIns="0" rIns="0" tIns="0" bIns="0">
-            <a:noAutofit/>
-          </a:bodyPr>
-          <a:lstStyle/>
-          <a:p>
-            <a:pPr algn="l">
-              <a:lnSpc>
-                <a:spcPts val="1920"/>
-              </a:lnSpc>
-              <a:spcBef>
-                <a:spcPts val="0"/>
-              </a:spcBef>
-              <a:spcAft>
-                <a:spcPts val="0"/>
-              </a:spcAft>
-              <a:buNone/>
-              <a:defRPr sz="1700" b="0">
-                <a:solidFill>
-                  <a:srgbClr val="303437"/>
-                </a:solidFill>
-                <a:latin typeface="Noto Sans"/>
-              </a:defRPr>
-            </a:pPr>
-            <a:r>
-              <a:rPr sz="1700" b="1" lang="ja-JP" altLang="en-US">
-                <a:solidFill>
-                  <a:srgbClr val="303437"/>
-                </a:solidFill>
-                <a:latin typeface="Noto Sans"/>
-                <a:ea typeface="Noto Sans CJK JP"/>
-                <a:cs typeface="Noto Sans"/>
-              </a:rPr>
-              <a:t>CLEVAReadingComprehensionScenario and Converter</a:t>
-            </a:r>
-          </a:p>
-        </p:txBody>
-      </p:sp>
-      <p:sp>
-        <p:nvSpPr>
-          <p:cNvPr id="9" name="TextBox 8"/>
-          <p:cNvSpPr txBox="1"/>
-          <p:nvPr/>
-        </p:nvSpPr>
-        <p:spPr>
-          <a:xfrm>
-            <a:off x="548640" y="3694175"/>
-            <a:ext cx="8046720" cy="228600"/>
-          </a:xfrm>
-          <a:prstGeom prst="rect">
-            <a:avLst/>
-          </a:prstGeom>
-          <a:noFill/>
-        </p:spPr>
-        <p:txBody>
-          <a:bodyPr wrap="square" lIns="0" rIns="0" tIns="0" bIns="0">
-            <a:noAutofit/>
-          </a:bodyPr>
-          <a:lstStyle/>
-          <a:p>
-            <a:pPr algn="l">
-              <a:lnSpc>
-                <a:spcPts val="1404"/>
-              </a:lnSpc>
-              <a:spcBef>
-                <a:spcPts val="0"/>
-              </a:spcBef>
-              <a:spcAft>
-                <a:spcPts val="0"/>
-              </a:spcAft>
-              <a:buNone/>
-              <a:defRPr sz="1200" b="0">
-                <a:solidFill>
-                  <a:srgbClr val="303437"/>
-                </a:solidFill>
-                <a:latin typeface="Noto Sans"/>
-              </a:defRPr>
-            </a:pPr>
-            <a:r>
-              <a:rPr sz="1200" b="0" lang="ja-JP" altLang="en-US">
-                <a:solidFill>
-                  <a:srgbClr val="626669"/>
-                </a:solidFill>
-                <a:latin typeface="Noto Sans"/>
-                <a:ea typeface="Noto Sans CJK JP"/>
-                <a:cs typeface="Noto Sans"/>
-              </a:rPr>
-              <a:t>Stanford CRFM · 2023 · HELM v0.4.0 implementation</a:t>
-            </a:r>
-          </a:p>
-        </p:txBody>
-      </p:sp>
-      <p:sp>
-        <p:nvSpPr>
-          <p:cNvPr id="10" name="TextBox 9"/>
-          <p:cNvSpPr txBox="1"/>
-          <p:nvPr/>
-        </p:nvSpPr>
-        <p:spPr>
-          <a:xfrm>
-            <a:off x="548640" y="3977639"/>
-            <a:ext cx="8046720" cy="457200"/>
-          </a:xfrm>
-          <a:prstGeom prst="rect">
-            <a:avLst/>
-          </a:prstGeom>
-          <a:noFill/>
-        </p:spPr>
-        <p:txBody>
-          <a:bodyPr wrap="square" lIns="0" rIns="0" tIns="0" bIns="0">
-            <a:noAutofit/>
-          </a:bodyPr>
-          <a:lstStyle/>
-          <a:p>
-            <a:pPr algn="l">
-              <a:lnSpc>
-                <a:spcPts val="1823"/>
-              </a:lnSpc>
-              <a:spcBef>
-                <a:spcPts val="0"/>
-              </a:spcBef>
-              <a:spcAft>
-                <a:spcPts val="0"/>
-              </a:spcAft>
-              <a:buNone/>
-              <a:defRPr sz="1600" b="0">
-                <a:solidFill>
-                  <a:srgbClr val="303437"/>
-                </a:solidFill>
-                <a:latin typeface="Noto Sans"/>
-              </a:defRPr>
-            </a:pPr>
-            <a:r>
-              <a:rPr sz="1600" b="0" lang="ja-JP" altLang="en-US">
-                <a:solidFill>
-                  <a:srgbClr val="303437"/>
-                </a:solidFill>
-                <a:latin typeface="Noto Sans"/>
-                <a:ea typeface="Noto Sans CJK JP"/>
-                <a:cs typeface="Noto Sans"/>
-              </a:rPr>
-              <a:t>変換済みデータとテンプレートを読み、候補、正解タグ、入力と出力を組み立てる。</a:t>
-            </a:r>
-          </a:p>
-        </p:txBody>
-      </p:sp>
-      <p:sp>
-        <p:nvSpPr>
-          <p:cNvPr id="11" name="TextBox 10"/>
-          <p:cNvSpPr txBox="1"/>
-          <p:nvPr/>
-        </p:nvSpPr>
-        <p:spPr>
-          <a:xfrm>
-            <a:off x="548640" y="4489704"/>
-            <a:ext cx="8046720" cy="228600"/>
-          </a:xfrm>
-          <a:prstGeom prst="rect">
-            <a:avLst/>
-          </a:prstGeom>
-          <a:noFill/>
-        </p:spPr>
-        <p:txBody>
-          <a:bodyPr wrap="square" lIns="0" rIns="0" tIns="0" bIns="0">
-            <a:noAutofit/>
-          </a:bodyPr>
-          <a:lstStyle/>
-          <a:p>
-            <a:pPr algn="l">
-              <a:lnSpc>
-                <a:spcPts val="1310"/>
-              </a:lnSpc>
-              <a:spcBef>
-                <a:spcPts val="0"/>
-              </a:spcBef>
-              <a:spcAft>
-                <a:spcPts val="0"/>
-              </a:spcAft>
-              <a:buNone/>
-              <a:defRPr sz="1120" b="0">
-                <a:solidFill>
-                  <a:srgbClr val="303437"/>
-                </a:solidFill>
-                <a:latin typeface="Noto Sans"/>
-              </a:defRPr>
-            </a:pPr>
-            <a:r>
-              <a:rPr sz="1120" b="0" lang="ja-JP" altLang="en-US">
-                <a:solidFill>
-                  <a:srgbClr val="2166AC"/>
-                </a:solidFill>
-                <a:latin typeface="Noto Sans"/>
-                <a:ea typeface="Noto Sans CJK JP"/>
-                <a:cs typeface="Noto Sans"/>
-                <a:hlinkClick r:id="rId3"/>
-              </a:rPr>
-              <a:t>https://github.com/stanford-crfm/helm/blob/v0.4.0/src/helm/benchmark/scenarios/cleva_scenario.py</a:t>
-            </a:r>
-          </a:p>
-        </p:txBody>
-      </p:sp>
-    </p:spTree>
-  </p:cSld>
-  <p:clrMapOvr>
-    <a:masterClrMapping/>
-  </p:clrMapOvr>
-</p:sld>
-</file>
-
 <file path=ppt/slides/slide7.xml><?xml version="1.0" encoding="utf-8"?>
 <p:sld xmlns:a="http://schemas.openxmlformats.org/drawingml/2006/main" xmlns:p="http://schemas.openxmlformats.org/presentationml/2006/main" xmlns:r="http://schemas.openxmlformats.org/officeDocument/2006/relationships">
   <p:cSld>
@@ -35400,36 +33691,6 @@
               <a:t>父親が忙しいこと、会話がないこと、息子に重圧があることを、話者と因果関係に沿って結び付ける。</a:t>
             </a:r>
           </a:p>
-          <a:p>
-            <a:pPr marL="457200" indent="-355600">
-              <a:lnSpc>
-                <a:spcPts val="2379"/>
-              </a:lnSpc>
-              <a:spcAft>
-                <a:spcPts val="0"/>
-              </a:spcAft>
-              <a:buSzPct val="66500"/>
-              <a:buFont typeface="Noto Sans CJK JP"/>
-              <a:buChar char="●"/>
-              <a:defRPr sz="2000" b="0">
-                <a:solidFill>
-                  <a:srgbClr val="303437"/>
-                </a:solidFill>
-                <a:latin typeface="Noto Sans"/>
-              </a:defRPr>
-            </a:pPr>
-            <a:r>
-              <a:rPr sz="2000" b="0" lang="ja-JP" altLang="en-US">
-                <a:solidFill>
-                  <a:srgbClr val="303437"/>
-                </a:solidFill>
-                <a:latin typeface="Noto Sans"/>
-                <a:ea typeface="Noto Sans CJK JP"/>
-                <a:cs typeface="Noto Sans"/>
-              </a:rPr>
-              <a:t>この父子会話は、CLEVAの論文にも読解の例として掲載されている。</a:t>
-            </a:r>
-          </a:p>
         </p:txBody>
       </p:sp>
       <p:sp>
@@ -35553,57 +33814,6 @@
                 <a:hlinkClick r:id="rId4"/>
               </a:rPr>
               <a:t>https://github.com/nlpdata/c3/tree/master/data</a:t>
-            </a:r>
-          </a:p>
-          <a:p>
-            <a:pPr>
-              <a:lnSpc>
-                <a:spcPts val="940"/>
-              </a:lnSpc>
-              <a:spcAft>
-                <a:spcPts val="140"/>
-              </a:spcAft>
-              <a:buNone/>
-              <a:defRPr sz="810" b="0">
-                <a:solidFill>
-                  <a:srgbClr val="303437"/>
-                </a:solidFill>
-                <a:latin typeface="Noto Sans"/>
-              </a:defRPr>
-            </a:pPr>
-            <a:r>
-              <a:rPr sz="810" b="0" lang="ja-JP" altLang="en-US">
-                <a:solidFill>
-                  <a:srgbClr val="626669"/>
-                </a:solidFill>
-                <a:latin typeface="Noto Sans"/>
-                <a:ea typeface="Noto Sans CJK JP"/>
-                <a:cs typeface="Noto Sans"/>
-              </a:rPr>
-              <a:t>[2] Li et al. (2023). CLEVA. EMNLP System Demonstrations.</a:t>
-            </a:r>
-            <a:r>
-              <a:rPr sz="810" b="0" lang="ja-JP" altLang="en-US">
-                <a:solidFill>
-                  <a:srgbClr val="626669"/>
-                </a:solidFill>
-                <a:latin typeface="Noto Sans"/>
-                <a:ea typeface="Noto Sans CJK JP"/>
-                <a:cs typeface="Noto Sans"/>
-              </a:rPr>
-              <a:t>  </a:t>
-            </a:r>
-            <a:r>
-              <a:rPr sz="810" b="0" lang="ja-JP" altLang="en-US">
-                <a:solidFill>
-                  <a:srgbClr val="626669"/>
-                </a:solidFill>
-                <a:latin typeface="Noto Sans"/>
-                <a:ea typeface="Noto Sans CJK JP"/>
-                <a:cs typeface="Noto Sans"/>
-                <a:hlinkClick r:id="rId3"/>
-              </a:rPr>
-              <a:t>https://aclanthology.org/2023.emnlp-demo.17/</a:t>
             </a:r>
           </a:p>
         </p:txBody>
